--- a/propuesta-clt/CLT_Proposal_Presentation_EN.pptx
+++ b/propuesta-clt/CLT_Proposal_Presentation_EN.pptx
@@ -29,9 +29,10 @@
     <p:sldId id="277" r:id="rId23"/>
     <p:sldId id="278" r:id="rId24"/>
     <p:sldId id="279" r:id="rId25"/>
+    <p:sldId id="280" r:id="rId26"/>
   </p:sldIdLst>
   <p:notesMasterIdLst>
-    <p:notesMasterId r:id="rId26"/>
+    <p:notesMasterId r:id="rId27"/>
   </p:notesMasterIdLst>
   <p:sldSz cx="9144000" cy="5143500"/>
   <p:notesSz cx="5143500" cy="9144000"/>
@@ -130,13 +131,13 @@
   <p:extLst>
     <p:ext uri="{521415D9-36F7-43E2-AB2F-B90AF26B5E84}">
       <p14:sectionLst xmlns:p14="http://schemas.microsoft.com/office/powerpoint/2010/main">
-        <p14:section name="Opening" id="{d63020c7-3fff-dc9e-f68a-ce07bc3c8942}">
+        <p14:section name="Opening" id="{4e0d74ca-efd8-53d4-a9c8-821d6f4f639d}">
           <p14:sldIdLst>
             <p14:sldId id="256"/>
             <p14:sldId id="257"/>
           </p14:sldIdLst>
         </p14:section>
-        <p14:section name="The manufacturer" id="{f9984854-3dc3-ec74-4c88-5b99a7811abb}">
+        <p14:section name="The manufacturer" id="{bc10433b-aa8b-f61c-32b5-4ec9f2072733}">
           <p14:sldIdLst>
             <p14:sldId id="258"/>
             <p14:sldId id="259"/>
@@ -144,7 +145,7 @@
             <p14:sldId id="261"/>
           </p14:sldIdLst>
         </p14:section>
-        <p14:section name="The Mexican market" id="{046131eb-58d9-0104-f0cb-0174e2e34dcc}">
+        <p14:section name="The Mexican market" id="{0019e513-e050-f1ce-8538-8fa91806373c}">
           <p14:sldIdLst>
             <p14:sldId id="262"/>
             <p14:sldId id="263"/>
@@ -154,28 +155,29 @@
             <p14:sldId id="267"/>
           </p14:sldIdLst>
         </p14:section>
-        <p14:section name="Why TID · VSP · CEB" id="{281a078e-c2e1-94ed-5f78-1905a48d8923}">
+        <p14:section name="Why TID · VSP · CEB" id="{85702685-46eb-c2a9-22d6-55ab6de973b6}">
           <p14:sldIdLst>
             <p14:sldId id="268"/>
             <p14:sldId id="269"/>
             <p14:sldId id="270"/>
+            <p14:sldId id="271"/>
           </p14:sldIdLst>
         </p14:section>
-        <p14:section name="Plan and investment" id="{86290ed0-bfd7-66b0-ffa1-b7ebf8850de8}">
+        <p14:section name="Plan and investment" id="{a0f01e3b-0336-8787-5a93-b6c071ce0ba7}">
           <p14:sldIdLst>
-            <p14:sldId id="271"/>
             <p14:sldId id="272"/>
             <p14:sldId id="273"/>
             <p14:sldId id="274"/>
+            <p14:sldId id="275"/>
           </p14:sldIdLst>
         </p14:section>
-        <p14:section name="The proposal" id="{486ace5c-198c-f928-bad4-05f9dfe2ccac}">
+        <p14:section name="The proposal" id="{3d49454a-49a7-b881-a2d3-25a2eb485ec8}">
           <p14:sldIdLst>
-            <p14:sldId id="275"/>
             <p14:sldId id="276"/>
             <p14:sldId id="277"/>
             <p14:sldId id="278"/>
             <p14:sldId id="279"/>
+            <p14:sldId id="280"/>
           </p14:sldIdLst>
         </p14:section>
       </p14:sectionLst>
@@ -2742,6 +2744,94 @@
             <a:fld id="{F7021451-1387-4CA6-816F-3879F97B5CBC}" type="slidenum">
               <a:rPr lang="en-US"/>
               <a:t>24</a:t>
+            </a:fld>
+            <a:endParaRPr lang="en-US"/>
+          </a:p>
+        </p:txBody>
+      </p:sp>
+    </p:spTree>
+    <p:extLst>
+      <p:ext uri="{BB962C8B-B14F-4D97-AF65-F5344CB8AC3E}">
+        <p14:creationId xmlns:p14="http://schemas.microsoft.com/office/powerpoint/2010/main" val="1024086991"/>
+      </p:ext>
+    </p:extLst>
+  </p:cSld>
+  <p:clrMapOvr>
+    <a:masterClrMapping/>
+  </p:clrMapOvr>
+</p:notes>
+</file>
+
+<file path=ppt/notesSlides/notesSlide25.xml><?xml version="1.0" encoding="utf-8"?>
+<p:notes xmlns:a="http://schemas.openxmlformats.org/drawingml/2006/main" xmlns:r="http://schemas.openxmlformats.org/officeDocument/2006/relationships" xmlns:p="http://schemas.openxmlformats.org/presentationml/2006/main">
+  <p:cSld>
+    <p:spTree>
+      <p:nvGrpSpPr>
+        <p:cNvPr id="1" name=""/>
+        <p:cNvGrpSpPr/>
+        <p:nvPr/>
+      </p:nvGrpSpPr>
+      <p:grpSpPr>
+        <a:xfrm>
+          <a:off x="0" y="0"/>
+          <a:ext cx="0" cy="0"/>
+          <a:chOff x="0" y="0"/>
+          <a:chExt cx="0" cy="0"/>
+        </a:xfrm>
+      </p:grpSpPr>
+      <p:sp>
+        <p:nvSpPr>
+          <p:cNvPr id="2" name="Slide Image Placeholder 1"/>
+          <p:cNvSpPr>
+            <a:spLocks noGrp="1" noRot="1" noChangeAspect="1"/>
+          </p:cNvSpPr>
+          <p:nvPr>
+            <p:ph type="sldImg"/>
+          </p:nvPr>
+        </p:nvSpPr>
+        <p:spPr/>
+      </p:sp>
+      <p:sp>
+        <p:nvSpPr>
+          <p:cNvPr id="3" name="Notes Placeholder 2"/>
+          <p:cNvSpPr>
+            <a:spLocks noGrp="1"/>
+          </p:cNvSpPr>
+          <p:nvPr>
+            <p:ph type="body" idx="1"/>
+          </p:nvPr>
+        </p:nvSpPr>
+        <p:spPr/>
+        <p:txBody>
+          <a:bodyPr/>
+          <a:lstStyle/>
+          <a:p>
+            <a:r>
+              <a:rPr lang="en-US" dirty="0"/>
+              <a:t/>
+            </a:r>
+            <a:endParaRPr lang="en-US" dirty="0"/>
+          </a:p>
+        </p:txBody>
+      </p:sp>
+      <p:sp>
+        <p:nvSpPr>
+          <p:cNvPr id="4" name="Slide Number Placeholder 3"/>
+          <p:cNvSpPr>
+            <a:spLocks noGrp="1"/>
+          </p:cNvSpPr>
+          <p:nvPr>
+            <p:ph type="sldNum" sz="quarter" idx="10"/>
+          </p:nvPr>
+        </p:nvSpPr>
+        <p:spPr/>
+        <p:txBody>
+          <a:bodyPr/>
+          <a:lstStyle/>
+          <a:p>
+            <a:fld id="{F7021451-1387-4CA6-816F-3879F97B5CBC}" type="slidenum">
+              <a:rPr lang="en-US"/>
+              <a:t>25</a:t>
             </a:fld>
             <a:endParaRPr lang="en-US"/>
           </a:p>
@@ -8492,42 +8582,6 @@
       <p:sp>
         <p:nvSpPr>
           <p:cNvPr id="2" name="Text 0"/>
-          <p:cNvSpPr txBox="1"/>
-          <p:nvPr/>
-        </p:nvSpPr>
-        <p:spPr>
-          <a:xfrm>
-            <a:off x="548640" y="1097280"/>
-            <a:ext cx="2743200" cy="914400"/>
-          </a:xfrm>
-          <a:prstGeom prst="rect">
-            <a:avLst/>
-          </a:prstGeom>
-          <a:noFill/>
-          <a:ln/>
-        </p:spPr>
-        <p:txBody>
-          <a:bodyPr wrap="square" lIns="0" tIns="0" rIns="0" bIns="0" rtlCol="0" anchor="ctr"/>
-          <a:lstStyle/>
-          <a:p>
-            <a:pPr indent="0" marL="0">
-              <a:buNone/>
-            </a:pPr>
-            <a:r>
-              <a:rPr lang="en-US" sz="6000" b="1" dirty="0">
-                <a:solidFill>
-                  <a:schemeClr val="accent3"/>
-                </a:solidFill>
-              </a:rPr>
-              <a:t>04</a:t>
-            </a:r>
-            <a:endParaRPr lang="en-US" sz="6000" dirty="0"/>
-          </a:p>
-        </p:txBody>
-      </p:sp>
-      <p:sp>
-        <p:nvSpPr>
-          <p:cNvPr id="3" name="Text 0"/>
           <p:cNvSpPr/>
           <p:nvPr>
             <p:ph idx="100" type="title" hasCustomPrompt="1"/>
@@ -8535,44 +8589,71 @@
         </p:nvSpPr>
         <p:spPr>
           <a:xfrm>
-            <a:off x="548640" y="2103120"/>
-            <a:ext cx="8046720" cy="914400"/>
-          </a:xfrm>
-          <a:prstGeom prst="rect">
-            <a:avLst/>
-          </a:prstGeom>
-          <a:noFill/>
-          <a:ln/>
-        </p:spPr>
-        <p:txBody>
-          <a:bodyPr wrap="square" rtlCol="0"/>
-          <a:lstStyle/>
-          <a:p>
-            <a:pPr algn="l" indent="0" marL="0">
-              <a:buNone/>
-            </a:pPr>
-            <a:r>
-              <a:rPr lang="en-US" sz="3600" b="1" dirty="0">
-                <a:solidFill>
-                  <a:schemeClr val="bg1"/>
-                </a:solidFill>
-              </a:rPr>
-              <a:t>Plan and investment</a:t>
-            </a:r>
-            <a:endParaRPr lang="en-US" sz="3600" dirty="0"/>
-          </a:p>
-        </p:txBody>
-      </p:sp>
-      <p:sp>
-        <p:nvSpPr>
-          <p:cNvPr id="4" name="cmyk-dot"/>
+            <a:off x="457200" y="274320"/>
+            <a:ext cx="8229600" cy="640080"/>
+          </a:xfrm>
+          <a:prstGeom prst="rect">
+            <a:avLst/>
+          </a:prstGeom>
+          <a:noFill/>
+          <a:ln/>
+        </p:spPr>
+        <p:txBody>
+          <a:bodyPr wrap="square" rtlCol="0" anchor="ctr"/>
+          <a:lstStyle/>
+          <a:p>
+            <a:pPr indent="0" marL="0">
+              <a:buNone/>
+            </a:pPr>
+            <a:r>
+              <a:rPr lang="en-US" sz="2600" b="1" dirty="0">
+                <a:solidFill>
+                  <a:schemeClr val="tx1"/>
+                </a:solidFill>
+              </a:rPr>
+              <a:t>Dedicated team and training</a:t>
+            </a:r>
+            <a:endParaRPr lang="en-US" sz="2600" dirty="0"/>
+          </a:p>
+        </p:txBody>
+      </p:sp>
+      <p:sp>
+        <p:nvSpPr>
+          <p:cNvPr id="3" name="Shape 1"/>
           <p:cNvSpPr/>
           <p:nvPr/>
         </p:nvSpPr>
         <p:spPr>
           <a:xfrm>
-            <a:off x="594360" y="3246120"/>
-            <a:ext cx="164592" cy="164592"/>
+            <a:off x="457200" y="1051560"/>
+            <a:ext cx="4206240" cy="960120"/>
+          </a:xfrm>
+          <a:prstGeom prst="roundRect">
+            <a:avLst>
+              <a:gd name="adj" fmla="val 7619"/>
+            </a:avLst>
+          </a:prstGeom>
+          <a:solidFill>
+            <a:srgbClr val="EEF2F7"/>
+          </a:solidFill>
+          <a:ln w="12700">
+            <a:solidFill>
+              <a:srgbClr val="EEF2F7"/>
+            </a:solidFill>
+            <a:prstDash val="solid"/>
+          </a:ln>
+        </p:spPr>
+      </p:sp>
+      <p:sp>
+        <p:nvSpPr>
+          <p:cNvPr id="4" name="Shape 2"/>
+          <p:cNvSpPr/>
+          <p:nvPr/>
+        </p:nvSpPr>
+        <p:spPr>
+          <a:xfrm>
+            <a:off x="621792" y="1325880"/>
+            <a:ext cx="411480" cy="411480"/>
           </a:xfrm>
           <a:prstGeom prst="ellipse">
             <a:avLst/>
@@ -8590,14 +8671,149 @@
       </p:sp>
       <p:sp>
         <p:nvSpPr>
-          <p:cNvPr id="5" name="cmyk-dot"/>
+          <p:cNvPr id="5" name="Text 3"/>
+          <p:cNvSpPr txBox="1"/>
+          <p:nvPr/>
+        </p:nvSpPr>
+        <p:spPr>
+          <a:xfrm>
+            <a:off x="621792" y="1325880"/>
+            <a:ext cx="411480" cy="411480"/>
+          </a:xfrm>
+          <a:prstGeom prst="rect">
+            <a:avLst/>
+          </a:prstGeom>
+          <a:noFill/>
+          <a:ln/>
+        </p:spPr>
+        <p:txBody>
+          <a:bodyPr wrap="square" lIns="0" tIns="0" rIns="0" bIns="0" rtlCol="0" anchor="ctr"/>
+          <a:lstStyle/>
+          <a:p>
+            <a:pPr algn="ctr" indent="0" marL="0">
+              <a:buNone/>
+            </a:pPr>
+            <a:r>
+              <a:rPr lang="en-US" sz="1300" b="1" dirty="0">
+                <a:solidFill>
+                  <a:srgbClr val="FFFFFF"/>
+                </a:solidFill>
+              </a:rPr>
+              <a:t>1</a:t>
+            </a:r>
+            <a:endParaRPr lang="en-US" sz="1300" dirty="0"/>
+          </a:p>
+        </p:txBody>
+      </p:sp>
+      <p:sp>
+        <p:nvSpPr>
+          <p:cNvPr id="6" name="Text 4"/>
+          <p:cNvSpPr txBox="1"/>
+          <p:nvPr/>
+        </p:nvSpPr>
+        <p:spPr>
+          <a:xfrm>
+            <a:off x="1188720" y="1143000"/>
+            <a:ext cx="3337560" cy="365760"/>
+          </a:xfrm>
+          <a:prstGeom prst="rect">
+            <a:avLst/>
+          </a:prstGeom>
+          <a:noFill/>
+          <a:ln/>
+        </p:spPr>
+        <p:txBody>
+          <a:bodyPr wrap="square" lIns="0" tIns="0" rIns="0" bIns="0" rtlCol="0" anchor="ctr"/>
+          <a:lstStyle/>
+          <a:p>
+            <a:pPr indent="0" marL="0">
+              <a:buNone/>
+            </a:pPr>
+            <a:r>
+              <a:rPr lang="en-US" sz="1600" b="1" dirty="0">
+                <a:solidFill>
+                  <a:schemeClr val="tx1"/>
+                </a:solidFill>
+              </a:rPr>
+              <a:t>Textile sales</a:t>
+            </a:r>
+            <a:endParaRPr lang="en-US" sz="1600" dirty="0"/>
+          </a:p>
+        </p:txBody>
+      </p:sp>
+      <p:sp>
+        <p:nvSpPr>
+          <p:cNvPr id="7" name="Text 5"/>
+          <p:cNvSpPr txBox="1"/>
+          <p:nvPr/>
+        </p:nvSpPr>
+        <p:spPr>
+          <a:xfrm>
+            <a:off x="1188720" y="1508760"/>
+            <a:ext cx="3337560" cy="457200"/>
+          </a:xfrm>
+          <a:prstGeom prst="rect">
+            <a:avLst/>
+          </a:prstGeom>
+          <a:noFill/>
+          <a:ln/>
+        </p:spPr>
+        <p:txBody>
+          <a:bodyPr wrap="square" lIns="0" tIns="0" rIns="0" bIns="0" rtlCol="0" anchor="t"/>
+          <a:lstStyle/>
+          <a:p>
+            <a:pPr indent="0" marL="0">
+              <a:buNone/>
+            </a:pPr>
+            <a:r>
+              <a:rPr lang="en-US" sz="1200" dirty="0">
+                <a:solidFill>
+                  <a:schemeClr val="tx2"/>
+                </a:solidFill>
+              </a:rPr>
+              <a:t>Prospecting, demos, turnkey quotes and closing</a:t>
+            </a:r>
+            <a:endParaRPr lang="en-US" sz="1200" dirty="0"/>
+          </a:p>
+        </p:txBody>
+      </p:sp>
+      <p:sp>
+        <p:nvSpPr>
+          <p:cNvPr id="8" name="Shape 6"/>
           <p:cNvSpPr/>
           <p:nvPr/>
         </p:nvSpPr>
         <p:spPr>
           <a:xfrm>
-            <a:off x="832104" y="3246120"/>
-            <a:ext cx="164592" cy="164592"/>
+            <a:off x="457200" y="2148840"/>
+            <a:ext cx="4206240" cy="960120"/>
+          </a:xfrm>
+          <a:prstGeom prst="roundRect">
+            <a:avLst>
+              <a:gd name="adj" fmla="val 7619"/>
+            </a:avLst>
+          </a:prstGeom>
+          <a:solidFill>
+            <a:srgbClr val="EEF2F7"/>
+          </a:solidFill>
+          <a:ln w="12700">
+            <a:solidFill>
+              <a:srgbClr val="EEF2F7"/>
+            </a:solidFill>
+            <a:prstDash val="solid"/>
+          </a:ln>
+        </p:spPr>
+      </p:sp>
+      <p:sp>
+        <p:nvSpPr>
+          <p:cNvPr id="9" name="Shape 7"/>
+          <p:cNvSpPr/>
+          <p:nvPr/>
+        </p:nvSpPr>
+        <p:spPr>
+          <a:xfrm>
+            <a:off x="621792" y="2423160"/>
+            <a:ext cx="411480" cy="411480"/>
           </a:xfrm>
           <a:prstGeom prst="ellipse">
             <a:avLst/>
@@ -8615,14 +8831,149 @@
       </p:sp>
       <p:sp>
         <p:nvSpPr>
-          <p:cNvPr id="6" name="cmyk-dot"/>
+          <p:cNvPr id="10" name="Text 8"/>
+          <p:cNvSpPr txBox="1"/>
+          <p:nvPr/>
+        </p:nvSpPr>
+        <p:spPr>
+          <a:xfrm>
+            <a:off x="621792" y="2423160"/>
+            <a:ext cx="411480" cy="411480"/>
+          </a:xfrm>
+          <a:prstGeom prst="rect">
+            <a:avLst/>
+          </a:prstGeom>
+          <a:noFill/>
+          <a:ln/>
+        </p:spPr>
+        <p:txBody>
+          <a:bodyPr wrap="square" lIns="0" tIns="0" rIns="0" bIns="0" rtlCol="0" anchor="ctr"/>
+          <a:lstStyle/>
+          <a:p>
+            <a:pPr algn="ctr" indent="0" marL="0">
+              <a:buNone/>
+            </a:pPr>
+            <a:r>
+              <a:rPr lang="en-US" sz="1300" b="1" dirty="0">
+                <a:solidFill>
+                  <a:srgbClr val="FFFFFF"/>
+                </a:solidFill>
+              </a:rPr>
+              <a:t>2</a:t>
+            </a:r>
+            <a:endParaRPr lang="en-US" sz="1300" dirty="0"/>
+          </a:p>
+        </p:txBody>
+      </p:sp>
+      <p:sp>
+        <p:nvSpPr>
+          <p:cNvPr id="11" name="Text 9"/>
+          <p:cNvSpPr txBox="1"/>
+          <p:nvPr/>
+        </p:nvSpPr>
+        <p:spPr>
+          <a:xfrm>
+            <a:off x="1188720" y="2240280"/>
+            <a:ext cx="3337560" cy="365760"/>
+          </a:xfrm>
+          <a:prstGeom prst="rect">
+            <a:avLst/>
+          </a:prstGeom>
+          <a:noFill/>
+          <a:ln/>
+        </p:spPr>
+        <p:txBody>
+          <a:bodyPr wrap="square" lIns="0" tIns="0" rIns="0" bIns="0" rtlCol="0" anchor="ctr"/>
+          <a:lstStyle/>
+          <a:p>
+            <a:pPr indent="0" marL="0">
+              <a:buNone/>
+            </a:pPr>
+            <a:r>
+              <a:rPr lang="en-US" sz="1600" b="1" dirty="0">
+                <a:solidFill>
+                  <a:schemeClr val="tx1"/>
+                </a:solidFill>
+              </a:rPr>
+              <a:t>Customer service</a:t>
+            </a:r>
+            <a:endParaRPr lang="en-US" sz="1600" dirty="0"/>
+          </a:p>
+        </p:txBody>
+      </p:sp>
+      <p:sp>
+        <p:nvSpPr>
+          <p:cNvPr id="12" name="Text 10"/>
+          <p:cNvSpPr txBox="1"/>
+          <p:nvPr/>
+        </p:nvSpPr>
+        <p:spPr>
+          <a:xfrm>
+            <a:off x="1188720" y="2606040"/>
+            <a:ext cx="3337560" cy="457200"/>
+          </a:xfrm>
+          <a:prstGeom prst="rect">
+            <a:avLst/>
+          </a:prstGeom>
+          <a:noFill/>
+          <a:ln/>
+        </p:spPr>
+        <p:txBody>
+          <a:bodyPr wrap="square" lIns="0" tIns="0" rIns="0" bIns="0" rtlCol="0" anchor="t"/>
+          <a:lstStyle/>
+          <a:p>
+            <a:pPr indent="0" marL="0">
+              <a:buNone/>
+            </a:pPr>
+            <a:r>
+              <a:rPr lang="en-US" sz="1200" dirty="0">
+                <a:solidFill>
+                  <a:schemeClr val="tx2"/>
+                </a:solidFill>
+              </a:rPr>
+              <a:t>Consumables orders, after-sales, warranties and service scheduling</a:t>
+            </a:r>
+            <a:endParaRPr lang="en-US" sz="1200" dirty="0"/>
+          </a:p>
+        </p:txBody>
+      </p:sp>
+      <p:sp>
+        <p:nvSpPr>
+          <p:cNvPr id="13" name="Shape 11"/>
           <p:cNvSpPr/>
           <p:nvPr/>
         </p:nvSpPr>
         <p:spPr>
           <a:xfrm>
-            <a:off x="1069848" y="3246120"/>
-            <a:ext cx="164592" cy="164592"/>
+            <a:off x="457200" y="3246120"/>
+            <a:ext cx="4206240" cy="960120"/>
+          </a:xfrm>
+          <a:prstGeom prst="roundRect">
+            <a:avLst>
+              <a:gd name="adj" fmla="val 7619"/>
+            </a:avLst>
+          </a:prstGeom>
+          <a:solidFill>
+            <a:srgbClr val="EEF2F7"/>
+          </a:solidFill>
+          <a:ln w="12700">
+            <a:solidFill>
+              <a:srgbClr val="EEF2F7"/>
+            </a:solidFill>
+            <a:prstDash val="solid"/>
+          </a:ln>
+        </p:spPr>
+      </p:sp>
+      <p:sp>
+        <p:nvSpPr>
+          <p:cNvPr id="14" name="Shape 12"/>
+          <p:cNvSpPr/>
+          <p:nvPr/>
+        </p:nvSpPr>
+        <p:spPr>
+          <a:xfrm>
+            <a:off x="621792" y="3520440"/>
+            <a:ext cx="411480" cy="411480"/>
           </a:xfrm>
           <a:prstGeom prst="ellipse">
             <a:avLst/>
@@ -8640,28 +8991,349 @@
       </p:sp>
       <p:sp>
         <p:nvSpPr>
-          <p:cNvPr id="7" name="cmyk-dot"/>
+          <p:cNvPr id="15" name="Text 13"/>
+          <p:cNvSpPr txBox="1"/>
+          <p:nvPr/>
+        </p:nvSpPr>
+        <p:spPr>
+          <a:xfrm>
+            <a:off x="621792" y="3520440"/>
+            <a:ext cx="411480" cy="411480"/>
+          </a:xfrm>
+          <a:prstGeom prst="rect">
+            <a:avLst/>
+          </a:prstGeom>
+          <a:noFill/>
+          <a:ln/>
+        </p:spPr>
+        <p:txBody>
+          <a:bodyPr wrap="square" lIns="0" tIns="0" rIns="0" bIns="0" rtlCol="0" anchor="ctr"/>
+          <a:lstStyle/>
+          <a:p>
+            <a:pPr algn="ctr" indent="0" marL="0">
+              <a:buNone/>
+            </a:pPr>
+            <a:r>
+              <a:rPr lang="en-US" sz="1300" b="1" dirty="0">
+                <a:solidFill>
+                  <a:srgbClr val="1B1F3B"/>
+                </a:solidFill>
+              </a:rPr>
+              <a:t>3</a:t>
+            </a:r>
+            <a:endParaRPr lang="en-US" sz="1300" dirty="0"/>
+          </a:p>
+        </p:txBody>
+      </p:sp>
+      <p:sp>
+        <p:nvSpPr>
+          <p:cNvPr id="16" name="Text 14"/>
+          <p:cNvSpPr txBox="1"/>
+          <p:nvPr/>
+        </p:nvSpPr>
+        <p:spPr>
+          <a:xfrm>
+            <a:off x="1188720" y="3337560"/>
+            <a:ext cx="3337560" cy="365760"/>
+          </a:xfrm>
+          <a:prstGeom prst="rect">
+            <a:avLst/>
+          </a:prstGeom>
+          <a:noFill/>
+          <a:ln/>
+        </p:spPr>
+        <p:txBody>
+          <a:bodyPr wrap="square" lIns="0" tIns="0" rIns="0" bIns="0" rtlCol="0" anchor="ctr"/>
+          <a:lstStyle/>
+          <a:p>
+            <a:pPr indent="0" marL="0">
+              <a:buNone/>
+            </a:pPr>
+            <a:r>
+              <a:rPr lang="en-US" sz="1600" b="1" dirty="0">
+                <a:solidFill>
+                  <a:schemeClr val="tx1"/>
+                </a:solidFill>
+              </a:rPr>
+              <a:t>Textile technician</a:t>
+            </a:r>
+            <a:endParaRPr lang="en-US" sz="1600" dirty="0"/>
+          </a:p>
+        </p:txBody>
+      </p:sp>
+      <p:sp>
+        <p:nvSpPr>
+          <p:cNvPr id="17" name="Text 15"/>
+          <p:cNvSpPr txBox="1"/>
+          <p:nvPr/>
+        </p:nvSpPr>
+        <p:spPr>
+          <a:xfrm>
+            <a:off x="1188720" y="3703320"/>
+            <a:ext cx="3337560" cy="457200"/>
+          </a:xfrm>
+          <a:prstGeom prst="rect">
+            <a:avLst/>
+          </a:prstGeom>
+          <a:noFill/>
+          <a:ln/>
+        </p:spPr>
+        <p:txBody>
+          <a:bodyPr wrap="square" lIns="0" tIns="0" rIns="0" bIns="0" rtlCol="0" anchor="t"/>
+          <a:lstStyle/>
+          <a:p>
+            <a:pPr indent="0" marL="0">
+              <a:buNone/>
+            </a:pPr>
+            <a:r>
+              <a:rPr lang="en-US" sz="1200" dirty="0">
+                <a:solidFill>
+                  <a:schemeClr val="tx2"/>
+                </a:solidFill>
+              </a:rPr>
+              <a:t>Installation, maintenance and support; +1 technician in year 2</a:t>
+            </a:r>
+            <a:endParaRPr lang="en-US" sz="1200" dirty="0"/>
+          </a:p>
+        </p:txBody>
+      </p:sp>
+      <p:sp>
+        <p:nvSpPr>
+          <p:cNvPr id="18" name="Shape 16"/>
           <p:cNvSpPr/>
           <p:nvPr/>
         </p:nvSpPr>
         <p:spPr>
           <a:xfrm>
-            <a:off x="1307592" y="3246120"/>
-            <a:ext cx="164592" cy="164592"/>
-          </a:xfrm>
-          <a:prstGeom prst="ellipse">
-            <a:avLst/>
+            <a:off x="4937760" y="1051560"/>
+            <a:ext cx="3749040" cy="3154680"/>
+          </a:xfrm>
+          <a:prstGeom prst="roundRect">
+            <a:avLst>
+              <a:gd name="adj" fmla="val 2319"/>
+            </a:avLst>
           </a:prstGeom>
           <a:solidFill>
-            <a:srgbClr val="FFFFFF"/>
+            <a:srgbClr val="1B1F3B"/>
           </a:solidFill>
           <a:ln w="12700">
             <a:solidFill>
-              <a:srgbClr val="FFFFFF"/>
+              <a:srgbClr val="1B1F3B"/>
             </a:solidFill>
             <a:prstDash val="solid"/>
           </a:ln>
         </p:spPr>
+      </p:sp>
+      <p:sp>
+        <p:nvSpPr>
+          <p:cNvPr id="19" name="Text 17"/>
+          <p:cNvSpPr txBox="1"/>
+          <p:nvPr/>
+        </p:nvSpPr>
+        <p:spPr>
+          <a:xfrm>
+            <a:off x="5166360" y="1188720"/>
+            <a:ext cx="3291840" cy="411480"/>
+          </a:xfrm>
+          <a:prstGeom prst="rect">
+            <a:avLst/>
+          </a:prstGeom>
+          <a:noFill/>
+          <a:ln/>
+        </p:spPr>
+        <p:txBody>
+          <a:bodyPr wrap="square" lIns="0" tIns="0" rIns="0" bIns="0" rtlCol="0" anchor="ctr"/>
+          <a:lstStyle/>
+          <a:p>
+            <a:pPr indent="0" marL="0">
+              <a:buNone/>
+            </a:pPr>
+            <a:r>
+              <a:rPr lang="en-US" sz="1700" b="1" dirty="0">
+                <a:solidFill>
+                  <a:srgbClr val="F2B705"/>
+                </a:solidFill>
+              </a:rPr>
+              <a:t>Training program</a:t>
+            </a:r>
+            <a:endParaRPr lang="en-US" sz="1700" dirty="0"/>
+          </a:p>
+        </p:txBody>
+      </p:sp>
+      <p:sp>
+        <p:nvSpPr>
+          <p:cNvPr id="20" name="Text 18"/>
+          <p:cNvSpPr txBox="1"/>
+          <p:nvPr/>
+        </p:nvSpPr>
+        <p:spPr>
+          <a:xfrm>
+            <a:off x="5166360" y="1691640"/>
+            <a:ext cx="3337560" cy="2377440"/>
+          </a:xfrm>
+          <a:prstGeom prst="rect">
+            <a:avLst/>
+          </a:prstGeom>
+          <a:noFill/>
+          <a:ln/>
+        </p:spPr>
+        <p:txBody>
+          <a:bodyPr wrap="square" lIns="0" tIns="0" rIns="0" bIns="0" rtlCol="0" anchor="t"/>
+          <a:lstStyle/>
+          <a:p>
+            <a:pPr marL="342900" indent="-342900">
+              <a:spcAft>
+                <a:spcPts val="800"/>
+              </a:spcAft>
+              <a:buSzPct val="100000"/>
+              <a:buChar char="•"/>
+            </a:pPr>
+            <a:r>
+              <a:rPr lang="en-US" sz="1400" dirty="0">
+                <a:solidFill>
+                  <a:srgbClr val="FFFFFF"/>
+                </a:solidFill>
+              </a:rPr>
+              <a:t>Initial at CLT’s plant: machines, chemistry and certification</a:t>
+            </a:r>
+            <a:endParaRPr lang="en-US" sz="1400" dirty="0"/>
+          </a:p>
+          <a:p>
+            <a:pPr marL="342900" indent="-342900">
+              <a:spcAft>
+                <a:spcPts val="800"/>
+              </a:spcAft>
+              <a:buSzPct val="100000"/>
+              <a:buChar char="•"/>
+            </a:pPr>
+            <a:r>
+              <a:rPr lang="en-US" sz="1400" dirty="0">
+                <a:solidFill>
+                  <a:srgbClr val="FFFFFF"/>
+                </a:solidFill>
+              </a:rPr>
+              <a:t>Customers – machines: operation, calibration and maintenance</a:t>
+            </a:r>
+            <a:endParaRPr lang="en-US" sz="1400" dirty="0"/>
+          </a:p>
+          <a:p>
+            <a:pPr marL="342900" indent="-342900">
+              <a:spcAft>
+                <a:spcPts val="800"/>
+              </a:spcAft>
+              <a:buSzPct val="100000"/>
+              <a:buChar char="•"/>
+            </a:pPr>
+            <a:r>
+              <a:rPr lang="en-US" sz="1400" dirty="0">
+                <a:solidFill>
+                  <a:srgbClr val="FFFFFF"/>
+                </a:solidFill>
+              </a:rPr>
+              <a:t>Customers – products: silicones, pastes, curing and effects</a:t>
+            </a:r>
+            <a:endParaRPr lang="en-US" sz="1400" dirty="0"/>
+          </a:p>
+          <a:p>
+            <a:pPr marL="342900" indent="-342900">
+              <a:spcAft>
+                <a:spcPts val="800"/>
+              </a:spcAft>
+              <a:buSzPct val="100000"/>
+              <a:buChar char="•"/>
+            </a:pPr>
+            <a:r>
+              <a:rPr lang="en-US" sz="1400" dirty="0">
+                <a:solidFill>
+                  <a:srgbClr val="FFFFFF"/>
+                </a:solidFill>
+              </a:rPr>
+              <a:t>Ongoing updates with CLT engineers</a:t>
+            </a:r>
+            <a:endParaRPr lang="en-US" sz="1400" dirty="0"/>
+          </a:p>
+        </p:txBody>
+      </p:sp>
+      <p:sp>
+        <p:nvSpPr>
+          <p:cNvPr id="21" name="Text 19"/>
+          <p:cNvSpPr txBox="1"/>
+          <p:nvPr/>
+        </p:nvSpPr>
+        <p:spPr>
+          <a:xfrm>
+            <a:off x="457200" y="4480560"/>
+            <a:ext cx="8229600" cy="274320"/>
+          </a:xfrm>
+          <a:prstGeom prst="rect">
+            <a:avLst/>
+          </a:prstGeom>
+          <a:noFill/>
+          <a:ln/>
+        </p:spPr>
+        <p:txBody>
+          <a:bodyPr wrap="square" lIns="0" tIns="0" rIns="0" bIns="0" rtlCol="0" anchor="ctr"/>
+          <a:lstStyle/>
+          <a:p>
+            <a:pPr indent="0" marL="0">
+              <a:buNone/>
+            </a:pPr>
+            <a:r>
+              <a:rPr lang="en-US" sz="1000" i="1" dirty="0">
+                <a:solidFill>
+                  <a:schemeClr val="accent5"/>
+                </a:solidFill>
+              </a:rPr>
+              <a:t>Existing support: 2 TID technicians, 1 VSP technician, CEB import and logistics</a:t>
+            </a:r>
+            <a:endParaRPr lang="en-US" sz="1000" dirty="0"/>
+          </a:p>
+        </p:txBody>
+      </p:sp>
+      <p:sp>
+        <p:nvSpPr>
+          <p:cNvPr id="25" name="Slide Number Placeholder 0"/>
+          <p:cNvSpPr>
+            <a:spLocks noGrp="1"/>
+          </p:cNvSpPr>
+          <p:nvPr>
+            <p:ph type="sldNum" sz="quarter" idx="4294967295"/>
+          </p:nvPr>
+        </p:nvSpPr>
+        <p:spPr>
+          <a:xfrm>
+            <a:off x="8229600" y="4800600"/>
+            <a:ext cx="457200" cy="228600"/>
+          </a:xfrm>
+          <a:prstGeom prst="rect">
+            <a:avLst/>
+          </a:prstGeom>
+          <a:extLst>
+            <a:ext uri="{C572A759-6A51-4108-AA02-DFA0A04FC94B}">
+              <ma14:wrappingTextBoxFlag xmlns:ma14="http://schemas.microsoft.com/office/mac/drawingml/2011/main" val="0"/>
+            </a:ext>
+          </a:extLst>
+        </p:spPr>
+        <p:txBody>
+          <a:bodyPr/>
+          <a:lstStyle>
+            <a:lvl1pPr>
+              <a:defRPr sz="900">
+                <a:solidFill>
+                  <a:srgbClr val="7A8299"/>
+                </a:solidFill>
+              </a:defRPr>
+            </a:lvl1pPr>
+          </a:lstStyle>
+          <a:p>
+            <a:pPr algn="r"/>
+            <a:fld id="{F7021451-1387-4CA6-816F-3879F97B5CBC}" type="slidenum">
+              <a:rPr b="0" lang="en-US"/>
+              <a:t>16</a:t>
+            </a:fld>
+            <a:endParaRPr lang="en-US"/>
+          </a:p>
+        </p:txBody>
       </p:sp>
     </p:spTree>
   </p:cSld>
@@ -8694,6 +9366,42 @@
       <p:sp>
         <p:nvSpPr>
           <p:cNvPr id="2" name="Text 0"/>
+          <p:cNvSpPr txBox="1"/>
+          <p:nvPr/>
+        </p:nvSpPr>
+        <p:spPr>
+          <a:xfrm>
+            <a:off x="548640" y="1097280"/>
+            <a:ext cx="2743200" cy="914400"/>
+          </a:xfrm>
+          <a:prstGeom prst="rect">
+            <a:avLst/>
+          </a:prstGeom>
+          <a:noFill/>
+          <a:ln/>
+        </p:spPr>
+        <p:txBody>
+          <a:bodyPr wrap="square" lIns="0" tIns="0" rIns="0" bIns="0" rtlCol="0" anchor="ctr"/>
+          <a:lstStyle/>
+          <a:p>
+            <a:pPr indent="0" marL="0">
+              <a:buNone/>
+            </a:pPr>
+            <a:r>
+              <a:rPr lang="en-US" sz="6000" b="1" dirty="0">
+                <a:solidFill>
+                  <a:schemeClr val="accent3"/>
+                </a:solidFill>
+              </a:rPr>
+              <a:t>04</a:t>
+            </a:r>
+            <a:endParaRPr lang="en-US" sz="6000" dirty="0"/>
+          </a:p>
+        </p:txBody>
+      </p:sp>
+      <p:sp>
+        <p:nvSpPr>
+          <p:cNvPr id="3" name="Text 0"/>
           <p:cNvSpPr/>
           <p:nvPr>
             <p:ph idx="100" type="title" hasCustomPrompt="1"/>
@@ -8701,67 +9409,44 @@
         </p:nvSpPr>
         <p:spPr>
           <a:xfrm>
-            <a:off x="457200" y="274320"/>
-            <a:ext cx="8229600" cy="640080"/>
-          </a:xfrm>
-          <a:prstGeom prst="rect">
-            <a:avLst/>
-          </a:prstGeom>
-          <a:noFill/>
-          <a:ln/>
-        </p:spPr>
-        <p:txBody>
-          <a:bodyPr wrap="square" rtlCol="0" anchor="ctr"/>
-          <a:lstStyle/>
-          <a:p>
-            <a:pPr indent="0" marL="0">
-              <a:buNone/>
-            </a:pPr>
-            <a:r>
-              <a:rPr lang="en-US" sz="2600" b="1" dirty="0">
-                <a:solidFill>
-                  <a:schemeClr val="tx1"/>
-                </a:solidFill>
-              </a:rPr>
-              <a:t>A four-phase commercial plan</a:t>
-            </a:r>
-            <a:endParaRPr lang="en-US" sz="2600" dirty="0"/>
-          </a:p>
-        </p:txBody>
-      </p:sp>
-      <p:sp>
-        <p:nvSpPr>
-          <p:cNvPr id="3" name="Shape 1"/>
+            <a:off x="548640" y="2103120"/>
+            <a:ext cx="8046720" cy="914400"/>
+          </a:xfrm>
+          <a:prstGeom prst="rect">
+            <a:avLst/>
+          </a:prstGeom>
+          <a:noFill/>
+          <a:ln/>
+        </p:spPr>
+        <p:txBody>
+          <a:bodyPr wrap="square" rtlCol="0"/>
+          <a:lstStyle/>
+          <a:p>
+            <a:pPr algn="l" indent="0" marL="0">
+              <a:buNone/>
+            </a:pPr>
+            <a:r>
+              <a:rPr lang="en-US" sz="3600" b="1" dirty="0">
+                <a:solidFill>
+                  <a:schemeClr val="bg1"/>
+                </a:solidFill>
+              </a:rPr>
+              <a:t>Plan and investment</a:t>
+            </a:r>
+            <a:endParaRPr lang="en-US" sz="3600" dirty="0"/>
+          </a:p>
+        </p:txBody>
+      </p:sp>
+      <p:sp>
+        <p:nvSpPr>
+          <p:cNvPr id="4" name="cmyk-dot"/>
           <p:cNvSpPr/>
           <p:nvPr/>
         </p:nvSpPr>
         <p:spPr>
           <a:xfrm>
-            <a:off x="731520" y="1691640"/>
-            <a:ext cx="7680960" cy="0"/>
-          </a:xfrm>
-          <a:prstGeom prst="line">
-            <a:avLst/>
-          </a:prstGeom>
-          <a:noFill/>
-          <a:ln w="25400">
-            <a:solidFill>
-              <a:srgbClr val="7A8299"/>
-            </a:solidFill>
-            <a:prstDash val="solid"/>
-          </a:ln>
-        </p:spPr>
-      </p:sp>
-      <p:sp>
-        <p:nvSpPr>
-          <p:cNvPr id="4" name="Shape 2"/>
-          <p:cNvSpPr/>
-          <p:nvPr/>
-        </p:nvSpPr>
-        <p:spPr>
-          <a:xfrm>
-            <a:off x="548640" y="1463040"/>
-            <a:ext cx="457200" cy="457200"/>
+            <a:off x="594360" y="3246120"/>
+            <a:ext cx="164592" cy="164592"/>
           </a:xfrm>
           <a:prstGeom prst="ellipse">
             <a:avLst/>
@@ -8779,158 +9464,14 @@
       </p:sp>
       <p:sp>
         <p:nvSpPr>
-          <p:cNvPr id="5" name="Text 3"/>
-          <p:cNvSpPr txBox="1"/>
-          <p:nvPr/>
-        </p:nvSpPr>
-        <p:spPr>
-          <a:xfrm>
-            <a:off x="548640" y="1463040"/>
-            <a:ext cx="457200" cy="457200"/>
-          </a:xfrm>
-          <a:prstGeom prst="rect">
-            <a:avLst/>
-          </a:prstGeom>
-          <a:noFill/>
-          <a:ln/>
-        </p:spPr>
-        <p:txBody>
-          <a:bodyPr wrap="square" lIns="0" tIns="0" rIns="0" bIns="0" rtlCol="0" anchor="ctr"/>
-          <a:lstStyle/>
-          <a:p>
-            <a:pPr algn="ctr" indent="0" marL="0">
-              <a:buNone/>
-            </a:pPr>
-            <a:r>
-              <a:rPr lang="en-US" sz="1300" b="1" dirty="0">
-                <a:solidFill>
-                  <a:srgbClr val="FFFFFF"/>
-                </a:solidFill>
-              </a:rPr>
-              <a:t>1</a:t>
-            </a:r>
-            <a:endParaRPr lang="en-US" sz="1300" dirty="0"/>
-          </a:p>
-        </p:txBody>
-      </p:sp>
-      <p:sp>
-        <p:nvSpPr>
-          <p:cNvPr id="6" name="Text 4"/>
-          <p:cNvSpPr txBox="1"/>
-          <p:nvPr/>
-        </p:nvSpPr>
-        <p:spPr>
-          <a:xfrm>
-            <a:off x="457200" y="2057400"/>
-            <a:ext cx="1920240" cy="320040"/>
-          </a:xfrm>
-          <a:prstGeom prst="rect">
-            <a:avLst/>
-          </a:prstGeom>
-          <a:noFill/>
-          <a:ln/>
-        </p:spPr>
-        <p:txBody>
-          <a:bodyPr wrap="square" lIns="0" tIns="0" rIns="0" bIns="0" rtlCol="0" anchor="ctr"/>
-          <a:lstStyle/>
-          <a:p>
-            <a:pPr indent="0" marL="0">
-              <a:buNone/>
-            </a:pPr>
-            <a:r>
-              <a:rPr lang="en-US" sz="1200" b="1" dirty="0">
-                <a:solidFill>
-                  <a:schemeClr val="accent1"/>
-                </a:solidFill>
-              </a:rPr>
-              <a:t>Months 0–6</a:t>
-            </a:r>
-            <a:endParaRPr lang="en-US" sz="1200" dirty="0"/>
-          </a:p>
-        </p:txBody>
-      </p:sp>
-      <p:sp>
-        <p:nvSpPr>
-          <p:cNvPr id="7" name="Text 5"/>
-          <p:cNvSpPr txBox="1"/>
-          <p:nvPr/>
-        </p:nvSpPr>
-        <p:spPr>
-          <a:xfrm>
-            <a:off x="457200" y="2377440"/>
-            <a:ext cx="1920240" cy="411480"/>
-          </a:xfrm>
-          <a:prstGeom prst="rect">
-            <a:avLst/>
-          </a:prstGeom>
-          <a:noFill/>
-          <a:ln/>
-        </p:spPr>
-        <p:txBody>
-          <a:bodyPr wrap="square" lIns="0" tIns="0" rIns="0" bIns="0" rtlCol="0" anchor="ctr"/>
-          <a:lstStyle/>
-          <a:p>
-            <a:pPr indent="0" marL="0">
-              <a:buNone/>
-            </a:pPr>
-            <a:r>
-              <a:rPr lang="en-US" sz="1700" b="1" dirty="0">
-                <a:solidFill>
-                  <a:schemeClr val="tx1"/>
-                </a:solidFill>
-              </a:rPr>
-              <a:t>Launch</a:t>
-            </a:r>
-            <a:endParaRPr lang="en-US" sz="1700" dirty="0"/>
-          </a:p>
-        </p:txBody>
-      </p:sp>
-      <p:sp>
-        <p:nvSpPr>
-          <p:cNvPr id="8" name="Text 6"/>
-          <p:cNvSpPr txBox="1"/>
-          <p:nvPr/>
-        </p:nvSpPr>
-        <p:spPr>
-          <a:xfrm>
-            <a:off x="457200" y="2834640"/>
-            <a:ext cx="1920240" cy="1188720"/>
-          </a:xfrm>
-          <a:prstGeom prst="rect">
-            <a:avLst/>
-          </a:prstGeom>
-          <a:noFill/>
-          <a:ln/>
-        </p:spPr>
-        <p:txBody>
-          <a:bodyPr wrap="square" lIns="0" tIns="0" rIns="0" bIns="0" rtlCol="0" anchor="t"/>
-          <a:lstStyle/>
-          <a:p>
-            <a:pPr indent="0" marL="0">
-              <a:buNone/>
-            </a:pPr>
-            <a:r>
-              <a:rPr lang="en-US" sz="1200" dirty="0">
-                <a:solidFill>
-                  <a:schemeClr val="tx2"/>
-                </a:solidFill>
-              </a:rPr>
-              <a:t>Agreement, training, consumables, FESPA</a:t>
-            </a:r>
-            <a:endParaRPr lang="en-US" sz="1200" dirty="0"/>
-          </a:p>
-        </p:txBody>
-      </p:sp>
-      <p:sp>
-        <p:nvSpPr>
-          <p:cNvPr id="9" name="Shape 7"/>
+          <p:cNvPr id="5" name="cmyk-dot"/>
           <p:cNvSpPr/>
           <p:nvPr/>
         </p:nvSpPr>
         <p:spPr>
           <a:xfrm>
-            <a:off x="2651760" y="1463040"/>
-            <a:ext cx="457200" cy="457200"/>
+            <a:off x="832104" y="3246120"/>
+            <a:ext cx="164592" cy="164592"/>
           </a:xfrm>
           <a:prstGeom prst="ellipse">
             <a:avLst/>
@@ -8948,158 +9489,14 @@
       </p:sp>
       <p:sp>
         <p:nvSpPr>
-          <p:cNvPr id="10" name="Text 8"/>
-          <p:cNvSpPr txBox="1"/>
-          <p:nvPr/>
-        </p:nvSpPr>
-        <p:spPr>
-          <a:xfrm>
-            <a:off x="2651760" y="1463040"/>
-            <a:ext cx="457200" cy="457200"/>
-          </a:xfrm>
-          <a:prstGeom prst="rect">
-            <a:avLst/>
-          </a:prstGeom>
-          <a:noFill/>
-          <a:ln/>
-        </p:spPr>
-        <p:txBody>
-          <a:bodyPr wrap="square" lIns="0" tIns="0" rIns="0" bIns="0" rtlCol="0" anchor="ctr"/>
-          <a:lstStyle/>
-          <a:p>
-            <a:pPr algn="ctr" indent="0" marL="0">
-              <a:buNone/>
-            </a:pPr>
-            <a:r>
-              <a:rPr lang="en-US" sz="1300" b="1" dirty="0">
-                <a:solidFill>
-                  <a:srgbClr val="FFFFFF"/>
-                </a:solidFill>
-              </a:rPr>
-              <a:t>2</a:t>
-            </a:r>
-            <a:endParaRPr lang="en-US" sz="1300" dirty="0"/>
-          </a:p>
-        </p:txBody>
-      </p:sp>
-      <p:sp>
-        <p:nvSpPr>
-          <p:cNvPr id="11" name="Text 9"/>
-          <p:cNvSpPr txBox="1"/>
-          <p:nvPr/>
-        </p:nvSpPr>
-        <p:spPr>
-          <a:xfrm>
-            <a:off x="2560320" y="2057400"/>
-            <a:ext cx="1920240" cy="320040"/>
-          </a:xfrm>
-          <a:prstGeom prst="rect">
-            <a:avLst/>
-          </a:prstGeom>
-          <a:noFill/>
-          <a:ln/>
-        </p:spPr>
-        <p:txBody>
-          <a:bodyPr wrap="square" lIns="0" tIns="0" rIns="0" bIns="0" rtlCol="0" anchor="ctr"/>
-          <a:lstStyle/>
-          <a:p>
-            <a:pPr indent="0" marL="0">
-              <a:buNone/>
-            </a:pPr>
-            <a:r>
-              <a:rPr lang="en-US" sz="1200" b="1" dirty="0">
-                <a:solidFill>
-                  <a:schemeClr val="accent1"/>
-                </a:solidFill>
-              </a:rPr>
-              <a:t>Months 6–18</a:t>
-            </a:r>
-            <a:endParaRPr lang="en-US" sz="1200" dirty="0"/>
-          </a:p>
-        </p:txBody>
-      </p:sp>
-      <p:sp>
-        <p:nvSpPr>
-          <p:cNvPr id="12" name="Text 10"/>
-          <p:cNvSpPr txBox="1"/>
-          <p:nvPr/>
-        </p:nvSpPr>
-        <p:spPr>
-          <a:xfrm>
-            <a:off x="2560320" y="2377440"/>
-            <a:ext cx="1920240" cy="411480"/>
-          </a:xfrm>
-          <a:prstGeom prst="rect">
-            <a:avLst/>
-          </a:prstGeom>
-          <a:noFill/>
-          <a:ln/>
-        </p:spPr>
-        <p:txBody>
-          <a:bodyPr wrap="square" lIns="0" tIns="0" rIns="0" bIns="0" rtlCol="0" anchor="ctr"/>
-          <a:lstStyle/>
-          <a:p>
-            <a:pPr indent="0" marL="0">
-              <a:buNone/>
-            </a:pPr>
-            <a:r>
-              <a:rPr lang="en-US" sz="1700" b="1" dirty="0">
-                <a:solidFill>
-                  <a:schemeClr val="tx1"/>
-                </a:solidFill>
-              </a:rPr>
-              <a:t>Demonstration</a:t>
-            </a:r>
-            <a:endParaRPr lang="en-US" sz="1700" dirty="0"/>
-          </a:p>
-        </p:txBody>
-      </p:sp>
-      <p:sp>
-        <p:nvSpPr>
-          <p:cNvPr id="13" name="Text 11"/>
-          <p:cNvSpPr txBox="1"/>
-          <p:nvPr/>
-        </p:nvSpPr>
-        <p:spPr>
-          <a:xfrm>
-            <a:off x="2560320" y="2834640"/>
-            <a:ext cx="1920240" cy="1188720"/>
-          </a:xfrm>
-          <a:prstGeom prst="rect">
-            <a:avLst/>
-          </a:prstGeom>
-          <a:noFill/>
-          <a:ln/>
-        </p:spPr>
-        <p:txBody>
-          <a:bodyPr wrap="square" lIns="0" tIns="0" rIns="0" bIns="0" rtlCol="0" anchor="t"/>
-          <a:lstStyle/>
-          <a:p>
-            <a:pPr indent="0" marL="0">
-              <a:buNone/>
-            </a:pPr>
-            <a:r>
-              <a:rPr lang="en-US" sz="1200" dirty="0">
-                <a:solidFill>
-                  <a:schemeClr val="tx2"/>
-                </a:solidFill>
-              </a:rPr>
-              <a:t>Demo showroom, first 2–5 lines</a:t>
-            </a:r>
-            <a:endParaRPr lang="en-US" sz="1200" dirty="0"/>
-          </a:p>
-        </p:txBody>
-      </p:sp>
-      <p:sp>
-        <p:nvSpPr>
-          <p:cNvPr id="14" name="Shape 12"/>
+          <p:cNvPr id="6" name="cmyk-dot"/>
           <p:cNvSpPr/>
           <p:nvPr/>
         </p:nvSpPr>
         <p:spPr>
           <a:xfrm>
-            <a:off x="4754880" y="1463040"/>
-            <a:ext cx="457200" cy="457200"/>
+            <a:off x="1069848" y="3246120"/>
+            <a:ext cx="164592" cy="164592"/>
           </a:xfrm>
           <a:prstGeom prst="ellipse">
             <a:avLst/>
@@ -9117,361 +9514,28 @@
       </p:sp>
       <p:sp>
         <p:nvSpPr>
-          <p:cNvPr id="15" name="Text 13"/>
-          <p:cNvSpPr txBox="1"/>
-          <p:nvPr/>
-        </p:nvSpPr>
-        <p:spPr>
-          <a:xfrm>
-            <a:off x="4754880" y="1463040"/>
-            <a:ext cx="457200" cy="457200"/>
-          </a:xfrm>
-          <a:prstGeom prst="rect">
-            <a:avLst/>
-          </a:prstGeom>
-          <a:noFill/>
-          <a:ln/>
-        </p:spPr>
-        <p:txBody>
-          <a:bodyPr wrap="square" lIns="0" tIns="0" rIns="0" bIns="0" rtlCol="0" anchor="ctr"/>
-          <a:lstStyle/>
-          <a:p>
-            <a:pPr algn="ctr" indent="0" marL="0">
-              <a:buNone/>
-            </a:pPr>
-            <a:r>
-              <a:rPr lang="en-US" sz="1300" b="1" dirty="0">
-                <a:solidFill>
-                  <a:srgbClr val="1B1F3B"/>
-                </a:solidFill>
-              </a:rPr>
-              <a:t>3</a:t>
-            </a:r>
-            <a:endParaRPr lang="en-US" sz="1300" dirty="0"/>
-          </a:p>
-        </p:txBody>
-      </p:sp>
-      <p:sp>
-        <p:nvSpPr>
-          <p:cNvPr id="16" name="Text 14"/>
-          <p:cNvSpPr txBox="1"/>
-          <p:nvPr/>
-        </p:nvSpPr>
-        <p:spPr>
-          <a:xfrm>
-            <a:off x="4663440" y="2057400"/>
-            <a:ext cx="1920240" cy="320040"/>
-          </a:xfrm>
-          <a:prstGeom prst="rect">
-            <a:avLst/>
-          </a:prstGeom>
-          <a:noFill/>
-          <a:ln/>
-        </p:spPr>
-        <p:txBody>
-          <a:bodyPr wrap="square" lIns="0" tIns="0" rIns="0" bIns="0" rtlCol="0" anchor="ctr"/>
-          <a:lstStyle/>
-          <a:p>
-            <a:pPr indent="0" marL="0">
-              <a:buNone/>
-            </a:pPr>
-            <a:r>
-              <a:rPr lang="en-US" sz="1200" b="1" dirty="0">
-                <a:solidFill>
-                  <a:schemeClr val="accent1"/>
-                </a:solidFill>
-              </a:rPr>
-              <a:t>Months 18–36</a:t>
-            </a:r>
-            <a:endParaRPr lang="en-US" sz="1200" dirty="0"/>
-          </a:p>
-        </p:txBody>
-      </p:sp>
-      <p:sp>
-        <p:nvSpPr>
-          <p:cNvPr id="17" name="Text 15"/>
-          <p:cNvSpPr txBox="1"/>
-          <p:nvPr/>
-        </p:nvSpPr>
-        <p:spPr>
-          <a:xfrm>
-            <a:off x="4663440" y="2377440"/>
-            <a:ext cx="1920240" cy="411480"/>
-          </a:xfrm>
-          <a:prstGeom prst="rect">
-            <a:avLst/>
-          </a:prstGeom>
-          <a:noFill/>
-          <a:ln/>
-        </p:spPr>
-        <p:txBody>
-          <a:bodyPr wrap="square" lIns="0" tIns="0" rIns="0" bIns="0" rtlCol="0" anchor="ctr"/>
-          <a:lstStyle/>
-          <a:p>
-            <a:pPr indent="0" marL="0">
-              <a:buNone/>
-            </a:pPr>
-            <a:r>
-              <a:rPr lang="en-US" sz="1700" b="1" dirty="0">
-                <a:solidFill>
-                  <a:schemeClr val="tx1"/>
-                </a:solidFill>
-              </a:rPr>
-              <a:t>Scale</a:t>
-            </a:r>
-            <a:endParaRPr lang="en-US" sz="1700" dirty="0"/>
-          </a:p>
-        </p:txBody>
-      </p:sp>
-      <p:sp>
-        <p:nvSpPr>
-          <p:cNvPr id="18" name="Text 16"/>
-          <p:cNvSpPr txBox="1"/>
-          <p:nvPr/>
-        </p:nvSpPr>
-        <p:spPr>
-          <a:xfrm>
-            <a:off x="4663440" y="2834640"/>
-            <a:ext cx="1920240" cy="1188720"/>
-          </a:xfrm>
-          <a:prstGeom prst="rect">
-            <a:avLst/>
-          </a:prstGeom>
-          <a:noFill/>
-          <a:ln/>
-        </p:spPr>
-        <p:txBody>
-          <a:bodyPr wrap="square" lIns="0" tIns="0" rIns="0" bIns="0" rtlCol="0" anchor="t"/>
-          <a:lstStyle/>
-          <a:p>
-            <a:pPr indent="0" marL="0">
-              <a:buNone/>
-            </a:pPr>
-            <a:r>
-              <a:rPr lang="en-US" sz="1200" dirty="0">
-                <a:solidFill>
-                  <a:schemeClr val="tx2"/>
-                </a:solidFill>
-              </a:rPr>
-              <a:t>Priority clusters, U.S. via VSP</a:t>
-            </a:r>
-            <a:endParaRPr lang="en-US" sz="1200" dirty="0"/>
-          </a:p>
-        </p:txBody>
-      </p:sp>
-      <p:sp>
-        <p:nvSpPr>
-          <p:cNvPr id="19" name="Shape 17"/>
+          <p:cNvPr id="7" name="cmyk-dot"/>
           <p:cNvSpPr/>
           <p:nvPr/>
         </p:nvSpPr>
         <p:spPr>
           <a:xfrm>
-            <a:off x="6858000" y="1463040"/>
-            <a:ext cx="457200" cy="457200"/>
+            <a:off x="1307592" y="3246120"/>
+            <a:ext cx="164592" cy="164592"/>
           </a:xfrm>
           <a:prstGeom prst="ellipse">
             <a:avLst/>
           </a:prstGeom>
           <a:solidFill>
-            <a:srgbClr val="1B1F3B"/>
+            <a:srgbClr val="FFFFFF"/>
           </a:solidFill>
           <a:ln w="12700">
             <a:solidFill>
-              <a:srgbClr val="1B1F3B"/>
+              <a:srgbClr val="FFFFFF"/>
             </a:solidFill>
             <a:prstDash val="solid"/>
           </a:ln>
         </p:spPr>
-      </p:sp>
-      <p:sp>
-        <p:nvSpPr>
-          <p:cNvPr id="20" name="Text 18"/>
-          <p:cNvSpPr txBox="1"/>
-          <p:nvPr/>
-        </p:nvSpPr>
-        <p:spPr>
-          <a:xfrm>
-            <a:off x="6858000" y="1463040"/>
-            <a:ext cx="457200" cy="457200"/>
-          </a:xfrm>
-          <a:prstGeom prst="rect">
-            <a:avLst/>
-          </a:prstGeom>
-          <a:noFill/>
-          <a:ln/>
-        </p:spPr>
-        <p:txBody>
-          <a:bodyPr wrap="square" lIns="0" tIns="0" rIns="0" bIns="0" rtlCol="0" anchor="ctr"/>
-          <a:lstStyle/>
-          <a:p>
-            <a:pPr algn="ctr" indent="0" marL="0">
-              <a:buNone/>
-            </a:pPr>
-            <a:r>
-              <a:rPr lang="en-US" sz="1300" b="1" dirty="0">
-                <a:solidFill>
-                  <a:srgbClr val="FFFFFF"/>
-                </a:solidFill>
-              </a:rPr>
-              <a:t>4</a:t>
-            </a:r>
-            <a:endParaRPr lang="en-US" sz="1300" dirty="0"/>
-          </a:p>
-        </p:txBody>
-      </p:sp>
-      <p:sp>
-        <p:nvSpPr>
-          <p:cNvPr id="21" name="Text 19"/>
-          <p:cNvSpPr txBox="1"/>
-          <p:nvPr/>
-        </p:nvSpPr>
-        <p:spPr>
-          <a:xfrm>
-            <a:off x="6766560" y="2057400"/>
-            <a:ext cx="1920240" cy="320040"/>
-          </a:xfrm>
-          <a:prstGeom prst="rect">
-            <a:avLst/>
-          </a:prstGeom>
-          <a:noFill/>
-          <a:ln/>
-        </p:spPr>
-        <p:txBody>
-          <a:bodyPr wrap="square" lIns="0" tIns="0" rIns="0" bIns="0" rtlCol="0" anchor="ctr"/>
-          <a:lstStyle/>
-          <a:p>
-            <a:pPr indent="0" marL="0">
-              <a:buNone/>
-            </a:pPr>
-            <a:r>
-              <a:rPr lang="en-US" sz="1200" b="1" dirty="0">
-                <a:solidFill>
-                  <a:schemeClr val="accent1"/>
-                </a:solidFill>
-              </a:rPr>
-              <a:t>Year 3+</a:t>
-            </a:r>
-            <a:endParaRPr lang="en-US" sz="1200" dirty="0"/>
-          </a:p>
-        </p:txBody>
-      </p:sp>
-      <p:sp>
-        <p:nvSpPr>
-          <p:cNvPr id="22" name="Text 20"/>
-          <p:cNvSpPr txBox="1"/>
-          <p:nvPr/>
-        </p:nvSpPr>
-        <p:spPr>
-          <a:xfrm>
-            <a:off x="6766560" y="2377440"/>
-            <a:ext cx="1920240" cy="411480"/>
-          </a:xfrm>
-          <a:prstGeom prst="rect">
-            <a:avLst/>
-          </a:prstGeom>
-          <a:noFill/>
-          <a:ln/>
-        </p:spPr>
-        <p:txBody>
-          <a:bodyPr wrap="square" lIns="0" tIns="0" rIns="0" bIns="0" rtlCol="0" anchor="ctr"/>
-          <a:lstStyle/>
-          <a:p>
-            <a:pPr indent="0" marL="0">
-              <a:buNone/>
-            </a:pPr>
-            <a:r>
-              <a:rPr lang="en-US" sz="1700" b="1" dirty="0">
-                <a:solidFill>
-                  <a:schemeClr val="tx1"/>
-                </a:solidFill>
-              </a:rPr>
-              <a:t>Latin America</a:t>
-            </a:r>
-            <a:endParaRPr lang="en-US" sz="1700" dirty="0"/>
-          </a:p>
-        </p:txBody>
-      </p:sp>
-      <p:sp>
-        <p:nvSpPr>
-          <p:cNvPr id="23" name="Text 21"/>
-          <p:cNvSpPr txBox="1"/>
-          <p:nvPr/>
-        </p:nvSpPr>
-        <p:spPr>
-          <a:xfrm>
-            <a:off x="6766560" y="2834640"/>
-            <a:ext cx="1920240" cy="1188720"/>
-          </a:xfrm>
-          <a:prstGeom prst="rect">
-            <a:avLst/>
-          </a:prstGeom>
-          <a:noFill/>
-          <a:ln/>
-        </p:spPr>
-        <p:txBody>
-          <a:bodyPr wrap="square" lIns="0" tIns="0" rIns="0" bIns="0" rtlCol="0" anchor="t"/>
-          <a:lstStyle/>
-          <a:p>
-            <a:pPr indent="0" marL="0">
-              <a:buNone/>
-            </a:pPr>
-            <a:r>
-              <a:rPr lang="en-US" sz="1200" dirty="0">
-                <a:solidFill>
-                  <a:schemeClr val="tx2"/>
-                </a:solidFill>
-              </a:rPr>
-              <a:t>Central America, Colombia, Peru, D.R.</a:t>
-            </a:r>
-            <a:endParaRPr lang="en-US" sz="1200" dirty="0"/>
-          </a:p>
-        </p:txBody>
-      </p:sp>
-      <p:sp>
-        <p:nvSpPr>
-          <p:cNvPr id="25" name="Slide Number Placeholder 0"/>
-          <p:cNvSpPr>
-            <a:spLocks noGrp="1"/>
-          </p:cNvSpPr>
-          <p:nvPr>
-            <p:ph type="sldNum" sz="quarter" idx="4294967295"/>
-          </p:nvPr>
-        </p:nvSpPr>
-        <p:spPr>
-          <a:xfrm>
-            <a:off x="8229600" y="4800600"/>
-            <a:ext cx="457200" cy="228600"/>
-          </a:xfrm>
-          <a:prstGeom prst="rect">
-            <a:avLst/>
-          </a:prstGeom>
-          <a:extLst>
-            <a:ext uri="{C572A759-6A51-4108-AA02-DFA0A04FC94B}">
-              <ma14:wrappingTextBoxFlag xmlns:ma14="http://schemas.microsoft.com/office/mac/drawingml/2011/main" val="0"/>
-            </a:ext>
-          </a:extLst>
-        </p:spPr>
-        <p:txBody>
-          <a:bodyPr/>
-          <a:lstStyle>
-            <a:lvl1pPr>
-              <a:defRPr sz="900">
-                <a:solidFill>
-                  <a:srgbClr val="7A8299"/>
-                </a:solidFill>
-              </a:defRPr>
-            </a:lvl1pPr>
-          </a:lstStyle>
-          <a:p>
-            <a:pPr algn="r"/>
-            <a:fld id="{F7021451-1387-4CA6-816F-3879F97B5CBC}" type="slidenum">
-              <a:rPr b="0" lang="en-US"/>
-              <a:t>17</a:t>
-            </a:fld>
-            <a:endParaRPr lang="en-US"/>
-          </a:p>
-        </p:txBody>
       </p:sp>
     </p:spTree>
   </p:cSld>
@@ -9533,7 +9597,7 @@
                   <a:schemeClr val="tx1"/>
                 </a:solidFill>
               </a:rPr>
-              <a:t>Initial investment</a:t>
+              <a:t>A four-phase commercial plan</a:t>
             </a:r>
             <a:endParaRPr lang="en-US" sz="2600" dirty="0"/>
           </a:p>
@@ -9547,20 +9611,41 @@
         </p:nvSpPr>
         <p:spPr>
           <a:xfrm>
-            <a:off x="457200" y="1097280"/>
-            <a:ext cx="2606040" cy="2834640"/>
-          </a:xfrm>
-          <a:prstGeom prst="roundRect">
-            <a:avLst>
-              <a:gd name="adj" fmla="val 2807"/>
-            </a:avLst>
+            <a:off x="731520" y="1691640"/>
+            <a:ext cx="7680960" cy="0"/>
+          </a:xfrm>
+          <a:prstGeom prst="line">
+            <a:avLst/>
+          </a:prstGeom>
+          <a:noFill/>
+          <a:ln w="25400">
+            <a:solidFill>
+              <a:srgbClr val="7A8299"/>
+            </a:solidFill>
+            <a:prstDash val="solid"/>
+          </a:ln>
+        </p:spPr>
+      </p:sp>
+      <p:sp>
+        <p:nvSpPr>
+          <p:cNvPr id="4" name="Shape 2"/>
+          <p:cNvSpPr/>
+          <p:nvPr/>
+        </p:nvSpPr>
+        <p:spPr>
+          <a:xfrm>
+            <a:off x="548640" y="1463040"/>
+            <a:ext cx="457200" cy="457200"/>
+          </a:xfrm>
+          <a:prstGeom prst="ellipse">
+            <a:avLst/>
           </a:prstGeom>
           <a:solidFill>
-            <a:srgbClr val="EEF2F7"/>
+            <a:srgbClr val="0089C2"/>
           </a:solidFill>
           <a:ln w="12700">
             <a:solidFill>
-              <a:srgbClr val="EEF2F7"/>
+              <a:srgbClr val="0089C2"/>
             </a:solidFill>
             <a:prstDash val="solid"/>
           </a:ln>
@@ -9568,14 +9653,14 @@
       </p:sp>
       <p:sp>
         <p:nvSpPr>
-          <p:cNvPr id="4" name="Text 2"/>
-          <p:cNvSpPr txBox="1"/>
-          <p:nvPr/>
-        </p:nvSpPr>
-        <p:spPr>
-          <a:xfrm>
-            <a:off x="640080" y="1554480"/>
-            <a:ext cx="2240280" cy="365760"/>
+          <p:cNvPr id="5" name="Text 3"/>
+          <p:cNvSpPr txBox="1"/>
+          <p:nvPr/>
+        </p:nvSpPr>
+        <p:spPr>
+          <a:xfrm>
+            <a:off x="548640" y="1463040"/>
+            <a:ext cx="457200" cy="457200"/>
           </a:xfrm>
           <a:prstGeom prst="rect">
             <a:avLst/>
@@ -9587,16 +9672,426 @@
           <a:bodyPr wrap="square" lIns="0" tIns="0" rIns="0" bIns="0" rtlCol="0" anchor="ctr"/>
           <a:lstStyle/>
           <a:p>
+            <a:pPr algn="ctr" indent="0" marL="0">
+              <a:buNone/>
+            </a:pPr>
+            <a:r>
+              <a:rPr lang="en-US" sz="1300" b="1" dirty="0">
+                <a:solidFill>
+                  <a:srgbClr val="FFFFFF"/>
+                </a:solidFill>
+              </a:rPr>
+              <a:t>1</a:t>
+            </a:r>
+            <a:endParaRPr lang="en-US" sz="1300" dirty="0"/>
+          </a:p>
+        </p:txBody>
+      </p:sp>
+      <p:sp>
+        <p:nvSpPr>
+          <p:cNvPr id="6" name="Text 4"/>
+          <p:cNvSpPr txBox="1"/>
+          <p:nvPr/>
+        </p:nvSpPr>
+        <p:spPr>
+          <a:xfrm>
+            <a:off x="457200" y="2057400"/>
+            <a:ext cx="1920240" cy="320040"/>
+          </a:xfrm>
+          <a:prstGeom prst="rect">
+            <a:avLst/>
+          </a:prstGeom>
+          <a:noFill/>
+          <a:ln/>
+        </p:spPr>
+        <p:txBody>
+          <a:bodyPr wrap="square" lIns="0" tIns="0" rIns="0" bIns="0" rtlCol="0" anchor="ctr"/>
+          <a:lstStyle/>
+          <a:p>
             <a:pPr indent="0" marL="0">
               <a:buNone/>
             </a:pPr>
             <a:r>
+              <a:rPr lang="en-US" sz="1200" b="1" dirty="0">
+                <a:solidFill>
+                  <a:schemeClr val="accent1"/>
+                </a:solidFill>
+              </a:rPr>
+              <a:t>Months 0–6</a:t>
+            </a:r>
+            <a:endParaRPr lang="en-US" sz="1200" dirty="0"/>
+          </a:p>
+        </p:txBody>
+      </p:sp>
+      <p:sp>
+        <p:nvSpPr>
+          <p:cNvPr id="7" name="Text 5"/>
+          <p:cNvSpPr txBox="1"/>
+          <p:nvPr/>
+        </p:nvSpPr>
+        <p:spPr>
+          <a:xfrm>
+            <a:off x="457200" y="2377440"/>
+            <a:ext cx="1920240" cy="411480"/>
+          </a:xfrm>
+          <a:prstGeom prst="rect">
+            <a:avLst/>
+          </a:prstGeom>
+          <a:noFill/>
+          <a:ln/>
+        </p:spPr>
+        <p:txBody>
+          <a:bodyPr wrap="square" lIns="0" tIns="0" rIns="0" bIns="0" rtlCol="0" anchor="ctr"/>
+          <a:lstStyle/>
+          <a:p>
+            <a:pPr indent="0" marL="0">
+              <a:buNone/>
+            </a:pPr>
+            <a:r>
               <a:rPr lang="en-US" sz="1700" b="1" dirty="0">
                 <a:solidFill>
+                  <a:schemeClr val="tx1"/>
+                </a:solidFill>
+              </a:rPr>
+              <a:t>Launch</a:t>
+            </a:r>
+            <a:endParaRPr lang="en-US" sz="1700" dirty="0"/>
+          </a:p>
+        </p:txBody>
+      </p:sp>
+      <p:sp>
+        <p:nvSpPr>
+          <p:cNvPr id="8" name="Text 6"/>
+          <p:cNvSpPr txBox="1"/>
+          <p:nvPr/>
+        </p:nvSpPr>
+        <p:spPr>
+          <a:xfrm>
+            <a:off x="457200" y="2834640"/>
+            <a:ext cx="1920240" cy="1188720"/>
+          </a:xfrm>
+          <a:prstGeom prst="rect">
+            <a:avLst/>
+          </a:prstGeom>
+          <a:noFill/>
+          <a:ln/>
+        </p:spPr>
+        <p:txBody>
+          <a:bodyPr wrap="square" lIns="0" tIns="0" rIns="0" bIns="0" rtlCol="0" anchor="t"/>
+          <a:lstStyle/>
+          <a:p>
+            <a:pPr indent="0" marL="0">
+              <a:buNone/>
+            </a:pPr>
+            <a:r>
+              <a:rPr lang="en-US" sz="1200" dirty="0">
+                <a:solidFill>
+                  <a:schemeClr val="tx2"/>
+                </a:solidFill>
+              </a:rPr>
+              <a:t>Agreement, hiring, training, consumables, FESPA</a:t>
+            </a:r>
+            <a:endParaRPr lang="en-US" sz="1200" dirty="0"/>
+          </a:p>
+        </p:txBody>
+      </p:sp>
+      <p:sp>
+        <p:nvSpPr>
+          <p:cNvPr id="9" name="Shape 7"/>
+          <p:cNvSpPr/>
+          <p:nvPr/>
+        </p:nvSpPr>
+        <p:spPr>
+          <a:xfrm>
+            <a:off x="2651760" y="1463040"/>
+            <a:ext cx="457200" cy="457200"/>
+          </a:xfrm>
+          <a:prstGeom prst="ellipse">
+            <a:avLst/>
+          </a:prstGeom>
+          <a:solidFill>
+            <a:srgbClr val="C2185B"/>
+          </a:solidFill>
+          <a:ln w="12700">
+            <a:solidFill>
+              <a:srgbClr val="C2185B"/>
+            </a:solidFill>
+            <a:prstDash val="solid"/>
+          </a:ln>
+        </p:spPr>
+      </p:sp>
+      <p:sp>
+        <p:nvSpPr>
+          <p:cNvPr id="10" name="Text 8"/>
+          <p:cNvSpPr txBox="1"/>
+          <p:nvPr/>
+        </p:nvSpPr>
+        <p:spPr>
+          <a:xfrm>
+            <a:off x="2651760" y="1463040"/>
+            <a:ext cx="457200" cy="457200"/>
+          </a:xfrm>
+          <a:prstGeom prst="rect">
+            <a:avLst/>
+          </a:prstGeom>
+          <a:noFill/>
+          <a:ln/>
+        </p:spPr>
+        <p:txBody>
+          <a:bodyPr wrap="square" lIns="0" tIns="0" rIns="0" bIns="0" rtlCol="0" anchor="ctr"/>
+          <a:lstStyle/>
+          <a:p>
+            <a:pPr algn="ctr" indent="0" marL="0">
+              <a:buNone/>
+            </a:pPr>
+            <a:r>
+              <a:rPr lang="en-US" sz="1300" b="1" dirty="0">
+                <a:solidFill>
+                  <a:srgbClr val="FFFFFF"/>
+                </a:solidFill>
+              </a:rPr>
+              <a:t>2</a:t>
+            </a:r>
+            <a:endParaRPr lang="en-US" sz="1300" dirty="0"/>
+          </a:p>
+        </p:txBody>
+      </p:sp>
+      <p:sp>
+        <p:nvSpPr>
+          <p:cNvPr id="11" name="Text 9"/>
+          <p:cNvSpPr txBox="1"/>
+          <p:nvPr/>
+        </p:nvSpPr>
+        <p:spPr>
+          <a:xfrm>
+            <a:off x="2560320" y="2057400"/>
+            <a:ext cx="1920240" cy="320040"/>
+          </a:xfrm>
+          <a:prstGeom prst="rect">
+            <a:avLst/>
+          </a:prstGeom>
+          <a:noFill/>
+          <a:ln/>
+        </p:spPr>
+        <p:txBody>
+          <a:bodyPr wrap="square" lIns="0" tIns="0" rIns="0" bIns="0" rtlCol="0" anchor="ctr"/>
+          <a:lstStyle/>
+          <a:p>
+            <a:pPr indent="0" marL="0">
+              <a:buNone/>
+            </a:pPr>
+            <a:r>
+              <a:rPr lang="en-US" sz="1200" b="1" dirty="0">
+                <a:solidFill>
+                  <a:schemeClr val="accent1"/>
+                </a:solidFill>
+              </a:rPr>
+              <a:t>Months 6–18</a:t>
+            </a:r>
+            <a:endParaRPr lang="en-US" sz="1200" dirty="0"/>
+          </a:p>
+        </p:txBody>
+      </p:sp>
+      <p:sp>
+        <p:nvSpPr>
+          <p:cNvPr id="12" name="Text 10"/>
+          <p:cNvSpPr txBox="1"/>
+          <p:nvPr/>
+        </p:nvSpPr>
+        <p:spPr>
+          <a:xfrm>
+            <a:off x="2560320" y="2377440"/>
+            <a:ext cx="1920240" cy="411480"/>
+          </a:xfrm>
+          <a:prstGeom prst="rect">
+            <a:avLst/>
+          </a:prstGeom>
+          <a:noFill/>
+          <a:ln/>
+        </p:spPr>
+        <p:txBody>
+          <a:bodyPr wrap="square" lIns="0" tIns="0" rIns="0" bIns="0" rtlCol="0" anchor="ctr"/>
+          <a:lstStyle/>
+          <a:p>
+            <a:pPr indent="0" marL="0">
+              <a:buNone/>
+            </a:pPr>
+            <a:r>
+              <a:rPr lang="en-US" sz="1700" b="1" dirty="0">
+                <a:solidFill>
+                  <a:schemeClr val="tx1"/>
+                </a:solidFill>
+              </a:rPr>
+              <a:t>Demonstration</a:t>
+            </a:r>
+            <a:endParaRPr lang="en-US" sz="1700" dirty="0"/>
+          </a:p>
+        </p:txBody>
+      </p:sp>
+      <p:sp>
+        <p:nvSpPr>
+          <p:cNvPr id="13" name="Text 11"/>
+          <p:cNvSpPr txBox="1"/>
+          <p:nvPr/>
+        </p:nvSpPr>
+        <p:spPr>
+          <a:xfrm>
+            <a:off x="2560320" y="2834640"/>
+            <a:ext cx="1920240" cy="1188720"/>
+          </a:xfrm>
+          <a:prstGeom prst="rect">
+            <a:avLst/>
+          </a:prstGeom>
+          <a:noFill/>
+          <a:ln/>
+        </p:spPr>
+        <p:txBody>
+          <a:bodyPr wrap="square" lIns="0" tIns="0" rIns="0" bIns="0" rtlCol="0" anchor="t"/>
+          <a:lstStyle/>
+          <a:p>
+            <a:pPr indent="0" marL="0">
+              <a:buNone/>
+            </a:pPr>
+            <a:r>
+              <a:rPr lang="en-US" sz="1200" dirty="0">
+                <a:solidFill>
+                  <a:schemeClr val="tx2"/>
+                </a:solidFill>
+              </a:rPr>
+              <a:t>Demo showroom, first 2–5 lines</a:t>
+            </a:r>
+            <a:endParaRPr lang="en-US" sz="1200" dirty="0"/>
+          </a:p>
+        </p:txBody>
+      </p:sp>
+      <p:sp>
+        <p:nvSpPr>
+          <p:cNvPr id="14" name="Shape 12"/>
+          <p:cNvSpPr/>
+          <p:nvPr/>
+        </p:nvSpPr>
+        <p:spPr>
+          <a:xfrm>
+            <a:off x="4754880" y="1463040"/>
+            <a:ext cx="457200" cy="457200"/>
+          </a:xfrm>
+          <a:prstGeom prst="ellipse">
+            <a:avLst/>
+          </a:prstGeom>
+          <a:solidFill>
+            <a:srgbClr val="F2B705"/>
+          </a:solidFill>
+          <a:ln w="12700">
+            <a:solidFill>
+              <a:srgbClr val="F2B705"/>
+            </a:solidFill>
+            <a:prstDash val="solid"/>
+          </a:ln>
+        </p:spPr>
+      </p:sp>
+      <p:sp>
+        <p:nvSpPr>
+          <p:cNvPr id="15" name="Text 13"/>
+          <p:cNvSpPr txBox="1"/>
+          <p:nvPr/>
+        </p:nvSpPr>
+        <p:spPr>
+          <a:xfrm>
+            <a:off x="4754880" y="1463040"/>
+            <a:ext cx="457200" cy="457200"/>
+          </a:xfrm>
+          <a:prstGeom prst="rect">
+            <a:avLst/>
+          </a:prstGeom>
+          <a:noFill/>
+          <a:ln/>
+        </p:spPr>
+        <p:txBody>
+          <a:bodyPr wrap="square" lIns="0" tIns="0" rIns="0" bIns="0" rtlCol="0" anchor="ctr"/>
+          <a:lstStyle/>
+          <a:p>
+            <a:pPr algn="ctr" indent="0" marL="0">
+              <a:buNone/>
+            </a:pPr>
+            <a:r>
+              <a:rPr lang="en-US" sz="1300" b="1" dirty="0">
+                <a:solidFill>
                   <a:srgbClr val="1B1F3B"/>
                 </a:solidFill>
               </a:rPr>
-              <a:t>Light</a:t>
+              <a:t>3</a:t>
+            </a:r>
+            <a:endParaRPr lang="en-US" sz="1300" dirty="0"/>
+          </a:p>
+        </p:txBody>
+      </p:sp>
+      <p:sp>
+        <p:nvSpPr>
+          <p:cNvPr id="16" name="Text 14"/>
+          <p:cNvSpPr txBox="1"/>
+          <p:nvPr/>
+        </p:nvSpPr>
+        <p:spPr>
+          <a:xfrm>
+            <a:off x="4663440" y="2057400"/>
+            <a:ext cx="1920240" cy="320040"/>
+          </a:xfrm>
+          <a:prstGeom prst="rect">
+            <a:avLst/>
+          </a:prstGeom>
+          <a:noFill/>
+          <a:ln/>
+        </p:spPr>
+        <p:txBody>
+          <a:bodyPr wrap="square" lIns="0" tIns="0" rIns="0" bIns="0" rtlCol="0" anchor="ctr"/>
+          <a:lstStyle/>
+          <a:p>
+            <a:pPr indent="0" marL="0">
+              <a:buNone/>
+            </a:pPr>
+            <a:r>
+              <a:rPr lang="en-US" sz="1200" b="1" dirty="0">
+                <a:solidFill>
+                  <a:schemeClr val="accent1"/>
+                </a:solidFill>
+              </a:rPr>
+              <a:t>Months 18–36</a:t>
+            </a:r>
+            <a:endParaRPr lang="en-US" sz="1200" dirty="0"/>
+          </a:p>
+        </p:txBody>
+      </p:sp>
+      <p:sp>
+        <p:nvSpPr>
+          <p:cNvPr id="17" name="Text 15"/>
+          <p:cNvSpPr txBox="1"/>
+          <p:nvPr/>
+        </p:nvSpPr>
+        <p:spPr>
+          <a:xfrm>
+            <a:off x="4663440" y="2377440"/>
+            <a:ext cx="1920240" cy="411480"/>
+          </a:xfrm>
+          <a:prstGeom prst="rect">
+            <a:avLst/>
+          </a:prstGeom>
+          <a:noFill/>
+          <a:ln/>
+        </p:spPr>
+        <p:txBody>
+          <a:bodyPr wrap="square" lIns="0" tIns="0" rIns="0" bIns="0" rtlCol="0" anchor="ctr"/>
+          <a:lstStyle/>
+          <a:p>
+            <a:pPr indent="0" marL="0">
+              <a:buNone/>
+            </a:pPr>
+            <a:r>
+              <a:rPr lang="en-US" sz="1700" b="1" dirty="0">
+                <a:solidFill>
+                  <a:schemeClr val="tx1"/>
+                </a:solidFill>
+              </a:rPr>
+              <a:t>Scale</a:t>
             </a:r>
             <a:endParaRPr lang="en-US" sz="1700" dirty="0"/>
           </a:p>
@@ -9604,71 +10099,35 @@
       </p:sp>
       <p:sp>
         <p:nvSpPr>
-          <p:cNvPr id="5" name="Text 3"/>
-          <p:cNvSpPr txBox="1"/>
-          <p:nvPr/>
-        </p:nvSpPr>
-        <p:spPr>
-          <a:xfrm>
-            <a:off x="640080" y="1965960"/>
-            <a:ext cx="2240280" cy="685800"/>
-          </a:xfrm>
-          <a:prstGeom prst="rect">
-            <a:avLst/>
-          </a:prstGeom>
-          <a:noFill/>
-          <a:ln/>
-        </p:spPr>
-        <p:txBody>
-          <a:bodyPr wrap="square" lIns="0" tIns="0" rIns="0" bIns="0" rtlCol="0" anchor="ctr"/>
+          <p:cNvPr id="18" name="Text 16"/>
+          <p:cNvSpPr txBox="1"/>
+          <p:nvPr/>
+        </p:nvSpPr>
+        <p:spPr>
+          <a:xfrm>
+            <a:off x="4663440" y="2834640"/>
+            <a:ext cx="1920240" cy="1188720"/>
+          </a:xfrm>
+          <a:prstGeom prst="rect">
+            <a:avLst/>
+          </a:prstGeom>
+          <a:noFill/>
+          <a:ln/>
+        </p:spPr>
+        <p:txBody>
+          <a:bodyPr wrap="square" lIns="0" tIns="0" rIns="0" bIns="0" rtlCol="0" anchor="t"/>
           <a:lstStyle/>
           <a:p>
             <a:pPr indent="0" marL="0">
               <a:buNone/>
             </a:pPr>
             <a:r>
-              <a:rPr lang="en-US" sz="3200" b="1" dirty="0">
-                <a:solidFill>
-                  <a:srgbClr val="C2185B"/>
-                </a:solidFill>
-              </a:rPr>
-              <a:t>~US$53k</a:t>
-            </a:r>
-            <a:endParaRPr lang="en-US" sz="3200" dirty="0"/>
-          </a:p>
-        </p:txBody>
-      </p:sp>
-      <p:sp>
-        <p:nvSpPr>
-          <p:cNvPr id="6" name="Text 4"/>
-          <p:cNvSpPr txBox="1"/>
-          <p:nvPr/>
-        </p:nvSpPr>
-        <p:spPr>
-          <a:xfrm>
-            <a:off x="640080" y="2743200"/>
-            <a:ext cx="2240280" cy="1097280"/>
-          </a:xfrm>
-          <a:prstGeom prst="rect">
-            <a:avLst/>
-          </a:prstGeom>
-          <a:noFill/>
-          <a:ln/>
-        </p:spPr>
-        <p:txBody>
-          <a:bodyPr wrap="square" lIns="0" tIns="0" rIns="0" bIns="0" rtlCol="0" anchor="t"/>
-          <a:lstStyle/>
-          <a:p>
-            <a:pPr indent="0" marL="0">
-              <a:buNone/>
-            </a:pPr>
-            <a:r>
               <a:rPr lang="en-US" sz="1200" dirty="0">
                 <a:solidFill>
-                  <a:srgbClr val="3A4060"/>
-                </a:solidFill>
-              </a:rPr>
-              <a:t>Demo on consignment or at an anchor shop; consumables first</a:t>
+                  <a:schemeClr val="tx2"/>
+                </a:solidFill>
+              </a:rPr>
+              <a:t>Priority clusters, U.S. via VSP</a:t>
             </a:r>
             <a:endParaRPr lang="en-US" sz="1200" dirty="0"/>
           </a:p>
@@ -9676,19 +10135,17 @@
       </p:sp>
       <p:sp>
         <p:nvSpPr>
-          <p:cNvPr id="7" name="Shape 5"/>
+          <p:cNvPr id="19" name="Shape 17"/>
           <p:cNvSpPr/>
           <p:nvPr/>
         </p:nvSpPr>
         <p:spPr>
           <a:xfrm>
-            <a:off x="3246120" y="1097280"/>
-            <a:ext cx="2606040" cy="2834640"/>
-          </a:xfrm>
-          <a:prstGeom prst="roundRect">
-            <a:avLst>
-              <a:gd name="adj" fmla="val 2807"/>
-            </a:avLst>
+            <a:off x="6858000" y="1463040"/>
+            <a:ext cx="457200" cy="457200"/>
+          </a:xfrm>
+          <a:prstGeom prst="ellipse">
+            <a:avLst/>
           </a:prstGeom>
           <a:solidFill>
             <a:srgbClr val="1B1F3B"/>
@@ -9703,14 +10160,14 @@
       </p:sp>
       <p:sp>
         <p:nvSpPr>
-          <p:cNvPr id="8" name="Text 6"/>
-          <p:cNvSpPr txBox="1"/>
-          <p:nvPr/>
-        </p:nvSpPr>
-        <p:spPr>
-          <a:xfrm>
-            <a:off x="3429000" y="1234440"/>
-            <a:ext cx="2240280" cy="274320"/>
+          <p:cNvPr id="20" name="Text 18"/>
+          <p:cNvSpPr txBox="1"/>
+          <p:nvPr/>
+        </p:nvSpPr>
+        <p:spPr>
+          <a:xfrm>
+            <a:off x="6858000" y="1463040"/>
+            <a:ext cx="457200" cy="457200"/>
           </a:xfrm>
           <a:prstGeom prst="rect">
             <a:avLst/>
@@ -9722,31 +10179,67 @@
           <a:bodyPr wrap="square" lIns="0" tIns="0" rIns="0" bIns="0" rtlCol="0" anchor="ctr"/>
           <a:lstStyle/>
           <a:p>
+            <a:pPr algn="ctr" indent="0" marL="0">
+              <a:buNone/>
+            </a:pPr>
+            <a:r>
+              <a:rPr lang="en-US" sz="1300" b="1" dirty="0">
+                <a:solidFill>
+                  <a:srgbClr val="FFFFFF"/>
+                </a:solidFill>
+              </a:rPr>
+              <a:t>4</a:t>
+            </a:r>
+            <a:endParaRPr lang="en-US" sz="1300" dirty="0"/>
+          </a:p>
+        </p:txBody>
+      </p:sp>
+      <p:sp>
+        <p:nvSpPr>
+          <p:cNvPr id="21" name="Text 19"/>
+          <p:cNvSpPr txBox="1"/>
+          <p:nvPr/>
+        </p:nvSpPr>
+        <p:spPr>
+          <a:xfrm>
+            <a:off x="6766560" y="2057400"/>
+            <a:ext cx="1920240" cy="320040"/>
+          </a:xfrm>
+          <a:prstGeom prst="rect">
+            <a:avLst/>
+          </a:prstGeom>
+          <a:noFill/>
+          <a:ln/>
+        </p:spPr>
+        <p:txBody>
+          <a:bodyPr wrap="square" lIns="0" tIns="0" rIns="0" bIns="0" rtlCol="0" anchor="ctr"/>
+          <a:lstStyle/>
+          <a:p>
             <a:pPr indent="0" marL="0">
               <a:buNone/>
             </a:pPr>
             <a:r>
-              <a:rPr lang="en-US" sz="1100" b="1" dirty="0">
-                <a:solidFill>
-                  <a:srgbClr val="F2B705"/>
-                </a:solidFill>
-              </a:rPr>
-              <a:t>Recommended</a:t>
-            </a:r>
-            <a:endParaRPr lang="en-US" sz="1100" dirty="0"/>
-          </a:p>
-        </p:txBody>
-      </p:sp>
-      <p:sp>
-        <p:nvSpPr>
-          <p:cNvPr id="9" name="Text 7"/>
-          <p:cNvSpPr txBox="1"/>
-          <p:nvPr/>
-        </p:nvSpPr>
-        <p:spPr>
-          <a:xfrm>
-            <a:off x="3429000" y="1554480"/>
-            <a:ext cx="2240280" cy="365760"/>
+              <a:rPr lang="en-US" sz="1200" b="1" dirty="0">
+                <a:solidFill>
+                  <a:schemeClr val="accent1"/>
+                </a:solidFill>
+              </a:rPr>
+              <a:t>Year 3+</a:t>
+            </a:r>
+            <a:endParaRPr lang="en-US" sz="1200" dirty="0"/>
+          </a:p>
+        </p:txBody>
+      </p:sp>
+      <p:sp>
+        <p:nvSpPr>
+          <p:cNvPr id="22" name="Text 20"/>
+          <p:cNvSpPr txBox="1"/>
+          <p:nvPr/>
+        </p:nvSpPr>
+        <p:spPr>
+          <a:xfrm>
+            <a:off x="6766560" y="2377440"/>
+            <a:ext cx="1920240" cy="411480"/>
           </a:xfrm>
           <a:prstGeom prst="rect">
             <a:avLst/>
@@ -9764,10 +10257,10 @@
             <a:r>
               <a:rPr lang="en-US" sz="1700" b="1" dirty="0">
                 <a:solidFill>
-                  <a:srgbClr val="FFFFFF"/>
-                </a:solidFill>
-              </a:rPr>
-              <a:t>Base</a:t>
+                  <a:schemeClr val="tx1"/>
+                </a:solidFill>
+              </a:rPr>
+              <a:t>Latin America</a:t>
             </a:r>
             <a:endParaRPr lang="en-US" sz="1700" dirty="0"/>
           </a:p>
@@ -9775,280 +10268,37 @@
       </p:sp>
       <p:sp>
         <p:nvSpPr>
-          <p:cNvPr id="10" name="Text 8"/>
-          <p:cNvSpPr txBox="1"/>
-          <p:nvPr/>
-        </p:nvSpPr>
-        <p:spPr>
-          <a:xfrm>
-            <a:off x="3429000" y="1965960"/>
-            <a:ext cx="2240280" cy="685800"/>
-          </a:xfrm>
-          <a:prstGeom prst="rect">
-            <a:avLst/>
-          </a:prstGeom>
-          <a:noFill/>
-          <a:ln/>
-        </p:spPr>
-        <p:txBody>
-          <a:bodyPr wrap="square" lIns="0" tIns="0" rIns="0" bIns="0" rtlCol="0" anchor="ctr"/>
+          <p:cNvPr id="23" name="Text 21"/>
+          <p:cNvSpPr txBox="1"/>
+          <p:nvPr/>
+        </p:nvSpPr>
+        <p:spPr>
+          <a:xfrm>
+            <a:off x="6766560" y="2834640"/>
+            <a:ext cx="1920240" cy="1188720"/>
+          </a:xfrm>
+          <a:prstGeom prst="rect">
+            <a:avLst/>
+          </a:prstGeom>
+          <a:noFill/>
+          <a:ln/>
+        </p:spPr>
+        <p:txBody>
+          <a:bodyPr wrap="square" lIns="0" tIns="0" rIns="0" bIns="0" rtlCol="0" anchor="t"/>
           <a:lstStyle/>
           <a:p>
             <a:pPr indent="0" marL="0">
               <a:buNone/>
             </a:pPr>
             <a:r>
-              <a:rPr lang="en-US" sz="3200" b="1" dirty="0">
-                <a:solidFill>
-                  <a:srgbClr val="F2B705"/>
-                </a:solidFill>
-              </a:rPr>
-              <a:t>~US$262k</a:t>
-            </a:r>
-            <a:endParaRPr lang="en-US" sz="3200" dirty="0"/>
-          </a:p>
-        </p:txBody>
-      </p:sp>
-      <p:sp>
-        <p:nvSpPr>
-          <p:cNvPr id="11" name="Text 9"/>
-          <p:cNvSpPr txBox="1"/>
-          <p:nvPr/>
-        </p:nvSpPr>
-        <p:spPr>
-          <a:xfrm>
-            <a:off x="3429000" y="2743200"/>
-            <a:ext cx="2240280" cy="1097280"/>
-          </a:xfrm>
-          <a:prstGeom prst="rect">
-            <a:avLst/>
-          </a:prstGeom>
-          <a:noFill/>
-          <a:ln/>
-        </p:spPr>
-        <p:txBody>
-          <a:bodyPr wrap="square" lIns="0" tIns="0" rIns="0" bIns="0" rtlCol="0" anchor="t"/>
-          <a:lstStyle/>
-          <a:p>
-            <a:pPr indent="0" marL="0">
-              <a:buNone/>
-            </a:pPr>
-            <a:r>
               <a:rPr lang="en-US" sz="1200" dirty="0">
                 <a:solidFill>
-                  <a:srgbClr val="DDE3EE"/>
-                </a:solidFill>
-              </a:rPr>
-              <a:t>Press + hybrid station, inventory, showroom, launch</a:t>
+                  <a:schemeClr val="tx2"/>
+                </a:solidFill>
+              </a:rPr>
+              <a:t>Central America, Colombia, Peru, D.R.</a:t>
             </a:r>
             <a:endParaRPr lang="en-US" sz="1200" dirty="0"/>
-          </a:p>
-        </p:txBody>
-      </p:sp>
-      <p:sp>
-        <p:nvSpPr>
-          <p:cNvPr id="12" name="Shape 10"/>
-          <p:cNvSpPr/>
-          <p:nvPr/>
-        </p:nvSpPr>
-        <p:spPr>
-          <a:xfrm>
-            <a:off x="6035040" y="1097280"/>
-            <a:ext cx="2606040" cy="2834640"/>
-          </a:xfrm>
-          <a:prstGeom prst="roundRect">
-            <a:avLst>
-              <a:gd name="adj" fmla="val 2807"/>
-            </a:avLst>
-          </a:prstGeom>
-          <a:solidFill>
-            <a:srgbClr val="EEF2F7"/>
-          </a:solidFill>
-          <a:ln w="12700">
-            <a:solidFill>
-              <a:srgbClr val="EEF2F7"/>
-            </a:solidFill>
-            <a:prstDash val="solid"/>
-          </a:ln>
-        </p:spPr>
-      </p:sp>
-      <p:sp>
-        <p:nvSpPr>
-          <p:cNvPr id="13" name="Text 11"/>
-          <p:cNvSpPr txBox="1"/>
-          <p:nvPr/>
-        </p:nvSpPr>
-        <p:spPr>
-          <a:xfrm>
-            <a:off x="6217920" y="1554480"/>
-            <a:ext cx="2240280" cy="365760"/>
-          </a:xfrm>
-          <a:prstGeom prst="rect">
-            <a:avLst/>
-          </a:prstGeom>
-          <a:noFill/>
-          <a:ln/>
-        </p:spPr>
-        <p:txBody>
-          <a:bodyPr wrap="square" lIns="0" tIns="0" rIns="0" bIns="0" rtlCol="0" anchor="ctr"/>
-          <a:lstStyle/>
-          <a:p>
-            <a:pPr indent="0" marL="0">
-              <a:buNone/>
-            </a:pPr>
-            <a:r>
-              <a:rPr lang="en-US" sz="1700" b="1" dirty="0">
-                <a:solidFill>
-                  <a:srgbClr val="1B1F3B"/>
-                </a:solidFill>
-              </a:rPr>
-              <a:t>Full</a:t>
-            </a:r>
-            <a:endParaRPr lang="en-US" sz="1700" dirty="0"/>
-          </a:p>
-        </p:txBody>
-      </p:sp>
-      <p:sp>
-        <p:nvSpPr>
-          <p:cNvPr id="14" name="Text 12"/>
-          <p:cNvSpPr txBox="1"/>
-          <p:nvPr/>
-        </p:nvSpPr>
-        <p:spPr>
-          <a:xfrm>
-            <a:off x="6217920" y="1965960"/>
-            <a:ext cx="2240280" cy="685800"/>
-          </a:xfrm>
-          <a:prstGeom prst="rect">
-            <a:avLst/>
-          </a:prstGeom>
-          <a:noFill/>
-          <a:ln/>
-        </p:spPr>
-        <p:txBody>
-          <a:bodyPr wrap="square" lIns="0" tIns="0" rIns="0" bIns="0" rtlCol="0" anchor="ctr"/>
-          <a:lstStyle/>
-          <a:p>
-            <a:pPr indent="0" marL="0">
-              <a:buNone/>
-            </a:pPr>
-            <a:r>
-              <a:rPr lang="en-US" sz="3200" b="1" dirty="0">
-                <a:solidFill>
-                  <a:srgbClr val="C2185B"/>
-                </a:solidFill>
-              </a:rPr>
-              <a:t>~US$450k</a:t>
-            </a:r>
-            <a:endParaRPr lang="en-US" sz="3200" dirty="0"/>
-          </a:p>
-        </p:txBody>
-      </p:sp>
-      <p:sp>
-        <p:nvSpPr>
-          <p:cNvPr id="15" name="Text 13"/>
-          <p:cNvSpPr txBox="1"/>
-          <p:nvPr/>
-        </p:nvSpPr>
-        <p:spPr>
-          <a:xfrm>
-            <a:off x="6217920" y="2743200"/>
-            <a:ext cx="2240280" cy="1097280"/>
-          </a:xfrm>
-          <a:prstGeom prst="rect">
-            <a:avLst/>
-          </a:prstGeom>
-          <a:noFill/>
-          <a:ln/>
-        </p:spPr>
-        <p:txBody>
-          <a:bodyPr wrap="square" lIns="0" tIns="0" rIns="0" bIns="0" rtlCol="0" anchor="t"/>
-          <a:lstStyle/>
-          <a:p>
-            <a:pPr indent="0" marL="0">
-              <a:buNone/>
-            </a:pPr>
-            <a:r>
-              <a:rPr lang="en-US" sz="1200" dirty="0">
-                <a:solidFill>
-                  <a:srgbClr val="3A4060"/>
-                </a:solidFill>
-              </a:rPr>
-              <a:t>Complete line incl. 6-station DTG</a:t>
-            </a:r>
-            <a:endParaRPr lang="en-US" sz="1200" dirty="0"/>
-          </a:p>
-        </p:txBody>
-      </p:sp>
-      <p:sp>
-        <p:nvSpPr>
-          <p:cNvPr id="16" name="Text 14"/>
-          <p:cNvSpPr txBox="1"/>
-          <p:nvPr/>
-        </p:nvSpPr>
-        <p:spPr>
-          <a:xfrm>
-            <a:off x="457200" y="4069080"/>
-            <a:ext cx="8229600" cy="320040"/>
-          </a:xfrm>
-          <a:prstGeom prst="rect">
-            <a:avLst/>
-          </a:prstGeom>
-          <a:noFill/>
-          <a:ln/>
-        </p:spPr>
-        <p:txBody>
-          <a:bodyPr wrap="square" lIns="0" tIns="0" rIns="0" bIns="0" rtlCol="0" anchor="ctr"/>
-          <a:lstStyle/>
-          <a:p>
-            <a:pPr indent="0" marL="0">
-              <a:buNone/>
-            </a:pPr>
-            <a:r>
-              <a:rPr lang="en-US" sz="1300" b="1" dirty="0">
-                <a:solidFill>
-                  <a:schemeClr val="tx1"/>
-                </a:solidFill>
-              </a:rPr>
-              <a:t>Year-1 operating expense: ~US$120k (textile manager, technician, shows, space)</a:t>
-            </a:r>
-            <a:endParaRPr lang="en-US" sz="1300" dirty="0"/>
-          </a:p>
-        </p:txBody>
-      </p:sp>
-      <p:sp>
-        <p:nvSpPr>
-          <p:cNvPr id="17" name="Text 15"/>
-          <p:cNvSpPr txBox="1"/>
-          <p:nvPr/>
-        </p:nvSpPr>
-        <p:spPr>
-          <a:xfrm>
-            <a:off x="457200" y="4480560"/>
-            <a:ext cx="8229600" cy="274320"/>
-          </a:xfrm>
-          <a:prstGeom prst="rect">
-            <a:avLst/>
-          </a:prstGeom>
-          <a:noFill/>
-          <a:ln/>
-        </p:spPr>
-        <p:txBody>
-          <a:bodyPr wrap="square" lIns="0" tIns="0" rIns="0" bIns="0" rtlCol="0" anchor="ctr"/>
-          <a:lstStyle/>
-          <a:p>
-            <a:pPr indent="0" marL="0">
-              <a:buNone/>
-            </a:pPr>
-            <a:r>
-              <a:rPr lang="en-US" sz="1000" i="1" dirty="0">
-                <a:solidFill>
-                  <a:schemeClr val="accent5"/>
-                </a:solidFill>
-              </a:rPr>
-              <a:t>Estimate — to be confirmed with CLT’s quotation</a:t>
-            </a:r>
-            <a:endParaRPr lang="en-US" sz="1000" dirty="0"/>
           </a:p>
         </p:txBody>
       </p:sp>
@@ -10157,78 +10407,26 @@
                   <a:schemeClr val="tx1"/>
                 </a:solidFill>
               </a:rPr>
-              <a:t>Projection: recurring revenue grows every year</a:t>
+              <a:t>Initial investment</a:t>
             </a:r>
             <a:endParaRPr lang="en-US" sz="2600" dirty="0"/>
           </a:p>
         </p:txBody>
       </p:sp>
-      <p:graphicFrame>
-        <p:nvGraphicFramePr>
-          <p:cNvPr id="3" name="Chart 0" descr=""/>
-          <p:cNvGraphicFramePr/>
-          <p:nvPr/>
-        </p:nvGraphicFramePr>
-        <p:xfrm>
-          <a:off x="457200" y="1005840"/>
-          <a:ext cx="5120640" cy="3383280"/>
-        </p:xfrm>
-        <a:graphic xmlns:a="http://schemas.openxmlformats.org/drawingml/2006/main">
-          <a:graphicData uri="http://schemas.openxmlformats.org/drawingml/2006/chart">
-            <c:chart xmlns:c="http://schemas.openxmlformats.org/drawingml/2006/chart" r:id="rId1"/>
-          </a:graphicData>
-        </a:graphic>
-      </p:graphicFrame>
-      <p:sp>
-        <p:nvSpPr>
-          <p:cNvPr id="4" name="Text 1"/>
-          <p:cNvSpPr txBox="1"/>
-          <p:nvPr/>
-        </p:nvSpPr>
-        <p:spPr>
-          <a:xfrm>
-            <a:off x="5943600" y="1051560"/>
-            <a:ext cx="2743200" cy="365760"/>
-          </a:xfrm>
-          <a:prstGeom prst="rect">
-            <a:avLst/>
-          </a:prstGeom>
-          <a:noFill/>
-          <a:ln/>
-        </p:spPr>
-        <p:txBody>
-          <a:bodyPr wrap="square" lIns="0" tIns="0" rIns="0" bIns="0" rtlCol="0" anchor="ctr"/>
-          <a:lstStyle/>
-          <a:p>
-            <a:pPr indent="0" marL="0">
-              <a:buNone/>
-            </a:pPr>
-            <a:r>
-              <a:rPr lang="en-US" sz="1500" b="1" dirty="0">
-                <a:solidFill>
-                  <a:schemeClr val="tx1"/>
-                </a:solidFill>
-              </a:rPr>
-              <a:t>Annual result</a:t>
-            </a:r>
-            <a:endParaRPr lang="en-US" sz="1500" dirty="0"/>
-          </a:p>
-        </p:txBody>
-      </p:sp>
-      <p:sp>
-        <p:nvSpPr>
-          <p:cNvPr id="5" name="Shape 2"/>
+      <p:sp>
+        <p:nvSpPr>
+          <p:cNvPr id="3" name="Shape 1"/>
           <p:cNvSpPr/>
           <p:nvPr/>
         </p:nvSpPr>
         <p:spPr>
           <a:xfrm>
-            <a:off x="5943600" y="1508760"/>
-            <a:ext cx="2743200" cy="731520"/>
+            <a:off x="457200" y="1097280"/>
+            <a:ext cx="2606040" cy="2834640"/>
           </a:xfrm>
           <a:prstGeom prst="roundRect">
             <a:avLst>
-              <a:gd name="adj" fmla="val 10000"/>
+              <a:gd name="adj" fmla="val 2807"/>
             </a:avLst>
           </a:prstGeom>
           <a:solidFill>
@@ -10244,14 +10442,14 @@
       </p:sp>
       <p:sp>
         <p:nvSpPr>
-          <p:cNvPr id="6" name="Text 3"/>
-          <p:cNvSpPr txBox="1"/>
-          <p:nvPr/>
-        </p:nvSpPr>
-        <p:spPr>
-          <a:xfrm>
-            <a:off x="6080760" y="1508760"/>
-            <a:ext cx="1005840" cy="731520"/>
+          <p:cNvPr id="4" name="Text 2"/>
+          <p:cNvSpPr txBox="1"/>
+          <p:nvPr/>
+        </p:nvSpPr>
+        <p:spPr>
+          <a:xfrm>
+            <a:off x="640080" y="1554480"/>
+            <a:ext cx="2240280" cy="365760"/>
           </a:xfrm>
           <a:prstGeom prst="rect">
             <a:avLst/>
@@ -10267,67 +10465,274 @@
               <a:buNone/>
             </a:pPr>
             <a:r>
-              <a:rPr lang="en-US" sz="1300" dirty="0">
+              <a:rPr lang="en-US" sz="1700" b="1" dirty="0">
+                <a:solidFill>
+                  <a:srgbClr val="1B1F3B"/>
+                </a:solidFill>
+              </a:rPr>
+              <a:t>Light</a:t>
+            </a:r>
+            <a:endParaRPr lang="en-US" sz="1700" dirty="0"/>
+          </a:p>
+        </p:txBody>
+      </p:sp>
+      <p:sp>
+        <p:nvSpPr>
+          <p:cNvPr id="5" name="Text 3"/>
+          <p:cNvSpPr txBox="1"/>
+          <p:nvPr/>
+        </p:nvSpPr>
+        <p:spPr>
+          <a:xfrm>
+            <a:off x="640080" y="1965960"/>
+            <a:ext cx="2240280" cy="685800"/>
+          </a:xfrm>
+          <a:prstGeom prst="rect">
+            <a:avLst/>
+          </a:prstGeom>
+          <a:noFill/>
+          <a:ln/>
+        </p:spPr>
+        <p:txBody>
+          <a:bodyPr wrap="square" lIns="0" tIns="0" rIns="0" bIns="0" rtlCol="0" anchor="ctr"/>
+          <a:lstStyle/>
+          <a:p>
+            <a:pPr indent="0" marL="0">
+              <a:buNone/>
+            </a:pPr>
+            <a:r>
+              <a:rPr lang="en-US" sz="3200" b="1" dirty="0">
+                <a:solidFill>
+                  <a:srgbClr val="C2185B"/>
+                </a:solidFill>
+              </a:rPr>
+              <a:t>~US$53k</a:t>
+            </a:r>
+            <a:endParaRPr lang="en-US" sz="3200" dirty="0"/>
+          </a:p>
+        </p:txBody>
+      </p:sp>
+      <p:sp>
+        <p:nvSpPr>
+          <p:cNvPr id="6" name="Text 4"/>
+          <p:cNvSpPr txBox="1"/>
+          <p:nvPr/>
+        </p:nvSpPr>
+        <p:spPr>
+          <a:xfrm>
+            <a:off x="640080" y="2743200"/>
+            <a:ext cx="2240280" cy="1097280"/>
+          </a:xfrm>
+          <a:prstGeom prst="rect">
+            <a:avLst/>
+          </a:prstGeom>
+          <a:noFill/>
+          <a:ln/>
+        </p:spPr>
+        <p:txBody>
+          <a:bodyPr wrap="square" lIns="0" tIns="0" rIns="0" bIns="0" rtlCol="0" anchor="t"/>
+          <a:lstStyle/>
+          <a:p>
+            <a:pPr indent="0" marL="0">
+              <a:buNone/>
+            </a:pPr>
+            <a:r>
+              <a:rPr lang="en-US" sz="1200" dirty="0">
                 <a:solidFill>
                   <a:srgbClr val="3A4060"/>
                 </a:solidFill>
               </a:rPr>
-              <a:t>Year 1</a:t>
-            </a:r>
-            <a:endParaRPr lang="en-US" sz="1300" dirty="0"/>
-          </a:p>
-        </p:txBody>
-      </p:sp>
-      <p:sp>
-        <p:nvSpPr>
-          <p:cNvPr id="7" name="Text 4"/>
-          <p:cNvSpPr txBox="1"/>
-          <p:nvPr/>
-        </p:nvSpPr>
-        <p:spPr>
-          <a:xfrm>
-            <a:off x="7040880" y="1508760"/>
-            <a:ext cx="1554480" cy="731520"/>
-          </a:xfrm>
-          <a:prstGeom prst="rect">
-            <a:avLst/>
-          </a:prstGeom>
-          <a:noFill/>
-          <a:ln/>
-        </p:spPr>
-        <p:txBody>
-          <a:bodyPr wrap="square" lIns="0" tIns="0" rIns="0" bIns="0" rtlCol="0" anchor="ctr"/>
-          <a:lstStyle/>
-          <a:p>
-            <a:pPr algn="r" indent="0" marL="0">
-              <a:buNone/>
-            </a:pPr>
-            <a:r>
-              <a:rPr lang="en-US" sz="2200" b="1" dirty="0">
-                <a:solidFill>
-                  <a:srgbClr val="C2185B"/>
-                </a:solidFill>
-              </a:rPr>
-              <a:t>-US$28k</a:t>
-            </a:r>
-            <a:endParaRPr lang="en-US" sz="2200" dirty="0"/>
-          </a:p>
-        </p:txBody>
-      </p:sp>
-      <p:sp>
-        <p:nvSpPr>
-          <p:cNvPr id="8" name="Shape 5"/>
+              <a:t>Demo on consignment or at an anchor shop; consumables first</a:t>
+            </a:r>
+            <a:endParaRPr lang="en-US" sz="1200" dirty="0"/>
+          </a:p>
+        </p:txBody>
+      </p:sp>
+      <p:sp>
+        <p:nvSpPr>
+          <p:cNvPr id="7" name="Shape 5"/>
           <p:cNvSpPr/>
           <p:nvPr/>
         </p:nvSpPr>
         <p:spPr>
           <a:xfrm>
-            <a:off x="5943600" y="2377440"/>
-            <a:ext cx="2743200" cy="731520"/>
+            <a:off x="3246120" y="1097280"/>
+            <a:ext cx="2606040" cy="2834640"/>
           </a:xfrm>
           <a:prstGeom prst="roundRect">
             <a:avLst>
-              <a:gd name="adj" fmla="val 10000"/>
+              <a:gd name="adj" fmla="val 2807"/>
+            </a:avLst>
+          </a:prstGeom>
+          <a:solidFill>
+            <a:srgbClr val="1B1F3B"/>
+          </a:solidFill>
+          <a:ln w="12700">
+            <a:solidFill>
+              <a:srgbClr val="1B1F3B"/>
+            </a:solidFill>
+            <a:prstDash val="solid"/>
+          </a:ln>
+        </p:spPr>
+      </p:sp>
+      <p:sp>
+        <p:nvSpPr>
+          <p:cNvPr id="8" name="Text 6"/>
+          <p:cNvSpPr txBox="1"/>
+          <p:nvPr/>
+        </p:nvSpPr>
+        <p:spPr>
+          <a:xfrm>
+            <a:off x="3429000" y="1234440"/>
+            <a:ext cx="2240280" cy="274320"/>
+          </a:xfrm>
+          <a:prstGeom prst="rect">
+            <a:avLst/>
+          </a:prstGeom>
+          <a:noFill/>
+          <a:ln/>
+        </p:spPr>
+        <p:txBody>
+          <a:bodyPr wrap="square" lIns="0" tIns="0" rIns="0" bIns="0" rtlCol="0" anchor="ctr"/>
+          <a:lstStyle/>
+          <a:p>
+            <a:pPr indent="0" marL="0">
+              <a:buNone/>
+            </a:pPr>
+            <a:r>
+              <a:rPr lang="en-US" sz="1100" b="1" dirty="0">
+                <a:solidFill>
+                  <a:srgbClr val="F2B705"/>
+                </a:solidFill>
+              </a:rPr>
+              <a:t>Recommended</a:t>
+            </a:r>
+            <a:endParaRPr lang="en-US" sz="1100" dirty="0"/>
+          </a:p>
+        </p:txBody>
+      </p:sp>
+      <p:sp>
+        <p:nvSpPr>
+          <p:cNvPr id="9" name="Text 7"/>
+          <p:cNvSpPr txBox="1"/>
+          <p:nvPr/>
+        </p:nvSpPr>
+        <p:spPr>
+          <a:xfrm>
+            <a:off x="3429000" y="1554480"/>
+            <a:ext cx="2240280" cy="365760"/>
+          </a:xfrm>
+          <a:prstGeom prst="rect">
+            <a:avLst/>
+          </a:prstGeom>
+          <a:noFill/>
+          <a:ln/>
+        </p:spPr>
+        <p:txBody>
+          <a:bodyPr wrap="square" lIns="0" tIns="0" rIns="0" bIns="0" rtlCol="0" anchor="ctr"/>
+          <a:lstStyle/>
+          <a:p>
+            <a:pPr indent="0" marL="0">
+              <a:buNone/>
+            </a:pPr>
+            <a:r>
+              <a:rPr lang="en-US" sz="1700" b="1" dirty="0">
+                <a:solidFill>
+                  <a:srgbClr val="FFFFFF"/>
+                </a:solidFill>
+              </a:rPr>
+              <a:t>Base</a:t>
+            </a:r>
+            <a:endParaRPr lang="en-US" sz="1700" dirty="0"/>
+          </a:p>
+        </p:txBody>
+      </p:sp>
+      <p:sp>
+        <p:nvSpPr>
+          <p:cNvPr id="10" name="Text 8"/>
+          <p:cNvSpPr txBox="1"/>
+          <p:nvPr/>
+        </p:nvSpPr>
+        <p:spPr>
+          <a:xfrm>
+            <a:off x="3429000" y="1965960"/>
+            <a:ext cx="2240280" cy="685800"/>
+          </a:xfrm>
+          <a:prstGeom prst="rect">
+            <a:avLst/>
+          </a:prstGeom>
+          <a:noFill/>
+          <a:ln/>
+        </p:spPr>
+        <p:txBody>
+          <a:bodyPr wrap="square" lIns="0" tIns="0" rIns="0" bIns="0" rtlCol="0" anchor="ctr"/>
+          <a:lstStyle/>
+          <a:p>
+            <a:pPr indent="0" marL="0">
+              <a:buNone/>
+            </a:pPr>
+            <a:r>
+              <a:rPr lang="en-US" sz="3200" b="1" dirty="0">
+                <a:solidFill>
+                  <a:srgbClr val="F2B705"/>
+                </a:solidFill>
+              </a:rPr>
+              <a:t>~US$262k</a:t>
+            </a:r>
+            <a:endParaRPr lang="en-US" sz="3200" dirty="0"/>
+          </a:p>
+        </p:txBody>
+      </p:sp>
+      <p:sp>
+        <p:nvSpPr>
+          <p:cNvPr id="11" name="Text 9"/>
+          <p:cNvSpPr txBox="1"/>
+          <p:nvPr/>
+        </p:nvSpPr>
+        <p:spPr>
+          <a:xfrm>
+            <a:off x="3429000" y="2743200"/>
+            <a:ext cx="2240280" cy="1097280"/>
+          </a:xfrm>
+          <a:prstGeom prst="rect">
+            <a:avLst/>
+          </a:prstGeom>
+          <a:noFill/>
+          <a:ln/>
+        </p:spPr>
+        <p:txBody>
+          <a:bodyPr wrap="square" lIns="0" tIns="0" rIns="0" bIns="0" rtlCol="0" anchor="t"/>
+          <a:lstStyle/>
+          <a:p>
+            <a:pPr indent="0" marL="0">
+              <a:buNone/>
+            </a:pPr>
+            <a:r>
+              <a:rPr lang="en-US" sz="1200" dirty="0">
+                <a:solidFill>
+                  <a:srgbClr val="DDE3EE"/>
+                </a:solidFill>
+              </a:rPr>
+              <a:t>Press + hybrid station, inventory, showroom, launch</a:t>
+            </a:r>
+            <a:endParaRPr lang="en-US" sz="1200" dirty="0"/>
+          </a:p>
+        </p:txBody>
+      </p:sp>
+      <p:sp>
+        <p:nvSpPr>
+          <p:cNvPr id="12" name="Shape 10"/>
+          <p:cNvSpPr/>
+          <p:nvPr/>
+        </p:nvSpPr>
+        <p:spPr>
+          <a:xfrm>
+            <a:off x="6035040" y="1097280"/>
+            <a:ext cx="2606040" cy="2834640"/>
+          </a:xfrm>
+          <a:prstGeom prst="roundRect">
+            <a:avLst>
+              <a:gd name="adj" fmla="val 2807"/>
             </a:avLst>
           </a:prstGeom>
           <a:solidFill>
@@ -10343,14 +10748,14 @@
       </p:sp>
       <p:sp>
         <p:nvSpPr>
-          <p:cNvPr id="9" name="Text 6"/>
-          <p:cNvSpPr txBox="1"/>
-          <p:nvPr/>
-        </p:nvSpPr>
-        <p:spPr>
-          <a:xfrm>
-            <a:off x="6080760" y="2377440"/>
-            <a:ext cx="1005840" cy="731520"/>
+          <p:cNvPr id="13" name="Text 11"/>
+          <p:cNvSpPr txBox="1"/>
+          <p:nvPr/>
+        </p:nvSpPr>
+        <p:spPr>
+          <a:xfrm>
+            <a:off x="6217920" y="1554480"/>
+            <a:ext cx="2240280" cy="365760"/>
           </a:xfrm>
           <a:prstGeom prst="rect">
             <a:avLst/>
@@ -10366,12 +10771,120 @@
               <a:buNone/>
             </a:pPr>
             <a:r>
-              <a:rPr lang="en-US" sz="1300" dirty="0">
+              <a:rPr lang="en-US" sz="1700" b="1" dirty="0">
+                <a:solidFill>
+                  <a:srgbClr val="1B1F3B"/>
+                </a:solidFill>
+              </a:rPr>
+              <a:t>Full</a:t>
+            </a:r>
+            <a:endParaRPr lang="en-US" sz="1700" dirty="0"/>
+          </a:p>
+        </p:txBody>
+      </p:sp>
+      <p:sp>
+        <p:nvSpPr>
+          <p:cNvPr id="14" name="Text 12"/>
+          <p:cNvSpPr txBox="1"/>
+          <p:nvPr/>
+        </p:nvSpPr>
+        <p:spPr>
+          <a:xfrm>
+            <a:off x="6217920" y="1965960"/>
+            <a:ext cx="2240280" cy="685800"/>
+          </a:xfrm>
+          <a:prstGeom prst="rect">
+            <a:avLst/>
+          </a:prstGeom>
+          <a:noFill/>
+          <a:ln/>
+        </p:spPr>
+        <p:txBody>
+          <a:bodyPr wrap="square" lIns="0" tIns="0" rIns="0" bIns="0" rtlCol="0" anchor="ctr"/>
+          <a:lstStyle/>
+          <a:p>
+            <a:pPr indent="0" marL="0">
+              <a:buNone/>
+            </a:pPr>
+            <a:r>
+              <a:rPr lang="en-US" sz="3200" b="1" dirty="0">
+                <a:solidFill>
+                  <a:srgbClr val="C2185B"/>
+                </a:solidFill>
+              </a:rPr>
+              <a:t>~US$450k</a:t>
+            </a:r>
+            <a:endParaRPr lang="en-US" sz="3200" dirty="0"/>
+          </a:p>
+        </p:txBody>
+      </p:sp>
+      <p:sp>
+        <p:nvSpPr>
+          <p:cNvPr id="15" name="Text 13"/>
+          <p:cNvSpPr txBox="1"/>
+          <p:nvPr/>
+        </p:nvSpPr>
+        <p:spPr>
+          <a:xfrm>
+            <a:off x="6217920" y="2743200"/>
+            <a:ext cx="2240280" cy="1097280"/>
+          </a:xfrm>
+          <a:prstGeom prst="rect">
+            <a:avLst/>
+          </a:prstGeom>
+          <a:noFill/>
+          <a:ln/>
+        </p:spPr>
+        <p:txBody>
+          <a:bodyPr wrap="square" lIns="0" tIns="0" rIns="0" bIns="0" rtlCol="0" anchor="t"/>
+          <a:lstStyle/>
+          <a:p>
+            <a:pPr indent="0" marL="0">
+              <a:buNone/>
+            </a:pPr>
+            <a:r>
+              <a:rPr lang="en-US" sz="1200" dirty="0">
                 <a:solidFill>
                   <a:srgbClr val="3A4060"/>
                 </a:solidFill>
               </a:rPr>
-              <a:t>Year 2</a:t>
+              <a:t>Complete line incl. 6-station DTG</a:t>
+            </a:r>
+            <a:endParaRPr lang="en-US" sz="1200" dirty="0"/>
+          </a:p>
+        </p:txBody>
+      </p:sp>
+      <p:sp>
+        <p:nvSpPr>
+          <p:cNvPr id="16" name="Text 14"/>
+          <p:cNvSpPr txBox="1"/>
+          <p:nvPr/>
+        </p:nvSpPr>
+        <p:spPr>
+          <a:xfrm>
+            <a:off x="457200" y="4069080"/>
+            <a:ext cx="8229600" cy="320040"/>
+          </a:xfrm>
+          <a:prstGeom prst="rect">
+            <a:avLst/>
+          </a:prstGeom>
+          <a:noFill/>
+          <a:ln/>
+        </p:spPr>
+        <p:txBody>
+          <a:bodyPr wrap="square" lIns="0" tIns="0" rIns="0" bIns="0" rtlCol="0" anchor="ctr"/>
+          <a:lstStyle/>
+          <a:p>
+            <a:pPr indent="0" marL="0">
+              <a:buNone/>
+            </a:pPr>
+            <a:r>
+              <a:rPr lang="en-US" sz="1300" b="1" dirty="0">
+                <a:solidFill>
+                  <a:schemeClr val="tx1"/>
+                </a:solidFill>
+              </a:rPr>
+              <a:t>Year-1 operating expense: ~US$131k (sales, customer service, technician, training, shows)</a:t>
             </a:r>
             <a:endParaRPr lang="en-US" sz="1300" dirty="0"/>
           </a:p>
@@ -10379,142 +10892,7 @@
       </p:sp>
       <p:sp>
         <p:nvSpPr>
-          <p:cNvPr id="10" name="Text 7"/>
-          <p:cNvSpPr txBox="1"/>
-          <p:nvPr/>
-        </p:nvSpPr>
-        <p:spPr>
-          <a:xfrm>
-            <a:off x="7040880" y="2377440"/>
-            <a:ext cx="1554480" cy="731520"/>
-          </a:xfrm>
-          <a:prstGeom prst="rect">
-            <a:avLst/>
-          </a:prstGeom>
-          <a:noFill/>
-          <a:ln/>
-        </p:spPr>
-        <p:txBody>
-          <a:bodyPr wrap="square" lIns="0" tIns="0" rIns="0" bIns="0" rtlCol="0" anchor="ctr"/>
-          <a:lstStyle/>
-          <a:p>
-            <a:pPr algn="r" indent="0" marL="0">
-              <a:buNone/>
-            </a:pPr>
-            <a:r>
-              <a:rPr lang="en-US" sz="2200" b="1" dirty="0">
-                <a:solidFill>
-                  <a:srgbClr val="2E7D32"/>
-                </a:solidFill>
-              </a:rPr>
-              <a:t>+US$109k</a:t>
-            </a:r>
-            <a:endParaRPr lang="en-US" sz="2200" dirty="0"/>
-          </a:p>
-        </p:txBody>
-      </p:sp>
-      <p:sp>
-        <p:nvSpPr>
-          <p:cNvPr id="11" name="Shape 8"/>
-          <p:cNvSpPr/>
-          <p:nvPr/>
-        </p:nvSpPr>
-        <p:spPr>
-          <a:xfrm>
-            <a:off x="5943600" y="3246120"/>
-            <a:ext cx="2743200" cy="731520"/>
-          </a:xfrm>
-          <a:prstGeom prst="roundRect">
-            <a:avLst>
-              <a:gd name="adj" fmla="val 10000"/>
-            </a:avLst>
-          </a:prstGeom>
-          <a:solidFill>
-            <a:srgbClr val="EEF2F7"/>
-          </a:solidFill>
-          <a:ln w="12700">
-            <a:solidFill>
-              <a:srgbClr val="EEF2F7"/>
-            </a:solidFill>
-            <a:prstDash val="solid"/>
-          </a:ln>
-        </p:spPr>
-      </p:sp>
-      <p:sp>
-        <p:nvSpPr>
-          <p:cNvPr id="12" name="Text 9"/>
-          <p:cNvSpPr txBox="1"/>
-          <p:nvPr/>
-        </p:nvSpPr>
-        <p:spPr>
-          <a:xfrm>
-            <a:off x="6080760" y="3246120"/>
-            <a:ext cx="1005840" cy="731520"/>
-          </a:xfrm>
-          <a:prstGeom prst="rect">
-            <a:avLst/>
-          </a:prstGeom>
-          <a:noFill/>
-          <a:ln/>
-        </p:spPr>
-        <p:txBody>
-          <a:bodyPr wrap="square" lIns="0" tIns="0" rIns="0" bIns="0" rtlCol="0" anchor="ctr"/>
-          <a:lstStyle/>
-          <a:p>
-            <a:pPr indent="0" marL="0">
-              <a:buNone/>
-            </a:pPr>
-            <a:r>
-              <a:rPr lang="en-US" sz="1300" dirty="0">
-                <a:solidFill>
-                  <a:srgbClr val="3A4060"/>
-                </a:solidFill>
-              </a:rPr>
-              <a:t>Year 3</a:t>
-            </a:r>
-            <a:endParaRPr lang="en-US" sz="1300" dirty="0"/>
-          </a:p>
-        </p:txBody>
-      </p:sp>
-      <p:sp>
-        <p:nvSpPr>
-          <p:cNvPr id="13" name="Text 10"/>
-          <p:cNvSpPr txBox="1"/>
-          <p:nvPr/>
-        </p:nvSpPr>
-        <p:spPr>
-          <a:xfrm>
-            <a:off x="7040880" y="3246120"/>
-            <a:ext cx="1554480" cy="731520"/>
-          </a:xfrm>
-          <a:prstGeom prst="rect">
-            <a:avLst/>
-          </a:prstGeom>
-          <a:noFill/>
-          <a:ln/>
-        </p:spPr>
-        <p:txBody>
-          <a:bodyPr wrap="square" lIns="0" tIns="0" rIns="0" bIns="0" rtlCol="0" anchor="ctr"/>
-          <a:lstStyle/>
-          <a:p>
-            <a:pPr algn="r" indent="0" marL="0">
-              <a:buNone/>
-            </a:pPr>
-            <a:r>
-              <a:rPr lang="en-US" sz="2200" b="1" dirty="0">
-                <a:solidFill>
-                  <a:srgbClr val="2E7D32"/>
-                </a:solidFill>
-              </a:rPr>
-              <a:t>+US$289k</a:t>
-            </a:r>
-            <a:endParaRPr lang="en-US" sz="2200" dirty="0"/>
-          </a:p>
-        </p:txBody>
-      </p:sp>
-      <p:sp>
-        <p:nvSpPr>
-          <p:cNvPr id="14" name="Text 11"/>
+          <p:cNvPr id="17" name="Text 15"/>
           <p:cNvSpPr txBox="1"/>
           <p:nvPr/>
         </p:nvSpPr>
@@ -10542,7 +10920,7 @@
                   <a:schemeClr val="accent5"/>
                 </a:solidFill>
               </a:rPr>
-              <a:t>Assumptions: US$150k line, 20% equipment / 35% consumables margin, ~US$36k consumption per line per year</a:t>
+              <a:t>Estimate — to be confirmed with CLT’s quotation</a:t>
             </a:r>
             <a:endParaRPr lang="en-US" sz="1000" dirty="0"/>
           </a:p>
@@ -11167,42 +11545,6 @@
       <p:sp>
         <p:nvSpPr>
           <p:cNvPr id="2" name="Text 0"/>
-          <p:cNvSpPr txBox="1"/>
-          <p:nvPr/>
-        </p:nvSpPr>
-        <p:spPr>
-          <a:xfrm>
-            <a:off x="548640" y="1097280"/>
-            <a:ext cx="2743200" cy="914400"/>
-          </a:xfrm>
-          <a:prstGeom prst="rect">
-            <a:avLst/>
-          </a:prstGeom>
-          <a:noFill/>
-          <a:ln/>
-        </p:spPr>
-        <p:txBody>
-          <a:bodyPr wrap="square" lIns="0" tIns="0" rIns="0" bIns="0" rtlCol="0" anchor="ctr"/>
-          <a:lstStyle/>
-          <a:p>
-            <a:pPr indent="0" marL="0">
-              <a:buNone/>
-            </a:pPr>
-            <a:r>
-              <a:rPr lang="en-US" sz="6000" b="1" dirty="0">
-                <a:solidFill>
-                  <a:schemeClr val="accent3"/>
-                </a:solidFill>
-              </a:rPr>
-              <a:t>05</a:t>
-            </a:r>
-            <a:endParaRPr lang="en-US" sz="6000" dirty="0"/>
-          </a:p>
-        </p:txBody>
-      </p:sp>
-      <p:sp>
-        <p:nvSpPr>
-          <p:cNvPr id="3" name="Text 0"/>
           <p:cNvSpPr/>
           <p:nvPr>
             <p:ph idx="100" type="title" hasCustomPrompt="1"/>
@@ -11210,54 +11552,108 @@
         </p:nvSpPr>
         <p:spPr>
           <a:xfrm>
-            <a:off x="548640" y="2103120"/>
-            <a:ext cx="8046720" cy="914400"/>
-          </a:xfrm>
-          <a:prstGeom prst="rect">
-            <a:avLst/>
-          </a:prstGeom>
-          <a:noFill/>
-          <a:ln/>
-        </p:spPr>
-        <p:txBody>
-          <a:bodyPr wrap="square" rtlCol="0"/>
-          <a:lstStyle/>
-          <a:p>
-            <a:pPr algn="l" indent="0" marL="0">
-              <a:buNone/>
-            </a:pPr>
-            <a:r>
-              <a:rPr lang="en-US" sz="3600" b="1" dirty="0">
-                <a:solidFill>
-                  <a:schemeClr val="bg1"/>
-                </a:solidFill>
-              </a:rPr>
-              <a:t>The proposal</a:t>
-            </a:r>
-            <a:endParaRPr lang="en-US" sz="3600" dirty="0"/>
-          </a:p>
-        </p:txBody>
-      </p:sp>
-      <p:sp>
-        <p:nvSpPr>
-          <p:cNvPr id="4" name="cmyk-dot"/>
+            <a:off x="457200" y="274320"/>
+            <a:ext cx="8229600" cy="640080"/>
+          </a:xfrm>
+          <a:prstGeom prst="rect">
+            <a:avLst/>
+          </a:prstGeom>
+          <a:noFill/>
+          <a:ln/>
+        </p:spPr>
+        <p:txBody>
+          <a:bodyPr wrap="square" rtlCol="0" anchor="ctr"/>
+          <a:lstStyle/>
+          <a:p>
+            <a:pPr indent="0" marL="0">
+              <a:buNone/>
+            </a:pPr>
+            <a:r>
+              <a:rPr lang="en-US" sz="2600" b="1" dirty="0">
+                <a:solidFill>
+                  <a:schemeClr val="tx1"/>
+                </a:solidFill>
+              </a:rPr>
+              <a:t>Projection: recurring revenue grows every year</a:t>
+            </a:r>
+            <a:endParaRPr lang="en-US" sz="2600" dirty="0"/>
+          </a:p>
+        </p:txBody>
+      </p:sp>
+      <p:graphicFrame>
+        <p:nvGraphicFramePr>
+          <p:cNvPr id="3" name="Chart 0" descr=""/>
+          <p:cNvGraphicFramePr/>
+          <p:nvPr/>
+        </p:nvGraphicFramePr>
+        <p:xfrm>
+          <a:off x="457200" y="1005840"/>
+          <a:ext cx="5120640" cy="3383280"/>
+        </p:xfrm>
+        <a:graphic xmlns:a="http://schemas.openxmlformats.org/drawingml/2006/main">
+          <a:graphicData uri="http://schemas.openxmlformats.org/drawingml/2006/chart">
+            <c:chart xmlns:c="http://schemas.openxmlformats.org/drawingml/2006/chart" r:id="rId1"/>
+          </a:graphicData>
+        </a:graphic>
+      </p:graphicFrame>
+      <p:sp>
+        <p:nvSpPr>
+          <p:cNvPr id="4" name="Text 1"/>
+          <p:cNvSpPr txBox="1"/>
+          <p:nvPr/>
+        </p:nvSpPr>
+        <p:spPr>
+          <a:xfrm>
+            <a:off x="5943600" y="1051560"/>
+            <a:ext cx="2743200" cy="365760"/>
+          </a:xfrm>
+          <a:prstGeom prst="rect">
+            <a:avLst/>
+          </a:prstGeom>
+          <a:noFill/>
+          <a:ln/>
+        </p:spPr>
+        <p:txBody>
+          <a:bodyPr wrap="square" lIns="0" tIns="0" rIns="0" bIns="0" rtlCol="0" anchor="ctr"/>
+          <a:lstStyle/>
+          <a:p>
+            <a:pPr indent="0" marL="0">
+              <a:buNone/>
+            </a:pPr>
+            <a:r>
+              <a:rPr lang="en-US" sz="1500" b="1" dirty="0">
+                <a:solidFill>
+                  <a:schemeClr val="tx1"/>
+                </a:solidFill>
+              </a:rPr>
+              <a:t>Annual result</a:t>
+            </a:r>
+            <a:endParaRPr lang="en-US" sz="1500" dirty="0"/>
+          </a:p>
+        </p:txBody>
+      </p:sp>
+      <p:sp>
+        <p:nvSpPr>
+          <p:cNvPr id="5" name="Shape 2"/>
           <p:cNvSpPr/>
           <p:nvPr/>
         </p:nvSpPr>
         <p:spPr>
           <a:xfrm>
-            <a:off x="594360" y="3246120"/>
-            <a:ext cx="164592" cy="164592"/>
-          </a:xfrm>
-          <a:prstGeom prst="ellipse">
-            <a:avLst/>
+            <a:off x="5943600" y="1508760"/>
+            <a:ext cx="2743200" cy="731520"/>
+          </a:xfrm>
+          <a:prstGeom prst="roundRect">
+            <a:avLst>
+              <a:gd name="adj" fmla="val 10000"/>
+            </a:avLst>
           </a:prstGeom>
           <a:solidFill>
-            <a:srgbClr val="0089C2"/>
+            <a:srgbClr val="EEF2F7"/>
           </a:solidFill>
           <a:ln w="12700">
             <a:solidFill>
-              <a:srgbClr val="0089C2"/>
+              <a:srgbClr val="EEF2F7"/>
             </a:solidFill>
             <a:prstDash val="solid"/>
           </a:ln>
@@ -11265,24 +11661,98 @@
       </p:sp>
       <p:sp>
         <p:nvSpPr>
-          <p:cNvPr id="5" name="cmyk-dot"/>
+          <p:cNvPr id="6" name="Text 3"/>
+          <p:cNvSpPr txBox="1"/>
+          <p:nvPr/>
+        </p:nvSpPr>
+        <p:spPr>
+          <a:xfrm>
+            <a:off x="6080760" y="1508760"/>
+            <a:ext cx="1005840" cy="731520"/>
+          </a:xfrm>
+          <a:prstGeom prst="rect">
+            <a:avLst/>
+          </a:prstGeom>
+          <a:noFill/>
+          <a:ln/>
+        </p:spPr>
+        <p:txBody>
+          <a:bodyPr wrap="square" lIns="0" tIns="0" rIns="0" bIns="0" rtlCol="0" anchor="ctr"/>
+          <a:lstStyle/>
+          <a:p>
+            <a:pPr indent="0" marL="0">
+              <a:buNone/>
+            </a:pPr>
+            <a:r>
+              <a:rPr lang="en-US" sz="1300" dirty="0">
+                <a:solidFill>
+                  <a:srgbClr val="3A4060"/>
+                </a:solidFill>
+              </a:rPr>
+              <a:t>Year 1</a:t>
+            </a:r>
+            <a:endParaRPr lang="en-US" sz="1300" dirty="0"/>
+          </a:p>
+        </p:txBody>
+      </p:sp>
+      <p:sp>
+        <p:nvSpPr>
+          <p:cNvPr id="7" name="Text 4"/>
+          <p:cNvSpPr txBox="1"/>
+          <p:nvPr/>
+        </p:nvSpPr>
+        <p:spPr>
+          <a:xfrm>
+            <a:off x="7040880" y="1508760"/>
+            <a:ext cx="1554480" cy="731520"/>
+          </a:xfrm>
+          <a:prstGeom prst="rect">
+            <a:avLst/>
+          </a:prstGeom>
+          <a:noFill/>
+          <a:ln/>
+        </p:spPr>
+        <p:txBody>
+          <a:bodyPr wrap="square" lIns="0" tIns="0" rIns="0" bIns="0" rtlCol="0" anchor="ctr"/>
+          <a:lstStyle/>
+          <a:p>
+            <a:pPr algn="r" indent="0" marL="0">
+              <a:buNone/>
+            </a:pPr>
+            <a:r>
+              <a:rPr lang="en-US" sz="2200" b="1" dirty="0">
+                <a:solidFill>
+                  <a:srgbClr val="C2185B"/>
+                </a:solidFill>
+              </a:rPr>
+              <a:t>-US$37k</a:t>
+            </a:r>
+            <a:endParaRPr lang="en-US" sz="2200" dirty="0"/>
+          </a:p>
+        </p:txBody>
+      </p:sp>
+      <p:sp>
+        <p:nvSpPr>
+          <p:cNvPr id="8" name="Shape 5"/>
           <p:cNvSpPr/>
           <p:nvPr/>
         </p:nvSpPr>
         <p:spPr>
           <a:xfrm>
-            <a:off x="832104" y="3246120"/>
-            <a:ext cx="164592" cy="164592"/>
-          </a:xfrm>
-          <a:prstGeom prst="ellipse">
-            <a:avLst/>
+            <a:off x="5943600" y="2377440"/>
+            <a:ext cx="2743200" cy="731520"/>
+          </a:xfrm>
+          <a:prstGeom prst="roundRect">
+            <a:avLst>
+              <a:gd name="adj" fmla="val 10000"/>
+            </a:avLst>
           </a:prstGeom>
           <a:solidFill>
-            <a:srgbClr val="C2185B"/>
+            <a:srgbClr val="EEF2F7"/>
           </a:solidFill>
           <a:ln w="12700">
             <a:solidFill>
-              <a:srgbClr val="C2185B"/>
+              <a:srgbClr val="EEF2F7"/>
             </a:solidFill>
             <a:prstDash val="solid"/>
           </a:ln>
@@ -11290,24 +11760,98 @@
       </p:sp>
       <p:sp>
         <p:nvSpPr>
-          <p:cNvPr id="6" name="cmyk-dot"/>
+          <p:cNvPr id="9" name="Text 6"/>
+          <p:cNvSpPr txBox="1"/>
+          <p:nvPr/>
+        </p:nvSpPr>
+        <p:spPr>
+          <a:xfrm>
+            <a:off x="6080760" y="2377440"/>
+            <a:ext cx="1005840" cy="731520"/>
+          </a:xfrm>
+          <a:prstGeom prst="rect">
+            <a:avLst/>
+          </a:prstGeom>
+          <a:noFill/>
+          <a:ln/>
+        </p:spPr>
+        <p:txBody>
+          <a:bodyPr wrap="square" lIns="0" tIns="0" rIns="0" bIns="0" rtlCol="0" anchor="ctr"/>
+          <a:lstStyle/>
+          <a:p>
+            <a:pPr indent="0" marL="0">
+              <a:buNone/>
+            </a:pPr>
+            <a:r>
+              <a:rPr lang="en-US" sz="1300" dirty="0">
+                <a:solidFill>
+                  <a:srgbClr val="3A4060"/>
+                </a:solidFill>
+              </a:rPr>
+              <a:t>Year 2</a:t>
+            </a:r>
+            <a:endParaRPr lang="en-US" sz="1300" dirty="0"/>
+          </a:p>
+        </p:txBody>
+      </p:sp>
+      <p:sp>
+        <p:nvSpPr>
+          <p:cNvPr id="10" name="Text 7"/>
+          <p:cNvSpPr txBox="1"/>
+          <p:nvPr/>
+        </p:nvSpPr>
+        <p:spPr>
+          <a:xfrm>
+            <a:off x="7040880" y="2377440"/>
+            <a:ext cx="1554480" cy="731520"/>
+          </a:xfrm>
+          <a:prstGeom prst="rect">
+            <a:avLst/>
+          </a:prstGeom>
+          <a:noFill/>
+          <a:ln/>
+        </p:spPr>
+        <p:txBody>
+          <a:bodyPr wrap="square" lIns="0" tIns="0" rIns="0" bIns="0" rtlCol="0" anchor="ctr"/>
+          <a:lstStyle/>
+          <a:p>
+            <a:pPr algn="r" indent="0" marL="0">
+              <a:buNone/>
+            </a:pPr>
+            <a:r>
+              <a:rPr lang="en-US" sz="2200" b="1" dirty="0">
+                <a:solidFill>
+                  <a:srgbClr val="2E7D32"/>
+                </a:solidFill>
+              </a:rPr>
+              <a:t>+US$89k</a:t>
+            </a:r>
+            <a:endParaRPr lang="en-US" sz="2200" dirty="0"/>
+          </a:p>
+        </p:txBody>
+      </p:sp>
+      <p:sp>
+        <p:nvSpPr>
+          <p:cNvPr id="11" name="Shape 8"/>
           <p:cNvSpPr/>
           <p:nvPr/>
         </p:nvSpPr>
         <p:spPr>
           <a:xfrm>
-            <a:off x="1069848" y="3246120"/>
-            <a:ext cx="164592" cy="164592"/>
-          </a:xfrm>
-          <a:prstGeom prst="ellipse">
-            <a:avLst/>
+            <a:off x="5943600" y="3246120"/>
+            <a:ext cx="2743200" cy="731520"/>
+          </a:xfrm>
+          <a:prstGeom prst="roundRect">
+            <a:avLst>
+              <a:gd name="adj" fmla="val 10000"/>
+            </a:avLst>
           </a:prstGeom>
           <a:solidFill>
-            <a:srgbClr val="F2B705"/>
+            <a:srgbClr val="EEF2F7"/>
           </a:solidFill>
           <a:ln w="12700">
             <a:solidFill>
-              <a:srgbClr val="F2B705"/>
+              <a:srgbClr val="EEF2F7"/>
             </a:solidFill>
             <a:prstDash val="solid"/>
           </a:ln>
@@ -11315,28 +11859,156 @@
       </p:sp>
       <p:sp>
         <p:nvSpPr>
-          <p:cNvPr id="7" name="cmyk-dot"/>
-          <p:cNvSpPr/>
-          <p:nvPr/>
-        </p:nvSpPr>
-        <p:spPr>
-          <a:xfrm>
-            <a:off x="1307592" y="3246120"/>
-            <a:ext cx="164592" cy="164592"/>
-          </a:xfrm>
-          <a:prstGeom prst="ellipse">
-            <a:avLst/>
-          </a:prstGeom>
-          <a:solidFill>
-            <a:srgbClr val="FFFFFF"/>
-          </a:solidFill>
-          <a:ln w="12700">
-            <a:solidFill>
-              <a:srgbClr val="FFFFFF"/>
-            </a:solidFill>
-            <a:prstDash val="solid"/>
-          </a:ln>
-        </p:spPr>
+          <p:cNvPr id="12" name="Text 9"/>
+          <p:cNvSpPr txBox="1"/>
+          <p:nvPr/>
+        </p:nvSpPr>
+        <p:spPr>
+          <a:xfrm>
+            <a:off x="6080760" y="3246120"/>
+            <a:ext cx="1005840" cy="731520"/>
+          </a:xfrm>
+          <a:prstGeom prst="rect">
+            <a:avLst/>
+          </a:prstGeom>
+          <a:noFill/>
+          <a:ln/>
+        </p:spPr>
+        <p:txBody>
+          <a:bodyPr wrap="square" lIns="0" tIns="0" rIns="0" bIns="0" rtlCol="0" anchor="ctr"/>
+          <a:lstStyle/>
+          <a:p>
+            <a:pPr indent="0" marL="0">
+              <a:buNone/>
+            </a:pPr>
+            <a:r>
+              <a:rPr lang="en-US" sz="1300" dirty="0">
+                <a:solidFill>
+                  <a:srgbClr val="3A4060"/>
+                </a:solidFill>
+              </a:rPr>
+              <a:t>Year 3</a:t>
+            </a:r>
+            <a:endParaRPr lang="en-US" sz="1300" dirty="0"/>
+          </a:p>
+        </p:txBody>
+      </p:sp>
+      <p:sp>
+        <p:nvSpPr>
+          <p:cNvPr id="13" name="Text 10"/>
+          <p:cNvSpPr txBox="1"/>
+          <p:nvPr/>
+        </p:nvSpPr>
+        <p:spPr>
+          <a:xfrm>
+            <a:off x="7040880" y="3246120"/>
+            <a:ext cx="1554480" cy="731520"/>
+          </a:xfrm>
+          <a:prstGeom prst="rect">
+            <a:avLst/>
+          </a:prstGeom>
+          <a:noFill/>
+          <a:ln/>
+        </p:spPr>
+        <p:txBody>
+          <a:bodyPr wrap="square" lIns="0" tIns="0" rIns="0" bIns="0" rtlCol="0" anchor="ctr"/>
+          <a:lstStyle/>
+          <a:p>
+            <a:pPr algn="r" indent="0" marL="0">
+              <a:buNone/>
+            </a:pPr>
+            <a:r>
+              <a:rPr lang="en-US" sz="2200" b="1" dirty="0">
+                <a:solidFill>
+                  <a:srgbClr val="2E7D32"/>
+                </a:solidFill>
+              </a:rPr>
+              <a:t>+US$269k</a:t>
+            </a:r>
+            <a:endParaRPr lang="en-US" sz="2200" dirty="0"/>
+          </a:p>
+        </p:txBody>
+      </p:sp>
+      <p:sp>
+        <p:nvSpPr>
+          <p:cNvPr id="14" name="Text 11"/>
+          <p:cNvSpPr txBox="1"/>
+          <p:nvPr/>
+        </p:nvSpPr>
+        <p:spPr>
+          <a:xfrm>
+            <a:off x="457200" y="4480560"/>
+            <a:ext cx="8229600" cy="274320"/>
+          </a:xfrm>
+          <a:prstGeom prst="rect">
+            <a:avLst/>
+          </a:prstGeom>
+          <a:noFill/>
+          <a:ln/>
+        </p:spPr>
+        <p:txBody>
+          <a:bodyPr wrap="square" lIns="0" tIns="0" rIns="0" bIns="0" rtlCol="0" anchor="ctr"/>
+          <a:lstStyle/>
+          <a:p>
+            <a:pPr indent="0" marL="0">
+              <a:buNone/>
+            </a:pPr>
+            <a:r>
+              <a:rPr lang="en-US" sz="1000" i="1" dirty="0">
+                <a:solidFill>
+                  <a:schemeClr val="accent5"/>
+                </a:solidFill>
+              </a:rPr>
+              <a:t>Assumptions: US$150k line, 20% equipment / 35% consumables margin, ~US$36k consumption per line per year</a:t>
+            </a:r>
+            <a:endParaRPr lang="en-US" sz="1000" dirty="0"/>
+          </a:p>
+        </p:txBody>
+      </p:sp>
+      <p:sp>
+        <p:nvSpPr>
+          <p:cNvPr id="25" name="Slide Number Placeholder 0"/>
+          <p:cNvSpPr>
+            <a:spLocks noGrp="1"/>
+          </p:cNvSpPr>
+          <p:nvPr>
+            <p:ph type="sldNum" sz="quarter" idx="4294967295"/>
+          </p:nvPr>
+        </p:nvSpPr>
+        <p:spPr>
+          <a:xfrm>
+            <a:off x="8229600" y="4800600"/>
+            <a:ext cx="457200" cy="228600"/>
+          </a:xfrm>
+          <a:prstGeom prst="rect">
+            <a:avLst/>
+          </a:prstGeom>
+          <a:extLst>
+            <a:ext uri="{C572A759-6A51-4108-AA02-DFA0A04FC94B}">
+              <ma14:wrappingTextBoxFlag xmlns:ma14="http://schemas.microsoft.com/office/mac/drawingml/2011/main" val="0"/>
+            </a:ext>
+          </a:extLst>
+        </p:spPr>
+        <p:txBody>
+          <a:bodyPr/>
+          <a:lstStyle>
+            <a:lvl1pPr>
+              <a:defRPr sz="900">
+                <a:solidFill>
+                  <a:srgbClr val="7A8299"/>
+                </a:solidFill>
+              </a:defRPr>
+            </a:lvl1pPr>
+          </a:lstStyle>
+          <a:p>
+            <a:pPr algn="r"/>
+            <a:fld id="{F7021451-1387-4CA6-816F-3879F97B5CBC}" type="slidenum">
+              <a:rPr b="0" lang="en-US"/>
+              <a:t>20</a:t>
+            </a:fld>
+            <a:endParaRPr lang="en-US"/>
+          </a:p>
+        </p:txBody>
       </p:sp>
     </p:spTree>
   </p:cSld>
@@ -11369,6 +12041,42 @@
       <p:sp>
         <p:nvSpPr>
           <p:cNvPr id="2" name="Text 0"/>
+          <p:cNvSpPr txBox="1"/>
+          <p:nvPr/>
+        </p:nvSpPr>
+        <p:spPr>
+          <a:xfrm>
+            <a:off x="548640" y="1097280"/>
+            <a:ext cx="2743200" cy="914400"/>
+          </a:xfrm>
+          <a:prstGeom prst="rect">
+            <a:avLst/>
+          </a:prstGeom>
+          <a:noFill/>
+          <a:ln/>
+        </p:spPr>
+        <p:txBody>
+          <a:bodyPr wrap="square" lIns="0" tIns="0" rIns="0" bIns="0" rtlCol="0" anchor="ctr"/>
+          <a:lstStyle/>
+          <a:p>
+            <a:pPr indent="0" marL="0">
+              <a:buNone/>
+            </a:pPr>
+            <a:r>
+              <a:rPr lang="en-US" sz="6000" b="1" dirty="0">
+                <a:solidFill>
+                  <a:schemeClr val="accent3"/>
+                </a:solidFill>
+              </a:rPr>
+              <a:t>05</a:t>
+            </a:r>
+            <a:endParaRPr lang="en-US" sz="6000" dirty="0"/>
+          </a:p>
+        </p:txBody>
+      </p:sp>
+      <p:sp>
+        <p:nvSpPr>
+          <p:cNvPr id="3" name="Text 0"/>
           <p:cNvSpPr/>
           <p:nvPr>
             <p:ph idx="100" type="title" hasCustomPrompt="1"/>
@@ -11376,56 +12084,54 @@
         </p:nvSpPr>
         <p:spPr>
           <a:xfrm>
-            <a:off x="457200" y="274320"/>
-            <a:ext cx="8229600" cy="640080"/>
-          </a:xfrm>
-          <a:prstGeom prst="rect">
-            <a:avLst/>
-          </a:prstGeom>
-          <a:noFill/>
-          <a:ln/>
-        </p:spPr>
-        <p:txBody>
-          <a:bodyPr wrap="square" rtlCol="0" anchor="ctr"/>
-          <a:lstStyle/>
-          <a:p>
-            <a:pPr indent="0" marL="0">
-              <a:buNone/>
-            </a:pPr>
-            <a:r>
-              <a:rPr lang="en-US" sz="2600" b="1" dirty="0">
-                <a:solidFill>
-                  <a:schemeClr val="tx1"/>
-                </a:solidFill>
-              </a:rPr>
-              <a:t>What we request and what we commit</a:t>
-            </a:r>
-            <a:endParaRPr lang="en-US" sz="2600" dirty="0"/>
-          </a:p>
-        </p:txBody>
-      </p:sp>
-      <p:sp>
-        <p:nvSpPr>
-          <p:cNvPr id="3" name="Shape 1"/>
+            <a:off x="548640" y="2103120"/>
+            <a:ext cx="8046720" cy="914400"/>
+          </a:xfrm>
+          <a:prstGeom prst="rect">
+            <a:avLst/>
+          </a:prstGeom>
+          <a:noFill/>
+          <a:ln/>
+        </p:spPr>
+        <p:txBody>
+          <a:bodyPr wrap="square" rtlCol="0"/>
+          <a:lstStyle/>
+          <a:p>
+            <a:pPr algn="l" indent="0" marL="0">
+              <a:buNone/>
+            </a:pPr>
+            <a:r>
+              <a:rPr lang="en-US" sz="3600" b="1" dirty="0">
+                <a:solidFill>
+                  <a:schemeClr val="bg1"/>
+                </a:solidFill>
+              </a:rPr>
+              <a:t>The proposal</a:t>
+            </a:r>
+            <a:endParaRPr lang="en-US" sz="3600" dirty="0"/>
+          </a:p>
+        </p:txBody>
+      </p:sp>
+      <p:sp>
+        <p:nvSpPr>
+          <p:cNvPr id="4" name="cmyk-dot"/>
           <p:cNvSpPr/>
           <p:nvPr/>
         </p:nvSpPr>
         <p:spPr>
           <a:xfrm>
-            <a:off x="457200" y="1051560"/>
-            <a:ext cx="4023360" cy="3337560"/>
-          </a:xfrm>
-          <a:prstGeom prst="roundRect">
-            <a:avLst>
-              <a:gd name="adj" fmla="val 2192"/>
-            </a:avLst>
+            <a:off x="594360" y="3246120"/>
+            <a:ext cx="164592" cy="164592"/>
+          </a:xfrm>
+          <a:prstGeom prst="ellipse">
+            <a:avLst/>
           </a:prstGeom>
           <a:solidFill>
-            <a:srgbClr val="EEF2F7"/>
+            <a:srgbClr val="0089C2"/>
           </a:solidFill>
           <a:ln w="12700">
             <a:solidFill>
-              <a:srgbClr val="EEF2F7"/>
+              <a:srgbClr val="0089C2"/>
             </a:solidFill>
             <a:prstDash val="solid"/>
           </a:ln>
@@ -11433,192 +12139,24 @@
       </p:sp>
       <p:sp>
         <p:nvSpPr>
-          <p:cNvPr id="4" name="Text 2"/>
-          <p:cNvSpPr txBox="1"/>
-          <p:nvPr/>
-        </p:nvSpPr>
-        <p:spPr>
-          <a:xfrm>
-            <a:off x="685800" y="1188720"/>
-            <a:ext cx="3566160" cy="411480"/>
-          </a:xfrm>
-          <a:prstGeom prst="rect">
-            <a:avLst/>
-          </a:prstGeom>
-          <a:noFill/>
-          <a:ln/>
-        </p:spPr>
-        <p:txBody>
-          <a:bodyPr wrap="square" lIns="0" tIns="0" rIns="0" bIns="0" rtlCol="0" anchor="ctr"/>
-          <a:lstStyle/>
-          <a:p>
-            <a:pPr indent="0" marL="0">
-              <a:buNone/>
-            </a:pPr>
-            <a:r>
-              <a:rPr lang="en-US" sz="1700" b="1" dirty="0">
-                <a:solidFill>
-                  <a:srgbClr val="C2185B"/>
-                </a:solidFill>
-              </a:rPr>
-              <a:t>We request from CLT</a:t>
-            </a:r>
-            <a:endParaRPr lang="en-US" sz="1700" dirty="0"/>
-          </a:p>
-        </p:txBody>
-      </p:sp>
-      <p:sp>
-        <p:nvSpPr>
-          <p:cNvPr id="5" name="Text 3"/>
-          <p:cNvSpPr txBox="1"/>
-          <p:nvPr/>
-        </p:nvSpPr>
-        <p:spPr>
-          <a:xfrm>
-            <a:off x="685800" y="1691640"/>
-            <a:ext cx="3611880" cy="2606040"/>
-          </a:xfrm>
-          <a:prstGeom prst="rect">
-            <a:avLst/>
-          </a:prstGeom>
-          <a:noFill/>
-          <a:ln/>
-        </p:spPr>
-        <p:txBody>
-          <a:bodyPr wrap="square" lIns="0" tIns="0" rIns="0" bIns="0" rtlCol="0" anchor="t"/>
-          <a:lstStyle/>
-          <a:p>
-            <a:pPr marL="342900" indent="-342900">
-              <a:spcAft>
-                <a:spcPts val="500"/>
-              </a:spcAft>
-              <a:buSzPct val="100000"/>
-              <a:buChar char="•"/>
-            </a:pPr>
-            <a:r>
-              <a:rPr lang="en-US" sz="1400" dirty="0">
-                <a:solidFill>
-                  <a:srgbClr val="1B1F3B"/>
-                </a:solidFill>
-              </a:rPr>
-              <a:t>Exclusivity in Mexico; LatAm subject to targets</a:t>
-            </a:r>
-            <a:endParaRPr lang="en-US" sz="1400" dirty="0"/>
-          </a:p>
-          <a:p>
-            <a:pPr marL="342900" indent="-342900">
-              <a:spcAft>
-                <a:spcPts val="500"/>
-              </a:spcAft>
-              <a:buSzPct val="100000"/>
-              <a:buChar char="•"/>
-            </a:pPr>
-            <a:r>
-              <a:rPr lang="en-US" sz="1400" dirty="0">
-                <a:solidFill>
-                  <a:srgbClr val="1B1F3B"/>
-                </a:solidFill>
-              </a:rPr>
-              <a:t>~20% equipment / ~35% consumables margin</a:t>
-            </a:r>
-            <a:endParaRPr lang="en-US" sz="1400" dirty="0"/>
-          </a:p>
-          <a:p>
-            <a:pPr marL="342900" indent="-342900">
-              <a:spcAft>
-                <a:spcPts val="500"/>
-              </a:spcAft>
-              <a:buSzPct val="100000"/>
-              <a:buChar char="•"/>
-            </a:pPr>
-            <a:r>
-              <a:rPr lang="en-US" sz="1400" dirty="0">
-                <a:solidFill>
-                  <a:srgbClr val="1B1F3B"/>
-                </a:solidFill>
-              </a:rPr>
-              <a:t>Demo on consignment or 30–50% off</a:t>
-            </a:r>
-            <a:endParaRPr lang="en-US" sz="1400" dirty="0"/>
-          </a:p>
-          <a:p>
-            <a:pPr marL="342900" indent="-342900">
-              <a:spcAft>
-                <a:spcPts val="500"/>
-              </a:spcAft>
-              <a:buSzPct val="100000"/>
-              <a:buChar char="•"/>
-            </a:pPr>
-            <a:r>
-              <a:rPr lang="en-US" sz="1400" dirty="0">
-                <a:solidFill>
-                  <a:srgbClr val="1B1F3B"/>
-                </a:solidFill>
-              </a:rPr>
-              <a:t>Initial inventory on consignment or 90 days</a:t>
-            </a:r>
-            <a:endParaRPr lang="en-US" sz="1400" dirty="0"/>
-          </a:p>
-          <a:p>
-            <a:pPr marL="342900" indent="-342900">
-              <a:spcAft>
-                <a:spcPts val="500"/>
-              </a:spcAft>
-              <a:buSzPct val="100000"/>
-              <a:buChar char="•"/>
-            </a:pPr>
-            <a:r>
-              <a:rPr lang="en-US" sz="1400" dirty="0">
-                <a:solidFill>
-                  <a:srgbClr val="1B1F3B"/>
-                </a:solidFill>
-              </a:rPr>
-              <a:t>Free training and certification</a:t>
-            </a:r>
-            <a:endParaRPr lang="en-US" sz="1400" dirty="0"/>
-          </a:p>
-          <a:p>
-            <a:pPr marL="342900" indent="-342900">
-              <a:spcAft>
-                <a:spcPts val="500"/>
-              </a:spcAft>
-              <a:buSzPct val="100000"/>
-              <a:buChar char="•"/>
-            </a:pPr>
-            <a:r>
-              <a:rPr lang="en-US" sz="1400" dirty="0">
-                <a:solidFill>
-                  <a:srgbClr val="1B1F3B"/>
-                </a:solidFill>
-              </a:rPr>
-              <a:t>Mexican leads referred to TID / CEB</a:t>
-            </a:r>
-            <a:endParaRPr lang="en-US" sz="1400" dirty="0"/>
-          </a:p>
-        </p:txBody>
-      </p:sp>
-      <p:sp>
-        <p:nvSpPr>
-          <p:cNvPr id="6" name="Shape 4"/>
+          <p:cNvPr id="5" name="cmyk-dot"/>
           <p:cNvSpPr/>
           <p:nvPr/>
         </p:nvSpPr>
         <p:spPr>
           <a:xfrm>
-            <a:off x="4663440" y="1051560"/>
-            <a:ext cx="4023360" cy="3337560"/>
-          </a:xfrm>
-          <a:prstGeom prst="roundRect">
-            <a:avLst>
-              <a:gd name="adj" fmla="val 2192"/>
-            </a:avLst>
+            <a:off x="832104" y="3246120"/>
+            <a:ext cx="164592" cy="164592"/>
+          </a:xfrm>
+          <a:prstGeom prst="ellipse">
+            <a:avLst/>
           </a:prstGeom>
           <a:solidFill>
-            <a:srgbClr val="EEF2F7"/>
+            <a:srgbClr val="C2185B"/>
           </a:solidFill>
           <a:ln w="12700">
             <a:solidFill>
-              <a:srgbClr val="EEF2F7"/>
+              <a:srgbClr val="C2185B"/>
             </a:solidFill>
             <a:prstDash val="solid"/>
           </a:ln>
@@ -11626,196 +12164,53 @@
       </p:sp>
       <p:sp>
         <p:nvSpPr>
-          <p:cNvPr id="7" name="Text 5"/>
-          <p:cNvSpPr txBox="1"/>
-          <p:nvPr/>
-        </p:nvSpPr>
-        <p:spPr>
-          <a:xfrm>
-            <a:off x="4892040" y="1188720"/>
-            <a:ext cx="3566160" cy="411480"/>
-          </a:xfrm>
-          <a:prstGeom prst="rect">
-            <a:avLst/>
-          </a:prstGeom>
-          <a:noFill/>
-          <a:ln/>
-        </p:spPr>
-        <p:txBody>
-          <a:bodyPr wrap="square" lIns="0" tIns="0" rIns="0" bIns="0" rtlCol="0" anchor="ctr"/>
-          <a:lstStyle/>
-          <a:p>
-            <a:pPr indent="0" marL="0">
-              <a:buNone/>
-            </a:pPr>
-            <a:r>
-              <a:rPr lang="en-US" sz="1700" b="1" dirty="0">
-                <a:solidFill>
-                  <a:srgbClr val="0089C2"/>
-                </a:solidFill>
-              </a:rPr>
-              <a:t>We commit to</a:t>
-            </a:r>
-            <a:endParaRPr lang="en-US" sz="1700" dirty="0"/>
-          </a:p>
-        </p:txBody>
-      </p:sp>
-      <p:sp>
-        <p:nvSpPr>
-          <p:cNvPr id="8" name="Text 6"/>
-          <p:cNvSpPr txBox="1"/>
-          <p:nvPr/>
-        </p:nvSpPr>
-        <p:spPr>
-          <a:xfrm>
-            <a:off x="4892040" y="1691640"/>
-            <a:ext cx="3611880" cy="2606040"/>
-          </a:xfrm>
-          <a:prstGeom prst="rect">
-            <a:avLst/>
-          </a:prstGeom>
-          <a:noFill/>
-          <a:ln/>
-        </p:spPr>
-        <p:txBody>
-          <a:bodyPr wrap="square" lIns="0" tIns="0" rIns="0" bIns="0" rtlCol="0" anchor="t"/>
-          <a:lstStyle/>
-          <a:p>
-            <a:pPr marL="342900" indent="-342900">
-              <a:spcAft>
-                <a:spcPts val="500"/>
-              </a:spcAft>
-              <a:buSzPct val="100000"/>
-              <a:buChar char="•"/>
-            </a:pPr>
-            <a:r>
-              <a:rPr lang="en-US" sz="1400" dirty="0">
-                <a:solidFill>
-                  <a:srgbClr val="1B1F3B"/>
-                </a:solidFill>
-              </a:rPr>
-              <a:t>Import and local inventory (CEB)</a:t>
-            </a:r>
-            <a:endParaRPr lang="en-US" sz="1400" dirty="0"/>
-          </a:p>
-          <a:p>
-            <a:pPr marL="342900" indent="-342900">
-              <a:spcAft>
-                <a:spcPts val="500"/>
-              </a:spcAft>
-              <a:buSzPct val="100000"/>
-              <a:buChar char="•"/>
-            </a:pPr>
-            <a:r>
-              <a:rPr lang="en-US" sz="1400" dirty="0">
-                <a:solidFill>
-                  <a:srgbClr val="1B1F3B"/>
-                </a:solidFill>
-              </a:rPr>
-              <a:t>Demo showroom and Spanish service</a:t>
-            </a:r>
-            <a:endParaRPr lang="en-US" sz="1400" dirty="0"/>
-          </a:p>
-          <a:p>
-            <a:pPr marL="342900" indent="-342900">
-              <a:spcAft>
-                <a:spcPts val="500"/>
-              </a:spcAft>
-              <a:buSzPct val="100000"/>
-              <a:buChar char="•"/>
-            </a:pPr>
-            <a:r>
-              <a:rPr lang="en-US" sz="1400" dirty="0">
-                <a:solidFill>
-                  <a:srgbClr val="1B1F3B"/>
-                </a:solidFill>
-              </a:rPr>
-              <a:t>Dedicated textile division</a:t>
-            </a:r>
-            <a:endParaRPr lang="en-US" sz="1400" dirty="0"/>
-          </a:p>
-          <a:p>
-            <a:pPr marL="342900" indent="-342900">
-              <a:spcAft>
-                <a:spcPts val="500"/>
-              </a:spcAft>
-              <a:buSzPct val="100000"/>
-              <a:buChar char="•"/>
-            </a:pPr>
-            <a:r>
-              <a:rPr lang="en-US" sz="1400" dirty="0">
-                <a:solidFill>
-                  <a:srgbClr val="1B1F3B"/>
-                </a:solidFill>
-              </a:rPr>
-              <a:t>Targets: 2 · 5 · 8 lines in years 1–3</a:t>
-            </a:r>
-            <a:endParaRPr lang="en-US" sz="1400" dirty="0"/>
-          </a:p>
-          <a:p>
-            <a:pPr marL="342900" indent="-342900">
-              <a:spcAft>
-                <a:spcPts val="500"/>
-              </a:spcAft>
-              <a:buSzPct val="100000"/>
-              <a:buChar char="•"/>
-            </a:pPr>
-            <a:r>
-              <a:rPr lang="en-US" sz="1400" dirty="0">
-                <a:solidFill>
-                  <a:srgbClr val="1B1F3B"/>
-                </a:solidFill>
-              </a:rPr>
-              <a:t>Quarterly reports</a:t>
-            </a:r>
-            <a:endParaRPr lang="en-US" sz="1400" dirty="0"/>
-          </a:p>
-        </p:txBody>
-      </p:sp>
-      <p:sp>
-        <p:nvSpPr>
-          <p:cNvPr id="25" name="Slide Number Placeholder 0"/>
-          <p:cNvSpPr>
-            <a:spLocks noGrp="1"/>
-          </p:cNvSpPr>
-          <p:nvPr>
-            <p:ph type="sldNum" sz="quarter" idx="4294967295"/>
-          </p:nvPr>
-        </p:nvSpPr>
-        <p:spPr>
-          <a:xfrm>
-            <a:off x="8229600" y="4800600"/>
-            <a:ext cx="457200" cy="228600"/>
-          </a:xfrm>
-          <a:prstGeom prst="rect">
-            <a:avLst/>
-          </a:prstGeom>
-          <a:extLst>
-            <a:ext uri="{C572A759-6A51-4108-AA02-DFA0A04FC94B}">
-              <ma14:wrappingTextBoxFlag xmlns:ma14="http://schemas.microsoft.com/office/mac/drawingml/2011/main" val="0"/>
-            </a:ext>
-          </a:extLst>
-        </p:spPr>
-        <p:txBody>
-          <a:bodyPr/>
-          <a:lstStyle>
-            <a:lvl1pPr>
-              <a:defRPr sz="900">
-                <a:solidFill>
-                  <a:srgbClr val="7A8299"/>
-                </a:solidFill>
-              </a:defRPr>
-            </a:lvl1pPr>
-          </a:lstStyle>
-          <a:p>
-            <a:pPr algn="r"/>
-            <a:fld id="{F7021451-1387-4CA6-816F-3879F97B5CBC}" type="slidenum">
-              <a:rPr b="0" lang="en-US"/>
-              <a:t>21</a:t>
-            </a:fld>
-            <a:endParaRPr lang="en-US"/>
-          </a:p>
-        </p:txBody>
+          <p:cNvPr id="6" name="cmyk-dot"/>
+          <p:cNvSpPr/>
+          <p:nvPr/>
+        </p:nvSpPr>
+        <p:spPr>
+          <a:xfrm>
+            <a:off x="1069848" y="3246120"/>
+            <a:ext cx="164592" cy="164592"/>
+          </a:xfrm>
+          <a:prstGeom prst="ellipse">
+            <a:avLst/>
+          </a:prstGeom>
+          <a:solidFill>
+            <a:srgbClr val="F2B705"/>
+          </a:solidFill>
+          <a:ln w="12700">
+            <a:solidFill>
+              <a:srgbClr val="F2B705"/>
+            </a:solidFill>
+            <a:prstDash val="solid"/>
+          </a:ln>
+        </p:spPr>
+      </p:sp>
+      <p:sp>
+        <p:nvSpPr>
+          <p:cNvPr id="7" name="cmyk-dot"/>
+          <p:cNvSpPr/>
+          <p:nvPr/>
+        </p:nvSpPr>
+        <p:spPr>
+          <a:xfrm>
+            <a:off x="1307592" y="3246120"/>
+            <a:ext cx="164592" cy="164592"/>
+          </a:xfrm>
+          <a:prstGeom prst="ellipse">
+            <a:avLst/>
+          </a:prstGeom>
+          <a:solidFill>
+            <a:srgbClr val="FFFFFF"/>
+          </a:solidFill>
+          <a:ln w="12700">
+            <a:solidFill>
+              <a:srgbClr val="FFFFFF"/>
+            </a:solidFill>
+            <a:prstDash val="solid"/>
+          </a:ln>
+        </p:spPr>
       </p:sp>
     </p:spTree>
   </p:cSld>
@@ -11877,7 +12272,7 @@
                   <a:schemeClr val="tx1"/>
                 </a:solidFill>
               </a:rPr>
-              <a:t>Risks and mitigation</a:t>
+              <a:t>What we request and what we commit</a:t>
             </a:r>
             <a:endParaRPr lang="en-US" sz="2600" dirty="0"/>
           </a:p>
@@ -11891,12 +12286,12 @@
         </p:nvSpPr>
         <p:spPr>
           <a:xfrm>
-            <a:off x="457200" y="1097280"/>
-            <a:ext cx="4023360" cy="1417320"/>
+            <a:off x="457200" y="1051560"/>
+            <a:ext cx="4023360" cy="3337560"/>
           </a:xfrm>
           <a:prstGeom prst="roundRect">
             <a:avLst>
-              <a:gd name="adj" fmla="val 5161"/>
+              <a:gd name="adj" fmla="val 2192"/>
             </a:avLst>
           </a:prstGeom>
           <a:solidFill>
@@ -11912,151 +12307,184 @@
       </p:sp>
       <p:sp>
         <p:nvSpPr>
-          <p:cNvPr id="4" name="Shape 2"/>
+          <p:cNvPr id="4" name="Text 2"/>
+          <p:cNvSpPr txBox="1"/>
+          <p:nvPr/>
+        </p:nvSpPr>
+        <p:spPr>
+          <a:xfrm>
+            <a:off x="685800" y="1188720"/>
+            <a:ext cx="3566160" cy="411480"/>
+          </a:xfrm>
+          <a:prstGeom prst="rect">
+            <a:avLst/>
+          </a:prstGeom>
+          <a:noFill/>
+          <a:ln/>
+        </p:spPr>
+        <p:txBody>
+          <a:bodyPr wrap="square" lIns="0" tIns="0" rIns="0" bIns="0" rtlCol="0" anchor="ctr"/>
+          <a:lstStyle/>
+          <a:p>
+            <a:pPr indent="0" marL="0">
+              <a:buNone/>
+            </a:pPr>
+            <a:r>
+              <a:rPr lang="en-US" sz="1700" b="1" dirty="0">
+                <a:solidFill>
+                  <a:srgbClr val="C2185B"/>
+                </a:solidFill>
+              </a:rPr>
+              <a:t>We request from CLT</a:t>
+            </a:r>
+            <a:endParaRPr lang="en-US" sz="1700" dirty="0"/>
+          </a:p>
+        </p:txBody>
+      </p:sp>
+      <p:sp>
+        <p:nvSpPr>
+          <p:cNvPr id="5" name="Text 3"/>
+          <p:cNvSpPr txBox="1"/>
+          <p:nvPr/>
+        </p:nvSpPr>
+        <p:spPr>
+          <a:xfrm>
+            <a:off x="685800" y="1691640"/>
+            <a:ext cx="3611880" cy="2606040"/>
+          </a:xfrm>
+          <a:prstGeom prst="rect">
+            <a:avLst/>
+          </a:prstGeom>
+          <a:noFill/>
+          <a:ln/>
+        </p:spPr>
+        <p:txBody>
+          <a:bodyPr wrap="square" lIns="0" tIns="0" rIns="0" bIns="0" rtlCol="0" anchor="t"/>
+          <a:lstStyle/>
+          <a:p>
+            <a:pPr marL="342900" indent="-342900">
+              <a:spcAft>
+                <a:spcPts val="500"/>
+              </a:spcAft>
+              <a:buSzPct val="100000"/>
+              <a:buChar char="•"/>
+            </a:pPr>
+            <a:r>
+              <a:rPr lang="en-US" sz="1400" dirty="0">
+                <a:solidFill>
+                  <a:srgbClr val="1B1F3B"/>
+                </a:solidFill>
+              </a:rPr>
+              <a:t>Exclusivity in Mexico; LatAm subject to targets</a:t>
+            </a:r>
+            <a:endParaRPr lang="en-US" sz="1400" dirty="0"/>
+          </a:p>
+          <a:p>
+            <a:pPr marL="342900" indent="-342900">
+              <a:spcAft>
+                <a:spcPts val="500"/>
+              </a:spcAft>
+              <a:buSzPct val="100000"/>
+              <a:buChar char="•"/>
+            </a:pPr>
+            <a:r>
+              <a:rPr lang="en-US" sz="1400" dirty="0">
+                <a:solidFill>
+                  <a:srgbClr val="1B1F3B"/>
+                </a:solidFill>
+              </a:rPr>
+              <a:t>~20% equipment / ~35% consumables margin</a:t>
+            </a:r>
+            <a:endParaRPr lang="en-US" sz="1400" dirty="0"/>
+          </a:p>
+          <a:p>
+            <a:pPr marL="342900" indent="-342900">
+              <a:spcAft>
+                <a:spcPts val="500"/>
+              </a:spcAft>
+              <a:buSzPct val="100000"/>
+              <a:buChar char="•"/>
+            </a:pPr>
+            <a:r>
+              <a:rPr lang="en-US" sz="1400" dirty="0">
+                <a:solidFill>
+                  <a:srgbClr val="1B1F3B"/>
+                </a:solidFill>
+              </a:rPr>
+              <a:t>Demo on consignment or 30–50% off</a:t>
+            </a:r>
+            <a:endParaRPr lang="en-US" sz="1400" dirty="0"/>
+          </a:p>
+          <a:p>
+            <a:pPr marL="342900" indent="-342900">
+              <a:spcAft>
+                <a:spcPts val="500"/>
+              </a:spcAft>
+              <a:buSzPct val="100000"/>
+              <a:buChar char="•"/>
+            </a:pPr>
+            <a:r>
+              <a:rPr lang="en-US" sz="1400" dirty="0">
+                <a:solidFill>
+                  <a:srgbClr val="1B1F3B"/>
+                </a:solidFill>
+              </a:rPr>
+              <a:t>Initial inventory on consignment or 90 days</a:t>
+            </a:r>
+            <a:endParaRPr lang="en-US" sz="1400" dirty="0"/>
+          </a:p>
+          <a:p>
+            <a:pPr marL="342900" indent="-342900">
+              <a:spcAft>
+                <a:spcPts val="500"/>
+              </a:spcAft>
+              <a:buSzPct val="100000"/>
+              <a:buChar char="•"/>
+            </a:pPr>
+            <a:r>
+              <a:rPr lang="en-US" sz="1400" dirty="0">
+                <a:solidFill>
+                  <a:srgbClr val="1B1F3B"/>
+                </a:solidFill>
+              </a:rPr>
+              <a:t>Free training and certification</a:t>
+            </a:r>
+            <a:endParaRPr lang="en-US" sz="1400" dirty="0"/>
+          </a:p>
+          <a:p>
+            <a:pPr marL="342900" indent="-342900">
+              <a:spcAft>
+                <a:spcPts val="500"/>
+              </a:spcAft>
+              <a:buSzPct val="100000"/>
+              <a:buChar char="•"/>
+            </a:pPr>
+            <a:r>
+              <a:rPr lang="en-US" sz="1400" dirty="0">
+                <a:solidFill>
+                  <a:srgbClr val="1B1F3B"/>
+                </a:solidFill>
+              </a:rPr>
+              <a:t>Mexican leads referred to TID / CEB</a:t>
+            </a:r>
+            <a:endParaRPr lang="en-US" sz="1400" dirty="0"/>
+          </a:p>
+        </p:txBody>
+      </p:sp>
+      <p:sp>
+        <p:nvSpPr>
+          <p:cNvPr id="6" name="Shape 4"/>
           <p:cNvSpPr/>
           <p:nvPr/>
         </p:nvSpPr>
         <p:spPr>
           <a:xfrm>
-            <a:off x="640080" y="1280160"/>
-            <a:ext cx="384048" cy="384048"/>
-          </a:xfrm>
-          <a:prstGeom prst="ellipse">
-            <a:avLst/>
-          </a:prstGeom>
-          <a:solidFill>
-            <a:srgbClr val="0089C2"/>
-          </a:solidFill>
-          <a:ln w="12700">
-            <a:solidFill>
-              <a:srgbClr val="0089C2"/>
-            </a:solidFill>
-            <a:prstDash val="solid"/>
-          </a:ln>
-        </p:spPr>
-      </p:sp>
-      <p:sp>
-        <p:nvSpPr>
-          <p:cNvPr id="5" name="Text 3"/>
-          <p:cNvSpPr txBox="1"/>
-          <p:nvPr/>
-        </p:nvSpPr>
-        <p:spPr>
-          <a:xfrm>
-            <a:off x="640080" y="1280160"/>
-            <a:ext cx="384048" cy="384048"/>
-          </a:xfrm>
-          <a:prstGeom prst="rect">
-            <a:avLst/>
-          </a:prstGeom>
-          <a:noFill/>
-          <a:ln/>
-        </p:spPr>
-        <p:txBody>
-          <a:bodyPr wrap="square" lIns="0" tIns="0" rIns="0" bIns="0" rtlCol="0" anchor="ctr"/>
-          <a:lstStyle/>
-          <a:p>
-            <a:pPr algn="ctr" indent="0" marL="0">
-              <a:buNone/>
-            </a:pPr>
-            <a:r>
-              <a:rPr lang="en-US" sz="1300" b="1" dirty="0">
-                <a:solidFill>
-                  <a:srgbClr val="FFFFFF"/>
-                </a:solidFill>
-              </a:rPr>
-              <a:t>!</a:t>
-            </a:r>
-            <a:endParaRPr lang="en-US" sz="1300" dirty="0"/>
-          </a:p>
-        </p:txBody>
-      </p:sp>
-      <p:sp>
-        <p:nvSpPr>
-          <p:cNvPr id="6" name="Text 4"/>
-          <p:cNvSpPr txBox="1"/>
-          <p:nvPr/>
-        </p:nvSpPr>
-        <p:spPr>
-          <a:xfrm>
-            <a:off x="1188720" y="1280160"/>
-            <a:ext cx="3108960" cy="384048"/>
-          </a:xfrm>
-          <a:prstGeom prst="rect">
-            <a:avLst/>
-          </a:prstGeom>
-          <a:noFill/>
-          <a:ln/>
-        </p:spPr>
-        <p:txBody>
-          <a:bodyPr wrap="square" lIns="0" tIns="0" rIns="0" bIns="0" rtlCol="0" anchor="ctr"/>
-          <a:lstStyle/>
-          <a:p>
-            <a:pPr indent="0" marL="0">
-              <a:buNone/>
-            </a:pPr>
-            <a:r>
-              <a:rPr lang="en-US" sz="1600" b="1" dirty="0">
-                <a:solidFill>
-                  <a:schemeClr val="tx1"/>
-                </a:solidFill>
-              </a:rPr>
-              <a:t>Cash-strapped industry</a:t>
-            </a:r>
-            <a:endParaRPr lang="en-US" sz="1600" dirty="0"/>
-          </a:p>
-        </p:txBody>
-      </p:sp>
-      <p:sp>
-        <p:nvSpPr>
-          <p:cNvPr id="7" name="Text 5"/>
-          <p:cNvSpPr txBox="1"/>
-          <p:nvPr/>
-        </p:nvSpPr>
-        <p:spPr>
-          <a:xfrm>
-            <a:off x="640080" y="1828800"/>
-            <a:ext cx="3657600" cy="548640"/>
-          </a:xfrm>
-          <a:prstGeom prst="rect">
-            <a:avLst/>
-          </a:prstGeom>
-          <a:noFill/>
-          <a:ln/>
-        </p:spPr>
-        <p:txBody>
-          <a:bodyPr wrap="square" lIns="0" tIns="0" rIns="0" bIns="0" rtlCol="0" anchor="t"/>
-          <a:lstStyle/>
-          <a:p>
-            <a:pPr indent="0" marL="0">
-              <a:buNone/>
-            </a:pPr>
-            <a:r>
-              <a:rPr lang="en-US" sz="1300" dirty="0">
-                <a:solidFill>
-                  <a:schemeClr val="tx2"/>
-                </a:solidFill>
-              </a:rPr>
-              <a:t>Phased investment and financing</a:t>
-            </a:r>
-            <a:endParaRPr lang="en-US" sz="1300" dirty="0"/>
-          </a:p>
-        </p:txBody>
-      </p:sp>
-      <p:sp>
-        <p:nvSpPr>
-          <p:cNvPr id="8" name="Shape 6"/>
-          <p:cNvSpPr/>
-          <p:nvPr/>
-        </p:nvSpPr>
-        <p:spPr>
-          <a:xfrm>
-            <a:off x="4663440" y="1097280"/>
-            <a:ext cx="4023360" cy="1417320"/>
+            <a:off x="4663440" y="1051560"/>
+            <a:ext cx="4023360" cy="3337560"/>
           </a:xfrm>
           <a:prstGeom prst="roundRect">
             <a:avLst>
-              <a:gd name="adj" fmla="val 5161"/>
+              <a:gd name="adj" fmla="val 2192"/>
             </a:avLst>
           </a:prstGeom>
           <a:solidFill>
@@ -12072,39 +12500,14 @@
       </p:sp>
       <p:sp>
         <p:nvSpPr>
-          <p:cNvPr id="9" name="Shape 7"/>
-          <p:cNvSpPr/>
-          <p:nvPr/>
-        </p:nvSpPr>
-        <p:spPr>
-          <a:xfrm>
-            <a:off x="4846320" y="1280160"/>
-            <a:ext cx="384048" cy="384048"/>
-          </a:xfrm>
-          <a:prstGeom prst="ellipse">
-            <a:avLst/>
-          </a:prstGeom>
-          <a:solidFill>
-            <a:srgbClr val="C2185B"/>
-          </a:solidFill>
-          <a:ln w="12700">
-            <a:solidFill>
-              <a:srgbClr val="C2185B"/>
-            </a:solidFill>
-            <a:prstDash val="solid"/>
-          </a:ln>
-        </p:spPr>
-      </p:sp>
-      <p:sp>
-        <p:nvSpPr>
-          <p:cNvPr id="10" name="Text 8"/>
-          <p:cNvSpPr txBox="1"/>
-          <p:nvPr/>
-        </p:nvSpPr>
-        <p:spPr>
-          <a:xfrm>
-            <a:off x="4846320" y="1280160"/>
-            <a:ext cx="384048" cy="384048"/>
+          <p:cNvPr id="7" name="Text 5"/>
+          <p:cNvSpPr txBox="1"/>
+          <p:nvPr/>
+        </p:nvSpPr>
+        <p:spPr>
+          <a:xfrm>
+            <a:off x="4892040" y="1188720"/>
+            <a:ext cx="3566160" cy="411480"/>
           </a:xfrm>
           <a:prstGeom prst="rect">
             <a:avLst/>
@@ -12116,67 +12519,31 @@
           <a:bodyPr wrap="square" lIns="0" tIns="0" rIns="0" bIns="0" rtlCol="0" anchor="ctr"/>
           <a:lstStyle/>
           <a:p>
-            <a:pPr algn="ctr" indent="0" marL="0">
-              <a:buNone/>
-            </a:pPr>
-            <a:r>
-              <a:rPr lang="en-US" sz="1300" b="1" dirty="0">
-                <a:solidFill>
-                  <a:srgbClr val="FFFFFF"/>
-                </a:solidFill>
-              </a:rPr>
-              <a:t>!</a:t>
-            </a:r>
-            <a:endParaRPr lang="en-US" sz="1300" dirty="0"/>
-          </a:p>
-        </p:txBody>
-      </p:sp>
-      <p:sp>
-        <p:nvSpPr>
-          <p:cNvPr id="11" name="Text 9"/>
-          <p:cNvSpPr txBox="1"/>
-          <p:nvPr/>
-        </p:nvSpPr>
-        <p:spPr>
-          <a:xfrm>
-            <a:off x="5394960" y="1280160"/>
-            <a:ext cx="3108960" cy="384048"/>
-          </a:xfrm>
-          <a:prstGeom prst="rect">
-            <a:avLst/>
-          </a:prstGeom>
-          <a:noFill/>
-          <a:ln/>
-        </p:spPr>
-        <p:txBody>
-          <a:bodyPr wrap="square" lIns="0" tIns="0" rIns="0" bIns="0" rtlCol="0" anchor="ctr"/>
-          <a:lstStyle/>
-          <a:p>
             <a:pPr indent="0" marL="0">
               <a:buNone/>
             </a:pPr>
             <a:r>
-              <a:rPr lang="en-US" sz="1600" b="1" dirty="0">
-                <a:solidFill>
-                  <a:schemeClr val="tx1"/>
-                </a:solidFill>
-              </a:rPr>
-              <a:t>DTF in short runs</a:t>
-            </a:r>
-            <a:endParaRPr lang="en-US" sz="1600" dirty="0"/>
-          </a:p>
-        </p:txBody>
-      </p:sp>
-      <p:sp>
-        <p:nvSpPr>
-          <p:cNvPr id="12" name="Text 10"/>
-          <p:cNvSpPr txBox="1"/>
-          <p:nvPr/>
-        </p:nvSpPr>
-        <p:spPr>
-          <a:xfrm>
-            <a:off x="4846320" y="1828800"/>
-            <a:ext cx="3657600" cy="548640"/>
+              <a:rPr lang="en-US" sz="1700" b="1" dirty="0">
+                <a:solidFill>
+                  <a:srgbClr val="0089C2"/>
+                </a:solidFill>
+              </a:rPr>
+              <a:t>We commit to</a:t>
+            </a:r>
+            <a:endParaRPr lang="en-US" sz="1700" dirty="0"/>
+          </a:p>
+        </p:txBody>
+      </p:sp>
+      <p:sp>
+        <p:nvSpPr>
+          <p:cNvPr id="8" name="Text 6"/>
+          <p:cNvSpPr txBox="1"/>
+          <p:nvPr/>
+        </p:nvSpPr>
+        <p:spPr>
+          <a:xfrm>
+            <a:off x="4892040" y="1691640"/>
+            <a:ext cx="3611880" cy="2606040"/>
           </a:xfrm>
           <a:prstGeom prst="rect">
             <a:avLst/>
@@ -12188,338 +12555,112 @@
           <a:bodyPr wrap="square" lIns="0" tIns="0" rIns="0" bIns="0" rtlCol="0" anchor="t"/>
           <a:lstStyle/>
           <a:p>
-            <a:pPr indent="0" marL="0">
-              <a:buNone/>
-            </a:pPr>
-            <a:r>
-              <a:rPr lang="en-US" sz="1300" dirty="0">
-                <a:solidFill>
-                  <a:schemeClr val="tx2"/>
-                </a:solidFill>
-              </a:rPr>
-              <a:t>Focus on volume and effects</a:t>
-            </a:r>
-            <a:endParaRPr lang="en-US" sz="1300" dirty="0"/>
-          </a:p>
-        </p:txBody>
-      </p:sp>
-      <p:sp>
-        <p:nvSpPr>
-          <p:cNvPr id="13" name="Shape 11"/>
-          <p:cNvSpPr/>
-          <p:nvPr/>
-        </p:nvSpPr>
-        <p:spPr>
-          <a:xfrm>
-            <a:off x="457200" y="2697480"/>
-            <a:ext cx="4023360" cy="1417320"/>
-          </a:xfrm>
-          <a:prstGeom prst="roundRect">
-            <a:avLst>
-              <a:gd name="adj" fmla="val 5161"/>
-            </a:avLst>
-          </a:prstGeom>
-          <a:solidFill>
-            <a:srgbClr val="EEF2F7"/>
-          </a:solidFill>
-          <a:ln w="12700">
-            <a:solidFill>
-              <a:srgbClr val="EEF2F7"/>
-            </a:solidFill>
-            <a:prstDash val="solid"/>
-          </a:ln>
-        </p:spPr>
-      </p:sp>
-      <p:sp>
-        <p:nvSpPr>
-          <p:cNvPr id="14" name="Shape 12"/>
-          <p:cNvSpPr/>
-          <p:nvPr/>
-        </p:nvSpPr>
-        <p:spPr>
-          <a:xfrm>
-            <a:off x="640080" y="2880360"/>
-            <a:ext cx="384048" cy="384048"/>
-          </a:xfrm>
-          <a:prstGeom prst="ellipse">
-            <a:avLst/>
-          </a:prstGeom>
-          <a:solidFill>
-            <a:srgbClr val="F2B705"/>
-          </a:solidFill>
-          <a:ln w="12700">
-            <a:solidFill>
-              <a:srgbClr val="F2B705"/>
-            </a:solidFill>
-            <a:prstDash val="solid"/>
-          </a:ln>
-        </p:spPr>
-      </p:sp>
-      <p:sp>
-        <p:nvSpPr>
-          <p:cNvPr id="15" name="Text 13"/>
-          <p:cNvSpPr txBox="1"/>
-          <p:nvPr/>
-        </p:nvSpPr>
-        <p:spPr>
-          <a:xfrm>
-            <a:off x="640080" y="2880360"/>
-            <a:ext cx="384048" cy="384048"/>
-          </a:xfrm>
-          <a:prstGeom prst="rect">
-            <a:avLst/>
-          </a:prstGeom>
-          <a:noFill/>
-          <a:ln/>
-        </p:spPr>
-        <p:txBody>
-          <a:bodyPr wrap="square" lIns="0" tIns="0" rIns="0" bIns="0" rtlCol="0" anchor="ctr"/>
-          <a:lstStyle/>
-          <a:p>
-            <a:pPr algn="ctr" indent="0" marL="0">
-              <a:buNone/>
-            </a:pPr>
-            <a:r>
-              <a:rPr lang="en-US" sz="1300" b="1" dirty="0">
+            <a:pPr marL="342900" indent="-342900">
+              <a:spcAft>
+                <a:spcPts val="500"/>
+              </a:spcAft>
+              <a:buSzPct val="100000"/>
+              <a:buChar char="•"/>
+            </a:pPr>
+            <a:r>
+              <a:rPr lang="en-US" sz="1400" dirty="0">
                 <a:solidFill>
                   <a:srgbClr val="1B1F3B"/>
                 </a:solidFill>
               </a:rPr>
-              <a:t>!</a:t>
-            </a:r>
-            <a:endParaRPr lang="en-US" sz="1300" dirty="0"/>
-          </a:p>
-        </p:txBody>
-      </p:sp>
-      <p:sp>
-        <p:nvSpPr>
-          <p:cNvPr id="16" name="Text 14"/>
-          <p:cNvSpPr txBox="1"/>
-          <p:nvPr/>
-        </p:nvSpPr>
-        <p:spPr>
-          <a:xfrm>
-            <a:off x="1188720" y="2880360"/>
-            <a:ext cx="3108960" cy="384048"/>
-          </a:xfrm>
-          <a:prstGeom prst="rect">
-            <a:avLst/>
-          </a:prstGeom>
-          <a:noFill/>
-          <a:ln/>
-        </p:spPr>
-        <p:txBody>
-          <a:bodyPr wrap="square" lIns="0" tIns="0" rIns="0" bIns="0" rtlCol="0" anchor="ctr"/>
-          <a:lstStyle/>
-          <a:p>
-            <a:pPr indent="0" marL="0">
-              <a:buNone/>
-            </a:pPr>
-            <a:r>
-              <a:rPr lang="en-US" sz="1600" b="1" dirty="0">
-                <a:solidFill>
-                  <a:schemeClr val="tx1"/>
-                </a:solidFill>
-              </a:rPr>
-              <a:t>Tariffs</a:t>
-            </a:r>
-            <a:endParaRPr lang="en-US" sz="1600" dirty="0"/>
-          </a:p>
-        </p:txBody>
-      </p:sp>
-      <p:sp>
-        <p:nvSpPr>
-          <p:cNvPr id="17" name="Text 15"/>
-          <p:cNvSpPr txBox="1"/>
-          <p:nvPr/>
-        </p:nvSpPr>
-        <p:spPr>
-          <a:xfrm>
-            <a:off x="640080" y="3429000"/>
-            <a:ext cx="3657600" cy="548640"/>
-          </a:xfrm>
-          <a:prstGeom prst="rect">
-            <a:avLst/>
-          </a:prstGeom>
-          <a:noFill/>
-          <a:ln/>
-        </p:spPr>
-        <p:txBody>
-          <a:bodyPr wrap="square" lIns="0" tIns="0" rIns="0" bIns="0" rtlCol="0" anchor="t"/>
-          <a:lstStyle/>
-          <a:p>
-            <a:pPr indent="0" marL="0">
-              <a:buNone/>
-            </a:pPr>
-            <a:r>
-              <a:rPr lang="en-US" sz="1300" dirty="0">
-                <a:solidFill>
-                  <a:schemeClr val="tx2"/>
-                </a:solidFill>
-              </a:rPr>
-              <a:t>Confirmed lines; PROSEC; CEB</a:t>
-            </a:r>
-            <a:endParaRPr lang="en-US" sz="1300" dirty="0"/>
-          </a:p>
-        </p:txBody>
-      </p:sp>
-      <p:sp>
-        <p:nvSpPr>
-          <p:cNvPr id="18" name="Shape 16"/>
-          <p:cNvSpPr/>
-          <p:nvPr/>
-        </p:nvSpPr>
-        <p:spPr>
-          <a:xfrm>
-            <a:off x="4663440" y="2697480"/>
-            <a:ext cx="4023360" cy="1417320"/>
-          </a:xfrm>
-          <a:prstGeom prst="roundRect">
-            <a:avLst>
-              <a:gd name="adj" fmla="val 5161"/>
-            </a:avLst>
-          </a:prstGeom>
-          <a:solidFill>
-            <a:srgbClr val="EEF2F7"/>
-          </a:solidFill>
-          <a:ln w="12700">
-            <a:solidFill>
-              <a:srgbClr val="EEF2F7"/>
-            </a:solidFill>
-            <a:prstDash val="solid"/>
-          </a:ln>
-        </p:spPr>
-      </p:sp>
-      <p:sp>
-        <p:nvSpPr>
-          <p:cNvPr id="19" name="Shape 17"/>
-          <p:cNvSpPr/>
-          <p:nvPr/>
-        </p:nvSpPr>
-        <p:spPr>
-          <a:xfrm>
-            <a:off x="4846320" y="2880360"/>
-            <a:ext cx="384048" cy="384048"/>
-          </a:xfrm>
-          <a:prstGeom prst="ellipse">
-            <a:avLst/>
-          </a:prstGeom>
-          <a:solidFill>
-            <a:srgbClr val="1B1F3B"/>
-          </a:solidFill>
-          <a:ln w="12700">
-            <a:solidFill>
-              <a:srgbClr val="1B1F3B"/>
-            </a:solidFill>
-            <a:prstDash val="solid"/>
-          </a:ln>
-        </p:spPr>
-      </p:sp>
-      <p:sp>
-        <p:nvSpPr>
-          <p:cNvPr id="20" name="Text 18"/>
-          <p:cNvSpPr txBox="1"/>
-          <p:nvPr/>
-        </p:nvSpPr>
-        <p:spPr>
-          <a:xfrm>
-            <a:off x="4846320" y="2880360"/>
-            <a:ext cx="384048" cy="384048"/>
-          </a:xfrm>
-          <a:prstGeom prst="rect">
-            <a:avLst/>
-          </a:prstGeom>
-          <a:noFill/>
-          <a:ln/>
-        </p:spPr>
-        <p:txBody>
-          <a:bodyPr wrap="square" lIns="0" tIns="0" rIns="0" bIns="0" rtlCol="0" anchor="ctr"/>
-          <a:lstStyle/>
-          <a:p>
-            <a:pPr algn="ctr" indent="0" marL="0">
-              <a:buNone/>
-            </a:pPr>
-            <a:r>
-              <a:rPr lang="en-US" sz="1300" b="1" dirty="0">
-                <a:solidFill>
-                  <a:srgbClr val="FFFFFF"/>
-                </a:solidFill>
-              </a:rPr>
-              <a:t>!</a:t>
-            </a:r>
-            <a:endParaRPr lang="en-US" sz="1300" dirty="0"/>
-          </a:p>
-        </p:txBody>
-      </p:sp>
-      <p:sp>
-        <p:nvSpPr>
-          <p:cNvPr id="21" name="Text 19"/>
-          <p:cNvSpPr txBox="1"/>
-          <p:nvPr/>
-        </p:nvSpPr>
-        <p:spPr>
-          <a:xfrm>
-            <a:off x="5394960" y="2880360"/>
-            <a:ext cx="3108960" cy="384048"/>
-          </a:xfrm>
-          <a:prstGeom prst="rect">
-            <a:avLst/>
-          </a:prstGeom>
-          <a:noFill/>
-          <a:ln/>
-        </p:spPr>
-        <p:txBody>
-          <a:bodyPr wrap="square" lIns="0" tIns="0" rIns="0" bIns="0" rtlCol="0" anchor="ctr"/>
-          <a:lstStyle/>
-          <a:p>
-            <a:pPr indent="0" marL="0">
-              <a:buNone/>
-            </a:pPr>
-            <a:r>
-              <a:rPr lang="en-US" sz="1600" b="1" dirty="0">
-                <a:solidFill>
-                  <a:schemeClr val="tx1"/>
-                </a:solidFill>
-              </a:rPr>
-              <a:t>Textile learning curve</a:t>
-            </a:r>
-            <a:endParaRPr lang="en-US" sz="1600" dirty="0"/>
-          </a:p>
-        </p:txBody>
-      </p:sp>
-      <p:sp>
-        <p:nvSpPr>
-          <p:cNvPr id="22" name="Text 20"/>
-          <p:cNvSpPr txBox="1"/>
-          <p:nvPr/>
-        </p:nvSpPr>
-        <p:spPr>
-          <a:xfrm>
-            <a:off x="4846320" y="3429000"/>
-            <a:ext cx="3657600" cy="548640"/>
-          </a:xfrm>
-          <a:prstGeom prst="rect">
-            <a:avLst/>
-          </a:prstGeom>
-          <a:noFill/>
-          <a:ln/>
-        </p:spPr>
-        <p:txBody>
-          <a:bodyPr wrap="square" lIns="0" tIns="0" rIns="0" bIns="0" rtlCol="0" anchor="t"/>
-          <a:lstStyle/>
-          <a:p>
-            <a:pPr indent="0" marL="0">
-              <a:buNone/>
-            </a:pPr>
-            <a:r>
-              <a:rPr lang="en-US" sz="1300" dirty="0">
-                <a:solidFill>
-                  <a:schemeClr val="tx2"/>
-                </a:solidFill>
-              </a:rPr>
-              <a:t>CLT certification and industry hires</a:t>
-            </a:r>
-            <a:endParaRPr lang="en-US" sz="1300" dirty="0"/>
+              <a:t>Import and local inventory (CEB)</a:t>
+            </a:r>
+            <a:endParaRPr lang="en-US" sz="1400" dirty="0"/>
+          </a:p>
+          <a:p>
+            <a:pPr marL="342900" indent="-342900">
+              <a:spcAft>
+                <a:spcPts val="500"/>
+              </a:spcAft>
+              <a:buSzPct val="100000"/>
+              <a:buChar char="•"/>
+            </a:pPr>
+            <a:r>
+              <a:rPr lang="en-US" sz="1400" dirty="0">
+                <a:solidFill>
+                  <a:srgbClr val="1B1F3B"/>
+                </a:solidFill>
+              </a:rPr>
+              <a:t>Demo showroom and Spanish service</a:t>
+            </a:r>
+            <a:endParaRPr lang="en-US" sz="1400" dirty="0"/>
+          </a:p>
+          <a:p>
+            <a:pPr marL="342900" indent="-342900">
+              <a:spcAft>
+                <a:spcPts val="500"/>
+              </a:spcAft>
+              <a:buSzPct val="100000"/>
+              <a:buChar char="•"/>
+            </a:pPr>
+            <a:r>
+              <a:rPr lang="en-US" sz="1400" dirty="0">
+                <a:solidFill>
+                  <a:srgbClr val="1B1F3B"/>
+                </a:solidFill>
+              </a:rPr>
+              <a:t>Sales, customer service and textile technician</a:t>
+            </a:r>
+            <a:endParaRPr lang="en-US" sz="1400" dirty="0"/>
+          </a:p>
+          <a:p>
+            <a:pPr marL="342900" indent="-342900">
+              <a:spcAft>
+                <a:spcPts val="500"/>
+              </a:spcAft>
+              <a:buSzPct val="100000"/>
+              <a:buChar char="•"/>
+            </a:pPr>
+            <a:r>
+              <a:rPr lang="en-US" sz="1400" dirty="0">
+                <a:solidFill>
+                  <a:srgbClr val="1B1F3B"/>
+                </a:solidFill>
+              </a:rPr>
+              <a:t>Machine and product training</a:t>
+            </a:r>
+            <a:endParaRPr lang="en-US" sz="1400" dirty="0"/>
+          </a:p>
+          <a:p>
+            <a:pPr marL="342900" indent="-342900">
+              <a:spcAft>
+                <a:spcPts val="500"/>
+              </a:spcAft>
+              <a:buSzPct val="100000"/>
+              <a:buChar char="•"/>
+            </a:pPr>
+            <a:r>
+              <a:rPr lang="en-US" sz="1400" dirty="0">
+                <a:solidFill>
+                  <a:srgbClr val="1B1F3B"/>
+                </a:solidFill>
+              </a:rPr>
+              <a:t>Targets: 2 · 5 · 8 lines in years 1–3</a:t>
+            </a:r>
+            <a:endParaRPr lang="en-US" sz="1400" dirty="0"/>
+          </a:p>
+          <a:p>
+            <a:pPr marL="342900" indent="-342900">
+              <a:spcAft>
+                <a:spcPts val="500"/>
+              </a:spcAft>
+              <a:buSzPct val="100000"/>
+              <a:buChar char="•"/>
+            </a:pPr>
+            <a:r>
+              <a:rPr lang="en-US" sz="1400" dirty="0">
+                <a:solidFill>
+                  <a:srgbClr val="1B1F3B"/>
+                </a:solidFill>
+              </a:rPr>
+              <a:t>Quarterly reports</a:t>
+            </a:r>
+            <a:endParaRPr lang="en-US" sz="1400" dirty="0"/>
           </a:p>
         </p:txBody>
       </p:sp>
@@ -12628,7 +12769,7 @@
                   <a:schemeClr val="tx1"/>
                 </a:solidFill>
               </a:rPr>
-              <a:t>Next steps</a:t>
+              <a:t>Risks and mitigation</a:t>
             </a:r>
             <a:endParaRPr lang="en-US" sz="2600" dirty="0"/>
           </a:p>
@@ -12643,7 +12784,34 @@
         <p:spPr>
           <a:xfrm>
             <a:off x="457200" y="1097280"/>
-            <a:ext cx="411480" cy="411480"/>
+            <a:ext cx="4023360" cy="1417320"/>
+          </a:xfrm>
+          <a:prstGeom prst="roundRect">
+            <a:avLst>
+              <a:gd name="adj" fmla="val 5161"/>
+            </a:avLst>
+          </a:prstGeom>
+          <a:solidFill>
+            <a:srgbClr val="EEF2F7"/>
+          </a:solidFill>
+          <a:ln w="12700">
+            <a:solidFill>
+              <a:srgbClr val="EEF2F7"/>
+            </a:solidFill>
+            <a:prstDash val="solid"/>
+          </a:ln>
+        </p:spPr>
+      </p:sp>
+      <p:sp>
+        <p:nvSpPr>
+          <p:cNvPr id="4" name="Shape 2"/>
+          <p:cNvSpPr/>
+          <p:nvPr/>
+        </p:nvSpPr>
+        <p:spPr>
+          <a:xfrm>
+            <a:off x="640080" y="1280160"/>
+            <a:ext cx="384048" cy="384048"/>
           </a:xfrm>
           <a:prstGeom prst="ellipse">
             <a:avLst/>
@@ -12661,14 +12829,14 @@
       </p:sp>
       <p:sp>
         <p:nvSpPr>
-          <p:cNvPr id="4" name="Text 2"/>
-          <p:cNvSpPr txBox="1"/>
-          <p:nvPr/>
-        </p:nvSpPr>
-        <p:spPr>
-          <a:xfrm>
-            <a:off x="457200" y="1097280"/>
-            <a:ext cx="411480" cy="411480"/>
+          <p:cNvPr id="5" name="Text 3"/>
+          <p:cNvSpPr txBox="1"/>
+          <p:nvPr/>
+        </p:nvSpPr>
+        <p:spPr>
+          <a:xfrm>
+            <a:off x="640080" y="1280160"/>
+            <a:ext cx="384048" cy="384048"/>
           </a:xfrm>
           <a:prstGeom prst="rect">
             <a:avLst/>
@@ -12689,7 +12857,7 @@
                   <a:srgbClr val="FFFFFF"/>
                 </a:solidFill>
               </a:rPr>
-              <a:t>1</a:t>
+              <a:t>!</a:t>
             </a:r>
             <a:endParaRPr lang="en-US" sz="1300" dirty="0"/>
           </a:p>
@@ -12697,14 +12865,14 @@
       </p:sp>
       <p:sp>
         <p:nvSpPr>
-          <p:cNvPr id="5" name="Text 3"/>
-          <p:cNvSpPr txBox="1"/>
-          <p:nvPr/>
-        </p:nvSpPr>
-        <p:spPr>
-          <a:xfrm>
-            <a:off x="1051560" y="1051560"/>
-            <a:ext cx="7589520" cy="502920"/>
+          <p:cNvPr id="6" name="Text 4"/>
+          <p:cNvSpPr txBox="1"/>
+          <p:nvPr/>
+        </p:nvSpPr>
+        <p:spPr>
+          <a:xfrm>
+            <a:off x="1188720" y="1280160"/>
+            <a:ext cx="3108960" cy="384048"/>
           </a:xfrm>
           <a:prstGeom prst="rect">
             <a:avLst/>
@@ -12720,27 +12888,90 @@
               <a:buNone/>
             </a:pPr>
             <a:r>
-              <a:rPr lang="en-US" sz="1500" dirty="0">
+              <a:rPr lang="en-US" sz="1600" b="1" dirty="0">
                 <a:solidFill>
                   <a:schemeClr val="tx1"/>
                 </a:solidFill>
               </a:rPr>
-              <a:t>CLT formal quotation (CLT-016B, CLT-012R, SM60-85, consumables)</a:t>
-            </a:r>
-            <a:endParaRPr lang="en-US" sz="1500" dirty="0"/>
-          </a:p>
-        </p:txBody>
-      </p:sp>
-      <p:sp>
-        <p:nvSpPr>
-          <p:cNvPr id="6" name="Shape 4"/>
+              <a:t>Cash-strapped industry</a:t>
+            </a:r>
+            <a:endParaRPr lang="en-US" sz="1600" dirty="0"/>
+          </a:p>
+        </p:txBody>
+      </p:sp>
+      <p:sp>
+        <p:nvSpPr>
+          <p:cNvPr id="7" name="Text 5"/>
+          <p:cNvSpPr txBox="1"/>
+          <p:nvPr/>
+        </p:nvSpPr>
+        <p:spPr>
+          <a:xfrm>
+            <a:off x="640080" y="1828800"/>
+            <a:ext cx="3657600" cy="548640"/>
+          </a:xfrm>
+          <a:prstGeom prst="rect">
+            <a:avLst/>
+          </a:prstGeom>
+          <a:noFill/>
+          <a:ln/>
+        </p:spPr>
+        <p:txBody>
+          <a:bodyPr wrap="square" lIns="0" tIns="0" rIns="0" bIns="0" rtlCol="0" anchor="t"/>
+          <a:lstStyle/>
+          <a:p>
+            <a:pPr indent="0" marL="0">
+              <a:buNone/>
+            </a:pPr>
+            <a:r>
+              <a:rPr lang="en-US" sz="1300" dirty="0">
+                <a:solidFill>
+                  <a:schemeClr val="tx2"/>
+                </a:solidFill>
+              </a:rPr>
+              <a:t>Phased investment and financing</a:t>
+            </a:r>
+            <a:endParaRPr lang="en-US" sz="1300" dirty="0"/>
+          </a:p>
+        </p:txBody>
+      </p:sp>
+      <p:sp>
+        <p:nvSpPr>
+          <p:cNvPr id="8" name="Shape 6"/>
           <p:cNvSpPr/>
           <p:nvPr/>
         </p:nvSpPr>
         <p:spPr>
           <a:xfrm>
-            <a:off x="457200" y="1737360"/>
-            <a:ext cx="411480" cy="411480"/>
+            <a:off x="4663440" y="1097280"/>
+            <a:ext cx="4023360" cy="1417320"/>
+          </a:xfrm>
+          <a:prstGeom prst="roundRect">
+            <a:avLst>
+              <a:gd name="adj" fmla="val 5161"/>
+            </a:avLst>
+          </a:prstGeom>
+          <a:solidFill>
+            <a:srgbClr val="EEF2F7"/>
+          </a:solidFill>
+          <a:ln w="12700">
+            <a:solidFill>
+              <a:srgbClr val="EEF2F7"/>
+            </a:solidFill>
+            <a:prstDash val="solid"/>
+          </a:ln>
+        </p:spPr>
+      </p:sp>
+      <p:sp>
+        <p:nvSpPr>
+          <p:cNvPr id="9" name="Shape 7"/>
+          <p:cNvSpPr/>
+          <p:nvPr/>
+        </p:nvSpPr>
+        <p:spPr>
+          <a:xfrm>
+            <a:off x="4846320" y="1280160"/>
+            <a:ext cx="384048" cy="384048"/>
           </a:xfrm>
           <a:prstGeom prst="ellipse">
             <a:avLst/>
@@ -12758,14 +12989,14 @@
       </p:sp>
       <p:sp>
         <p:nvSpPr>
-          <p:cNvPr id="7" name="Text 5"/>
-          <p:cNvSpPr txBox="1"/>
-          <p:nvPr/>
-        </p:nvSpPr>
-        <p:spPr>
-          <a:xfrm>
-            <a:off x="457200" y="1737360"/>
-            <a:ext cx="411480" cy="411480"/>
+          <p:cNvPr id="10" name="Text 8"/>
+          <p:cNvSpPr txBox="1"/>
+          <p:nvPr/>
+        </p:nvSpPr>
+        <p:spPr>
+          <a:xfrm>
+            <a:off x="4846320" y="1280160"/>
+            <a:ext cx="384048" cy="384048"/>
           </a:xfrm>
           <a:prstGeom prst="rect">
             <a:avLst/>
@@ -12786,7 +13017,7 @@
                   <a:srgbClr val="FFFFFF"/>
                 </a:solidFill>
               </a:rPr>
-              <a:t>2</a:t>
+              <a:t>!</a:t>
             </a:r>
             <a:endParaRPr lang="en-US" sz="1300" dirty="0"/>
           </a:p>
@@ -12794,14 +13025,14 @@
       </p:sp>
       <p:sp>
         <p:nvSpPr>
-          <p:cNvPr id="8" name="Text 6"/>
-          <p:cNvSpPr txBox="1"/>
-          <p:nvPr/>
-        </p:nvSpPr>
-        <p:spPr>
-          <a:xfrm>
-            <a:off x="1051560" y="1691640"/>
-            <a:ext cx="7589520" cy="502920"/>
+          <p:cNvPr id="11" name="Text 9"/>
+          <p:cNvSpPr txBox="1"/>
+          <p:nvPr/>
+        </p:nvSpPr>
+        <p:spPr>
+          <a:xfrm>
+            <a:off x="5394960" y="1280160"/>
+            <a:ext cx="3108960" cy="384048"/>
           </a:xfrm>
           <a:prstGeom prst="rect">
             <a:avLst/>
@@ -12817,27 +13048,90 @@
               <a:buNone/>
             </a:pPr>
             <a:r>
-              <a:rPr lang="en-US" sz="1500" dirty="0">
+              <a:rPr lang="en-US" sz="1600" b="1" dirty="0">
                 <a:solidFill>
                   <a:schemeClr val="tx1"/>
                 </a:solidFill>
               </a:rPr>
-              <a:t>Meeting with CLT’s owners to review terms</a:t>
-            </a:r>
-            <a:endParaRPr lang="en-US" sz="1500" dirty="0"/>
-          </a:p>
-        </p:txBody>
-      </p:sp>
-      <p:sp>
-        <p:nvSpPr>
-          <p:cNvPr id="9" name="Shape 7"/>
+              <a:t>DTF in short runs</a:t>
+            </a:r>
+            <a:endParaRPr lang="en-US" sz="1600" dirty="0"/>
+          </a:p>
+        </p:txBody>
+      </p:sp>
+      <p:sp>
+        <p:nvSpPr>
+          <p:cNvPr id="12" name="Text 10"/>
+          <p:cNvSpPr txBox="1"/>
+          <p:nvPr/>
+        </p:nvSpPr>
+        <p:spPr>
+          <a:xfrm>
+            <a:off x="4846320" y="1828800"/>
+            <a:ext cx="3657600" cy="548640"/>
+          </a:xfrm>
+          <a:prstGeom prst="rect">
+            <a:avLst/>
+          </a:prstGeom>
+          <a:noFill/>
+          <a:ln/>
+        </p:spPr>
+        <p:txBody>
+          <a:bodyPr wrap="square" lIns="0" tIns="0" rIns="0" bIns="0" rtlCol="0" anchor="t"/>
+          <a:lstStyle/>
+          <a:p>
+            <a:pPr indent="0" marL="0">
+              <a:buNone/>
+            </a:pPr>
+            <a:r>
+              <a:rPr lang="en-US" sz="1300" dirty="0">
+                <a:solidFill>
+                  <a:schemeClr val="tx2"/>
+                </a:solidFill>
+              </a:rPr>
+              <a:t>Focus on volume and effects</a:t>
+            </a:r>
+            <a:endParaRPr lang="en-US" sz="1300" dirty="0"/>
+          </a:p>
+        </p:txBody>
+      </p:sp>
+      <p:sp>
+        <p:nvSpPr>
+          <p:cNvPr id="13" name="Shape 11"/>
           <p:cNvSpPr/>
           <p:nvPr/>
         </p:nvSpPr>
         <p:spPr>
           <a:xfrm>
-            <a:off x="457200" y="2377440"/>
-            <a:ext cx="411480" cy="411480"/>
+            <a:off x="457200" y="2697480"/>
+            <a:ext cx="4023360" cy="1417320"/>
+          </a:xfrm>
+          <a:prstGeom prst="roundRect">
+            <a:avLst>
+              <a:gd name="adj" fmla="val 5161"/>
+            </a:avLst>
+          </a:prstGeom>
+          <a:solidFill>
+            <a:srgbClr val="EEF2F7"/>
+          </a:solidFill>
+          <a:ln w="12700">
+            <a:solidFill>
+              <a:srgbClr val="EEF2F7"/>
+            </a:solidFill>
+            <a:prstDash val="solid"/>
+          </a:ln>
+        </p:spPr>
+      </p:sp>
+      <p:sp>
+        <p:nvSpPr>
+          <p:cNvPr id="14" name="Shape 12"/>
+          <p:cNvSpPr/>
+          <p:nvPr/>
+        </p:nvSpPr>
+        <p:spPr>
+          <a:xfrm>
+            <a:off x="640080" y="2880360"/>
+            <a:ext cx="384048" cy="384048"/>
           </a:xfrm>
           <a:prstGeom prst="ellipse">
             <a:avLst/>
@@ -12855,14 +13149,14 @@
       </p:sp>
       <p:sp>
         <p:nvSpPr>
-          <p:cNvPr id="10" name="Text 8"/>
-          <p:cNvSpPr txBox="1"/>
-          <p:nvPr/>
-        </p:nvSpPr>
-        <p:spPr>
-          <a:xfrm>
-            <a:off x="457200" y="2377440"/>
-            <a:ext cx="411480" cy="411480"/>
+          <p:cNvPr id="15" name="Text 13"/>
+          <p:cNvSpPr txBox="1"/>
+          <p:nvPr/>
+        </p:nvSpPr>
+        <p:spPr>
+          <a:xfrm>
+            <a:off x="640080" y="2880360"/>
+            <a:ext cx="384048" cy="384048"/>
           </a:xfrm>
           <a:prstGeom prst="rect">
             <a:avLst/>
@@ -12883,7 +13177,7 @@
                   <a:srgbClr val="1B1F3B"/>
                 </a:solidFill>
               </a:rPr>
-              <a:t>3</a:t>
+              <a:t>!</a:t>
             </a:r>
             <a:endParaRPr lang="en-US" sz="1300" dirty="0"/>
           </a:p>
@@ -12891,14 +13185,14 @@
       </p:sp>
       <p:sp>
         <p:nvSpPr>
-          <p:cNvPr id="11" name="Text 9"/>
-          <p:cNvSpPr txBox="1"/>
-          <p:nvPr/>
-        </p:nvSpPr>
-        <p:spPr>
-          <a:xfrm>
-            <a:off x="1051560" y="2331720"/>
-            <a:ext cx="7589520" cy="502920"/>
+          <p:cNvPr id="16" name="Text 14"/>
+          <p:cNvSpPr txBox="1"/>
+          <p:nvPr/>
+        </p:nvSpPr>
+        <p:spPr>
+          <a:xfrm>
+            <a:off x="1188720" y="2880360"/>
+            <a:ext cx="3108960" cy="384048"/>
           </a:xfrm>
           <a:prstGeom prst="rect">
             <a:avLst/>
@@ -12914,27 +13208,90 @@
               <a:buNone/>
             </a:pPr>
             <a:r>
-              <a:rPr lang="en-US" sz="1500" dirty="0">
+              <a:rPr lang="en-US" sz="1600" b="1" dirty="0">
                 <a:solidFill>
                   <a:schemeClr val="tx1"/>
                 </a:solidFill>
               </a:rPr>
-              <a:t>Confirm duties with a customs broker</a:t>
-            </a:r>
-            <a:endParaRPr lang="en-US" sz="1500" dirty="0"/>
-          </a:p>
-        </p:txBody>
-      </p:sp>
-      <p:sp>
-        <p:nvSpPr>
-          <p:cNvPr id="12" name="Shape 10"/>
+              <a:t>Tariffs</a:t>
+            </a:r>
+            <a:endParaRPr lang="en-US" sz="1600" dirty="0"/>
+          </a:p>
+        </p:txBody>
+      </p:sp>
+      <p:sp>
+        <p:nvSpPr>
+          <p:cNvPr id="17" name="Text 15"/>
+          <p:cNvSpPr txBox="1"/>
+          <p:nvPr/>
+        </p:nvSpPr>
+        <p:spPr>
+          <a:xfrm>
+            <a:off x="640080" y="3429000"/>
+            <a:ext cx="3657600" cy="548640"/>
+          </a:xfrm>
+          <a:prstGeom prst="rect">
+            <a:avLst/>
+          </a:prstGeom>
+          <a:noFill/>
+          <a:ln/>
+        </p:spPr>
+        <p:txBody>
+          <a:bodyPr wrap="square" lIns="0" tIns="0" rIns="0" bIns="0" rtlCol="0" anchor="t"/>
+          <a:lstStyle/>
+          <a:p>
+            <a:pPr indent="0" marL="0">
+              <a:buNone/>
+            </a:pPr>
+            <a:r>
+              <a:rPr lang="en-US" sz="1300" dirty="0">
+                <a:solidFill>
+                  <a:schemeClr val="tx2"/>
+                </a:solidFill>
+              </a:rPr>
+              <a:t>Confirmed lines; PROSEC; CEB</a:t>
+            </a:r>
+            <a:endParaRPr lang="en-US" sz="1300" dirty="0"/>
+          </a:p>
+        </p:txBody>
+      </p:sp>
+      <p:sp>
+        <p:nvSpPr>
+          <p:cNvPr id="18" name="Shape 16"/>
           <p:cNvSpPr/>
           <p:nvPr/>
         </p:nvSpPr>
         <p:spPr>
           <a:xfrm>
-            <a:off x="457200" y="3017520"/>
-            <a:ext cx="411480" cy="411480"/>
+            <a:off x="4663440" y="2697480"/>
+            <a:ext cx="4023360" cy="1417320"/>
+          </a:xfrm>
+          <a:prstGeom prst="roundRect">
+            <a:avLst>
+              <a:gd name="adj" fmla="val 5161"/>
+            </a:avLst>
+          </a:prstGeom>
+          <a:solidFill>
+            <a:srgbClr val="EEF2F7"/>
+          </a:solidFill>
+          <a:ln w="12700">
+            <a:solidFill>
+              <a:srgbClr val="EEF2F7"/>
+            </a:solidFill>
+            <a:prstDash val="solid"/>
+          </a:ln>
+        </p:spPr>
+      </p:sp>
+      <p:sp>
+        <p:nvSpPr>
+          <p:cNvPr id="19" name="Shape 17"/>
+          <p:cNvSpPr/>
+          <p:nvPr/>
+        </p:nvSpPr>
+        <p:spPr>
+          <a:xfrm>
+            <a:off x="4846320" y="2880360"/>
+            <a:ext cx="384048" cy="384048"/>
           </a:xfrm>
           <a:prstGeom prst="ellipse">
             <a:avLst/>
@@ -12952,14 +13309,14 @@
       </p:sp>
       <p:sp>
         <p:nvSpPr>
-          <p:cNvPr id="13" name="Text 11"/>
-          <p:cNvSpPr txBox="1"/>
-          <p:nvPr/>
-        </p:nvSpPr>
-        <p:spPr>
-          <a:xfrm>
-            <a:off x="457200" y="3017520"/>
-            <a:ext cx="411480" cy="411480"/>
+          <p:cNvPr id="20" name="Text 18"/>
+          <p:cNvSpPr txBox="1"/>
+          <p:nvPr/>
+        </p:nvSpPr>
+        <p:spPr>
+          <a:xfrm>
+            <a:off x="4846320" y="2880360"/>
+            <a:ext cx="384048" cy="384048"/>
           </a:xfrm>
           <a:prstGeom prst="rect">
             <a:avLst/>
@@ -12980,7 +13337,7 @@
                   <a:srgbClr val="FFFFFF"/>
                 </a:solidFill>
               </a:rPr>
-              <a:t>4</a:t>
+              <a:t>!</a:t>
             </a:r>
             <a:endParaRPr lang="en-US" sz="1300" dirty="0"/>
           </a:p>
@@ -12988,14 +13345,14 @@
       </p:sp>
       <p:sp>
         <p:nvSpPr>
-          <p:cNvPr id="14" name="Text 12"/>
-          <p:cNvSpPr txBox="1"/>
-          <p:nvPr/>
-        </p:nvSpPr>
-        <p:spPr>
-          <a:xfrm>
-            <a:off x="1051560" y="2971800"/>
-            <a:ext cx="7589520" cy="502920"/>
+          <p:cNvPr id="21" name="Text 19"/>
+          <p:cNvSpPr txBox="1"/>
+          <p:nvPr/>
+        </p:nvSpPr>
+        <p:spPr>
+          <a:xfrm>
+            <a:off x="5394960" y="2880360"/>
+            <a:ext cx="3108960" cy="384048"/>
           </a:xfrm>
           <a:prstGeom prst="rect">
             <a:avLst/>
@@ -13011,111 +13368,50 @@
               <a:buNone/>
             </a:pPr>
             <a:r>
-              <a:rPr lang="en-US" sz="1500" dirty="0">
+              <a:rPr lang="en-US" sz="1600" b="1" dirty="0">
                 <a:solidFill>
                   <a:schemeClr val="tx1"/>
                 </a:solidFill>
               </a:rPr>
-              <a:t>Validate consumption with 10–15 shops</a:t>
-            </a:r>
-            <a:endParaRPr lang="en-US" sz="1500" dirty="0"/>
-          </a:p>
-        </p:txBody>
-      </p:sp>
-      <p:sp>
-        <p:nvSpPr>
-          <p:cNvPr id="15" name="Shape 13"/>
-          <p:cNvSpPr/>
-          <p:nvPr/>
-        </p:nvSpPr>
-        <p:spPr>
-          <a:xfrm>
-            <a:off x="457200" y="3657600"/>
-            <a:ext cx="411480" cy="411480"/>
-          </a:xfrm>
-          <a:prstGeom prst="ellipse">
-            <a:avLst/>
-          </a:prstGeom>
-          <a:solidFill>
-            <a:srgbClr val="0089C2"/>
-          </a:solidFill>
-          <a:ln w="12700">
-            <a:solidFill>
-              <a:srgbClr val="0089C2"/>
-            </a:solidFill>
-            <a:prstDash val="solid"/>
-          </a:ln>
-        </p:spPr>
-      </p:sp>
-      <p:sp>
-        <p:nvSpPr>
-          <p:cNvPr id="16" name="Text 14"/>
-          <p:cNvSpPr txBox="1"/>
-          <p:nvPr/>
-        </p:nvSpPr>
-        <p:spPr>
-          <a:xfrm>
-            <a:off x="457200" y="3657600"/>
-            <a:ext cx="411480" cy="411480"/>
-          </a:xfrm>
-          <a:prstGeom prst="rect">
-            <a:avLst/>
-          </a:prstGeom>
-          <a:noFill/>
-          <a:ln/>
-        </p:spPr>
-        <p:txBody>
-          <a:bodyPr wrap="square" lIns="0" tIns="0" rIns="0" bIns="0" rtlCol="0" anchor="ctr"/>
-          <a:lstStyle/>
-          <a:p>
-            <a:pPr algn="ctr" indent="0" marL="0">
-              <a:buNone/>
-            </a:pPr>
-            <a:r>
-              <a:rPr lang="en-US" sz="1300" b="1" dirty="0">
-                <a:solidFill>
-                  <a:srgbClr val="FFFFFF"/>
-                </a:solidFill>
-              </a:rPr>
-              <a:t>5</a:t>
+              <a:t>Textile learning curve</a:t>
+            </a:r>
+            <a:endParaRPr lang="en-US" sz="1600" dirty="0"/>
+          </a:p>
+        </p:txBody>
+      </p:sp>
+      <p:sp>
+        <p:nvSpPr>
+          <p:cNvPr id="22" name="Text 20"/>
+          <p:cNvSpPr txBox="1"/>
+          <p:nvPr/>
+        </p:nvSpPr>
+        <p:spPr>
+          <a:xfrm>
+            <a:off x="4846320" y="3429000"/>
+            <a:ext cx="3657600" cy="548640"/>
+          </a:xfrm>
+          <a:prstGeom prst="rect">
+            <a:avLst/>
+          </a:prstGeom>
+          <a:noFill/>
+          <a:ln/>
+        </p:spPr>
+        <p:txBody>
+          <a:bodyPr wrap="square" lIns="0" tIns="0" rIns="0" bIns="0" rtlCol="0" anchor="t"/>
+          <a:lstStyle/>
+          <a:p>
+            <a:pPr indent="0" marL="0">
+              <a:buNone/>
+            </a:pPr>
+            <a:r>
+              <a:rPr lang="en-US" sz="1300" dirty="0">
+                <a:solidFill>
+                  <a:schemeClr val="tx2"/>
+                </a:solidFill>
+              </a:rPr>
+              <a:t>CLT certification and industry hires</a:t>
             </a:r>
             <a:endParaRPr lang="en-US" sz="1300" dirty="0"/>
-          </a:p>
-        </p:txBody>
-      </p:sp>
-      <p:sp>
-        <p:nvSpPr>
-          <p:cNvPr id="17" name="Text 15"/>
-          <p:cNvSpPr txBox="1"/>
-          <p:nvPr/>
-        </p:nvSpPr>
-        <p:spPr>
-          <a:xfrm>
-            <a:off x="1051560" y="3611880"/>
-            <a:ext cx="7589520" cy="502920"/>
-          </a:xfrm>
-          <a:prstGeom prst="rect">
-            <a:avLst/>
-          </a:prstGeom>
-          <a:noFill/>
-          <a:ln/>
-        </p:spPr>
-        <p:txBody>
-          <a:bodyPr wrap="square" lIns="0" tIns="0" rIns="0" bIns="0" rtlCol="0" anchor="ctr"/>
-          <a:lstStyle/>
-          <a:p>
-            <a:pPr indent="0" marL="0">
-              <a:buNone/>
-            </a:pPr>
-            <a:r>
-              <a:rPr lang="en-US" sz="1500" dirty="0">
-                <a:solidFill>
-                  <a:schemeClr val="tx1"/>
-                </a:solidFill>
-              </a:rPr>
-              <a:t>Letter of intent and 6-month launch plan</a:t>
-            </a:r>
-            <a:endParaRPr lang="en-US" sz="1500" dirty="0"/>
           </a:p>
         </p:txBody>
       </p:sp>
@@ -13178,6 +13474,602 @@
 <file path=ppt/slides/slide24.xml><?xml version="1.0" encoding="utf-8"?>
 <p:sld xmlns:a="http://schemas.openxmlformats.org/drawingml/2006/main" xmlns:r="http://schemas.openxmlformats.org/officeDocument/2006/relationships" xmlns:p="http://schemas.openxmlformats.org/presentationml/2006/main">
   <p:cSld name="Slide 24">
+    <p:spTree>
+      <p:nvGrpSpPr>
+        <p:cNvPr id="1" name=""/>
+        <p:cNvGrpSpPr/>
+        <p:nvPr/>
+      </p:nvGrpSpPr>
+      <p:grpSpPr>
+        <a:xfrm>
+          <a:off x="0" y="0"/>
+          <a:ext cx="0" cy="0"/>
+          <a:chOff x="0" y="0"/>
+          <a:chExt cx="0" cy="0"/>
+        </a:xfrm>
+      </p:grpSpPr>
+      <p:sp>
+        <p:nvSpPr>
+          <p:cNvPr id="2" name="Text 0"/>
+          <p:cNvSpPr/>
+          <p:nvPr>
+            <p:ph idx="100" type="title" hasCustomPrompt="1"/>
+          </p:nvPr>
+        </p:nvSpPr>
+        <p:spPr>
+          <a:xfrm>
+            <a:off x="457200" y="274320"/>
+            <a:ext cx="8229600" cy="640080"/>
+          </a:xfrm>
+          <a:prstGeom prst="rect">
+            <a:avLst/>
+          </a:prstGeom>
+          <a:noFill/>
+          <a:ln/>
+        </p:spPr>
+        <p:txBody>
+          <a:bodyPr wrap="square" rtlCol="0" anchor="ctr"/>
+          <a:lstStyle/>
+          <a:p>
+            <a:pPr indent="0" marL="0">
+              <a:buNone/>
+            </a:pPr>
+            <a:r>
+              <a:rPr lang="en-US" sz="2600" b="1" dirty="0">
+                <a:solidFill>
+                  <a:schemeClr val="tx1"/>
+                </a:solidFill>
+              </a:rPr>
+              <a:t>Next steps</a:t>
+            </a:r>
+            <a:endParaRPr lang="en-US" sz="2600" dirty="0"/>
+          </a:p>
+        </p:txBody>
+      </p:sp>
+      <p:sp>
+        <p:nvSpPr>
+          <p:cNvPr id="3" name="Shape 1"/>
+          <p:cNvSpPr/>
+          <p:nvPr/>
+        </p:nvSpPr>
+        <p:spPr>
+          <a:xfrm>
+            <a:off x="457200" y="1097280"/>
+            <a:ext cx="411480" cy="411480"/>
+          </a:xfrm>
+          <a:prstGeom prst="ellipse">
+            <a:avLst/>
+          </a:prstGeom>
+          <a:solidFill>
+            <a:srgbClr val="0089C2"/>
+          </a:solidFill>
+          <a:ln w="12700">
+            <a:solidFill>
+              <a:srgbClr val="0089C2"/>
+            </a:solidFill>
+            <a:prstDash val="solid"/>
+          </a:ln>
+        </p:spPr>
+      </p:sp>
+      <p:sp>
+        <p:nvSpPr>
+          <p:cNvPr id="4" name="Text 2"/>
+          <p:cNvSpPr txBox="1"/>
+          <p:nvPr/>
+        </p:nvSpPr>
+        <p:spPr>
+          <a:xfrm>
+            <a:off x="457200" y="1097280"/>
+            <a:ext cx="411480" cy="411480"/>
+          </a:xfrm>
+          <a:prstGeom prst="rect">
+            <a:avLst/>
+          </a:prstGeom>
+          <a:noFill/>
+          <a:ln/>
+        </p:spPr>
+        <p:txBody>
+          <a:bodyPr wrap="square" lIns="0" tIns="0" rIns="0" bIns="0" rtlCol="0" anchor="ctr"/>
+          <a:lstStyle/>
+          <a:p>
+            <a:pPr algn="ctr" indent="0" marL="0">
+              <a:buNone/>
+            </a:pPr>
+            <a:r>
+              <a:rPr lang="en-US" sz="1300" b="1" dirty="0">
+                <a:solidFill>
+                  <a:srgbClr val="FFFFFF"/>
+                </a:solidFill>
+              </a:rPr>
+              <a:t>1</a:t>
+            </a:r>
+            <a:endParaRPr lang="en-US" sz="1300" dirty="0"/>
+          </a:p>
+        </p:txBody>
+      </p:sp>
+      <p:sp>
+        <p:nvSpPr>
+          <p:cNvPr id="5" name="Text 3"/>
+          <p:cNvSpPr txBox="1"/>
+          <p:nvPr/>
+        </p:nvSpPr>
+        <p:spPr>
+          <a:xfrm>
+            <a:off x="1051560" y="1051560"/>
+            <a:ext cx="7589520" cy="502920"/>
+          </a:xfrm>
+          <a:prstGeom prst="rect">
+            <a:avLst/>
+          </a:prstGeom>
+          <a:noFill/>
+          <a:ln/>
+        </p:spPr>
+        <p:txBody>
+          <a:bodyPr wrap="square" lIns="0" tIns="0" rIns="0" bIns="0" rtlCol="0" anchor="ctr"/>
+          <a:lstStyle/>
+          <a:p>
+            <a:pPr indent="0" marL="0">
+              <a:buNone/>
+            </a:pPr>
+            <a:r>
+              <a:rPr lang="en-US" sz="1500" dirty="0">
+                <a:solidFill>
+                  <a:schemeClr val="tx1"/>
+                </a:solidFill>
+              </a:rPr>
+              <a:t>CLT formal quotation (CLT-016B, CLT-012R, SM60-85, consumables)</a:t>
+            </a:r>
+            <a:endParaRPr lang="en-US" sz="1500" dirty="0"/>
+          </a:p>
+        </p:txBody>
+      </p:sp>
+      <p:sp>
+        <p:nvSpPr>
+          <p:cNvPr id="6" name="Shape 4"/>
+          <p:cNvSpPr/>
+          <p:nvPr/>
+        </p:nvSpPr>
+        <p:spPr>
+          <a:xfrm>
+            <a:off x="457200" y="1737360"/>
+            <a:ext cx="411480" cy="411480"/>
+          </a:xfrm>
+          <a:prstGeom prst="ellipse">
+            <a:avLst/>
+          </a:prstGeom>
+          <a:solidFill>
+            <a:srgbClr val="C2185B"/>
+          </a:solidFill>
+          <a:ln w="12700">
+            <a:solidFill>
+              <a:srgbClr val="C2185B"/>
+            </a:solidFill>
+            <a:prstDash val="solid"/>
+          </a:ln>
+        </p:spPr>
+      </p:sp>
+      <p:sp>
+        <p:nvSpPr>
+          <p:cNvPr id="7" name="Text 5"/>
+          <p:cNvSpPr txBox="1"/>
+          <p:nvPr/>
+        </p:nvSpPr>
+        <p:spPr>
+          <a:xfrm>
+            <a:off x="457200" y="1737360"/>
+            <a:ext cx="411480" cy="411480"/>
+          </a:xfrm>
+          <a:prstGeom prst="rect">
+            <a:avLst/>
+          </a:prstGeom>
+          <a:noFill/>
+          <a:ln/>
+        </p:spPr>
+        <p:txBody>
+          <a:bodyPr wrap="square" lIns="0" tIns="0" rIns="0" bIns="0" rtlCol="0" anchor="ctr"/>
+          <a:lstStyle/>
+          <a:p>
+            <a:pPr algn="ctr" indent="0" marL="0">
+              <a:buNone/>
+            </a:pPr>
+            <a:r>
+              <a:rPr lang="en-US" sz="1300" b="1" dirty="0">
+                <a:solidFill>
+                  <a:srgbClr val="FFFFFF"/>
+                </a:solidFill>
+              </a:rPr>
+              <a:t>2</a:t>
+            </a:r>
+            <a:endParaRPr lang="en-US" sz="1300" dirty="0"/>
+          </a:p>
+        </p:txBody>
+      </p:sp>
+      <p:sp>
+        <p:nvSpPr>
+          <p:cNvPr id="8" name="Text 6"/>
+          <p:cNvSpPr txBox="1"/>
+          <p:nvPr/>
+        </p:nvSpPr>
+        <p:spPr>
+          <a:xfrm>
+            <a:off x="1051560" y="1691640"/>
+            <a:ext cx="7589520" cy="502920"/>
+          </a:xfrm>
+          <a:prstGeom prst="rect">
+            <a:avLst/>
+          </a:prstGeom>
+          <a:noFill/>
+          <a:ln/>
+        </p:spPr>
+        <p:txBody>
+          <a:bodyPr wrap="square" lIns="0" tIns="0" rIns="0" bIns="0" rtlCol="0" anchor="ctr"/>
+          <a:lstStyle/>
+          <a:p>
+            <a:pPr indent="0" marL="0">
+              <a:buNone/>
+            </a:pPr>
+            <a:r>
+              <a:rPr lang="en-US" sz="1500" dirty="0">
+                <a:solidFill>
+                  <a:schemeClr val="tx1"/>
+                </a:solidFill>
+              </a:rPr>
+              <a:t>Meeting with CLT’s owners to review terms</a:t>
+            </a:r>
+            <a:endParaRPr lang="en-US" sz="1500" dirty="0"/>
+          </a:p>
+        </p:txBody>
+      </p:sp>
+      <p:sp>
+        <p:nvSpPr>
+          <p:cNvPr id="9" name="Shape 7"/>
+          <p:cNvSpPr/>
+          <p:nvPr/>
+        </p:nvSpPr>
+        <p:spPr>
+          <a:xfrm>
+            <a:off x="457200" y="2377440"/>
+            <a:ext cx="411480" cy="411480"/>
+          </a:xfrm>
+          <a:prstGeom prst="ellipse">
+            <a:avLst/>
+          </a:prstGeom>
+          <a:solidFill>
+            <a:srgbClr val="F2B705"/>
+          </a:solidFill>
+          <a:ln w="12700">
+            <a:solidFill>
+              <a:srgbClr val="F2B705"/>
+            </a:solidFill>
+            <a:prstDash val="solid"/>
+          </a:ln>
+        </p:spPr>
+      </p:sp>
+      <p:sp>
+        <p:nvSpPr>
+          <p:cNvPr id="10" name="Text 8"/>
+          <p:cNvSpPr txBox="1"/>
+          <p:nvPr/>
+        </p:nvSpPr>
+        <p:spPr>
+          <a:xfrm>
+            <a:off x="457200" y="2377440"/>
+            <a:ext cx="411480" cy="411480"/>
+          </a:xfrm>
+          <a:prstGeom prst="rect">
+            <a:avLst/>
+          </a:prstGeom>
+          <a:noFill/>
+          <a:ln/>
+        </p:spPr>
+        <p:txBody>
+          <a:bodyPr wrap="square" lIns="0" tIns="0" rIns="0" bIns="0" rtlCol="0" anchor="ctr"/>
+          <a:lstStyle/>
+          <a:p>
+            <a:pPr algn="ctr" indent="0" marL="0">
+              <a:buNone/>
+            </a:pPr>
+            <a:r>
+              <a:rPr lang="en-US" sz="1300" b="1" dirty="0">
+                <a:solidFill>
+                  <a:srgbClr val="1B1F3B"/>
+                </a:solidFill>
+              </a:rPr>
+              <a:t>3</a:t>
+            </a:r>
+            <a:endParaRPr lang="en-US" sz="1300" dirty="0"/>
+          </a:p>
+        </p:txBody>
+      </p:sp>
+      <p:sp>
+        <p:nvSpPr>
+          <p:cNvPr id="11" name="Text 9"/>
+          <p:cNvSpPr txBox="1"/>
+          <p:nvPr/>
+        </p:nvSpPr>
+        <p:spPr>
+          <a:xfrm>
+            <a:off x="1051560" y="2331720"/>
+            <a:ext cx="7589520" cy="502920"/>
+          </a:xfrm>
+          <a:prstGeom prst="rect">
+            <a:avLst/>
+          </a:prstGeom>
+          <a:noFill/>
+          <a:ln/>
+        </p:spPr>
+        <p:txBody>
+          <a:bodyPr wrap="square" lIns="0" tIns="0" rIns="0" bIns="0" rtlCol="0" anchor="ctr"/>
+          <a:lstStyle/>
+          <a:p>
+            <a:pPr indent="0" marL="0">
+              <a:buNone/>
+            </a:pPr>
+            <a:r>
+              <a:rPr lang="en-US" sz="1500" dirty="0">
+                <a:solidFill>
+                  <a:schemeClr val="tx1"/>
+                </a:solidFill>
+              </a:rPr>
+              <a:t>Confirm duties with a customs broker</a:t>
+            </a:r>
+            <a:endParaRPr lang="en-US" sz="1500" dirty="0"/>
+          </a:p>
+        </p:txBody>
+      </p:sp>
+      <p:sp>
+        <p:nvSpPr>
+          <p:cNvPr id="12" name="Shape 10"/>
+          <p:cNvSpPr/>
+          <p:nvPr/>
+        </p:nvSpPr>
+        <p:spPr>
+          <a:xfrm>
+            <a:off x="457200" y="3017520"/>
+            <a:ext cx="411480" cy="411480"/>
+          </a:xfrm>
+          <a:prstGeom prst="ellipse">
+            <a:avLst/>
+          </a:prstGeom>
+          <a:solidFill>
+            <a:srgbClr val="1B1F3B"/>
+          </a:solidFill>
+          <a:ln w="12700">
+            <a:solidFill>
+              <a:srgbClr val="1B1F3B"/>
+            </a:solidFill>
+            <a:prstDash val="solid"/>
+          </a:ln>
+        </p:spPr>
+      </p:sp>
+      <p:sp>
+        <p:nvSpPr>
+          <p:cNvPr id="13" name="Text 11"/>
+          <p:cNvSpPr txBox="1"/>
+          <p:nvPr/>
+        </p:nvSpPr>
+        <p:spPr>
+          <a:xfrm>
+            <a:off x="457200" y="3017520"/>
+            <a:ext cx="411480" cy="411480"/>
+          </a:xfrm>
+          <a:prstGeom prst="rect">
+            <a:avLst/>
+          </a:prstGeom>
+          <a:noFill/>
+          <a:ln/>
+        </p:spPr>
+        <p:txBody>
+          <a:bodyPr wrap="square" lIns="0" tIns="0" rIns="0" bIns="0" rtlCol="0" anchor="ctr"/>
+          <a:lstStyle/>
+          <a:p>
+            <a:pPr algn="ctr" indent="0" marL="0">
+              <a:buNone/>
+            </a:pPr>
+            <a:r>
+              <a:rPr lang="en-US" sz="1300" b="1" dirty="0">
+                <a:solidFill>
+                  <a:srgbClr val="FFFFFF"/>
+                </a:solidFill>
+              </a:rPr>
+              <a:t>4</a:t>
+            </a:r>
+            <a:endParaRPr lang="en-US" sz="1300" dirty="0"/>
+          </a:p>
+        </p:txBody>
+      </p:sp>
+      <p:sp>
+        <p:nvSpPr>
+          <p:cNvPr id="14" name="Text 12"/>
+          <p:cNvSpPr txBox="1"/>
+          <p:nvPr/>
+        </p:nvSpPr>
+        <p:spPr>
+          <a:xfrm>
+            <a:off x="1051560" y="2971800"/>
+            <a:ext cx="7589520" cy="502920"/>
+          </a:xfrm>
+          <a:prstGeom prst="rect">
+            <a:avLst/>
+          </a:prstGeom>
+          <a:noFill/>
+          <a:ln/>
+        </p:spPr>
+        <p:txBody>
+          <a:bodyPr wrap="square" lIns="0" tIns="0" rIns="0" bIns="0" rtlCol="0" anchor="ctr"/>
+          <a:lstStyle/>
+          <a:p>
+            <a:pPr indent="0" marL="0">
+              <a:buNone/>
+            </a:pPr>
+            <a:r>
+              <a:rPr lang="en-US" sz="1500" dirty="0">
+                <a:solidFill>
+                  <a:schemeClr val="tx1"/>
+                </a:solidFill>
+              </a:rPr>
+              <a:t>Validate consumption with 10–15 shops</a:t>
+            </a:r>
+            <a:endParaRPr lang="en-US" sz="1500" dirty="0"/>
+          </a:p>
+        </p:txBody>
+      </p:sp>
+      <p:sp>
+        <p:nvSpPr>
+          <p:cNvPr id="15" name="Shape 13"/>
+          <p:cNvSpPr/>
+          <p:nvPr/>
+        </p:nvSpPr>
+        <p:spPr>
+          <a:xfrm>
+            <a:off x="457200" y="3657600"/>
+            <a:ext cx="411480" cy="411480"/>
+          </a:xfrm>
+          <a:prstGeom prst="ellipse">
+            <a:avLst/>
+          </a:prstGeom>
+          <a:solidFill>
+            <a:srgbClr val="0089C2"/>
+          </a:solidFill>
+          <a:ln w="12700">
+            <a:solidFill>
+              <a:srgbClr val="0089C2"/>
+            </a:solidFill>
+            <a:prstDash val="solid"/>
+          </a:ln>
+        </p:spPr>
+      </p:sp>
+      <p:sp>
+        <p:nvSpPr>
+          <p:cNvPr id="16" name="Text 14"/>
+          <p:cNvSpPr txBox="1"/>
+          <p:nvPr/>
+        </p:nvSpPr>
+        <p:spPr>
+          <a:xfrm>
+            <a:off x="457200" y="3657600"/>
+            <a:ext cx="411480" cy="411480"/>
+          </a:xfrm>
+          <a:prstGeom prst="rect">
+            <a:avLst/>
+          </a:prstGeom>
+          <a:noFill/>
+          <a:ln/>
+        </p:spPr>
+        <p:txBody>
+          <a:bodyPr wrap="square" lIns="0" tIns="0" rIns="0" bIns="0" rtlCol="0" anchor="ctr"/>
+          <a:lstStyle/>
+          <a:p>
+            <a:pPr algn="ctr" indent="0" marL="0">
+              <a:buNone/>
+            </a:pPr>
+            <a:r>
+              <a:rPr lang="en-US" sz="1300" b="1" dirty="0">
+                <a:solidFill>
+                  <a:srgbClr val="FFFFFF"/>
+                </a:solidFill>
+              </a:rPr>
+              <a:t>5</a:t>
+            </a:r>
+            <a:endParaRPr lang="en-US" sz="1300" dirty="0"/>
+          </a:p>
+        </p:txBody>
+      </p:sp>
+      <p:sp>
+        <p:nvSpPr>
+          <p:cNvPr id="17" name="Text 15"/>
+          <p:cNvSpPr txBox="1"/>
+          <p:nvPr/>
+        </p:nvSpPr>
+        <p:spPr>
+          <a:xfrm>
+            <a:off x="1051560" y="3611880"/>
+            <a:ext cx="7589520" cy="502920"/>
+          </a:xfrm>
+          <a:prstGeom prst="rect">
+            <a:avLst/>
+          </a:prstGeom>
+          <a:noFill/>
+          <a:ln/>
+        </p:spPr>
+        <p:txBody>
+          <a:bodyPr wrap="square" lIns="0" tIns="0" rIns="0" bIns="0" rtlCol="0" anchor="ctr"/>
+          <a:lstStyle/>
+          <a:p>
+            <a:pPr indent="0" marL="0">
+              <a:buNone/>
+            </a:pPr>
+            <a:r>
+              <a:rPr lang="en-US" sz="1500" dirty="0">
+                <a:solidFill>
+                  <a:schemeClr val="tx1"/>
+                </a:solidFill>
+              </a:rPr>
+              <a:t>Letter of intent and 6-month launch plan</a:t>
+            </a:r>
+            <a:endParaRPr lang="en-US" sz="1500" dirty="0"/>
+          </a:p>
+        </p:txBody>
+      </p:sp>
+      <p:sp>
+        <p:nvSpPr>
+          <p:cNvPr id="25" name="Slide Number Placeholder 0"/>
+          <p:cNvSpPr>
+            <a:spLocks noGrp="1"/>
+          </p:cNvSpPr>
+          <p:nvPr>
+            <p:ph type="sldNum" sz="quarter" idx="4294967295"/>
+          </p:nvPr>
+        </p:nvSpPr>
+        <p:spPr>
+          <a:xfrm>
+            <a:off x="8229600" y="4800600"/>
+            <a:ext cx="457200" cy="228600"/>
+          </a:xfrm>
+          <a:prstGeom prst="rect">
+            <a:avLst/>
+          </a:prstGeom>
+          <a:extLst>
+            <a:ext uri="{C572A759-6A51-4108-AA02-DFA0A04FC94B}">
+              <ma14:wrappingTextBoxFlag xmlns:ma14="http://schemas.microsoft.com/office/mac/drawingml/2011/main" val="0"/>
+            </a:ext>
+          </a:extLst>
+        </p:spPr>
+        <p:txBody>
+          <a:bodyPr/>
+          <a:lstStyle>
+            <a:lvl1pPr>
+              <a:defRPr sz="900">
+                <a:solidFill>
+                  <a:srgbClr val="7A8299"/>
+                </a:solidFill>
+              </a:defRPr>
+            </a:lvl1pPr>
+          </a:lstStyle>
+          <a:p>
+            <a:pPr algn="r"/>
+            <a:fld id="{F7021451-1387-4CA6-816F-3879F97B5CBC}" type="slidenum">
+              <a:rPr b="0" lang="en-US"/>
+              <a:t>24</a:t>
+            </a:fld>
+            <a:endParaRPr lang="en-US"/>
+          </a:p>
+        </p:txBody>
+      </p:sp>
+    </p:spTree>
+  </p:cSld>
+  <p:clrMapOvr>
+    <a:masterClrMapping/>
+  </p:clrMapOvr>
+  <p:transition spd="med">
+    <p:fade/>
+  </p:transition>
+</p:sld>
+</file>
+
+<file path=ppt/slides/slide25.xml><?xml version="1.0" encoding="utf-8"?>
+<p:sld xmlns:a="http://schemas.openxmlformats.org/drawingml/2006/main" xmlns:r="http://schemas.openxmlformats.org/officeDocument/2006/relationships" xmlns:p="http://schemas.openxmlformats.org/presentationml/2006/main">
+  <p:cSld name="Slide 25">
     <p:spTree>
       <p:nvGrpSpPr>
         <p:cNvPr id="1" name=""/>

--- a/propuesta-clt/CLT_Proposal_Presentation_EN.pptx
+++ b/propuesta-clt/CLT_Proposal_Presentation_EN.pptx
@@ -38,9 +38,10 @@
     <p:sldId id="286" r:id="rId32"/>
     <p:sldId id="287" r:id="rId33"/>
     <p:sldId id="288" r:id="rId34"/>
+    <p:sldId id="289" r:id="rId35"/>
   </p:sldIdLst>
   <p:notesMasterIdLst>
-    <p:notesMasterId r:id="rId35"/>
+    <p:notesMasterId r:id="rId36"/>
   </p:notesMasterIdLst>
   <p:sldSz cx="9144000" cy="5143500"/>
   <p:notesSz cx="5143500" cy="9144000"/>
@@ -139,13 +140,13 @@
   <p:extLst>
     <p:ext uri="{521415D9-36F7-43E2-AB2F-B90AF26B5E84}">
       <p14:sectionLst xmlns:p14="http://schemas.microsoft.com/office/powerpoint/2010/main">
-        <p14:section name="Opening" id="{55828471-64d6-f378-c6ce-1d40cd9ddfd1}">
+        <p14:section name="Opening" id="{42826b6a-84fc-bf56-e0ce-38b57c5184c0}">
           <p14:sldIdLst>
             <p14:sldId id="256"/>
             <p14:sldId id="257"/>
           </p14:sldIdLst>
         </p14:section>
-        <p14:section name="The manufacturer" id="{9daeed64-f679-d475-3830-b6f0db5c5251}">
+        <p14:section name="The manufacturer" id="{fbc6f1a4-b551-2614-458b-c3722c3752ad}">
           <p14:sldIdLst>
             <p14:sldId id="258"/>
             <p14:sldId id="259"/>
@@ -156,7 +157,7 @@
             <p14:sldId id="264"/>
           </p14:sldIdLst>
         </p14:section>
-        <p14:section name="The Mexican market" id="{cbcd46ab-53ad-5178-d549-27b4f6cb25a6}">
+        <p14:section name="The Mexican market" id="{068d48d4-4d83-733c-ebe3-b5e73474db3d}">
           <p14:sldIdLst>
             <p14:sldId id="265"/>
             <p14:sldId id="266"/>
@@ -171,7 +172,7 @@
             <p14:sldId id="275"/>
           </p14:sldIdLst>
         </p14:section>
-        <p14:section name="Why TID · VSP · CEB" id="{f8f4bc9b-d35f-5cd6-3447-1c598e2b42f5}">
+        <p14:section name="Why TID · VSP · CEB" id="{cf684f60-a510-88db-f1d7-1f4852658d7a}">
           <p14:sldIdLst>
             <p14:sldId id="276"/>
             <p14:sldId id="277"/>
@@ -179,21 +180,22 @@
             <p14:sldId id="279"/>
           </p14:sldIdLst>
         </p14:section>
-        <p14:section name="Plan and investment" id="{57cfc6c2-4d41-5f7a-11fa-58a53b32867c}">
+        <p14:section name="Plan and investment" id="{eacd4fdf-e02a-e23e-6351-dedbf2a27f22}">
           <p14:sldIdLst>
             <p14:sldId id="280"/>
             <p14:sldId id="281"/>
             <p14:sldId id="282"/>
             <p14:sldId id="283"/>
+            <p14:sldId id="284"/>
           </p14:sldIdLst>
         </p14:section>
-        <p14:section name="The proposal" id="{f7499568-7036-cd0d-58d6-fce245e2aed0}">
+        <p14:section name="The proposal" id="{e373942f-88bd-e4b0-dbf0-48f001c99a5b}">
           <p14:sldIdLst>
-            <p14:sldId id="284"/>
             <p14:sldId id="285"/>
             <p14:sldId id="286"/>
             <p14:sldId id="287"/>
             <p14:sldId id="288"/>
+            <p14:sldId id="289"/>
           </p14:sldIdLst>
         </p14:section>
       </p14:sectionLst>
@@ -3640,6 +3642,94 @@
             <a:fld id="{F7021451-1387-4CA6-816F-3879F97B5CBC}" type="slidenum">
               <a:rPr lang="en-US"/>
               <a:t>33</a:t>
+            </a:fld>
+            <a:endParaRPr lang="en-US"/>
+          </a:p>
+        </p:txBody>
+      </p:sp>
+    </p:spTree>
+    <p:extLst>
+      <p:ext uri="{BB962C8B-B14F-4D97-AF65-F5344CB8AC3E}">
+        <p14:creationId xmlns:p14="http://schemas.microsoft.com/office/powerpoint/2010/main" val="1024086991"/>
+      </p:ext>
+    </p:extLst>
+  </p:cSld>
+  <p:clrMapOvr>
+    <a:masterClrMapping/>
+  </p:clrMapOvr>
+</p:notes>
+</file>
+
+<file path=ppt/notesSlides/notesSlide34.xml><?xml version="1.0" encoding="utf-8"?>
+<p:notes xmlns:a="http://schemas.openxmlformats.org/drawingml/2006/main" xmlns:r="http://schemas.openxmlformats.org/officeDocument/2006/relationships" xmlns:p="http://schemas.openxmlformats.org/presentationml/2006/main">
+  <p:cSld>
+    <p:spTree>
+      <p:nvGrpSpPr>
+        <p:cNvPr id="1" name=""/>
+        <p:cNvGrpSpPr/>
+        <p:nvPr/>
+      </p:nvGrpSpPr>
+      <p:grpSpPr>
+        <a:xfrm>
+          <a:off x="0" y="0"/>
+          <a:ext cx="0" cy="0"/>
+          <a:chOff x="0" y="0"/>
+          <a:chExt cx="0" cy="0"/>
+        </a:xfrm>
+      </p:grpSpPr>
+      <p:sp>
+        <p:nvSpPr>
+          <p:cNvPr id="2" name="Slide Image Placeholder 1"/>
+          <p:cNvSpPr>
+            <a:spLocks noGrp="1" noRot="1" noChangeAspect="1"/>
+          </p:cNvSpPr>
+          <p:nvPr>
+            <p:ph type="sldImg"/>
+          </p:nvPr>
+        </p:nvSpPr>
+        <p:spPr/>
+      </p:sp>
+      <p:sp>
+        <p:nvSpPr>
+          <p:cNvPr id="3" name="Notes Placeholder 2"/>
+          <p:cNvSpPr>
+            <a:spLocks noGrp="1"/>
+          </p:cNvSpPr>
+          <p:nvPr>
+            <p:ph type="body" idx="1"/>
+          </p:nvPr>
+        </p:nvSpPr>
+        <p:spPr/>
+        <p:txBody>
+          <a:bodyPr/>
+          <a:lstStyle/>
+          <a:p>
+            <a:r>
+              <a:rPr lang="en-US" dirty="0"/>
+              <a:t/>
+            </a:r>
+            <a:endParaRPr lang="en-US" dirty="0"/>
+          </a:p>
+        </p:txBody>
+      </p:sp>
+      <p:sp>
+        <p:nvSpPr>
+          <p:cNvPr id="4" name="Slide Number Placeholder 3"/>
+          <p:cNvSpPr>
+            <a:spLocks noGrp="1"/>
+          </p:cNvSpPr>
+          <p:nvPr>
+            <p:ph type="sldNum" sz="quarter" idx="10"/>
+          </p:nvPr>
+        </p:nvSpPr>
+        <p:spPr/>
+        <p:txBody>
+          <a:bodyPr/>
+          <a:lstStyle/>
+          <a:p>
+            <a:fld id="{F7021451-1387-4CA6-816F-3879F97B5CBC}" type="slidenum">
+              <a:rPr lang="en-US"/>
+              <a:t>34</a:t>
             </a:fld>
             <a:endParaRPr lang="en-US"/>
           </a:p>
@@ -22157,7 +22247,7 @@
                   <a:schemeClr val="tx1"/>
                 </a:solidFill>
               </a:rPr>
-              <a:t>Initial investment</a:t>
+              <a:t>Marketing plan: becoming No. 1 in Mexico</a:t>
             </a:r>
             <a:endParaRPr lang="en-US" sz="2600" dirty="0"/>
           </a:p>
@@ -22171,12 +22261,75 @@
         </p:nvSpPr>
         <p:spPr>
           <a:xfrm>
-            <a:off x="457200" y="1097280"/>
-            <a:ext cx="2606040" cy="2834640"/>
+            <a:off x="457200" y="960120"/>
+            <a:ext cx="8229600" cy="502920"/>
           </a:xfrm>
           <a:prstGeom prst="roundRect">
             <a:avLst>
-              <a:gd name="adj" fmla="val 2807"/>
+              <a:gd name="adj" fmla="val 14545"/>
+            </a:avLst>
+          </a:prstGeom>
+          <a:solidFill>
+            <a:srgbClr val="1B1F3B"/>
+          </a:solidFill>
+          <a:ln w="12700">
+            <a:solidFill>
+              <a:srgbClr val="1B1F3B"/>
+            </a:solidFill>
+            <a:prstDash val="solid"/>
+          </a:ln>
+        </p:spPr>
+      </p:sp>
+      <p:sp>
+        <p:nvSpPr>
+          <p:cNvPr id="4" name="Text 2"/>
+          <p:cNvSpPr txBox="1"/>
+          <p:nvPr/>
+        </p:nvSpPr>
+        <p:spPr>
+          <a:xfrm>
+            <a:off x="640080" y="960120"/>
+            <a:ext cx="7863840" cy="502920"/>
+          </a:xfrm>
+          <a:prstGeom prst="rect">
+            <a:avLst/>
+          </a:prstGeom>
+          <a:noFill/>
+          <a:ln/>
+        </p:spPr>
+        <p:txBody>
+          <a:bodyPr wrap="square" lIns="0" tIns="0" rIns="0" bIns="0" rtlCol="0" anchor="ctr"/>
+          <a:lstStyle/>
+          <a:p>
+            <a:pPr indent="0" marL="0">
+              <a:buNone/>
+            </a:pPr>
+            <a:r>
+              <a:rPr lang="en-US" sz="1500" b="1" dirty="0">
+                <a:solidFill>
+                  <a:srgbClr val="F2B705"/>
+                </a:solidFill>
+              </a:rPr>
+              <a:t>“Screen + digital. One pass.” — with chemistry and service in Mexico</a:t>
+            </a:r>
+            <a:endParaRPr lang="en-US" sz="1500" dirty="0"/>
+          </a:p>
+        </p:txBody>
+      </p:sp>
+      <p:sp>
+        <p:nvSpPr>
+          <p:cNvPr id="5" name="Shape 3"/>
+          <p:cNvSpPr/>
+          <p:nvPr/>
+        </p:nvSpPr>
+        <p:spPr>
+          <a:xfrm>
+            <a:off x="457200" y="1645920"/>
+            <a:ext cx="4846320" cy="621792"/>
+          </a:xfrm>
+          <a:prstGeom prst="roundRect">
+            <a:avLst>
+              <a:gd name="adj" fmla="val 11765"/>
             </a:avLst>
           </a:prstGeom>
           <a:solidFill>
@@ -22192,14 +22345,39 @@
       </p:sp>
       <p:sp>
         <p:nvSpPr>
-          <p:cNvPr id="4" name="Text 2"/>
+          <p:cNvPr id="6" name="Shape 4"/>
+          <p:cNvSpPr/>
+          <p:nvPr/>
+        </p:nvSpPr>
+        <p:spPr>
+          <a:xfrm>
+            <a:off x="594360" y="1773936"/>
+            <a:ext cx="365760" cy="365760"/>
+          </a:xfrm>
+          <a:prstGeom prst="ellipse">
+            <a:avLst/>
+          </a:prstGeom>
+          <a:solidFill>
+            <a:srgbClr val="0089C2"/>
+          </a:solidFill>
+          <a:ln w="12700">
+            <a:solidFill>
+              <a:srgbClr val="0089C2"/>
+            </a:solidFill>
+            <a:prstDash val="solid"/>
+          </a:ln>
+        </p:spPr>
+      </p:sp>
+      <p:sp>
+        <p:nvSpPr>
+          <p:cNvPr id="7" name="Text 5"/>
           <p:cNvSpPr txBox="1"/>
           <p:nvPr/>
         </p:nvSpPr>
         <p:spPr>
           <a:xfrm>
-            <a:off x="640080" y="1554480"/>
-            <a:ext cx="2240280" cy="365760"/>
+            <a:off x="594360" y="1773936"/>
+            <a:ext cx="365760" cy="365760"/>
           </a:xfrm>
           <a:prstGeom prst="rect">
             <a:avLst/>
@@ -22211,31 +22389,67 @@
           <a:bodyPr wrap="square" lIns="0" tIns="0" rIns="0" bIns="0" rtlCol="0" anchor="ctr"/>
           <a:lstStyle/>
           <a:p>
+            <a:pPr algn="ctr" indent="0" marL="0">
+              <a:buNone/>
+            </a:pPr>
+            <a:r>
+              <a:rPr lang="en-US" sz="1300" b="1" dirty="0">
+                <a:solidFill>
+                  <a:srgbClr val="FFFFFF"/>
+                </a:solidFill>
+              </a:rPr>
+              <a:t>1</a:t>
+            </a:r>
+            <a:endParaRPr lang="en-US" sz="1300" dirty="0"/>
+          </a:p>
+        </p:txBody>
+      </p:sp>
+      <p:sp>
+        <p:nvSpPr>
+          <p:cNvPr id="8" name="Text 6"/>
+          <p:cNvSpPr txBox="1"/>
+          <p:nvPr/>
+        </p:nvSpPr>
+        <p:spPr>
+          <a:xfrm>
+            <a:off x="1097280" y="1682496"/>
+            <a:ext cx="4114800" cy="274320"/>
+          </a:xfrm>
+          <a:prstGeom prst="rect">
+            <a:avLst/>
+          </a:prstGeom>
+          <a:noFill/>
+          <a:ln/>
+        </p:spPr>
+        <p:txBody>
+          <a:bodyPr wrap="square" lIns="0" tIns="0" rIns="0" bIns="0" rtlCol="0" anchor="ctr"/>
+          <a:lstStyle/>
+          <a:p>
             <a:pPr indent="0" marL="0">
               <a:buNone/>
             </a:pPr>
             <a:r>
-              <a:rPr lang="en-US" sz="1700" b="1" dirty="0">
-                <a:solidFill>
-                  <a:srgbClr val="1B1F3B"/>
-                </a:solidFill>
-              </a:rPr>
-              <a:t>Light</a:t>
-            </a:r>
-            <a:endParaRPr lang="en-US" sz="1700" dirty="0"/>
-          </a:p>
-        </p:txBody>
-      </p:sp>
-      <p:sp>
-        <p:nvSpPr>
-          <p:cNvPr id="5" name="Text 3"/>
+              <a:rPr lang="en-US" sz="1300" b="1" dirty="0">
+                <a:solidFill>
+                  <a:schemeClr val="tx1"/>
+                </a:solidFill>
+              </a:rPr>
+              <a:t>80/20 accounts</a:t>
+            </a:r>
+            <a:endParaRPr lang="en-US" sz="1300" dirty="0"/>
+          </a:p>
+        </p:txBody>
+      </p:sp>
+      <p:sp>
+        <p:nvSpPr>
+          <p:cNvPr id="9" name="Text 7"/>
           <p:cNvSpPr txBox="1"/>
           <p:nvPr/>
         </p:nvSpPr>
         <p:spPr>
           <a:xfrm>
-            <a:off x="640080" y="1965960"/>
-            <a:ext cx="2240280" cy="685800"/>
+            <a:off x="1097280" y="1956816"/>
+            <a:ext cx="4114800" cy="274320"/>
           </a:xfrm>
           <a:prstGeom prst="rect">
             <a:avLst/>
@@ -22251,27 +22465,79 @@
               <a:buNone/>
             </a:pPr>
             <a:r>
-              <a:rPr lang="en-US" sz="3200" b="1" dirty="0">
-                <a:solidFill>
-                  <a:srgbClr val="C2185B"/>
-                </a:solidFill>
-              </a:rPr>
-              <a:t>~US$53k</a:t>
-            </a:r>
-            <a:endParaRPr lang="en-US" sz="3200" dirty="0"/>
-          </a:p>
-        </p:txBody>
-      </p:sp>
-      <p:sp>
-        <p:nvSpPr>
-          <p:cNvPr id="6" name="Text 4"/>
+              <a:rPr lang="en-US" sz="1100" dirty="0">
+                <a:solidFill>
+                  <a:schemeClr val="tx2"/>
+                </a:solidFill>
+              </a:rPr>
+              <a:t>Sample with their design, demo and pilot on their fabric</a:t>
+            </a:r>
+            <a:endParaRPr lang="en-US" sz="1100" dirty="0"/>
+          </a:p>
+        </p:txBody>
+      </p:sp>
+      <p:sp>
+        <p:nvSpPr>
+          <p:cNvPr id="10" name="Shape 8"/>
+          <p:cNvSpPr/>
+          <p:nvPr/>
+        </p:nvSpPr>
+        <p:spPr>
+          <a:xfrm>
+            <a:off x="457200" y="2359152"/>
+            <a:ext cx="4846320" cy="621792"/>
+          </a:xfrm>
+          <a:prstGeom prst="roundRect">
+            <a:avLst>
+              <a:gd name="adj" fmla="val 11765"/>
+            </a:avLst>
+          </a:prstGeom>
+          <a:solidFill>
+            <a:srgbClr val="EEF2F7"/>
+          </a:solidFill>
+          <a:ln w="12700">
+            <a:solidFill>
+              <a:srgbClr val="EEF2F7"/>
+            </a:solidFill>
+            <a:prstDash val="solid"/>
+          </a:ln>
+        </p:spPr>
+      </p:sp>
+      <p:sp>
+        <p:nvSpPr>
+          <p:cNvPr id="11" name="Shape 9"/>
+          <p:cNvSpPr/>
+          <p:nvPr/>
+        </p:nvSpPr>
+        <p:spPr>
+          <a:xfrm>
+            <a:off x="594360" y="2487168"/>
+            <a:ext cx="365760" cy="365760"/>
+          </a:xfrm>
+          <a:prstGeom prst="ellipse">
+            <a:avLst/>
+          </a:prstGeom>
+          <a:solidFill>
+            <a:srgbClr val="C2185B"/>
+          </a:solidFill>
+          <a:ln w="12700">
+            <a:solidFill>
+              <a:srgbClr val="C2185B"/>
+            </a:solidFill>
+            <a:prstDash val="solid"/>
+          </a:ln>
+        </p:spPr>
+      </p:sp>
+      <p:sp>
+        <p:nvSpPr>
+          <p:cNvPr id="12" name="Text 10"/>
           <p:cNvSpPr txBox="1"/>
           <p:nvPr/>
         </p:nvSpPr>
         <p:spPr>
           <a:xfrm>
-            <a:off x="640080" y="2743200"/>
-            <a:ext cx="2240280" cy="1097280"/>
+            <a:off x="594360" y="2487168"/>
+            <a:ext cx="365760" cy="365760"/>
           </a:xfrm>
           <a:prstGeom prst="rect">
             <a:avLst/>
@@ -22280,39 +22546,296 @@
           <a:ln/>
         </p:spPr>
         <p:txBody>
-          <a:bodyPr wrap="square" lIns="0" tIns="0" rIns="0" bIns="0" rtlCol="0" anchor="t"/>
+          <a:bodyPr wrap="square" lIns="0" tIns="0" rIns="0" bIns="0" rtlCol="0" anchor="ctr"/>
+          <a:lstStyle/>
+          <a:p>
+            <a:pPr algn="ctr" indent="0" marL="0">
+              <a:buNone/>
+            </a:pPr>
+            <a:r>
+              <a:rPr lang="en-US" sz="1300" b="1" dirty="0">
+                <a:solidFill>
+                  <a:srgbClr val="FFFFFF"/>
+                </a:solidFill>
+              </a:rPr>
+              <a:t>2</a:t>
+            </a:r>
+            <a:endParaRPr lang="en-US" sz="1300" dirty="0"/>
+          </a:p>
+        </p:txBody>
+      </p:sp>
+      <p:sp>
+        <p:nvSpPr>
+          <p:cNvPr id="13" name="Text 11"/>
+          <p:cNvSpPr txBox="1"/>
+          <p:nvPr/>
+        </p:nvSpPr>
+        <p:spPr>
+          <a:xfrm>
+            <a:off x="1097280" y="2395728"/>
+            <a:ext cx="4114800" cy="274320"/>
+          </a:xfrm>
+          <a:prstGeom prst="rect">
+            <a:avLst/>
+          </a:prstGeom>
+          <a:noFill/>
+          <a:ln/>
+        </p:spPr>
+        <p:txBody>
+          <a:bodyPr wrap="square" lIns="0" tIns="0" rIns="0" bIns="0" rtlCol="0" anchor="ctr"/>
           <a:lstStyle/>
           <a:p>
             <a:pPr indent="0" marL="0">
               <a:buNone/>
             </a:pPr>
             <a:r>
-              <a:rPr lang="en-US" sz="1200" dirty="0">
-                <a:solidFill>
-                  <a:srgbClr val="3A4060"/>
-                </a:solidFill>
-              </a:rPr>
-              <a:t>Demo on consignment or at an anchor shop; consumables first</a:t>
-            </a:r>
-            <a:endParaRPr lang="en-US" sz="1200" dirty="0"/>
-          </a:p>
-        </p:txBody>
-      </p:sp>
-      <p:sp>
-        <p:nvSpPr>
-          <p:cNvPr id="7" name="Shape 5"/>
+              <a:rPr lang="en-US" sz="1300" b="1" dirty="0">
+                <a:solidFill>
+                  <a:schemeClr val="tx1"/>
+                </a:solidFill>
+              </a:rPr>
+              <a:t>Demo room</a:t>
+            </a:r>
+            <a:endParaRPr lang="en-US" sz="1300" dirty="0"/>
+          </a:p>
+        </p:txBody>
+      </p:sp>
+      <p:sp>
+        <p:nvSpPr>
+          <p:cNvPr id="14" name="Text 12"/>
+          <p:cNvSpPr txBox="1"/>
+          <p:nvPr/>
+        </p:nvSpPr>
+        <p:spPr>
+          <a:xfrm>
+            <a:off x="1097280" y="2670048"/>
+            <a:ext cx="4114800" cy="274320"/>
+          </a:xfrm>
+          <a:prstGeom prst="rect">
+            <a:avLst/>
+          </a:prstGeom>
+          <a:noFill/>
+          <a:ln/>
+        </p:spPr>
+        <p:txBody>
+          <a:bodyPr wrap="square" lIns="0" tIns="0" rIns="0" bIns="0" rtlCol="0" anchor="ctr"/>
+          <a:lstStyle/>
+          <a:p>
+            <a:pPr indent="0" marL="0">
+              <a:buNone/>
+            </a:pPr>
+            <a:r>
+              <a:rPr lang="en-US" sz="1100" dirty="0">
+                <a:solidFill>
+                  <a:schemeClr val="tx2"/>
+                </a:solidFill>
+              </a:rPr>
+              <a:t>Demos, workshops and CLT Hybrid Academy</a:t>
+            </a:r>
+            <a:endParaRPr lang="en-US" sz="1100" dirty="0"/>
+          </a:p>
+        </p:txBody>
+      </p:sp>
+      <p:sp>
+        <p:nvSpPr>
+          <p:cNvPr id="15" name="Shape 13"/>
           <p:cNvSpPr/>
           <p:nvPr/>
         </p:nvSpPr>
         <p:spPr>
           <a:xfrm>
-            <a:off x="3246120" y="1097280"/>
-            <a:ext cx="2606040" cy="2834640"/>
+            <a:off x="457200" y="3072384"/>
+            <a:ext cx="4846320" cy="621792"/>
           </a:xfrm>
           <a:prstGeom prst="roundRect">
             <a:avLst>
-              <a:gd name="adj" fmla="val 2807"/>
+              <a:gd name="adj" fmla="val 11765"/>
             </a:avLst>
+          </a:prstGeom>
+          <a:solidFill>
+            <a:srgbClr val="EEF2F7"/>
+          </a:solidFill>
+          <a:ln w="12700">
+            <a:solidFill>
+              <a:srgbClr val="EEF2F7"/>
+            </a:solidFill>
+            <a:prstDash val="solid"/>
+          </a:ln>
+        </p:spPr>
+      </p:sp>
+      <p:sp>
+        <p:nvSpPr>
+          <p:cNvPr id="16" name="Shape 14"/>
+          <p:cNvSpPr/>
+          <p:nvPr/>
+        </p:nvSpPr>
+        <p:spPr>
+          <a:xfrm>
+            <a:off x="594360" y="3200400"/>
+            <a:ext cx="365760" cy="365760"/>
+          </a:xfrm>
+          <a:prstGeom prst="ellipse">
+            <a:avLst/>
+          </a:prstGeom>
+          <a:solidFill>
+            <a:srgbClr val="F2B705"/>
+          </a:solidFill>
+          <a:ln w="12700">
+            <a:solidFill>
+              <a:srgbClr val="F2B705"/>
+            </a:solidFill>
+            <a:prstDash val="solid"/>
+          </a:ln>
+        </p:spPr>
+      </p:sp>
+      <p:sp>
+        <p:nvSpPr>
+          <p:cNvPr id="17" name="Text 15"/>
+          <p:cNvSpPr txBox="1"/>
+          <p:nvPr/>
+        </p:nvSpPr>
+        <p:spPr>
+          <a:xfrm>
+            <a:off x="594360" y="3200400"/>
+            <a:ext cx="365760" cy="365760"/>
+          </a:xfrm>
+          <a:prstGeom prst="rect">
+            <a:avLst/>
+          </a:prstGeom>
+          <a:noFill/>
+          <a:ln/>
+        </p:spPr>
+        <p:txBody>
+          <a:bodyPr wrap="square" lIns="0" tIns="0" rIns="0" bIns="0" rtlCol="0" anchor="ctr"/>
+          <a:lstStyle/>
+          <a:p>
+            <a:pPr algn="ctr" indent="0" marL="0">
+              <a:buNone/>
+            </a:pPr>
+            <a:r>
+              <a:rPr lang="en-US" sz="1300" b="1" dirty="0">
+                <a:solidFill>
+                  <a:srgbClr val="1B1F3B"/>
+                </a:solidFill>
+              </a:rPr>
+              <a:t>3</a:t>
+            </a:r>
+            <a:endParaRPr lang="en-US" sz="1300" dirty="0"/>
+          </a:p>
+        </p:txBody>
+      </p:sp>
+      <p:sp>
+        <p:nvSpPr>
+          <p:cNvPr id="18" name="Text 16"/>
+          <p:cNvSpPr txBox="1"/>
+          <p:nvPr/>
+        </p:nvSpPr>
+        <p:spPr>
+          <a:xfrm>
+            <a:off x="1097280" y="3108960"/>
+            <a:ext cx="4114800" cy="274320"/>
+          </a:xfrm>
+          <a:prstGeom prst="rect">
+            <a:avLst/>
+          </a:prstGeom>
+          <a:noFill/>
+          <a:ln/>
+        </p:spPr>
+        <p:txBody>
+          <a:bodyPr wrap="square" lIns="0" tIns="0" rIns="0" bIns="0" rtlCol="0" anchor="ctr"/>
+          <a:lstStyle/>
+          <a:p>
+            <a:pPr indent="0" marL="0">
+              <a:buNone/>
+            </a:pPr>
+            <a:r>
+              <a:rPr lang="en-US" sz="1300" b="1" dirty="0">
+                <a:solidFill>
+                  <a:schemeClr val="tx1"/>
+                </a:solidFill>
+              </a:rPr>
+              <a:t>Content</a:t>
+            </a:r>
+            <a:endParaRPr lang="en-US" sz="1300" dirty="0"/>
+          </a:p>
+        </p:txBody>
+      </p:sp>
+      <p:sp>
+        <p:nvSpPr>
+          <p:cNvPr id="19" name="Text 17"/>
+          <p:cNvSpPr txBox="1"/>
+          <p:nvPr/>
+        </p:nvSpPr>
+        <p:spPr>
+          <a:xfrm>
+            <a:off x="1097280" y="3383280"/>
+            <a:ext cx="4114800" cy="274320"/>
+          </a:xfrm>
+          <a:prstGeom prst="rect">
+            <a:avLst/>
+          </a:prstGeom>
+          <a:noFill/>
+          <a:ln/>
+        </p:spPr>
+        <p:txBody>
+          <a:bodyPr wrap="square" lIns="0" tIns="0" rIns="0" bIns="0" rtlCol="0" anchor="ctr"/>
+          <a:lstStyle/>
+          <a:p>
+            <a:pPr indent="0" marL="0">
+              <a:buNone/>
+            </a:pPr>
+            <a:r>
+              <a:rPr lang="en-US" sz="1100" dirty="0">
+                <a:solidFill>
+                  <a:schemeClr val="tx2"/>
+                </a:solidFill>
+              </a:rPr>
+              <a:t>Effect reels, cases, LinkedIn and WhatsApp</a:t>
+            </a:r>
+            <a:endParaRPr lang="en-US" sz="1100" dirty="0"/>
+          </a:p>
+        </p:txBody>
+      </p:sp>
+      <p:sp>
+        <p:nvSpPr>
+          <p:cNvPr id="20" name="Shape 18"/>
+          <p:cNvSpPr/>
+          <p:nvPr/>
+        </p:nvSpPr>
+        <p:spPr>
+          <a:xfrm>
+            <a:off x="457200" y="3785616"/>
+            <a:ext cx="4846320" cy="621792"/>
+          </a:xfrm>
+          <a:prstGeom prst="roundRect">
+            <a:avLst>
+              <a:gd name="adj" fmla="val 11765"/>
+            </a:avLst>
+          </a:prstGeom>
+          <a:solidFill>
+            <a:srgbClr val="EEF2F7"/>
+          </a:solidFill>
+          <a:ln w="12700">
+            <a:solidFill>
+              <a:srgbClr val="EEF2F7"/>
+            </a:solidFill>
+            <a:prstDash val="solid"/>
+          </a:ln>
+        </p:spPr>
+      </p:sp>
+      <p:sp>
+        <p:nvSpPr>
+          <p:cNvPr id="21" name="Shape 19"/>
+          <p:cNvSpPr/>
+          <p:nvPr/>
+        </p:nvSpPr>
+        <p:spPr>
+          <a:xfrm>
+            <a:off x="594360" y="3913632"/>
+            <a:ext cx="365760" cy="365760"/>
+          </a:xfrm>
+          <a:prstGeom prst="ellipse">
+            <a:avLst/>
           </a:prstGeom>
           <a:solidFill>
             <a:srgbClr val="1B1F3B"/>
@@ -22327,14 +22850,14 @@
       </p:sp>
       <p:sp>
         <p:nvSpPr>
-          <p:cNvPr id="8" name="Text 6"/>
+          <p:cNvPr id="22" name="Text 20"/>
           <p:cNvSpPr txBox="1"/>
           <p:nvPr/>
         </p:nvSpPr>
         <p:spPr>
           <a:xfrm>
-            <a:off x="3429000" y="1234440"/>
-            <a:ext cx="2240280" cy="274320"/>
+            <a:off x="594360" y="3913632"/>
+            <a:ext cx="365760" cy="365760"/>
           </a:xfrm>
           <a:prstGeom prst="rect">
             <a:avLst/>
@@ -22346,31 +22869,67 @@
           <a:bodyPr wrap="square" lIns="0" tIns="0" rIns="0" bIns="0" rtlCol="0" anchor="ctr"/>
           <a:lstStyle/>
           <a:p>
+            <a:pPr algn="ctr" indent="0" marL="0">
+              <a:buNone/>
+            </a:pPr>
+            <a:r>
+              <a:rPr lang="en-US" sz="1300" b="1" dirty="0">
+                <a:solidFill>
+                  <a:srgbClr val="FFFFFF"/>
+                </a:solidFill>
+              </a:rPr>
+              <a:t>4</a:t>
+            </a:r>
+            <a:endParaRPr lang="en-US" sz="1300" dirty="0"/>
+          </a:p>
+        </p:txBody>
+      </p:sp>
+      <p:sp>
+        <p:nvSpPr>
+          <p:cNvPr id="23" name="Text 21"/>
+          <p:cNvSpPr txBox="1"/>
+          <p:nvPr/>
+        </p:nvSpPr>
+        <p:spPr>
+          <a:xfrm>
+            <a:off x="1097280" y="3822192"/>
+            <a:ext cx="4114800" cy="274320"/>
+          </a:xfrm>
+          <a:prstGeom prst="rect">
+            <a:avLst/>
+          </a:prstGeom>
+          <a:noFill/>
+          <a:ln/>
+        </p:spPr>
+        <p:txBody>
+          <a:bodyPr wrap="square" lIns="0" tIns="0" rIns="0" bIns="0" rtlCol="0" anchor="ctr"/>
+          <a:lstStyle/>
+          <a:p>
             <a:pPr indent="0" marL="0">
               <a:buNone/>
             </a:pPr>
             <a:r>
-              <a:rPr lang="en-US" sz="1100" b="1" dirty="0">
-                <a:solidFill>
-                  <a:srgbClr val="F2B705"/>
-                </a:solidFill>
-              </a:rPr>
-              <a:t>Recommended</a:t>
-            </a:r>
-            <a:endParaRPr lang="en-US" sz="1100" dirty="0"/>
-          </a:p>
-        </p:txBody>
-      </p:sp>
-      <p:sp>
-        <p:nvSpPr>
-          <p:cNvPr id="9" name="Text 7"/>
+              <a:rPr lang="en-US" sz="1300" b="1" dirty="0">
+                <a:solidFill>
+                  <a:schemeClr val="tx1"/>
+                </a:solidFill>
+              </a:rPr>
+              <a:t>Events</a:t>
+            </a:r>
+            <a:endParaRPr lang="en-US" sz="1300" dirty="0"/>
+          </a:p>
+        </p:txBody>
+      </p:sp>
+      <p:sp>
+        <p:nvSpPr>
+          <p:cNvPr id="24" name="Text 22"/>
           <p:cNvSpPr txBox="1"/>
           <p:nvPr/>
         </p:nvSpPr>
         <p:spPr>
           <a:xfrm>
-            <a:off x="3429000" y="1554480"/>
-            <a:ext cx="2240280" cy="365760"/>
+            <a:off x="1097280" y="4096512"/>
+            <a:ext cx="4114800" cy="274320"/>
           </a:xfrm>
           <a:prstGeom prst="rect">
             <a:avLst/>
@@ -22386,103 +22945,31 @@
               <a:buNone/>
             </a:pPr>
             <a:r>
-              <a:rPr lang="en-US" sz="1700" b="1" dirty="0">
-                <a:solidFill>
-                  <a:srgbClr val="FFFFFF"/>
-                </a:solidFill>
-              </a:rPr>
-              <a:t>Base</a:t>
-            </a:r>
-            <a:endParaRPr lang="en-US" sz="1700" dirty="0"/>
-          </a:p>
-        </p:txBody>
-      </p:sp>
-      <p:sp>
-        <p:nvSpPr>
-          <p:cNvPr id="10" name="Text 8"/>
-          <p:cNvSpPr txBox="1"/>
-          <p:nvPr/>
-        </p:nvSpPr>
-        <p:spPr>
-          <a:xfrm>
-            <a:off x="3429000" y="1965960"/>
-            <a:ext cx="2240280" cy="685800"/>
-          </a:xfrm>
-          <a:prstGeom prst="rect">
-            <a:avLst/>
-          </a:prstGeom>
-          <a:noFill/>
-          <a:ln/>
-        </p:spPr>
-        <p:txBody>
-          <a:bodyPr wrap="square" lIns="0" tIns="0" rIns="0" bIns="0" rtlCol="0" anchor="ctr"/>
-          <a:lstStyle/>
-          <a:p>
-            <a:pPr indent="0" marL="0">
-              <a:buNone/>
-            </a:pPr>
-            <a:r>
-              <a:rPr lang="en-US" sz="3200" b="1" dirty="0">
-                <a:solidFill>
-                  <a:srgbClr val="F2B705"/>
-                </a:solidFill>
-              </a:rPr>
-              <a:t>~US$262k</a:t>
-            </a:r>
-            <a:endParaRPr lang="en-US" sz="3200" dirty="0"/>
-          </a:p>
-        </p:txBody>
-      </p:sp>
-      <p:sp>
-        <p:nvSpPr>
-          <p:cNvPr id="11" name="Text 9"/>
-          <p:cNvSpPr txBox="1"/>
-          <p:nvPr/>
-        </p:nvSpPr>
-        <p:spPr>
-          <a:xfrm>
-            <a:off x="3429000" y="2743200"/>
-            <a:ext cx="2240280" cy="1097280"/>
-          </a:xfrm>
-          <a:prstGeom prst="rect">
-            <a:avLst/>
-          </a:prstGeom>
-          <a:noFill/>
-          <a:ln/>
-        </p:spPr>
-        <p:txBody>
-          <a:bodyPr wrap="square" lIns="0" tIns="0" rIns="0" bIns="0" rtlCol="0" anchor="t"/>
-          <a:lstStyle/>
-          <a:p>
-            <a:pPr indent="0" marL="0">
-              <a:buNone/>
-            </a:pPr>
-            <a:r>
-              <a:rPr lang="en-US" sz="1200" dirty="0">
-                <a:solidFill>
-                  <a:srgbClr val="DDE3EE"/>
-                </a:solidFill>
-              </a:rPr>
-              <a:t>Press + hybrid station, inventory, showroom, launch</a:t>
-            </a:r>
-            <a:endParaRPr lang="en-US" sz="1200" dirty="0"/>
-          </a:p>
-        </p:txBody>
-      </p:sp>
-      <p:sp>
-        <p:nvSpPr>
-          <p:cNvPr id="12" name="Shape 10"/>
+              <a:rPr lang="en-US" sz="1100" dirty="0">
+                <a:solidFill>
+                  <a:schemeClr val="tx2"/>
+                </a:solidFill>
+              </a:rPr>
+              <a:t>FESPA, Hybrid Days in 6 cities, PRINTING United</a:t>
+            </a:r>
+            <a:endParaRPr lang="en-US" sz="1100" dirty="0"/>
+          </a:p>
+        </p:txBody>
+      </p:sp>
+      <p:sp>
+        <p:nvSpPr>
+          <p:cNvPr id="25" name="Shape 23"/>
           <p:cNvSpPr/>
           <p:nvPr/>
         </p:nvSpPr>
         <p:spPr>
           <a:xfrm>
-            <a:off x="6035040" y="1097280"/>
-            <a:ext cx="2606040" cy="2834640"/>
+            <a:off x="5486400" y="1645920"/>
+            <a:ext cx="3200400" cy="2761488"/>
           </a:xfrm>
           <a:prstGeom prst="roundRect">
             <a:avLst>
-              <a:gd name="adj" fmla="val 2807"/>
+              <a:gd name="adj" fmla="val 2649"/>
             </a:avLst>
           </a:prstGeom>
           <a:solidFill>
@@ -22498,14 +22985,14 @@
       </p:sp>
       <p:sp>
         <p:nvSpPr>
-          <p:cNvPr id="13" name="Text 11"/>
+          <p:cNvPr id="26" name="Text 24"/>
           <p:cNvSpPr txBox="1"/>
           <p:nvPr/>
         </p:nvSpPr>
         <p:spPr>
           <a:xfrm>
-            <a:off x="6217920" y="1554480"/>
-            <a:ext cx="2240280" cy="365760"/>
+            <a:off x="5669280" y="1737360"/>
+            <a:ext cx="2834640" cy="320040"/>
           </a:xfrm>
           <a:prstGeom prst="rect">
             <a:avLst/>
@@ -22521,27 +23008,27 @@
               <a:buNone/>
             </a:pPr>
             <a:r>
-              <a:rPr lang="en-US" sz="1700" b="1" dirty="0">
-                <a:solidFill>
-                  <a:srgbClr val="1B1F3B"/>
-                </a:solidFill>
-              </a:rPr>
-              <a:t>Full</a:t>
-            </a:r>
-            <a:endParaRPr lang="en-US" sz="1700" dirty="0"/>
-          </a:p>
-        </p:txBody>
-      </p:sp>
-      <p:sp>
-        <p:nvSpPr>
-          <p:cNvPr id="14" name="Text 12"/>
+              <a:rPr lang="en-US" sz="1400" b="1" dirty="0">
+                <a:solidFill>
+                  <a:schemeClr val="accent1"/>
+                </a:solidFill>
+              </a:rPr>
+              <a:t>Year-1 targets</a:t>
+            </a:r>
+            <a:endParaRPr lang="en-US" sz="1400" dirty="0"/>
+          </a:p>
+        </p:txBody>
+      </p:sp>
+      <p:sp>
+        <p:nvSpPr>
+          <p:cNvPr id="27" name="Text 25"/>
           <p:cNvSpPr txBox="1"/>
           <p:nvPr/>
         </p:nvSpPr>
         <p:spPr>
           <a:xfrm>
-            <a:off x="6217920" y="1965960"/>
-            <a:ext cx="2240280" cy="685800"/>
+            <a:off x="5669280" y="2148840"/>
+            <a:ext cx="1143000" cy="457200"/>
           </a:xfrm>
           <a:prstGeom prst="rect">
             <a:avLst/>
@@ -22557,27 +23044,27 @@
               <a:buNone/>
             </a:pPr>
             <a:r>
-              <a:rPr lang="en-US" sz="3200" b="1" dirty="0">
-                <a:solidFill>
-                  <a:srgbClr val="C2185B"/>
-                </a:solidFill>
-              </a:rPr>
-              <a:t>~US$450k</a:t>
-            </a:r>
-            <a:endParaRPr lang="en-US" sz="3200" dirty="0"/>
-          </a:p>
-        </p:txBody>
-      </p:sp>
-      <p:sp>
-        <p:nvSpPr>
-          <p:cNvPr id="15" name="Text 13"/>
+              <a:rPr lang="en-US" sz="1800" b="1" dirty="0">
+                <a:solidFill>
+                  <a:srgbClr val="1B1F3B"/>
+                </a:solidFill>
+              </a:rPr>
+              <a:t>300</a:t>
+            </a:r>
+            <a:endParaRPr lang="en-US" sz="1800" dirty="0"/>
+          </a:p>
+        </p:txBody>
+      </p:sp>
+      <p:sp>
+        <p:nvSpPr>
+          <p:cNvPr id="28" name="Text 26"/>
           <p:cNvSpPr txBox="1"/>
           <p:nvPr/>
         </p:nvSpPr>
         <p:spPr>
           <a:xfrm>
-            <a:off x="6217920" y="2743200"/>
-            <a:ext cx="2240280" cy="1097280"/>
+            <a:off x="6812280" y="2148840"/>
+            <a:ext cx="1783080" cy="457200"/>
           </a:xfrm>
           <a:prstGeom prst="rect">
             <a:avLst/>
@@ -22586,34 +23073,34 @@
           <a:ln/>
         </p:spPr>
         <p:txBody>
-          <a:bodyPr wrap="square" lIns="0" tIns="0" rIns="0" bIns="0" rtlCol="0" anchor="t"/>
+          <a:bodyPr wrap="square" lIns="0" tIns="0" rIns="0" bIns="0" rtlCol="0" anchor="ctr"/>
           <a:lstStyle/>
           <a:p>
             <a:pPr indent="0" marL="0">
               <a:buNone/>
             </a:pPr>
             <a:r>
-              <a:rPr lang="en-US" sz="1200" dirty="0">
-                <a:solidFill>
-                  <a:srgbClr val="3A4060"/>
-                </a:solidFill>
-              </a:rPr>
-              <a:t>Complete line incl. 6-station DTG</a:t>
-            </a:r>
-            <a:endParaRPr lang="en-US" sz="1200" dirty="0"/>
-          </a:p>
-        </p:txBody>
-      </p:sp>
-      <p:sp>
-        <p:nvSpPr>
-          <p:cNvPr id="16" name="Text 14"/>
+              <a:rPr lang="en-US" sz="1100" dirty="0">
+                <a:solidFill>
+                  <a:schemeClr val="tx2"/>
+                </a:solidFill>
+              </a:rPr>
+              <a:t>qualified leads</a:t>
+            </a:r>
+            <a:endParaRPr lang="en-US" sz="1100" dirty="0"/>
+          </a:p>
+        </p:txBody>
+      </p:sp>
+      <p:sp>
+        <p:nvSpPr>
+          <p:cNvPr id="29" name="Text 27"/>
           <p:cNvSpPr txBox="1"/>
           <p:nvPr/>
         </p:nvSpPr>
         <p:spPr>
           <a:xfrm>
-            <a:off x="457200" y="4069080"/>
-            <a:ext cx="8229600" cy="320040"/>
+            <a:off x="5669280" y="2697480"/>
+            <a:ext cx="1143000" cy="457200"/>
           </a:xfrm>
           <a:prstGeom prst="rect">
             <a:avLst/>
@@ -22629,20 +23116,200 @@
               <a:buNone/>
             </a:pPr>
             <a:r>
-              <a:rPr lang="en-US" sz="1300" b="1" dirty="0">
-                <a:solidFill>
-                  <a:schemeClr val="tx1"/>
-                </a:solidFill>
-              </a:rPr>
-              <a:t>Year-1 operating expense: ~US$131k (sales, customer service, technician, training, shows)</a:t>
-            </a:r>
-            <a:endParaRPr lang="en-US" sz="1300" dirty="0"/>
-          </a:p>
-        </p:txBody>
-      </p:sp>
-      <p:sp>
-        <p:nvSpPr>
-          <p:cNvPr id="17" name="Text 15"/>
+              <a:rPr lang="en-US" sz="1800" b="1" dirty="0">
+                <a:solidFill>
+                  <a:srgbClr val="1B1F3B"/>
+                </a:solidFill>
+              </a:rPr>
+              <a:t>40</a:t>
+            </a:r>
+            <a:endParaRPr lang="en-US" sz="1800" dirty="0"/>
+          </a:p>
+        </p:txBody>
+      </p:sp>
+      <p:sp>
+        <p:nvSpPr>
+          <p:cNvPr id="30" name="Text 28"/>
+          <p:cNvSpPr txBox="1"/>
+          <p:nvPr/>
+        </p:nvSpPr>
+        <p:spPr>
+          <a:xfrm>
+            <a:off x="6812280" y="2697480"/>
+            <a:ext cx="1783080" cy="457200"/>
+          </a:xfrm>
+          <a:prstGeom prst="rect">
+            <a:avLst/>
+          </a:prstGeom>
+          <a:noFill/>
+          <a:ln/>
+        </p:spPr>
+        <p:txBody>
+          <a:bodyPr wrap="square" lIns="0" tIns="0" rIns="0" bIns="0" rtlCol="0" anchor="ctr"/>
+          <a:lstStyle/>
+          <a:p>
+            <a:pPr indent="0" marL="0">
+              <a:buNone/>
+            </a:pPr>
+            <a:r>
+              <a:rPr lang="en-US" sz="1100" dirty="0">
+                <a:solidFill>
+                  <a:schemeClr val="tx2"/>
+                </a:solidFill>
+              </a:rPr>
+              <a:t>demos</a:t>
+            </a:r>
+            <a:endParaRPr lang="en-US" sz="1100" dirty="0"/>
+          </a:p>
+        </p:txBody>
+      </p:sp>
+      <p:sp>
+        <p:nvSpPr>
+          <p:cNvPr id="31" name="Text 29"/>
+          <p:cNvSpPr txBox="1"/>
+          <p:nvPr/>
+        </p:nvSpPr>
+        <p:spPr>
+          <a:xfrm>
+            <a:off x="5669280" y="3246120"/>
+            <a:ext cx="1143000" cy="457200"/>
+          </a:xfrm>
+          <a:prstGeom prst="rect">
+            <a:avLst/>
+          </a:prstGeom>
+          <a:noFill/>
+          <a:ln/>
+        </p:spPr>
+        <p:txBody>
+          <a:bodyPr wrap="square" lIns="0" tIns="0" rIns="0" bIns="0" rtlCol="0" anchor="ctr"/>
+          <a:lstStyle/>
+          <a:p>
+            <a:pPr indent="0" marL="0">
+              <a:buNone/>
+            </a:pPr>
+            <a:r>
+              <a:rPr lang="en-US" sz="1800" b="1" dirty="0">
+                <a:solidFill>
+                  <a:srgbClr val="1B1F3B"/>
+                </a:solidFill>
+              </a:rPr>
+              <a:t>30</a:t>
+            </a:r>
+            <a:endParaRPr lang="en-US" sz="1800" dirty="0"/>
+          </a:p>
+        </p:txBody>
+      </p:sp>
+      <p:sp>
+        <p:nvSpPr>
+          <p:cNvPr id="32" name="Text 30"/>
+          <p:cNvSpPr txBox="1"/>
+          <p:nvPr/>
+        </p:nvSpPr>
+        <p:spPr>
+          <a:xfrm>
+            <a:off x="6812280" y="3246120"/>
+            <a:ext cx="1783080" cy="457200"/>
+          </a:xfrm>
+          <a:prstGeom prst="rect">
+            <a:avLst/>
+          </a:prstGeom>
+          <a:noFill/>
+          <a:ln/>
+        </p:spPr>
+        <p:txBody>
+          <a:bodyPr wrap="square" lIns="0" tIns="0" rIns="0" bIns="0" rtlCol="0" anchor="ctr"/>
+          <a:lstStyle/>
+          <a:p>
+            <a:pPr indent="0" marL="0">
+              <a:buNone/>
+            </a:pPr>
+            <a:r>
+              <a:rPr lang="en-US" sz="1100" dirty="0">
+                <a:solidFill>
+                  <a:schemeClr val="tx2"/>
+                </a:solidFill>
+              </a:rPr>
+              <a:t>shops on consumables</a:t>
+            </a:r>
+            <a:endParaRPr lang="en-US" sz="1100" dirty="0"/>
+          </a:p>
+        </p:txBody>
+      </p:sp>
+      <p:sp>
+        <p:nvSpPr>
+          <p:cNvPr id="33" name="Text 31"/>
+          <p:cNvSpPr txBox="1"/>
+          <p:nvPr/>
+        </p:nvSpPr>
+        <p:spPr>
+          <a:xfrm>
+            <a:off x="5669280" y="3794760"/>
+            <a:ext cx="1143000" cy="457200"/>
+          </a:xfrm>
+          <a:prstGeom prst="rect">
+            <a:avLst/>
+          </a:prstGeom>
+          <a:noFill/>
+          <a:ln/>
+        </p:spPr>
+        <p:txBody>
+          <a:bodyPr wrap="square" lIns="0" tIns="0" rIns="0" bIns="0" rtlCol="0" anchor="ctr"/>
+          <a:lstStyle/>
+          <a:p>
+            <a:pPr indent="0" marL="0">
+              <a:buNone/>
+            </a:pPr>
+            <a:r>
+              <a:rPr lang="en-US" sz="1800" b="1" dirty="0">
+                <a:solidFill>
+                  <a:srgbClr val="1B1F3B"/>
+                </a:solidFill>
+              </a:rPr>
+              <a:t>US$50k</a:t>
+            </a:r>
+            <a:endParaRPr lang="en-US" sz="1800" dirty="0"/>
+          </a:p>
+        </p:txBody>
+      </p:sp>
+      <p:sp>
+        <p:nvSpPr>
+          <p:cNvPr id="34" name="Text 32"/>
+          <p:cNvSpPr txBox="1"/>
+          <p:nvPr/>
+        </p:nvSpPr>
+        <p:spPr>
+          <a:xfrm>
+            <a:off x="6812280" y="3794760"/>
+            <a:ext cx="1783080" cy="457200"/>
+          </a:xfrm>
+          <a:prstGeom prst="rect">
+            <a:avLst/>
+          </a:prstGeom>
+          <a:noFill/>
+          <a:ln/>
+        </p:spPr>
+        <p:txBody>
+          <a:bodyPr wrap="square" lIns="0" tIns="0" rIns="0" bIns="0" rtlCol="0" anchor="ctr"/>
+          <a:lstStyle/>
+          <a:p>
+            <a:pPr indent="0" marL="0">
+              <a:buNone/>
+            </a:pPr>
+            <a:r>
+              <a:rPr lang="en-US" sz="1100" dirty="0">
+                <a:solidFill>
+                  <a:schemeClr val="tx2"/>
+                </a:solidFill>
+              </a:rPr>
+              <a:t>budget (US$65k · 80k years 2–3)</a:t>
+            </a:r>
+            <a:endParaRPr lang="en-US" sz="1100" dirty="0"/>
+          </a:p>
+        </p:txBody>
+      </p:sp>
+      <p:sp>
+        <p:nvSpPr>
+          <p:cNvPr id="35" name="Text 33"/>
           <p:cNvSpPr txBox="1"/>
           <p:nvPr/>
         </p:nvSpPr>
@@ -22670,7 +23337,7 @@
                   <a:schemeClr val="accent5"/>
                 </a:solidFill>
               </a:rPr>
-              <a:t>Estimate — to be confirmed with CLT’s quotation</a:t>
+              <a:t>Latam: Central America years 2–3; Peru and Colombia year 3. Full plan in Excel.</a:t>
             </a:r>
             <a:endParaRPr lang="en-US" sz="1000" dirty="0"/>
           </a:p>
@@ -22781,78 +23448,26 @@
                   <a:schemeClr val="tx1"/>
                 </a:solidFill>
               </a:rPr>
-              <a:t>Projection: recurring revenue grows every year</a:t>
+              <a:t>Initial investment</a:t>
             </a:r>
             <a:endParaRPr lang="en-US" sz="2600" dirty="0"/>
           </a:p>
         </p:txBody>
       </p:sp>
-      <p:graphicFrame>
-        <p:nvGraphicFramePr>
-          <p:cNvPr id="3" name="Chart 0" descr=""/>
-          <p:cNvGraphicFramePr/>
-          <p:nvPr/>
-        </p:nvGraphicFramePr>
-        <p:xfrm>
-          <a:off x="457200" y="1005840"/>
-          <a:ext cx="5120640" cy="3383280"/>
-        </p:xfrm>
-        <a:graphic xmlns:a="http://schemas.openxmlformats.org/drawingml/2006/main">
-          <a:graphicData uri="http://schemas.openxmlformats.org/drawingml/2006/chart">
-            <c:chart xmlns:c="http://schemas.openxmlformats.org/drawingml/2006/chart" r:id="rId1"/>
-          </a:graphicData>
-        </a:graphic>
-      </p:graphicFrame>
-      <p:sp>
-        <p:nvSpPr>
-          <p:cNvPr id="4" name="Text 1"/>
-          <p:cNvSpPr txBox="1"/>
-          <p:nvPr/>
-        </p:nvSpPr>
-        <p:spPr>
-          <a:xfrm>
-            <a:off x="5943600" y="1051560"/>
-            <a:ext cx="2743200" cy="365760"/>
-          </a:xfrm>
-          <a:prstGeom prst="rect">
-            <a:avLst/>
-          </a:prstGeom>
-          <a:noFill/>
-          <a:ln/>
-        </p:spPr>
-        <p:txBody>
-          <a:bodyPr wrap="square" lIns="0" tIns="0" rIns="0" bIns="0" rtlCol="0" anchor="ctr"/>
-          <a:lstStyle/>
-          <a:p>
-            <a:pPr indent="0" marL="0">
-              <a:buNone/>
-            </a:pPr>
-            <a:r>
-              <a:rPr lang="en-US" sz="1500" b="1" dirty="0">
-                <a:solidFill>
-                  <a:schemeClr val="tx1"/>
-                </a:solidFill>
-              </a:rPr>
-              <a:t>Annual result</a:t>
-            </a:r>
-            <a:endParaRPr lang="en-US" sz="1500" dirty="0"/>
-          </a:p>
-        </p:txBody>
-      </p:sp>
-      <p:sp>
-        <p:nvSpPr>
-          <p:cNvPr id="5" name="Shape 2"/>
+      <p:sp>
+        <p:nvSpPr>
+          <p:cNvPr id="3" name="Shape 1"/>
           <p:cNvSpPr/>
           <p:nvPr/>
         </p:nvSpPr>
         <p:spPr>
           <a:xfrm>
-            <a:off x="5943600" y="1508760"/>
-            <a:ext cx="2743200" cy="731520"/>
+            <a:off x="457200" y="1097280"/>
+            <a:ext cx="2606040" cy="2834640"/>
           </a:xfrm>
           <a:prstGeom prst="roundRect">
             <a:avLst>
-              <a:gd name="adj" fmla="val 10000"/>
+              <a:gd name="adj" fmla="val 2807"/>
             </a:avLst>
           </a:prstGeom>
           <a:solidFill>
@@ -22868,14 +23483,14 @@
       </p:sp>
       <p:sp>
         <p:nvSpPr>
-          <p:cNvPr id="6" name="Text 3"/>
+          <p:cNvPr id="4" name="Text 2"/>
           <p:cNvSpPr txBox="1"/>
           <p:nvPr/>
         </p:nvSpPr>
         <p:spPr>
           <a:xfrm>
-            <a:off x="6080760" y="1508760"/>
-            <a:ext cx="1005840" cy="731520"/>
+            <a:off x="640080" y="1554480"/>
+            <a:ext cx="2240280" cy="365760"/>
           </a:xfrm>
           <a:prstGeom prst="rect">
             <a:avLst/>
@@ -22891,27 +23506,27 @@
               <a:buNone/>
             </a:pPr>
             <a:r>
-              <a:rPr lang="en-US" sz="1300" dirty="0">
-                <a:solidFill>
-                  <a:srgbClr val="3A4060"/>
-                </a:solidFill>
-              </a:rPr>
-              <a:t>Year 1</a:t>
-            </a:r>
-            <a:endParaRPr lang="en-US" sz="1300" dirty="0"/>
-          </a:p>
-        </p:txBody>
-      </p:sp>
-      <p:sp>
-        <p:nvSpPr>
-          <p:cNvPr id="7" name="Text 4"/>
+              <a:rPr lang="en-US" sz="1700" b="1" dirty="0">
+                <a:solidFill>
+                  <a:srgbClr val="1B1F3B"/>
+                </a:solidFill>
+              </a:rPr>
+              <a:t>Light</a:t>
+            </a:r>
+            <a:endParaRPr lang="en-US" sz="1700" dirty="0"/>
+          </a:p>
+        </p:txBody>
+      </p:sp>
+      <p:sp>
+        <p:nvSpPr>
+          <p:cNvPr id="5" name="Text 3"/>
           <p:cNvSpPr txBox="1"/>
           <p:nvPr/>
         </p:nvSpPr>
         <p:spPr>
           <a:xfrm>
-            <a:off x="7040880" y="1508760"/>
-            <a:ext cx="1554480" cy="731520"/>
+            <a:off x="640080" y="1965960"/>
+            <a:ext cx="2240280" cy="685800"/>
           </a:xfrm>
           <a:prstGeom prst="rect">
             <a:avLst/>
@@ -22923,35 +23538,242 @@
           <a:bodyPr wrap="square" lIns="0" tIns="0" rIns="0" bIns="0" rtlCol="0" anchor="ctr"/>
           <a:lstStyle/>
           <a:p>
-            <a:pPr algn="r" indent="0" marL="0">
+            <a:pPr indent="0" marL="0">
               <a:buNone/>
             </a:pPr>
             <a:r>
-              <a:rPr lang="en-US" sz="2200" b="1" dirty="0">
+              <a:rPr lang="en-US" sz="3200" b="1" dirty="0">
                 <a:solidFill>
                   <a:srgbClr val="C2185B"/>
                 </a:solidFill>
               </a:rPr>
-              <a:t>-US$37k</a:t>
-            </a:r>
-            <a:endParaRPr lang="en-US" sz="2200" dirty="0"/>
-          </a:p>
-        </p:txBody>
-      </p:sp>
-      <p:sp>
-        <p:nvSpPr>
-          <p:cNvPr id="8" name="Shape 5"/>
+              <a:t>~US$53k</a:t>
+            </a:r>
+            <a:endParaRPr lang="en-US" sz="3200" dirty="0"/>
+          </a:p>
+        </p:txBody>
+      </p:sp>
+      <p:sp>
+        <p:nvSpPr>
+          <p:cNvPr id="6" name="Text 4"/>
+          <p:cNvSpPr txBox="1"/>
+          <p:nvPr/>
+        </p:nvSpPr>
+        <p:spPr>
+          <a:xfrm>
+            <a:off x="640080" y="2743200"/>
+            <a:ext cx="2240280" cy="1097280"/>
+          </a:xfrm>
+          <a:prstGeom prst="rect">
+            <a:avLst/>
+          </a:prstGeom>
+          <a:noFill/>
+          <a:ln/>
+        </p:spPr>
+        <p:txBody>
+          <a:bodyPr wrap="square" lIns="0" tIns="0" rIns="0" bIns="0" rtlCol="0" anchor="t"/>
+          <a:lstStyle/>
+          <a:p>
+            <a:pPr indent="0" marL="0">
+              <a:buNone/>
+            </a:pPr>
+            <a:r>
+              <a:rPr lang="en-US" sz="1200" dirty="0">
+                <a:solidFill>
+                  <a:srgbClr val="3A4060"/>
+                </a:solidFill>
+              </a:rPr>
+              <a:t>Demo on consignment or at an anchor shop; consumables first</a:t>
+            </a:r>
+            <a:endParaRPr lang="en-US" sz="1200" dirty="0"/>
+          </a:p>
+        </p:txBody>
+      </p:sp>
+      <p:sp>
+        <p:nvSpPr>
+          <p:cNvPr id="7" name="Shape 5"/>
           <p:cNvSpPr/>
           <p:nvPr/>
         </p:nvSpPr>
         <p:spPr>
           <a:xfrm>
-            <a:off x="5943600" y="2377440"/>
-            <a:ext cx="2743200" cy="731520"/>
+            <a:off x="3246120" y="1097280"/>
+            <a:ext cx="2606040" cy="2834640"/>
           </a:xfrm>
           <a:prstGeom prst="roundRect">
             <a:avLst>
-              <a:gd name="adj" fmla="val 10000"/>
+              <a:gd name="adj" fmla="val 2807"/>
+            </a:avLst>
+          </a:prstGeom>
+          <a:solidFill>
+            <a:srgbClr val="1B1F3B"/>
+          </a:solidFill>
+          <a:ln w="12700">
+            <a:solidFill>
+              <a:srgbClr val="1B1F3B"/>
+            </a:solidFill>
+            <a:prstDash val="solid"/>
+          </a:ln>
+        </p:spPr>
+      </p:sp>
+      <p:sp>
+        <p:nvSpPr>
+          <p:cNvPr id="8" name="Text 6"/>
+          <p:cNvSpPr txBox="1"/>
+          <p:nvPr/>
+        </p:nvSpPr>
+        <p:spPr>
+          <a:xfrm>
+            <a:off x="3429000" y="1234440"/>
+            <a:ext cx="2240280" cy="274320"/>
+          </a:xfrm>
+          <a:prstGeom prst="rect">
+            <a:avLst/>
+          </a:prstGeom>
+          <a:noFill/>
+          <a:ln/>
+        </p:spPr>
+        <p:txBody>
+          <a:bodyPr wrap="square" lIns="0" tIns="0" rIns="0" bIns="0" rtlCol="0" anchor="ctr"/>
+          <a:lstStyle/>
+          <a:p>
+            <a:pPr indent="0" marL="0">
+              <a:buNone/>
+            </a:pPr>
+            <a:r>
+              <a:rPr lang="en-US" sz="1100" b="1" dirty="0">
+                <a:solidFill>
+                  <a:srgbClr val="F2B705"/>
+                </a:solidFill>
+              </a:rPr>
+              <a:t>Recommended</a:t>
+            </a:r>
+            <a:endParaRPr lang="en-US" sz="1100" dirty="0"/>
+          </a:p>
+        </p:txBody>
+      </p:sp>
+      <p:sp>
+        <p:nvSpPr>
+          <p:cNvPr id="9" name="Text 7"/>
+          <p:cNvSpPr txBox="1"/>
+          <p:nvPr/>
+        </p:nvSpPr>
+        <p:spPr>
+          <a:xfrm>
+            <a:off x="3429000" y="1554480"/>
+            <a:ext cx="2240280" cy="365760"/>
+          </a:xfrm>
+          <a:prstGeom prst="rect">
+            <a:avLst/>
+          </a:prstGeom>
+          <a:noFill/>
+          <a:ln/>
+        </p:spPr>
+        <p:txBody>
+          <a:bodyPr wrap="square" lIns="0" tIns="0" rIns="0" bIns="0" rtlCol="0" anchor="ctr"/>
+          <a:lstStyle/>
+          <a:p>
+            <a:pPr indent="0" marL="0">
+              <a:buNone/>
+            </a:pPr>
+            <a:r>
+              <a:rPr lang="en-US" sz="1700" b="1" dirty="0">
+                <a:solidFill>
+                  <a:srgbClr val="FFFFFF"/>
+                </a:solidFill>
+              </a:rPr>
+              <a:t>Base</a:t>
+            </a:r>
+            <a:endParaRPr lang="en-US" sz="1700" dirty="0"/>
+          </a:p>
+        </p:txBody>
+      </p:sp>
+      <p:sp>
+        <p:nvSpPr>
+          <p:cNvPr id="10" name="Text 8"/>
+          <p:cNvSpPr txBox="1"/>
+          <p:nvPr/>
+        </p:nvSpPr>
+        <p:spPr>
+          <a:xfrm>
+            <a:off x="3429000" y="1965960"/>
+            <a:ext cx="2240280" cy="685800"/>
+          </a:xfrm>
+          <a:prstGeom prst="rect">
+            <a:avLst/>
+          </a:prstGeom>
+          <a:noFill/>
+          <a:ln/>
+        </p:spPr>
+        <p:txBody>
+          <a:bodyPr wrap="square" lIns="0" tIns="0" rIns="0" bIns="0" rtlCol="0" anchor="ctr"/>
+          <a:lstStyle/>
+          <a:p>
+            <a:pPr indent="0" marL="0">
+              <a:buNone/>
+            </a:pPr>
+            <a:r>
+              <a:rPr lang="en-US" sz="3200" b="1" dirty="0">
+                <a:solidFill>
+                  <a:srgbClr val="F2B705"/>
+                </a:solidFill>
+              </a:rPr>
+              <a:t>~US$262k</a:t>
+            </a:r>
+            <a:endParaRPr lang="en-US" sz="3200" dirty="0"/>
+          </a:p>
+        </p:txBody>
+      </p:sp>
+      <p:sp>
+        <p:nvSpPr>
+          <p:cNvPr id="11" name="Text 9"/>
+          <p:cNvSpPr txBox="1"/>
+          <p:nvPr/>
+        </p:nvSpPr>
+        <p:spPr>
+          <a:xfrm>
+            <a:off x="3429000" y="2743200"/>
+            <a:ext cx="2240280" cy="1097280"/>
+          </a:xfrm>
+          <a:prstGeom prst="rect">
+            <a:avLst/>
+          </a:prstGeom>
+          <a:noFill/>
+          <a:ln/>
+        </p:spPr>
+        <p:txBody>
+          <a:bodyPr wrap="square" lIns="0" tIns="0" rIns="0" bIns="0" rtlCol="0" anchor="t"/>
+          <a:lstStyle/>
+          <a:p>
+            <a:pPr indent="0" marL="0">
+              <a:buNone/>
+            </a:pPr>
+            <a:r>
+              <a:rPr lang="en-US" sz="1200" dirty="0">
+                <a:solidFill>
+                  <a:srgbClr val="DDE3EE"/>
+                </a:solidFill>
+              </a:rPr>
+              <a:t>Press + hybrid station, inventory, showroom, launch</a:t>
+            </a:r>
+            <a:endParaRPr lang="en-US" sz="1200" dirty="0"/>
+          </a:p>
+        </p:txBody>
+      </p:sp>
+      <p:sp>
+        <p:nvSpPr>
+          <p:cNvPr id="12" name="Shape 10"/>
+          <p:cNvSpPr/>
+          <p:nvPr/>
+        </p:nvSpPr>
+        <p:spPr>
+          <a:xfrm>
+            <a:off x="6035040" y="1097280"/>
+            <a:ext cx="2606040" cy="2834640"/>
+          </a:xfrm>
+          <a:prstGeom prst="roundRect">
+            <a:avLst>
+              <a:gd name="adj" fmla="val 2807"/>
             </a:avLst>
           </a:prstGeom>
           <a:solidFill>
@@ -22967,14 +23789,14 @@
       </p:sp>
       <p:sp>
         <p:nvSpPr>
-          <p:cNvPr id="9" name="Text 6"/>
+          <p:cNvPr id="13" name="Text 11"/>
           <p:cNvSpPr txBox="1"/>
           <p:nvPr/>
         </p:nvSpPr>
         <p:spPr>
           <a:xfrm>
-            <a:off x="6080760" y="2377440"/>
-            <a:ext cx="1005840" cy="731520"/>
+            <a:off x="6217920" y="1554480"/>
+            <a:ext cx="2240280" cy="365760"/>
           </a:xfrm>
           <a:prstGeom prst="rect">
             <a:avLst/>
@@ -22990,27 +23812,27 @@
               <a:buNone/>
             </a:pPr>
             <a:r>
-              <a:rPr lang="en-US" sz="1300" dirty="0">
-                <a:solidFill>
-                  <a:srgbClr val="3A4060"/>
-                </a:solidFill>
-              </a:rPr>
-              <a:t>Year 2</a:t>
-            </a:r>
-            <a:endParaRPr lang="en-US" sz="1300" dirty="0"/>
-          </a:p>
-        </p:txBody>
-      </p:sp>
-      <p:sp>
-        <p:nvSpPr>
-          <p:cNvPr id="10" name="Text 7"/>
+              <a:rPr lang="en-US" sz="1700" b="1" dirty="0">
+                <a:solidFill>
+                  <a:srgbClr val="1B1F3B"/>
+                </a:solidFill>
+              </a:rPr>
+              <a:t>Full</a:t>
+            </a:r>
+            <a:endParaRPr lang="en-US" sz="1700" dirty="0"/>
+          </a:p>
+        </p:txBody>
+      </p:sp>
+      <p:sp>
+        <p:nvSpPr>
+          <p:cNvPr id="14" name="Text 12"/>
           <p:cNvSpPr txBox="1"/>
           <p:nvPr/>
         </p:nvSpPr>
         <p:spPr>
           <a:xfrm>
-            <a:off x="7040880" y="2377440"/>
-            <a:ext cx="1554480" cy="731520"/>
+            <a:off x="6217920" y="1965960"/>
+            <a:ext cx="2240280" cy="685800"/>
           </a:xfrm>
           <a:prstGeom prst="rect">
             <a:avLst/>
@@ -23022,58 +23844,31 @@
           <a:bodyPr wrap="square" lIns="0" tIns="0" rIns="0" bIns="0" rtlCol="0" anchor="ctr"/>
           <a:lstStyle/>
           <a:p>
-            <a:pPr algn="r" indent="0" marL="0">
+            <a:pPr indent="0" marL="0">
               <a:buNone/>
             </a:pPr>
             <a:r>
-              <a:rPr lang="en-US" sz="2200" b="1" dirty="0">
-                <a:solidFill>
-                  <a:srgbClr val="2E7D32"/>
-                </a:solidFill>
-              </a:rPr>
-              <a:t>+US$89k</a:t>
-            </a:r>
-            <a:endParaRPr lang="en-US" sz="2200" dirty="0"/>
-          </a:p>
-        </p:txBody>
-      </p:sp>
-      <p:sp>
-        <p:nvSpPr>
-          <p:cNvPr id="11" name="Shape 8"/>
-          <p:cNvSpPr/>
-          <p:nvPr/>
-        </p:nvSpPr>
-        <p:spPr>
-          <a:xfrm>
-            <a:off x="5943600" y="3246120"/>
-            <a:ext cx="2743200" cy="731520"/>
-          </a:xfrm>
-          <a:prstGeom prst="roundRect">
-            <a:avLst>
-              <a:gd name="adj" fmla="val 10000"/>
-            </a:avLst>
-          </a:prstGeom>
-          <a:solidFill>
-            <a:srgbClr val="EEF2F7"/>
-          </a:solidFill>
-          <a:ln w="12700">
-            <a:solidFill>
-              <a:srgbClr val="EEF2F7"/>
-            </a:solidFill>
-            <a:prstDash val="solid"/>
-          </a:ln>
-        </p:spPr>
-      </p:sp>
-      <p:sp>
-        <p:nvSpPr>
-          <p:cNvPr id="12" name="Text 9"/>
+              <a:rPr lang="en-US" sz="3200" b="1" dirty="0">
+                <a:solidFill>
+                  <a:srgbClr val="C2185B"/>
+                </a:solidFill>
+              </a:rPr>
+              <a:t>~US$450k</a:t>
+            </a:r>
+            <a:endParaRPr lang="en-US" sz="3200" dirty="0"/>
+          </a:p>
+        </p:txBody>
+      </p:sp>
+      <p:sp>
+        <p:nvSpPr>
+          <p:cNvPr id="15" name="Text 13"/>
           <p:cNvSpPr txBox="1"/>
           <p:nvPr/>
         </p:nvSpPr>
         <p:spPr>
           <a:xfrm>
-            <a:off x="6080760" y="3246120"/>
-            <a:ext cx="1005840" cy="731520"/>
+            <a:off x="6217920" y="2743200"/>
+            <a:ext cx="2240280" cy="1097280"/>
           </a:xfrm>
           <a:prstGeom prst="rect">
             <a:avLst/>
@@ -23082,34 +23877,34 @@
           <a:ln/>
         </p:spPr>
         <p:txBody>
-          <a:bodyPr wrap="square" lIns="0" tIns="0" rIns="0" bIns="0" rtlCol="0" anchor="ctr"/>
+          <a:bodyPr wrap="square" lIns="0" tIns="0" rIns="0" bIns="0" rtlCol="0" anchor="t"/>
           <a:lstStyle/>
           <a:p>
             <a:pPr indent="0" marL="0">
               <a:buNone/>
             </a:pPr>
             <a:r>
-              <a:rPr lang="en-US" sz="1300" dirty="0">
+              <a:rPr lang="en-US" sz="1200" dirty="0">
                 <a:solidFill>
                   <a:srgbClr val="3A4060"/>
                 </a:solidFill>
               </a:rPr>
-              <a:t>Year 3</a:t>
-            </a:r>
-            <a:endParaRPr lang="en-US" sz="1300" dirty="0"/>
-          </a:p>
-        </p:txBody>
-      </p:sp>
-      <p:sp>
-        <p:nvSpPr>
-          <p:cNvPr id="13" name="Text 10"/>
+              <a:t>Complete line incl. 6-station DTG</a:t>
+            </a:r>
+            <a:endParaRPr lang="en-US" sz="1200" dirty="0"/>
+          </a:p>
+        </p:txBody>
+      </p:sp>
+      <p:sp>
+        <p:nvSpPr>
+          <p:cNvPr id="16" name="Text 14"/>
           <p:cNvSpPr txBox="1"/>
           <p:nvPr/>
         </p:nvSpPr>
         <p:spPr>
           <a:xfrm>
-            <a:off x="7040880" y="3246120"/>
-            <a:ext cx="1554480" cy="731520"/>
+            <a:off x="457200" y="4069080"/>
+            <a:ext cx="8229600" cy="320040"/>
           </a:xfrm>
           <a:prstGeom prst="rect">
             <a:avLst/>
@@ -23121,24 +23916,24 @@
           <a:bodyPr wrap="square" lIns="0" tIns="0" rIns="0" bIns="0" rtlCol="0" anchor="ctr"/>
           <a:lstStyle/>
           <a:p>
-            <a:pPr algn="r" indent="0" marL="0">
+            <a:pPr indent="0" marL="0">
               <a:buNone/>
             </a:pPr>
             <a:r>
-              <a:rPr lang="en-US" sz="2200" b="1" dirty="0">
-                <a:solidFill>
-                  <a:srgbClr val="2E7D32"/>
-                </a:solidFill>
-              </a:rPr>
-              <a:t>+US$269k</a:t>
-            </a:r>
-            <a:endParaRPr lang="en-US" sz="2200" dirty="0"/>
-          </a:p>
-        </p:txBody>
-      </p:sp>
-      <p:sp>
-        <p:nvSpPr>
-          <p:cNvPr id="14" name="Text 11"/>
+              <a:rPr lang="en-US" sz="1300" b="1" dirty="0">
+                <a:solidFill>
+                  <a:schemeClr val="tx1"/>
+                </a:solidFill>
+              </a:rPr>
+              <a:t>Year-1 operating expense: ~US$131k (sales, customer service, technician, training, shows)</a:t>
+            </a:r>
+            <a:endParaRPr lang="en-US" sz="1300" dirty="0"/>
+          </a:p>
+        </p:txBody>
+      </p:sp>
+      <p:sp>
+        <p:nvSpPr>
+          <p:cNvPr id="17" name="Text 15"/>
           <p:cNvSpPr txBox="1"/>
           <p:nvPr/>
         </p:nvSpPr>
@@ -23166,7 +23961,7 @@
                   <a:schemeClr val="accent5"/>
                 </a:solidFill>
               </a:rPr>
-              <a:t>Assumptions: US$150k line, 20% equipment / 35% consumables margin, ~US$36k consumption per line per year</a:t>
+              <a:t>Estimate — to be confirmed with CLT’s quotation</a:t>
             </a:r>
             <a:endParaRPr lang="en-US" sz="1000" dirty="0"/>
           </a:p>
@@ -23248,42 +24043,6 @@
       <p:sp>
         <p:nvSpPr>
           <p:cNvPr id="2" name="Text 0"/>
-          <p:cNvSpPr txBox="1"/>
-          <p:nvPr/>
-        </p:nvSpPr>
-        <p:spPr>
-          <a:xfrm>
-            <a:off x="548640" y="1097280"/>
-            <a:ext cx="2743200" cy="914400"/>
-          </a:xfrm>
-          <a:prstGeom prst="rect">
-            <a:avLst/>
-          </a:prstGeom>
-          <a:noFill/>
-          <a:ln/>
-        </p:spPr>
-        <p:txBody>
-          <a:bodyPr wrap="square" lIns="0" tIns="0" rIns="0" bIns="0" rtlCol="0" anchor="ctr"/>
-          <a:lstStyle/>
-          <a:p>
-            <a:pPr indent="0" marL="0">
-              <a:buNone/>
-            </a:pPr>
-            <a:r>
-              <a:rPr lang="en-US" sz="6000" b="1" dirty="0">
-                <a:solidFill>
-                  <a:schemeClr val="accent3"/>
-                </a:solidFill>
-              </a:rPr>
-              <a:t>05</a:t>
-            </a:r>
-            <a:endParaRPr lang="en-US" sz="6000" dirty="0"/>
-          </a:p>
-        </p:txBody>
-      </p:sp>
-      <p:sp>
-        <p:nvSpPr>
-          <p:cNvPr id="3" name="Text 0"/>
           <p:cNvSpPr/>
           <p:nvPr>
             <p:ph idx="100" type="title" hasCustomPrompt="1"/>
@@ -23291,8 +24050,8 @@
         </p:nvSpPr>
         <p:spPr>
           <a:xfrm>
-            <a:off x="548640" y="2103120"/>
-            <a:ext cx="8046720" cy="914400"/>
+            <a:off x="457200" y="274320"/>
+            <a:ext cx="8229600" cy="640080"/>
           </a:xfrm>
           <a:prstGeom prst="rect">
             <a:avLst/>
@@ -23301,44 +24060,98 @@
           <a:ln/>
         </p:spPr>
         <p:txBody>
-          <a:bodyPr wrap="square" rtlCol="0"/>
-          <a:lstStyle/>
-          <a:p>
-            <a:pPr algn="l" indent="0" marL="0">
+          <a:bodyPr wrap="square" rtlCol="0" anchor="ctr"/>
+          <a:lstStyle/>
+          <a:p>
+            <a:pPr indent="0" marL="0">
               <a:buNone/>
             </a:pPr>
             <a:r>
-              <a:rPr lang="en-US" sz="3600" b="1" dirty="0">
-                <a:solidFill>
-                  <a:schemeClr val="bg1"/>
-                </a:solidFill>
-              </a:rPr>
-              <a:t>The proposal</a:t>
-            </a:r>
-            <a:endParaRPr lang="en-US" sz="3600" dirty="0"/>
-          </a:p>
-        </p:txBody>
-      </p:sp>
-      <p:sp>
-        <p:nvSpPr>
-          <p:cNvPr id="4" name="cmyk-dot"/>
+              <a:rPr lang="en-US" sz="2600" b="1" dirty="0">
+                <a:solidFill>
+                  <a:schemeClr val="tx1"/>
+                </a:solidFill>
+              </a:rPr>
+              <a:t>Projection: recurring revenue grows every year</a:t>
+            </a:r>
+            <a:endParaRPr lang="en-US" sz="2600" dirty="0"/>
+          </a:p>
+        </p:txBody>
+      </p:sp>
+      <p:graphicFrame>
+        <p:nvGraphicFramePr>
+          <p:cNvPr id="3" name="Chart 0" descr=""/>
+          <p:cNvGraphicFramePr/>
+          <p:nvPr/>
+        </p:nvGraphicFramePr>
+        <p:xfrm>
+          <a:off x="457200" y="1005840"/>
+          <a:ext cx="5120640" cy="3383280"/>
+        </p:xfrm>
+        <a:graphic xmlns:a="http://schemas.openxmlformats.org/drawingml/2006/main">
+          <a:graphicData uri="http://schemas.openxmlformats.org/drawingml/2006/chart">
+            <c:chart xmlns:c="http://schemas.openxmlformats.org/drawingml/2006/chart" r:id="rId1"/>
+          </a:graphicData>
+        </a:graphic>
+      </p:graphicFrame>
+      <p:sp>
+        <p:nvSpPr>
+          <p:cNvPr id="4" name="Text 1"/>
+          <p:cNvSpPr txBox="1"/>
+          <p:nvPr/>
+        </p:nvSpPr>
+        <p:spPr>
+          <a:xfrm>
+            <a:off x="5943600" y="1051560"/>
+            <a:ext cx="2743200" cy="365760"/>
+          </a:xfrm>
+          <a:prstGeom prst="rect">
+            <a:avLst/>
+          </a:prstGeom>
+          <a:noFill/>
+          <a:ln/>
+        </p:spPr>
+        <p:txBody>
+          <a:bodyPr wrap="square" lIns="0" tIns="0" rIns="0" bIns="0" rtlCol="0" anchor="ctr"/>
+          <a:lstStyle/>
+          <a:p>
+            <a:pPr indent="0" marL="0">
+              <a:buNone/>
+            </a:pPr>
+            <a:r>
+              <a:rPr lang="en-US" sz="1500" b="1" dirty="0">
+                <a:solidFill>
+                  <a:schemeClr val="tx1"/>
+                </a:solidFill>
+              </a:rPr>
+              <a:t>Annual result</a:t>
+            </a:r>
+            <a:endParaRPr lang="en-US" sz="1500" dirty="0"/>
+          </a:p>
+        </p:txBody>
+      </p:sp>
+      <p:sp>
+        <p:nvSpPr>
+          <p:cNvPr id="5" name="Shape 2"/>
           <p:cNvSpPr/>
           <p:nvPr/>
         </p:nvSpPr>
         <p:spPr>
           <a:xfrm>
-            <a:off x="594360" y="3246120"/>
-            <a:ext cx="164592" cy="164592"/>
-          </a:xfrm>
-          <a:prstGeom prst="ellipse">
-            <a:avLst/>
+            <a:off x="5943600" y="1508760"/>
+            <a:ext cx="2743200" cy="731520"/>
+          </a:xfrm>
+          <a:prstGeom prst="roundRect">
+            <a:avLst>
+              <a:gd name="adj" fmla="val 10000"/>
+            </a:avLst>
           </a:prstGeom>
           <a:solidFill>
-            <a:srgbClr val="0089C2"/>
+            <a:srgbClr val="EEF2F7"/>
           </a:solidFill>
           <a:ln w="12700">
             <a:solidFill>
-              <a:srgbClr val="0089C2"/>
+              <a:srgbClr val="EEF2F7"/>
             </a:solidFill>
             <a:prstDash val="solid"/>
           </a:ln>
@@ -23346,24 +24159,98 @@
       </p:sp>
       <p:sp>
         <p:nvSpPr>
-          <p:cNvPr id="5" name="cmyk-dot"/>
+          <p:cNvPr id="6" name="Text 3"/>
+          <p:cNvSpPr txBox="1"/>
+          <p:nvPr/>
+        </p:nvSpPr>
+        <p:spPr>
+          <a:xfrm>
+            <a:off x="6080760" y="1508760"/>
+            <a:ext cx="1005840" cy="731520"/>
+          </a:xfrm>
+          <a:prstGeom prst="rect">
+            <a:avLst/>
+          </a:prstGeom>
+          <a:noFill/>
+          <a:ln/>
+        </p:spPr>
+        <p:txBody>
+          <a:bodyPr wrap="square" lIns="0" tIns="0" rIns="0" bIns="0" rtlCol="0" anchor="ctr"/>
+          <a:lstStyle/>
+          <a:p>
+            <a:pPr indent="0" marL="0">
+              <a:buNone/>
+            </a:pPr>
+            <a:r>
+              <a:rPr lang="en-US" sz="1300" dirty="0">
+                <a:solidFill>
+                  <a:srgbClr val="3A4060"/>
+                </a:solidFill>
+              </a:rPr>
+              <a:t>Year 1</a:t>
+            </a:r>
+            <a:endParaRPr lang="en-US" sz="1300" dirty="0"/>
+          </a:p>
+        </p:txBody>
+      </p:sp>
+      <p:sp>
+        <p:nvSpPr>
+          <p:cNvPr id="7" name="Text 4"/>
+          <p:cNvSpPr txBox="1"/>
+          <p:nvPr/>
+        </p:nvSpPr>
+        <p:spPr>
+          <a:xfrm>
+            <a:off x="7040880" y="1508760"/>
+            <a:ext cx="1554480" cy="731520"/>
+          </a:xfrm>
+          <a:prstGeom prst="rect">
+            <a:avLst/>
+          </a:prstGeom>
+          <a:noFill/>
+          <a:ln/>
+        </p:spPr>
+        <p:txBody>
+          <a:bodyPr wrap="square" lIns="0" tIns="0" rIns="0" bIns="0" rtlCol="0" anchor="ctr"/>
+          <a:lstStyle/>
+          <a:p>
+            <a:pPr algn="r" indent="0" marL="0">
+              <a:buNone/>
+            </a:pPr>
+            <a:r>
+              <a:rPr lang="en-US" sz="2200" b="1" dirty="0">
+                <a:solidFill>
+                  <a:srgbClr val="C2185B"/>
+                </a:solidFill>
+              </a:rPr>
+              <a:t>-US$37k</a:t>
+            </a:r>
+            <a:endParaRPr lang="en-US" sz="2200" dirty="0"/>
+          </a:p>
+        </p:txBody>
+      </p:sp>
+      <p:sp>
+        <p:nvSpPr>
+          <p:cNvPr id="8" name="Shape 5"/>
           <p:cNvSpPr/>
           <p:nvPr/>
         </p:nvSpPr>
         <p:spPr>
           <a:xfrm>
-            <a:off x="832104" y="3246120"/>
-            <a:ext cx="164592" cy="164592"/>
-          </a:xfrm>
-          <a:prstGeom prst="ellipse">
-            <a:avLst/>
+            <a:off x="5943600" y="2377440"/>
+            <a:ext cx="2743200" cy="731520"/>
+          </a:xfrm>
+          <a:prstGeom prst="roundRect">
+            <a:avLst>
+              <a:gd name="adj" fmla="val 10000"/>
+            </a:avLst>
           </a:prstGeom>
           <a:solidFill>
-            <a:srgbClr val="C2185B"/>
+            <a:srgbClr val="EEF2F7"/>
           </a:solidFill>
           <a:ln w="12700">
             <a:solidFill>
-              <a:srgbClr val="C2185B"/>
+              <a:srgbClr val="EEF2F7"/>
             </a:solidFill>
             <a:prstDash val="solid"/>
           </a:ln>
@@ -23371,24 +24258,98 @@
       </p:sp>
       <p:sp>
         <p:nvSpPr>
-          <p:cNvPr id="6" name="cmyk-dot"/>
+          <p:cNvPr id="9" name="Text 6"/>
+          <p:cNvSpPr txBox="1"/>
+          <p:nvPr/>
+        </p:nvSpPr>
+        <p:spPr>
+          <a:xfrm>
+            <a:off x="6080760" y="2377440"/>
+            <a:ext cx="1005840" cy="731520"/>
+          </a:xfrm>
+          <a:prstGeom prst="rect">
+            <a:avLst/>
+          </a:prstGeom>
+          <a:noFill/>
+          <a:ln/>
+        </p:spPr>
+        <p:txBody>
+          <a:bodyPr wrap="square" lIns="0" tIns="0" rIns="0" bIns="0" rtlCol="0" anchor="ctr"/>
+          <a:lstStyle/>
+          <a:p>
+            <a:pPr indent="0" marL="0">
+              <a:buNone/>
+            </a:pPr>
+            <a:r>
+              <a:rPr lang="en-US" sz="1300" dirty="0">
+                <a:solidFill>
+                  <a:srgbClr val="3A4060"/>
+                </a:solidFill>
+              </a:rPr>
+              <a:t>Year 2</a:t>
+            </a:r>
+            <a:endParaRPr lang="en-US" sz="1300" dirty="0"/>
+          </a:p>
+        </p:txBody>
+      </p:sp>
+      <p:sp>
+        <p:nvSpPr>
+          <p:cNvPr id="10" name="Text 7"/>
+          <p:cNvSpPr txBox="1"/>
+          <p:nvPr/>
+        </p:nvSpPr>
+        <p:spPr>
+          <a:xfrm>
+            <a:off x="7040880" y="2377440"/>
+            <a:ext cx="1554480" cy="731520"/>
+          </a:xfrm>
+          <a:prstGeom prst="rect">
+            <a:avLst/>
+          </a:prstGeom>
+          <a:noFill/>
+          <a:ln/>
+        </p:spPr>
+        <p:txBody>
+          <a:bodyPr wrap="square" lIns="0" tIns="0" rIns="0" bIns="0" rtlCol="0" anchor="ctr"/>
+          <a:lstStyle/>
+          <a:p>
+            <a:pPr algn="r" indent="0" marL="0">
+              <a:buNone/>
+            </a:pPr>
+            <a:r>
+              <a:rPr lang="en-US" sz="2200" b="1" dirty="0">
+                <a:solidFill>
+                  <a:srgbClr val="2E7D32"/>
+                </a:solidFill>
+              </a:rPr>
+              <a:t>+US$89k</a:t>
+            </a:r>
+            <a:endParaRPr lang="en-US" sz="2200" dirty="0"/>
+          </a:p>
+        </p:txBody>
+      </p:sp>
+      <p:sp>
+        <p:nvSpPr>
+          <p:cNvPr id="11" name="Shape 8"/>
           <p:cNvSpPr/>
           <p:nvPr/>
         </p:nvSpPr>
         <p:spPr>
           <a:xfrm>
-            <a:off x="1069848" y="3246120"/>
-            <a:ext cx="164592" cy="164592"/>
-          </a:xfrm>
-          <a:prstGeom prst="ellipse">
-            <a:avLst/>
+            <a:off x="5943600" y="3246120"/>
+            <a:ext cx="2743200" cy="731520"/>
+          </a:xfrm>
+          <a:prstGeom prst="roundRect">
+            <a:avLst>
+              <a:gd name="adj" fmla="val 10000"/>
+            </a:avLst>
           </a:prstGeom>
           <a:solidFill>
-            <a:srgbClr val="F2B705"/>
+            <a:srgbClr val="EEF2F7"/>
           </a:solidFill>
           <a:ln w="12700">
             <a:solidFill>
-              <a:srgbClr val="F2B705"/>
+              <a:srgbClr val="EEF2F7"/>
             </a:solidFill>
             <a:prstDash val="solid"/>
           </a:ln>
@@ -23396,28 +24357,156 @@
       </p:sp>
       <p:sp>
         <p:nvSpPr>
-          <p:cNvPr id="7" name="cmyk-dot"/>
-          <p:cNvSpPr/>
-          <p:nvPr/>
-        </p:nvSpPr>
-        <p:spPr>
-          <a:xfrm>
-            <a:off x="1307592" y="3246120"/>
-            <a:ext cx="164592" cy="164592"/>
-          </a:xfrm>
-          <a:prstGeom prst="ellipse">
-            <a:avLst/>
-          </a:prstGeom>
-          <a:solidFill>
-            <a:srgbClr val="FFFFFF"/>
-          </a:solidFill>
-          <a:ln w="12700">
-            <a:solidFill>
-              <a:srgbClr val="FFFFFF"/>
-            </a:solidFill>
-            <a:prstDash val="solid"/>
-          </a:ln>
-        </p:spPr>
+          <p:cNvPr id="12" name="Text 9"/>
+          <p:cNvSpPr txBox="1"/>
+          <p:nvPr/>
+        </p:nvSpPr>
+        <p:spPr>
+          <a:xfrm>
+            <a:off x="6080760" y="3246120"/>
+            <a:ext cx="1005840" cy="731520"/>
+          </a:xfrm>
+          <a:prstGeom prst="rect">
+            <a:avLst/>
+          </a:prstGeom>
+          <a:noFill/>
+          <a:ln/>
+        </p:spPr>
+        <p:txBody>
+          <a:bodyPr wrap="square" lIns="0" tIns="0" rIns="0" bIns="0" rtlCol="0" anchor="ctr"/>
+          <a:lstStyle/>
+          <a:p>
+            <a:pPr indent="0" marL="0">
+              <a:buNone/>
+            </a:pPr>
+            <a:r>
+              <a:rPr lang="en-US" sz="1300" dirty="0">
+                <a:solidFill>
+                  <a:srgbClr val="3A4060"/>
+                </a:solidFill>
+              </a:rPr>
+              <a:t>Year 3</a:t>
+            </a:r>
+            <a:endParaRPr lang="en-US" sz="1300" dirty="0"/>
+          </a:p>
+        </p:txBody>
+      </p:sp>
+      <p:sp>
+        <p:nvSpPr>
+          <p:cNvPr id="13" name="Text 10"/>
+          <p:cNvSpPr txBox="1"/>
+          <p:nvPr/>
+        </p:nvSpPr>
+        <p:spPr>
+          <a:xfrm>
+            <a:off x="7040880" y="3246120"/>
+            <a:ext cx="1554480" cy="731520"/>
+          </a:xfrm>
+          <a:prstGeom prst="rect">
+            <a:avLst/>
+          </a:prstGeom>
+          <a:noFill/>
+          <a:ln/>
+        </p:spPr>
+        <p:txBody>
+          <a:bodyPr wrap="square" lIns="0" tIns="0" rIns="0" bIns="0" rtlCol="0" anchor="ctr"/>
+          <a:lstStyle/>
+          <a:p>
+            <a:pPr algn="r" indent="0" marL="0">
+              <a:buNone/>
+            </a:pPr>
+            <a:r>
+              <a:rPr lang="en-US" sz="2200" b="1" dirty="0">
+                <a:solidFill>
+                  <a:srgbClr val="2E7D32"/>
+                </a:solidFill>
+              </a:rPr>
+              <a:t>+US$269k</a:t>
+            </a:r>
+            <a:endParaRPr lang="en-US" sz="2200" dirty="0"/>
+          </a:p>
+        </p:txBody>
+      </p:sp>
+      <p:sp>
+        <p:nvSpPr>
+          <p:cNvPr id="14" name="Text 11"/>
+          <p:cNvSpPr txBox="1"/>
+          <p:nvPr/>
+        </p:nvSpPr>
+        <p:spPr>
+          <a:xfrm>
+            <a:off x="457200" y="4480560"/>
+            <a:ext cx="8229600" cy="274320"/>
+          </a:xfrm>
+          <a:prstGeom prst="rect">
+            <a:avLst/>
+          </a:prstGeom>
+          <a:noFill/>
+          <a:ln/>
+        </p:spPr>
+        <p:txBody>
+          <a:bodyPr wrap="square" lIns="0" tIns="0" rIns="0" bIns="0" rtlCol="0" anchor="ctr"/>
+          <a:lstStyle/>
+          <a:p>
+            <a:pPr indent="0" marL="0">
+              <a:buNone/>
+            </a:pPr>
+            <a:r>
+              <a:rPr lang="en-US" sz="1000" i="1" dirty="0">
+                <a:solidFill>
+                  <a:schemeClr val="accent5"/>
+                </a:solidFill>
+              </a:rPr>
+              <a:t>Assumptions: US$150k line, 20% equipment / 35% consumables margin, ~US$36k consumption per line per year</a:t>
+            </a:r>
+            <a:endParaRPr lang="en-US" sz="1000" dirty="0"/>
+          </a:p>
+        </p:txBody>
+      </p:sp>
+      <p:sp>
+        <p:nvSpPr>
+          <p:cNvPr id="25" name="Slide Number Placeholder 0"/>
+          <p:cNvSpPr>
+            <a:spLocks noGrp="1"/>
+          </p:cNvSpPr>
+          <p:nvPr>
+            <p:ph type="sldNum" sz="quarter" idx="4294967295"/>
+          </p:nvPr>
+        </p:nvSpPr>
+        <p:spPr>
+          <a:xfrm>
+            <a:off x="8229600" y="4800600"/>
+            <a:ext cx="457200" cy="228600"/>
+          </a:xfrm>
+          <a:prstGeom prst="rect">
+            <a:avLst/>
+          </a:prstGeom>
+          <a:extLst>
+            <a:ext uri="{C572A759-6A51-4108-AA02-DFA0A04FC94B}">
+              <ma14:wrappingTextBoxFlag xmlns:ma14="http://schemas.microsoft.com/office/mac/drawingml/2011/main" val="0"/>
+            </a:ext>
+          </a:extLst>
+        </p:spPr>
+        <p:txBody>
+          <a:bodyPr/>
+          <a:lstStyle>
+            <a:lvl1pPr>
+              <a:defRPr sz="900">
+                <a:solidFill>
+                  <a:srgbClr val="7A8299"/>
+                </a:solidFill>
+              </a:defRPr>
+            </a:lvl1pPr>
+          </a:lstStyle>
+          <a:p>
+            <a:pPr algn="r"/>
+            <a:fld id="{F7021451-1387-4CA6-816F-3879F97B5CBC}" type="slidenum">
+              <a:rPr b="0" lang="en-US"/>
+              <a:t>29</a:t>
+            </a:fld>
+            <a:endParaRPr lang="en-US"/>
+          </a:p>
+        </p:txBody>
       </p:sp>
     </p:spTree>
   </p:cSld>
@@ -23652,6 +24741,42 @@
       <p:sp>
         <p:nvSpPr>
           <p:cNvPr id="2" name="Text 0"/>
+          <p:cNvSpPr txBox="1"/>
+          <p:nvPr/>
+        </p:nvSpPr>
+        <p:spPr>
+          <a:xfrm>
+            <a:off x="548640" y="1097280"/>
+            <a:ext cx="2743200" cy="914400"/>
+          </a:xfrm>
+          <a:prstGeom prst="rect">
+            <a:avLst/>
+          </a:prstGeom>
+          <a:noFill/>
+          <a:ln/>
+        </p:spPr>
+        <p:txBody>
+          <a:bodyPr wrap="square" lIns="0" tIns="0" rIns="0" bIns="0" rtlCol="0" anchor="ctr"/>
+          <a:lstStyle/>
+          <a:p>
+            <a:pPr indent="0" marL="0">
+              <a:buNone/>
+            </a:pPr>
+            <a:r>
+              <a:rPr lang="en-US" sz="6000" b="1" dirty="0">
+                <a:solidFill>
+                  <a:schemeClr val="accent3"/>
+                </a:solidFill>
+              </a:rPr>
+              <a:t>05</a:t>
+            </a:r>
+            <a:endParaRPr lang="en-US" sz="6000" dirty="0"/>
+          </a:p>
+        </p:txBody>
+      </p:sp>
+      <p:sp>
+        <p:nvSpPr>
+          <p:cNvPr id="3" name="Text 0"/>
           <p:cNvSpPr/>
           <p:nvPr>
             <p:ph idx="100" type="title" hasCustomPrompt="1"/>
@@ -23659,8 +24784,8 @@
         </p:nvSpPr>
         <p:spPr>
           <a:xfrm>
-            <a:off x="457200" y="274320"/>
-            <a:ext cx="8229600" cy="640080"/>
+            <a:off x="548640" y="2103120"/>
+            <a:ext cx="8046720" cy="914400"/>
           </a:xfrm>
           <a:prstGeom prst="rect">
             <a:avLst/>
@@ -23669,46 +24794,44 @@
           <a:ln/>
         </p:spPr>
         <p:txBody>
-          <a:bodyPr wrap="square" rtlCol="0" anchor="ctr"/>
-          <a:lstStyle/>
-          <a:p>
-            <a:pPr indent="0" marL="0">
+          <a:bodyPr wrap="square" rtlCol="0"/>
+          <a:lstStyle/>
+          <a:p>
+            <a:pPr algn="l" indent="0" marL="0">
               <a:buNone/>
             </a:pPr>
             <a:r>
-              <a:rPr lang="en-US" sz="2600" b="1" dirty="0">
-                <a:solidFill>
-                  <a:schemeClr val="tx1"/>
-                </a:solidFill>
-              </a:rPr>
-              <a:t>What we request and what we commit</a:t>
-            </a:r>
-            <a:endParaRPr lang="en-US" sz="2600" dirty="0"/>
-          </a:p>
-        </p:txBody>
-      </p:sp>
-      <p:sp>
-        <p:nvSpPr>
-          <p:cNvPr id="3" name="Shape 1"/>
+              <a:rPr lang="en-US" sz="3600" b="1" dirty="0">
+                <a:solidFill>
+                  <a:schemeClr val="bg1"/>
+                </a:solidFill>
+              </a:rPr>
+              <a:t>The proposal</a:t>
+            </a:r>
+            <a:endParaRPr lang="en-US" sz="3600" dirty="0"/>
+          </a:p>
+        </p:txBody>
+      </p:sp>
+      <p:sp>
+        <p:nvSpPr>
+          <p:cNvPr id="4" name="cmyk-dot"/>
           <p:cNvSpPr/>
           <p:nvPr/>
         </p:nvSpPr>
         <p:spPr>
           <a:xfrm>
-            <a:off x="457200" y="1051560"/>
-            <a:ext cx="4023360" cy="3337560"/>
-          </a:xfrm>
-          <a:prstGeom prst="roundRect">
-            <a:avLst>
-              <a:gd name="adj" fmla="val 2192"/>
-            </a:avLst>
+            <a:off x="594360" y="3246120"/>
+            <a:ext cx="164592" cy="164592"/>
+          </a:xfrm>
+          <a:prstGeom prst="ellipse">
+            <a:avLst/>
           </a:prstGeom>
           <a:solidFill>
-            <a:srgbClr val="EEF2F7"/>
+            <a:srgbClr val="0089C2"/>
           </a:solidFill>
           <a:ln w="12700">
             <a:solidFill>
-              <a:srgbClr val="EEF2F7"/>
+              <a:srgbClr val="0089C2"/>
             </a:solidFill>
             <a:prstDash val="solid"/>
           </a:ln>
@@ -23716,192 +24839,24 @@
       </p:sp>
       <p:sp>
         <p:nvSpPr>
-          <p:cNvPr id="4" name="Text 2"/>
-          <p:cNvSpPr txBox="1"/>
-          <p:nvPr/>
-        </p:nvSpPr>
-        <p:spPr>
-          <a:xfrm>
-            <a:off x="685800" y="1188720"/>
-            <a:ext cx="3566160" cy="411480"/>
-          </a:xfrm>
-          <a:prstGeom prst="rect">
-            <a:avLst/>
-          </a:prstGeom>
-          <a:noFill/>
-          <a:ln/>
-        </p:spPr>
-        <p:txBody>
-          <a:bodyPr wrap="square" lIns="0" tIns="0" rIns="0" bIns="0" rtlCol="0" anchor="ctr"/>
-          <a:lstStyle/>
-          <a:p>
-            <a:pPr indent="0" marL="0">
-              <a:buNone/>
-            </a:pPr>
-            <a:r>
-              <a:rPr lang="en-US" sz="1700" b="1" dirty="0">
-                <a:solidFill>
-                  <a:srgbClr val="C2185B"/>
-                </a:solidFill>
-              </a:rPr>
-              <a:t>We request from CLT</a:t>
-            </a:r>
-            <a:endParaRPr lang="en-US" sz="1700" dirty="0"/>
-          </a:p>
-        </p:txBody>
-      </p:sp>
-      <p:sp>
-        <p:nvSpPr>
-          <p:cNvPr id="5" name="Text 3"/>
-          <p:cNvSpPr txBox="1"/>
-          <p:nvPr/>
-        </p:nvSpPr>
-        <p:spPr>
-          <a:xfrm>
-            <a:off x="685800" y="1691640"/>
-            <a:ext cx="3611880" cy="2606040"/>
-          </a:xfrm>
-          <a:prstGeom prst="rect">
-            <a:avLst/>
-          </a:prstGeom>
-          <a:noFill/>
-          <a:ln/>
-        </p:spPr>
-        <p:txBody>
-          <a:bodyPr wrap="square" lIns="0" tIns="0" rIns="0" bIns="0" rtlCol="0" anchor="t"/>
-          <a:lstStyle/>
-          <a:p>
-            <a:pPr marL="342900" indent="-342900">
-              <a:spcAft>
-                <a:spcPts val="500"/>
-              </a:spcAft>
-              <a:buSzPct val="100000"/>
-              <a:buChar char="•"/>
-            </a:pPr>
-            <a:r>
-              <a:rPr lang="en-US" sz="1400" dirty="0">
-                <a:solidFill>
-                  <a:srgbClr val="1B1F3B"/>
-                </a:solidFill>
-              </a:rPr>
-              <a:t>Exclusivity in Mexico; LatAm subject to targets</a:t>
-            </a:r>
-            <a:endParaRPr lang="en-US" sz="1400" dirty="0"/>
-          </a:p>
-          <a:p>
-            <a:pPr marL="342900" indent="-342900">
-              <a:spcAft>
-                <a:spcPts val="500"/>
-              </a:spcAft>
-              <a:buSzPct val="100000"/>
-              <a:buChar char="•"/>
-            </a:pPr>
-            <a:r>
-              <a:rPr lang="en-US" sz="1400" dirty="0">
-                <a:solidFill>
-                  <a:srgbClr val="1B1F3B"/>
-                </a:solidFill>
-              </a:rPr>
-              <a:t>~20% equipment / ~35% consumables margin</a:t>
-            </a:r>
-            <a:endParaRPr lang="en-US" sz="1400" dirty="0"/>
-          </a:p>
-          <a:p>
-            <a:pPr marL="342900" indent="-342900">
-              <a:spcAft>
-                <a:spcPts val="500"/>
-              </a:spcAft>
-              <a:buSzPct val="100000"/>
-              <a:buChar char="•"/>
-            </a:pPr>
-            <a:r>
-              <a:rPr lang="en-US" sz="1400" dirty="0">
-                <a:solidFill>
-                  <a:srgbClr val="1B1F3B"/>
-                </a:solidFill>
-              </a:rPr>
-              <a:t>Demo on consignment or 30–50% off</a:t>
-            </a:r>
-            <a:endParaRPr lang="en-US" sz="1400" dirty="0"/>
-          </a:p>
-          <a:p>
-            <a:pPr marL="342900" indent="-342900">
-              <a:spcAft>
-                <a:spcPts val="500"/>
-              </a:spcAft>
-              <a:buSzPct val="100000"/>
-              <a:buChar char="•"/>
-            </a:pPr>
-            <a:r>
-              <a:rPr lang="en-US" sz="1400" dirty="0">
-                <a:solidFill>
-                  <a:srgbClr val="1B1F3B"/>
-                </a:solidFill>
-              </a:rPr>
-              <a:t>Initial inventory on consignment or 90 days</a:t>
-            </a:r>
-            <a:endParaRPr lang="en-US" sz="1400" dirty="0"/>
-          </a:p>
-          <a:p>
-            <a:pPr marL="342900" indent="-342900">
-              <a:spcAft>
-                <a:spcPts val="500"/>
-              </a:spcAft>
-              <a:buSzPct val="100000"/>
-              <a:buChar char="•"/>
-            </a:pPr>
-            <a:r>
-              <a:rPr lang="en-US" sz="1400" dirty="0">
-                <a:solidFill>
-                  <a:srgbClr val="1B1F3B"/>
-                </a:solidFill>
-              </a:rPr>
-              <a:t>Free training and certification</a:t>
-            </a:r>
-            <a:endParaRPr lang="en-US" sz="1400" dirty="0"/>
-          </a:p>
-          <a:p>
-            <a:pPr marL="342900" indent="-342900">
-              <a:spcAft>
-                <a:spcPts val="500"/>
-              </a:spcAft>
-              <a:buSzPct val="100000"/>
-              <a:buChar char="•"/>
-            </a:pPr>
-            <a:r>
-              <a:rPr lang="en-US" sz="1400" dirty="0">
-                <a:solidFill>
-                  <a:srgbClr val="1B1F3B"/>
-                </a:solidFill>
-              </a:rPr>
-              <a:t>Mexican leads referred to TID / CEB</a:t>
-            </a:r>
-            <a:endParaRPr lang="en-US" sz="1400" dirty="0"/>
-          </a:p>
-        </p:txBody>
-      </p:sp>
-      <p:sp>
-        <p:nvSpPr>
-          <p:cNvPr id="6" name="Shape 4"/>
+          <p:cNvPr id="5" name="cmyk-dot"/>
           <p:cNvSpPr/>
           <p:nvPr/>
         </p:nvSpPr>
         <p:spPr>
           <a:xfrm>
-            <a:off x="4663440" y="1051560"/>
-            <a:ext cx="4023360" cy="3337560"/>
-          </a:xfrm>
-          <a:prstGeom prst="roundRect">
-            <a:avLst>
-              <a:gd name="adj" fmla="val 2192"/>
-            </a:avLst>
+            <a:off x="832104" y="3246120"/>
+            <a:ext cx="164592" cy="164592"/>
+          </a:xfrm>
+          <a:prstGeom prst="ellipse">
+            <a:avLst/>
           </a:prstGeom>
           <a:solidFill>
-            <a:srgbClr val="EEF2F7"/>
+            <a:srgbClr val="C2185B"/>
           </a:solidFill>
           <a:ln w="12700">
             <a:solidFill>
-              <a:srgbClr val="EEF2F7"/>
+              <a:srgbClr val="C2185B"/>
             </a:solidFill>
             <a:prstDash val="solid"/>
           </a:ln>
@@ -23909,214 +24864,53 @@
       </p:sp>
       <p:sp>
         <p:nvSpPr>
-          <p:cNvPr id="7" name="Text 5"/>
-          <p:cNvSpPr txBox="1"/>
-          <p:nvPr/>
-        </p:nvSpPr>
-        <p:spPr>
-          <a:xfrm>
-            <a:off x="4892040" y="1188720"/>
-            <a:ext cx="3566160" cy="411480"/>
-          </a:xfrm>
-          <a:prstGeom prst="rect">
-            <a:avLst/>
-          </a:prstGeom>
-          <a:noFill/>
-          <a:ln/>
-        </p:spPr>
-        <p:txBody>
-          <a:bodyPr wrap="square" lIns="0" tIns="0" rIns="0" bIns="0" rtlCol="0" anchor="ctr"/>
-          <a:lstStyle/>
-          <a:p>
-            <a:pPr indent="0" marL="0">
-              <a:buNone/>
-            </a:pPr>
-            <a:r>
-              <a:rPr lang="en-US" sz="1700" b="1" dirty="0">
-                <a:solidFill>
-                  <a:srgbClr val="0089C2"/>
-                </a:solidFill>
-              </a:rPr>
-              <a:t>We commit to</a:t>
-            </a:r>
-            <a:endParaRPr lang="en-US" sz="1700" dirty="0"/>
-          </a:p>
-        </p:txBody>
-      </p:sp>
-      <p:sp>
-        <p:nvSpPr>
-          <p:cNvPr id="8" name="Text 6"/>
-          <p:cNvSpPr txBox="1"/>
-          <p:nvPr/>
-        </p:nvSpPr>
-        <p:spPr>
-          <a:xfrm>
-            <a:off x="4892040" y="1691640"/>
-            <a:ext cx="3611880" cy="2606040"/>
-          </a:xfrm>
-          <a:prstGeom prst="rect">
-            <a:avLst/>
-          </a:prstGeom>
-          <a:noFill/>
-          <a:ln/>
-        </p:spPr>
-        <p:txBody>
-          <a:bodyPr wrap="square" lIns="0" tIns="0" rIns="0" bIns="0" rtlCol="0" anchor="t"/>
-          <a:lstStyle/>
-          <a:p>
-            <a:pPr marL="342900" indent="-342900">
-              <a:spcAft>
-                <a:spcPts val="500"/>
-              </a:spcAft>
-              <a:buSzPct val="100000"/>
-              <a:buChar char="•"/>
-            </a:pPr>
-            <a:r>
-              <a:rPr lang="en-US" sz="1400" dirty="0">
-                <a:solidFill>
-                  <a:srgbClr val="1B1F3B"/>
-                </a:solidFill>
-              </a:rPr>
-              <a:t>Import and local inventory (CEB)</a:t>
-            </a:r>
-            <a:endParaRPr lang="en-US" sz="1400" dirty="0"/>
-          </a:p>
-          <a:p>
-            <a:pPr marL="342900" indent="-342900">
-              <a:spcAft>
-                <a:spcPts val="500"/>
-              </a:spcAft>
-              <a:buSzPct val="100000"/>
-              <a:buChar char="•"/>
-            </a:pPr>
-            <a:r>
-              <a:rPr lang="en-US" sz="1400" dirty="0">
-                <a:solidFill>
-                  <a:srgbClr val="1B1F3B"/>
-                </a:solidFill>
-              </a:rPr>
-              <a:t>Demo showroom and Spanish service</a:t>
-            </a:r>
-            <a:endParaRPr lang="en-US" sz="1400" dirty="0"/>
-          </a:p>
-          <a:p>
-            <a:pPr marL="342900" indent="-342900">
-              <a:spcAft>
-                <a:spcPts val="500"/>
-              </a:spcAft>
-              <a:buSzPct val="100000"/>
-              <a:buChar char="•"/>
-            </a:pPr>
-            <a:r>
-              <a:rPr lang="en-US" sz="1400" dirty="0">
-                <a:solidFill>
-                  <a:srgbClr val="1B1F3B"/>
-                </a:solidFill>
-              </a:rPr>
-              <a:t>Sales, customer service and textile technician</a:t>
-            </a:r>
-            <a:endParaRPr lang="en-US" sz="1400" dirty="0"/>
-          </a:p>
-          <a:p>
-            <a:pPr marL="342900" indent="-342900">
-              <a:spcAft>
-                <a:spcPts val="500"/>
-              </a:spcAft>
-              <a:buSzPct val="100000"/>
-              <a:buChar char="•"/>
-            </a:pPr>
-            <a:r>
-              <a:rPr lang="en-US" sz="1400" dirty="0">
-                <a:solidFill>
-                  <a:srgbClr val="1B1F3B"/>
-                </a:solidFill>
-              </a:rPr>
-              <a:t>Machine and product training</a:t>
-            </a:r>
-            <a:endParaRPr lang="en-US" sz="1400" dirty="0"/>
-          </a:p>
-          <a:p>
-            <a:pPr marL="342900" indent="-342900">
-              <a:spcAft>
-                <a:spcPts val="500"/>
-              </a:spcAft>
-              <a:buSzPct val="100000"/>
-              <a:buChar char="•"/>
-            </a:pPr>
-            <a:r>
-              <a:rPr lang="en-US" sz="1400" dirty="0">
-                <a:solidFill>
-                  <a:srgbClr val="1B1F3B"/>
-                </a:solidFill>
-              </a:rPr>
-              <a:t>Targets: 2 · 5 · 8 lines in years 1–3</a:t>
-            </a:r>
-            <a:endParaRPr lang="en-US" sz="1400" dirty="0"/>
-          </a:p>
-          <a:p>
-            <a:pPr marL="342900" indent="-342900">
-              <a:spcAft>
-                <a:spcPts val="500"/>
-              </a:spcAft>
-              <a:buSzPct val="100000"/>
-              <a:buChar char="•"/>
-            </a:pPr>
-            <a:r>
-              <a:rPr lang="en-US" sz="1400" dirty="0">
-                <a:solidFill>
-                  <a:srgbClr val="1B1F3B"/>
-                </a:solidFill>
-              </a:rPr>
-              <a:t>Quarterly reports</a:t>
-            </a:r>
-            <a:endParaRPr lang="en-US" sz="1400" dirty="0"/>
-          </a:p>
-        </p:txBody>
-      </p:sp>
-      <p:sp>
-        <p:nvSpPr>
-          <p:cNvPr id="25" name="Slide Number Placeholder 0"/>
-          <p:cNvSpPr>
-            <a:spLocks noGrp="1"/>
-          </p:cNvSpPr>
-          <p:nvPr>
-            <p:ph type="sldNum" sz="quarter" idx="4294967295"/>
-          </p:nvPr>
-        </p:nvSpPr>
-        <p:spPr>
-          <a:xfrm>
-            <a:off x="8229600" y="4800600"/>
-            <a:ext cx="457200" cy="228600"/>
-          </a:xfrm>
-          <a:prstGeom prst="rect">
-            <a:avLst/>
-          </a:prstGeom>
-          <a:extLst>
-            <a:ext uri="{C572A759-6A51-4108-AA02-DFA0A04FC94B}">
-              <ma14:wrappingTextBoxFlag xmlns:ma14="http://schemas.microsoft.com/office/mac/drawingml/2011/main" val="0"/>
-            </a:ext>
-          </a:extLst>
-        </p:spPr>
-        <p:txBody>
-          <a:bodyPr/>
-          <a:lstStyle>
-            <a:lvl1pPr>
-              <a:defRPr sz="900">
-                <a:solidFill>
-                  <a:srgbClr val="7A8299"/>
-                </a:solidFill>
-              </a:defRPr>
-            </a:lvl1pPr>
-          </a:lstStyle>
-          <a:p>
-            <a:pPr algn="r"/>
-            <a:fld id="{F7021451-1387-4CA6-816F-3879F97B5CBC}" type="slidenum">
-              <a:rPr b="0" lang="en-US"/>
-              <a:t>30</a:t>
-            </a:fld>
-            <a:endParaRPr lang="en-US"/>
-          </a:p>
-        </p:txBody>
+          <p:cNvPr id="6" name="cmyk-dot"/>
+          <p:cNvSpPr/>
+          <p:nvPr/>
+        </p:nvSpPr>
+        <p:spPr>
+          <a:xfrm>
+            <a:off x="1069848" y="3246120"/>
+            <a:ext cx="164592" cy="164592"/>
+          </a:xfrm>
+          <a:prstGeom prst="ellipse">
+            <a:avLst/>
+          </a:prstGeom>
+          <a:solidFill>
+            <a:srgbClr val="F2B705"/>
+          </a:solidFill>
+          <a:ln w="12700">
+            <a:solidFill>
+              <a:srgbClr val="F2B705"/>
+            </a:solidFill>
+            <a:prstDash val="solid"/>
+          </a:ln>
+        </p:spPr>
+      </p:sp>
+      <p:sp>
+        <p:nvSpPr>
+          <p:cNvPr id="7" name="cmyk-dot"/>
+          <p:cNvSpPr/>
+          <p:nvPr/>
+        </p:nvSpPr>
+        <p:spPr>
+          <a:xfrm>
+            <a:off x="1307592" y="3246120"/>
+            <a:ext cx="164592" cy="164592"/>
+          </a:xfrm>
+          <a:prstGeom prst="ellipse">
+            <a:avLst/>
+          </a:prstGeom>
+          <a:solidFill>
+            <a:srgbClr val="FFFFFF"/>
+          </a:solidFill>
+          <a:ln w="12700">
+            <a:solidFill>
+              <a:srgbClr val="FFFFFF"/>
+            </a:solidFill>
+            <a:prstDash val="solid"/>
+          </a:ln>
+        </p:spPr>
       </p:sp>
     </p:spTree>
   </p:cSld>
@@ -24178,7 +24972,7 @@
                   <a:schemeClr val="tx1"/>
                 </a:solidFill>
               </a:rPr>
-              <a:t>Risks and mitigation</a:t>
+              <a:t>What we request and what we commit</a:t>
             </a:r>
             <a:endParaRPr lang="en-US" sz="2600" dirty="0"/>
           </a:p>
@@ -24192,12 +24986,12 @@
         </p:nvSpPr>
         <p:spPr>
           <a:xfrm>
-            <a:off x="457200" y="1097280"/>
-            <a:ext cx="4023360" cy="1417320"/>
+            <a:off x="457200" y="1051560"/>
+            <a:ext cx="4023360" cy="3337560"/>
           </a:xfrm>
           <a:prstGeom prst="roundRect">
             <a:avLst>
-              <a:gd name="adj" fmla="val 5161"/>
+              <a:gd name="adj" fmla="val 2192"/>
             </a:avLst>
           </a:prstGeom>
           <a:solidFill>
@@ -24213,28 +25007,39 @@
       </p:sp>
       <p:sp>
         <p:nvSpPr>
-          <p:cNvPr id="4" name="Shape 2"/>
-          <p:cNvSpPr/>
-          <p:nvPr/>
-        </p:nvSpPr>
-        <p:spPr>
-          <a:xfrm>
-            <a:off x="640080" y="1280160"/>
-            <a:ext cx="384048" cy="384048"/>
-          </a:xfrm>
-          <a:prstGeom prst="ellipse">
-            <a:avLst/>
-          </a:prstGeom>
-          <a:solidFill>
-            <a:srgbClr val="0089C2"/>
-          </a:solidFill>
-          <a:ln w="12700">
-            <a:solidFill>
-              <a:srgbClr val="0089C2"/>
-            </a:solidFill>
-            <a:prstDash val="solid"/>
-          </a:ln>
-        </p:spPr>
+          <p:cNvPr id="4" name="Text 2"/>
+          <p:cNvSpPr txBox="1"/>
+          <p:nvPr/>
+        </p:nvSpPr>
+        <p:spPr>
+          <a:xfrm>
+            <a:off x="685800" y="1188720"/>
+            <a:ext cx="3566160" cy="411480"/>
+          </a:xfrm>
+          <a:prstGeom prst="rect">
+            <a:avLst/>
+          </a:prstGeom>
+          <a:noFill/>
+          <a:ln/>
+        </p:spPr>
+        <p:txBody>
+          <a:bodyPr wrap="square" lIns="0" tIns="0" rIns="0" bIns="0" rtlCol="0" anchor="ctr"/>
+          <a:lstStyle/>
+          <a:p>
+            <a:pPr indent="0" marL="0">
+              <a:buNone/>
+            </a:pPr>
+            <a:r>
+              <a:rPr lang="en-US" sz="1700" b="1" dirty="0">
+                <a:solidFill>
+                  <a:srgbClr val="C2185B"/>
+                </a:solidFill>
+              </a:rPr>
+              <a:t>We request from CLT</a:t>
+            </a:r>
+            <a:endParaRPr lang="en-US" sz="1700" dirty="0"/>
+          </a:p>
+        </p:txBody>
       </p:sp>
       <p:sp>
         <p:nvSpPr>
@@ -24244,8 +25049,8 @@
         </p:nvSpPr>
         <p:spPr>
           <a:xfrm>
-            <a:off x="640080" y="1280160"/>
-            <a:ext cx="384048" cy="384048"/>
+            <a:off x="685800" y="1691640"/>
+            <a:ext cx="3611880" cy="2606040"/>
           </a:xfrm>
           <a:prstGeom prst="rect">
             <a:avLst/>
@@ -24254,110 +25059,132 @@
           <a:ln/>
         </p:spPr>
         <p:txBody>
-          <a:bodyPr wrap="square" lIns="0" tIns="0" rIns="0" bIns="0" rtlCol="0" anchor="ctr"/>
-          <a:lstStyle/>
-          <a:p>
-            <a:pPr algn="ctr" indent="0" marL="0">
-              <a:buNone/>
-            </a:pPr>
-            <a:r>
-              <a:rPr lang="en-US" sz="1300" b="1" dirty="0">
-                <a:solidFill>
-                  <a:srgbClr val="FFFFFF"/>
-                </a:solidFill>
-              </a:rPr>
-              <a:t>!</a:t>
-            </a:r>
-            <a:endParaRPr lang="en-US" sz="1300" dirty="0"/>
-          </a:p>
-        </p:txBody>
-      </p:sp>
-      <p:sp>
-        <p:nvSpPr>
-          <p:cNvPr id="6" name="Text 4"/>
-          <p:cNvSpPr txBox="1"/>
-          <p:nvPr/>
-        </p:nvSpPr>
-        <p:spPr>
-          <a:xfrm>
-            <a:off x="1188720" y="1280160"/>
-            <a:ext cx="3108960" cy="384048"/>
-          </a:xfrm>
-          <a:prstGeom prst="rect">
-            <a:avLst/>
-          </a:prstGeom>
-          <a:noFill/>
-          <a:ln/>
-        </p:spPr>
-        <p:txBody>
-          <a:bodyPr wrap="square" lIns="0" tIns="0" rIns="0" bIns="0" rtlCol="0" anchor="ctr"/>
-          <a:lstStyle/>
-          <a:p>
-            <a:pPr indent="0" marL="0">
-              <a:buNone/>
-            </a:pPr>
-            <a:r>
-              <a:rPr lang="en-US" sz="1600" b="1" dirty="0">
-                <a:solidFill>
-                  <a:schemeClr val="tx1"/>
-                </a:solidFill>
-              </a:rPr>
-              <a:t>Cash-strapped industry</a:t>
-            </a:r>
-            <a:endParaRPr lang="en-US" sz="1600" dirty="0"/>
-          </a:p>
-        </p:txBody>
-      </p:sp>
-      <p:sp>
-        <p:nvSpPr>
-          <p:cNvPr id="7" name="Text 5"/>
-          <p:cNvSpPr txBox="1"/>
-          <p:nvPr/>
-        </p:nvSpPr>
-        <p:spPr>
-          <a:xfrm>
-            <a:off x="640080" y="1828800"/>
-            <a:ext cx="3657600" cy="548640"/>
-          </a:xfrm>
-          <a:prstGeom prst="rect">
-            <a:avLst/>
-          </a:prstGeom>
-          <a:noFill/>
-          <a:ln/>
-        </p:spPr>
-        <p:txBody>
           <a:bodyPr wrap="square" lIns="0" tIns="0" rIns="0" bIns="0" rtlCol="0" anchor="t"/>
           <a:lstStyle/>
           <a:p>
-            <a:pPr indent="0" marL="0">
-              <a:buNone/>
-            </a:pPr>
-            <a:r>
-              <a:rPr lang="en-US" sz="1300" dirty="0">
-                <a:solidFill>
-                  <a:schemeClr val="tx2"/>
-                </a:solidFill>
-              </a:rPr>
-              <a:t>Phased investment and financing</a:t>
-            </a:r>
-            <a:endParaRPr lang="en-US" sz="1300" dirty="0"/>
-          </a:p>
-        </p:txBody>
-      </p:sp>
-      <p:sp>
-        <p:nvSpPr>
-          <p:cNvPr id="8" name="Shape 6"/>
+            <a:pPr marL="342900" indent="-342900">
+              <a:spcAft>
+                <a:spcPts val="500"/>
+              </a:spcAft>
+              <a:buSzPct val="100000"/>
+              <a:buChar char="•"/>
+            </a:pPr>
+            <a:r>
+              <a:rPr lang="en-US" sz="1400" dirty="0">
+                <a:solidFill>
+                  <a:srgbClr val="1B1F3B"/>
+                </a:solidFill>
+              </a:rPr>
+              <a:t>Exclusivity in Mexico; LatAm subject to targets</a:t>
+            </a:r>
+            <a:endParaRPr lang="en-US" sz="1400" dirty="0"/>
+          </a:p>
+          <a:p>
+            <a:pPr marL="342900" indent="-342900">
+              <a:spcAft>
+                <a:spcPts val="500"/>
+              </a:spcAft>
+              <a:buSzPct val="100000"/>
+              <a:buChar char="•"/>
+            </a:pPr>
+            <a:r>
+              <a:rPr lang="en-US" sz="1400" dirty="0">
+                <a:solidFill>
+                  <a:srgbClr val="1B1F3B"/>
+                </a:solidFill>
+              </a:rPr>
+              <a:t>~20% equipment / ~35% consumables margin</a:t>
+            </a:r>
+            <a:endParaRPr lang="en-US" sz="1400" dirty="0"/>
+          </a:p>
+          <a:p>
+            <a:pPr marL="342900" indent="-342900">
+              <a:spcAft>
+                <a:spcPts val="500"/>
+              </a:spcAft>
+              <a:buSzPct val="100000"/>
+              <a:buChar char="•"/>
+            </a:pPr>
+            <a:r>
+              <a:rPr lang="en-US" sz="1400" dirty="0">
+                <a:solidFill>
+                  <a:srgbClr val="1B1F3B"/>
+                </a:solidFill>
+              </a:rPr>
+              <a:t>Demo on consignment or 30–50% off</a:t>
+            </a:r>
+            <a:endParaRPr lang="en-US" sz="1400" dirty="0"/>
+          </a:p>
+          <a:p>
+            <a:pPr marL="342900" indent="-342900">
+              <a:spcAft>
+                <a:spcPts val="500"/>
+              </a:spcAft>
+              <a:buSzPct val="100000"/>
+              <a:buChar char="•"/>
+            </a:pPr>
+            <a:r>
+              <a:rPr lang="en-US" sz="1400" dirty="0">
+                <a:solidFill>
+                  <a:srgbClr val="1B1F3B"/>
+                </a:solidFill>
+              </a:rPr>
+              <a:t>Initial inventory on consignment or 90 days</a:t>
+            </a:r>
+            <a:endParaRPr lang="en-US" sz="1400" dirty="0"/>
+          </a:p>
+          <a:p>
+            <a:pPr marL="342900" indent="-342900">
+              <a:spcAft>
+                <a:spcPts val="500"/>
+              </a:spcAft>
+              <a:buSzPct val="100000"/>
+              <a:buChar char="•"/>
+            </a:pPr>
+            <a:r>
+              <a:rPr lang="en-US" sz="1400" dirty="0">
+                <a:solidFill>
+                  <a:srgbClr val="1B1F3B"/>
+                </a:solidFill>
+              </a:rPr>
+              <a:t>Free training and certification</a:t>
+            </a:r>
+            <a:endParaRPr lang="en-US" sz="1400" dirty="0"/>
+          </a:p>
+          <a:p>
+            <a:pPr marL="342900" indent="-342900">
+              <a:spcAft>
+                <a:spcPts val="500"/>
+              </a:spcAft>
+              <a:buSzPct val="100000"/>
+              <a:buChar char="•"/>
+            </a:pPr>
+            <a:r>
+              <a:rPr lang="en-US" sz="1400" dirty="0">
+                <a:solidFill>
+                  <a:srgbClr val="1B1F3B"/>
+                </a:solidFill>
+              </a:rPr>
+              <a:t>Mexican leads referred to TID / CEB</a:t>
+            </a:r>
+            <a:endParaRPr lang="en-US" sz="1400" dirty="0"/>
+          </a:p>
+        </p:txBody>
+      </p:sp>
+      <p:sp>
+        <p:nvSpPr>
+          <p:cNvPr id="6" name="Shape 4"/>
           <p:cNvSpPr/>
           <p:nvPr/>
         </p:nvSpPr>
         <p:spPr>
           <a:xfrm>
-            <a:off x="4663440" y="1097280"/>
-            <a:ext cx="4023360" cy="1417320"/>
+            <a:off x="4663440" y="1051560"/>
+            <a:ext cx="4023360" cy="3337560"/>
           </a:xfrm>
           <a:prstGeom prst="roundRect">
             <a:avLst>
-              <a:gd name="adj" fmla="val 5161"/>
+              <a:gd name="adj" fmla="val 2192"/>
             </a:avLst>
           </a:prstGeom>
           <a:solidFill>
@@ -24373,39 +25200,14 @@
       </p:sp>
       <p:sp>
         <p:nvSpPr>
-          <p:cNvPr id="9" name="Shape 7"/>
-          <p:cNvSpPr/>
-          <p:nvPr/>
-        </p:nvSpPr>
-        <p:spPr>
-          <a:xfrm>
-            <a:off x="4846320" y="1280160"/>
-            <a:ext cx="384048" cy="384048"/>
-          </a:xfrm>
-          <a:prstGeom prst="ellipse">
-            <a:avLst/>
-          </a:prstGeom>
-          <a:solidFill>
-            <a:srgbClr val="C2185B"/>
-          </a:solidFill>
-          <a:ln w="12700">
-            <a:solidFill>
-              <a:srgbClr val="C2185B"/>
-            </a:solidFill>
-            <a:prstDash val="solid"/>
-          </a:ln>
-        </p:spPr>
-      </p:sp>
-      <p:sp>
-        <p:nvSpPr>
-          <p:cNvPr id="10" name="Text 8"/>
+          <p:cNvPr id="7" name="Text 5"/>
           <p:cNvSpPr txBox="1"/>
           <p:nvPr/>
         </p:nvSpPr>
         <p:spPr>
           <a:xfrm>
-            <a:off x="4846320" y="1280160"/>
-            <a:ext cx="384048" cy="384048"/>
+            <a:off x="4892040" y="1188720"/>
+            <a:ext cx="3566160" cy="411480"/>
           </a:xfrm>
           <a:prstGeom prst="rect">
             <a:avLst/>
@@ -24417,31 +25219,31 @@
           <a:bodyPr wrap="square" lIns="0" tIns="0" rIns="0" bIns="0" rtlCol="0" anchor="ctr"/>
           <a:lstStyle/>
           <a:p>
-            <a:pPr algn="ctr" indent="0" marL="0">
+            <a:pPr indent="0" marL="0">
               <a:buNone/>
             </a:pPr>
             <a:r>
-              <a:rPr lang="en-US" sz="1300" b="1" dirty="0">
-                <a:solidFill>
-                  <a:srgbClr val="FFFFFF"/>
-                </a:solidFill>
-              </a:rPr>
-              <a:t>!</a:t>
-            </a:r>
-            <a:endParaRPr lang="en-US" sz="1300" dirty="0"/>
-          </a:p>
-        </p:txBody>
-      </p:sp>
-      <p:sp>
-        <p:nvSpPr>
-          <p:cNvPr id="11" name="Text 9"/>
+              <a:rPr lang="en-US" sz="1700" b="1" dirty="0">
+                <a:solidFill>
+                  <a:srgbClr val="0089C2"/>
+                </a:solidFill>
+              </a:rPr>
+              <a:t>We commit to</a:t>
+            </a:r>
+            <a:endParaRPr lang="en-US" sz="1700" dirty="0"/>
+          </a:p>
+        </p:txBody>
+      </p:sp>
+      <p:sp>
+        <p:nvSpPr>
+          <p:cNvPr id="8" name="Text 6"/>
           <p:cNvSpPr txBox="1"/>
           <p:nvPr/>
         </p:nvSpPr>
         <p:spPr>
           <a:xfrm>
-            <a:off x="5394960" y="1280160"/>
-            <a:ext cx="3108960" cy="384048"/>
+            <a:off x="4892040" y="1691640"/>
+            <a:ext cx="3611880" cy="2606040"/>
           </a:xfrm>
           <a:prstGeom prst="rect">
             <a:avLst/>
@@ -24450,377 +25252,115 @@
           <a:ln/>
         </p:spPr>
         <p:txBody>
-          <a:bodyPr wrap="square" lIns="0" tIns="0" rIns="0" bIns="0" rtlCol="0" anchor="ctr"/>
-          <a:lstStyle/>
-          <a:p>
-            <a:pPr indent="0" marL="0">
-              <a:buNone/>
-            </a:pPr>
-            <a:r>
-              <a:rPr lang="en-US" sz="1600" b="1" dirty="0">
-                <a:solidFill>
-                  <a:schemeClr val="tx1"/>
-                </a:solidFill>
-              </a:rPr>
-              <a:t>DTF in short runs</a:t>
-            </a:r>
-            <a:endParaRPr lang="en-US" sz="1600" dirty="0"/>
-          </a:p>
-        </p:txBody>
-      </p:sp>
-      <p:sp>
-        <p:nvSpPr>
-          <p:cNvPr id="12" name="Text 10"/>
-          <p:cNvSpPr txBox="1"/>
-          <p:nvPr/>
-        </p:nvSpPr>
-        <p:spPr>
-          <a:xfrm>
-            <a:off x="4846320" y="1828800"/>
-            <a:ext cx="3657600" cy="548640"/>
-          </a:xfrm>
-          <a:prstGeom prst="rect">
-            <a:avLst/>
-          </a:prstGeom>
-          <a:noFill/>
-          <a:ln/>
-        </p:spPr>
-        <p:txBody>
           <a:bodyPr wrap="square" lIns="0" tIns="0" rIns="0" bIns="0" rtlCol="0" anchor="t"/>
           <a:lstStyle/>
           <a:p>
-            <a:pPr indent="0" marL="0">
-              <a:buNone/>
-            </a:pPr>
-            <a:r>
-              <a:rPr lang="en-US" sz="1300" dirty="0">
-                <a:solidFill>
-                  <a:schemeClr val="tx2"/>
-                </a:solidFill>
-              </a:rPr>
-              <a:t>Focus on volume and effects</a:t>
-            </a:r>
-            <a:endParaRPr lang="en-US" sz="1300" dirty="0"/>
-          </a:p>
-        </p:txBody>
-      </p:sp>
-      <p:sp>
-        <p:nvSpPr>
-          <p:cNvPr id="13" name="Shape 11"/>
-          <p:cNvSpPr/>
-          <p:nvPr/>
-        </p:nvSpPr>
-        <p:spPr>
-          <a:xfrm>
-            <a:off x="457200" y="2697480"/>
-            <a:ext cx="4023360" cy="1417320"/>
-          </a:xfrm>
-          <a:prstGeom prst="roundRect">
-            <a:avLst>
-              <a:gd name="adj" fmla="val 5161"/>
-            </a:avLst>
-          </a:prstGeom>
-          <a:solidFill>
-            <a:srgbClr val="EEF2F7"/>
-          </a:solidFill>
-          <a:ln w="12700">
-            <a:solidFill>
-              <a:srgbClr val="EEF2F7"/>
-            </a:solidFill>
-            <a:prstDash val="solid"/>
-          </a:ln>
-        </p:spPr>
-      </p:sp>
-      <p:sp>
-        <p:nvSpPr>
-          <p:cNvPr id="14" name="Shape 12"/>
-          <p:cNvSpPr/>
-          <p:nvPr/>
-        </p:nvSpPr>
-        <p:spPr>
-          <a:xfrm>
-            <a:off x="640080" y="2880360"/>
-            <a:ext cx="384048" cy="384048"/>
-          </a:xfrm>
-          <a:prstGeom prst="ellipse">
-            <a:avLst/>
-          </a:prstGeom>
-          <a:solidFill>
-            <a:srgbClr val="F2B705"/>
-          </a:solidFill>
-          <a:ln w="12700">
-            <a:solidFill>
-              <a:srgbClr val="F2B705"/>
-            </a:solidFill>
-            <a:prstDash val="solid"/>
-          </a:ln>
-        </p:spPr>
-      </p:sp>
-      <p:sp>
-        <p:nvSpPr>
-          <p:cNvPr id="15" name="Text 13"/>
-          <p:cNvSpPr txBox="1"/>
-          <p:nvPr/>
-        </p:nvSpPr>
-        <p:spPr>
-          <a:xfrm>
-            <a:off x="640080" y="2880360"/>
-            <a:ext cx="384048" cy="384048"/>
-          </a:xfrm>
-          <a:prstGeom prst="rect">
-            <a:avLst/>
-          </a:prstGeom>
-          <a:noFill/>
-          <a:ln/>
-        </p:spPr>
-        <p:txBody>
-          <a:bodyPr wrap="square" lIns="0" tIns="0" rIns="0" bIns="0" rtlCol="0" anchor="ctr"/>
-          <a:lstStyle/>
-          <a:p>
-            <a:pPr algn="ctr" indent="0" marL="0">
-              <a:buNone/>
-            </a:pPr>
-            <a:r>
-              <a:rPr lang="en-US" sz="1300" b="1" dirty="0">
+            <a:pPr marL="342900" indent="-342900">
+              <a:spcAft>
+                <a:spcPts val="500"/>
+              </a:spcAft>
+              <a:buSzPct val="100000"/>
+              <a:buChar char="•"/>
+            </a:pPr>
+            <a:r>
+              <a:rPr lang="en-US" sz="1400" dirty="0">
                 <a:solidFill>
                   <a:srgbClr val="1B1F3B"/>
                 </a:solidFill>
               </a:rPr>
-              <a:t>!</a:t>
-            </a:r>
-            <a:endParaRPr lang="en-US" sz="1300" dirty="0"/>
-          </a:p>
-        </p:txBody>
-      </p:sp>
-      <p:sp>
-        <p:nvSpPr>
-          <p:cNvPr id="16" name="Text 14"/>
-          <p:cNvSpPr txBox="1"/>
-          <p:nvPr/>
-        </p:nvSpPr>
-        <p:spPr>
-          <a:xfrm>
-            <a:off x="1188720" y="2880360"/>
-            <a:ext cx="3108960" cy="384048"/>
-          </a:xfrm>
-          <a:prstGeom prst="rect">
-            <a:avLst/>
-          </a:prstGeom>
-          <a:noFill/>
-          <a:ln/>
-        </p:spPr>
-        <p:txBody>
-          <a:bodyPr wrap="square" lIns="0" tIns="0" rIns="0" bIns="0" rtlCol="0" anchor="ctr"/>
-          <a:lstStyle/>
-          <a:p>
-            <a:pPr indent="0" marL="0">
-              <a:buNone/>
-            </a:pPr>
-            <a:r>
-              <a:rPr lang="en-US" sz="1600" b="1" dirty="0">
-                <a:solidFill>
-                  <a:schemeClr val="tx1"/>
-                </a:solidFill>
-              </a:rPr>
-              <a:t>Tariffs</a:t>
-            </a:r>
-            <a:endParaRPr lang="en-US" sz="1600" dirty="0"/>
-          </a:p>
-        </p:txBody>
-      </p:sp>
-      <p:sp>
-        <p:nvSpPr>
-          <p:cNvPr id="17" name="Text 15"/>
-          <p:cNvSpPr txBox="1"/>
-          <p:nvPr/>
-        </p:nvSpPr>
-        <p:spPr>
-          <a:xfrm>
-            <a:off x="640080" y="3429000"/>
-            <a:ext cx="3657600" cy="548640"/>
-          </a:xfrm>
-          <a:prstGeom prst="rect">
-            <a:avLst/>
-          </a:prstGeom>
-          <a:noFill/>
-          <a:ln/>
-        </p:spPr>
-        <p:txBody>
-          <a:bodyPr wrap="square" lIns="0" tIns="0" rIns="0" bIns="0" rtlCol="0" anchor="t"/>
-          <a:lstStyle/>
-          <a:p>
-            <a:pPr indent="0" marL="0">
-              <a:buNone/>
-            </a:pPr>
-            <a:r>
-              <a:rPr lang="en-US" sz="1300" dirty="0">
-                <a:solidFill>
-                  <a:schemeClr val="tx2"/>
-                </a:solidFill>
-              </a:rPr>
-              <a:t>Confirmed lines; PROSEC; CEB</a:t>
-            </a:r>
-            <a:endParaRPr lang="en-US" sz="1300" dirty="0"/>
-          </a:p>
-        </p:txBody>
-      </p:sp>
-      <p:sp>
-        <p:nvSpPr>
-          <p:cNvPr id="18" name="Shape 16"/>
-          <p:cNvSpPr/>
-          <p:nvPr/>
-        </p:nvSpPr>
-        <p:spPr>
-          <a:xfrm>
-            <a:off x="4663440" y="2697480"/>
-            <a:ext cx="4023360" cy="1417320"/>
-          </a:xfrm>
-          <a:prstGeom prst="roundRect">
-            <a:avLst>
-              <a:gd name="adj" fmla="val 5161"/>
-            </a:avLst>
-          </a:prstGeom>
-          <a:solidFill>
-            <a:srgbClr val="EEF2F7"/>
-          </a:solidFill>
-          <a:ln w="12700">
-            <a:solidFill>
-              <a:srgbClr val="EEF2F7"/>
-            </a:solidFill>
-            <a:prstDash val="solid"/>
-          </a:ln>
-        </p:spPr>
-      </p:sp>
-      <p:sp>
-        <p:nvSpPr>
-          <p:cNvPr id="19" name="Shape 17"/>
-          <p:cNvSpPr/>
-          <p:nvPr/>
-        </p:nvSpPr>
-        <p:spPr>
-          <a:xfrm>
-            <a:off x="4846320" y="2880360"/>
-            <a:ext cx="384048" cy="384048"/>
-          </a:xfrm>
-          <a:prstGeom prst="ellipse">
-            <a:avLst/>
-          </a:prstGeom>
-          <a:solidFill>
-            <a:srgbClr val="1B1F3B"/>
-          </a:solidFill>
-          <a:ln w="12700">
-            <a:solidFill>
-              <a:srgbClr val="1B1F3B"/>
-            </a:solidFill>
-            <a:prstDash val="solid"/>
-          </a:ln>
-        </p:spPr>
-      </p:sp>
-      <p:sp>
-        <p:nvSpPr>
-          <p:cNvPr id="20" name="Text 18"/>
-          <p:cNvSpPr txBox="1"/>
-          <p:nvPr/>
-        </p:nvSpPr>
-        <p:spPr>
-          <a:xfrm>
-            <a:off x="4846320" y="2880360"/>
-            <a:ext cx="384048" cy="384048"/>
-          </a:xfrm>
-          <a:prstGeom prst="rect">
-            <a:avLst/>
-          </a:prstGeom>
-          <a:noFill/>
-          <a:ln/>
-        </p:spPr>
-        <p:txBody>
-          <a:bodyPr wrap="square" lIns="0" tIns="0" rIns="0" bIns="0" rtlCol="0" anchor="ctr"/>
-          <a:lstStyle/>
-          <a:p>
-            <a:pPr algn="ctr" indent="0" marL="0">
-              <a:buNone/>
-            </a:pPr>
-            <a:r>
-              <a:rPr lang="en-US" sz="1300" b="1" dirty="0">
-                <a:solidFill>
-                  <a:srgbClr val="FFFFFF"/>
-                </a:solidFill>
-              </a:rPr>
-              <a:t>!</a:t>
-            </a:r>
-            <a:endParaRPr lang="en-US" sz="1300" dirty="0"/>
-          </a:p>
-        </p:txBody>
-      </p:sp>
-      <p:sp>
-        <p:nvSpPr>
-          <p:cNvPr id="21" name="Text 19"/>
-          <p:cNvSpPr txBox="1"/>
-          <p:nvPr/>
-        </p:nvSpPr>
-        <p:spPr>
-          <a:xfrm>
-            <a:off x="5394960" y="2880360"/>
-            <a:ext cx="3108960" cy="384048"/>
-          </a:xfrm>
-          <a:prstGeom prst="rect">
-            <a:avLst/>
-          </a:prstGeom>
-          <a:noFill/>
-          <a:ln/>
-        </p:spPr>
-        <p:txBody>
-          <a:bodyPr wrap="square" lIns="0" tIns="0" rIns="0" bIns="0" rtlCol="0" anchor="ctr"/>
-          <a:lstStyle/>
-          <a:p>
-            <a:pPr indent="0" marL="0">
-              <a:buNone/>
-            </a:pPr>
-            <a:r>
-              <a:rPr lang="en-US" sz="1600" b="1" dirty="0">
-                <a:solidFill>
-                  <a:schemeClr val="tx1"/>
-                </a:solidFill>
-              </a:rPr>
-              <a:t>Textile learning curve</a:t>
-            </a:r>
-            <a:endParaRPr lang="en-US" sz="1600" dirty="0"/>
-          </a:p>
-        </p:txBody>
-      </p:sp>
-      <p:sp>
-        <p:nvSpPr>
-          <p:cNvPr id="22" name="Text 20"/>
-          <p:cNvSpPr txBox="1"/>
-          <p:nvPr/>
-        </p:nvSpPr>
-        <p:spPr>
-          <a:xfrm>
-            <a:off x="4846320" y="3429000"/>
-            <a:ext cx="3657600" cy="548640"/>
-          </a:xfrm>
-          <a:prstGeom prst="rect">
-            <a:avLst/>
-          </a:prstGeom>
-          <a:noFill/>
-          <a:ln/>
-        </p:spPr>
-        <p:txBody>
-          <a:bodyPr wrap="square" lIns="0" tIns="0" rIns="0" bIns="0" rtlCol="0" anchor="t"/>
-          <a:lstStyle/>
-          <a:p>
-            <a:pPr indent="0" marL="0">
-              <a:buNone/>
-            </a:pPr>
-            <a:r>
-              <a:rPr lang="en-US" sz="1300" dirty="0">
-                <a:solidFill>
-                  <a:schemeClr val="tx2"/>
-                </a:solidFill>
-              </a:rPr>
-              <a:t>CLT certification and industry hires</a:t>
-            </a:r>
-            <a:endParaRPr lang="en-US" sz="1300" dirty="0"/>
+              <a:t>Import and local inventory (CEB)</a:t>
+            </a:r>
+            <a:endParaRPr lang="en-US" sz="1400" dirty="0"/>
+          </a:p>
+          <a:p>
+            <a:pPr marL="342900" indent="-342900">
+              <a:spcAft>
+                <a:spcPts val="500"/>
+              </a:spcAft>
+              <a:buSzPct val="100000"/>
+              <a:buChar char="•"/>
+            </a:pPr>
+            <a:r>
+              <a:rPr lang="en-US" sz="1400" dirty="0">
+                <a:solidFill>
+                  <a:srgbClr val="1B1F3B"/>
+                </a:solidFill>
+              </a:rPr>
+              <a:t>Demo showroom and Spanish service</a:t>
+            </a:r>
+            <a:endParaRPr lang="en-US" sz="1400" dirty="0"/>
+          </a:p>
+          <a:p>
+            <a:pPr marL="342900" indent="-342900">
+              <a:spcAft>
+                <a:spcPts val="500"/>
+              </a:spcAft>
+              <a:buSzPct val="100000"/>
+              <a:buChar char="•"/>
+            </a:pPr>
+            <a:r>
+              <a:rPr lang="en-US" sz="1400" dirty="0">
+                <a:solidFill>
+                  <a:srgbClr val="1B1F3B"/>
+                </a:solidFill>
+              </a:rPr>
+              <a:t>Sales, customer service and textile technician</a:t>
+            </a:r>
+            <a:endParaRPr lang="en-US" sz="1400" dirty="0"/>
+          </a:p>
+          <a:p>
+            <a:pPr marL="342900" indent="-342900">
+              <a:spcAft>
+                <a:spcPts val="500"/>
+              </a:spcAft>
+              <a:buSzPct val="100000"/>
+              <a:buChar char="•"/>
+            </a:pPr>
+            <a:r>
+              <a:rPr lang="en-US" sz="1400" dirty="0">
+                <a:solidFill>
+                  <a:srgbClr val="1B1F3B"/>
+                </a:solidFill>
+              </a:rPr>
+              <a:t>Machine and product training</a:t>
+            </a:r>
+            <a:endParaRPr lang="en-US" sz="1400" dirty="0"/>
+          </a:p>
+          <a:p>
+            <a:pPr marL="342900" indent="-342900">
+              <a:spcAft>
+                <a:spcPts val="500"/>
+              </a:spcAft>
+              <a:buSzPct val="100000"/>
+              <a:buChar char="•"/>
+            </a:pPr>
+            <a:r>
+              <a:rPr lang="en-US" sz="1400" dirty="0">
+                <a:solidFill>
+                  <a:srgbClr val="1B1F3B"/>
+                </a:solidFill>
+              </a:rPr>
+              <a:t>Targets: 2 · 5 · 8 lines in years 1–3</a:t>
+            </a:r>
+            <a:endParaRPr lang="en-US" sz="1400" dirty="0"/>
+          </a:p>
+          <a:p>
+            <a:pPr marL="342900" indent="-342900">
+              <a:spcAft>
+                <a:spcPts val="500"/>
+              </a:spcAft>
+              <a:buSzPct val="100000"/>
+              <a:buChar char="•"/>
+            </a:pPr>
+            <a:r>
+              <a:rPr lang="en-US" sz="1400" dirty="0">
+                <a:solidFill>
+                  <a:srgbClr val="1B1F3B"/>
+                </a:solidFill>
+              </a:rPr>
+              <a:t>Quarterly reports</a:t>
+            </a:r>
+            <a:endParaRPr lang="en-US" sz="1400" dirty="0"/>
           </a:p>
         </p:txBody>
       </p:sp>
@@ -24929,7 +25469,7 @@
                   <a:schemeClr val="tx1"/>
                 </a:solidFill>
               </a:rPr>
-              <a:t>Next steps</a:t>
+              <a:t>Risks and mitigation</a:t>
             </a:r>
             <a:endParaRPr lang="en-US" sz="2600" dirty="0"/>
           </a:p>
@@ -24944,7 +25484,34 @@
         <p:spPr>
           <a:xfrm>
             <a:off x="457200" y="1097280"/>
-            <a:ext cx="411480" cy="411480"/>
+            <a:ext cx="4023360" cy="1417320"/>
+          </a:xfrm>
+          <a:prstGeom prst="roundRect">
+            <a:avLst>
+              <a:gd name="adj" fmla="val 5161"/>
+            </a:avLst>
+          </a:prstGeom>
+          <a:solidFill>
+            <a:srgbClr val="EEF2F7"/>
+          </a:solidFill>
+          <a:ln w="12700">
+            <a:solidFill>
+              <a:srgbClr val="EEF2F7"/>
+            </a:solidFill>
+            <a:prstDash val="solid"/>
+          </a:ln>
+        </p:spPr>
+      </p:sp>
+      <p:sp>
+        <p:nvSpPr>
+          <p:cNvPr id="4" name="Shape 2"/>
+          <p:cNvSpPr/>
+          <p:nvPr/>
+        </p:nvSpPr>
+        <p:spPr>
+          <a:xfrm>
+            <a:off x="640080" y="1280160"/>
+            <a:ext cx="384048" cy="384048"/>
           </a:xfrm>
           <a:prstGeom prst="ellipse">
             <a:avLst/>
@@ -24962,14 +25529,14 @@
       </p:sp>
       <p:sp>
         <p:nvSpPr>
-          <p:cNvPr id="4" name="Text 2"/>
+          <p:cNvPr id="5" name="Text 3"/>
           <p:cNvSpPr txBox="1"/>
           <p:nvPr/>
         </p:nvSpPr>
         <p:spPr>
           <a:xfrm>
-            <a:off x="457200" y="1097280"/>
-            <a:ext cx="411480" cy="411480"/>
+            <a:off x="640080" y="1280160"/>
+            <a:ext cx="384048" cy="384048"/>
           </a:xfrm>
           <a:prstGeom prst="rect">
             <a:avLst/>
@@ -24990,7 +25557,7 @@
                   <a:srgbClr val="FFFFFF"/>
                 </a:solidFill>
               </a:rPr>
-              <a:t>1</a:t>
+              <a:t>!</a:t>
             </a:r>
             <a:endParaRPr lang="en-US" sz="1300" dirty="0"/>
           </a:p>
@@ -24998,14 +25565,14 @@
       </p:sp>
       <p:sp>
         <p:nvSpPr>
-          <p:cNvPr id="5" name="Text 3"/>
+          <p:cNvPr id="6" name="Text 4"/>
           <p:cNvSpPr txBox="1"/>
           <p:nvPr/>
         </p:nvSpPr>
         <p:spPr>
           <a:xfrm>
-            <a:off x="1051560" y="1051560"/>
-            <a:ext cx="7589520" cy="502920"/>
+            <a:off x="1188720" y="1280160"/>
+            <a:ext cx="3108960" cy="384048"/>
           </a:xfrm>
           <a:prstGeom prst="rect">
             <a:avLst/>
@@ -25021,27 +25588,90 @@
               <a:buNone/>
             </a:pPr>
             <a:r>
-              <a:rPr lang="en-US" sz="1500" dirty="0">
+              <a:rPr lang="en-US" sz="1600" b="1" dirty="0">
                 <a:solidFill>
                   <a:schemeClr val="tx1"/>
                 </a:solidFill>
               </a:rPr>
-              <a:t>CLT formal quotation (CLT-016B, CLT-012R, SM60-85, consumables)</a:t>
-            </a:r>
-            <a:endParaRPr lang="en-US" sz="1500" dirty="0"/>
-          </a:p>
-        </p:txBody>
-      </p:sp>
-      <p:sp>
-        <p:nvSpPr>
-          <p:cNvPr id="6" name="Shape 4"/>
+              <a:t>Cash-strapped industry</a:t>
+            </a:r>
+            <a:endParaRPr lang="en-US" sz="1600" dirty="0"/>
+          </a:p>
+        </p:txBody>
+      </p:sp>
+      <p:sp>
+        <p:nvSpPr>
+          <p:cNvPr id="7" name="Text 5"/>
+          <p:cNvSpPr txBox="1"/>
+          <p:nvPr/>
+        </p:nvSpPr>
+        <p:spPr>
+          <a:xfrm>
+            <a:off x="640080" y="1828800"/>
+            <a:ext cx="3657600" cy="548640"/>
+          </a:xfrm>
+          <a:prstGeom prst="rect">
+            <a:avLst/>
+          </a:prstGeom>
+          <a:noFill/>
+          <a:ln/>
+        </p:spPr>
+        <p:txBody>
+          <a:bodyPr wrap="square" lIns="0" tIns="0" rIns="0" bIns="0" rtlCol="0" anchor="t"/>
+          <a:lstStyle/>
+          <a:p>
+            <a:pPr indent="0" marL="0">
+              <a:buNone/>
+            </a:pPr>
+            <a:r>
+              <a:rPr lang="en-US" sz="1300" dirty="0">
+                <a:solidFill>
+                  <a:schemeClr val="tx2"/>
+                </a:solidFill>
+              </a:rPr>
+              <a:t>Phased investment and financing</a:t>
+            </a:r>
+            <a:endParaRPr lang="en-US" sz="1300" dirty="0"/>
+          </a:p>
+        </p:txBody>
+      </p:sp>
+      <p:sp>
+        <p:nvSpPr>
+          <p:cNvPr id="8" name="Shape 6"/>
           <p:cNvSpPr/>
           <p:nvPr/>
         </p:nvSpPr>
         <p:spPr>
           <a:xfrm>
-            <a:off x="457200" y="1737360"/>
-            <a:ext cx="411480" cy="411480"/>
+            <a:off x="4663440" y="1097280"/>
+            <a:ext cx="4023360" cy="1417320"/>
+          </a:xfrm>
+          <a:prstGeom prst="roundRect">
+            <a:avLst>
+              <a:gd name="adj" fmla="val 5161"/>
+            </a:avLst>
+          </a:prstGeom>
+          <a:solidFill>
+            <a:srgbClr val="EEF2F7"/>
+          </a:solidFill>
+          <a:ln w="12700">
+            <a:solidFill>
+              <a:srgbClr val="EEF2F7"/>
+            </a:solidFill>
+            <a:prstDash val="solid"/>
+          </a:ln>
+        </p:spPr>
+      </p:sp>
+      <p:sp>
+        <p:nvSpPr>
+          <p:cNvPr id="9" name="Shape 7"/>
+          <p:cNvSpPr/>
+          <p:nvPr/>
+        </p:nvSpPr>
+        <p:spPr>
+          <a:xfrm>
+            <a:off x="4846320" y="1280160"/>
+            <a:ext cx="384048" cy="384048"/>
           </a:xfrm>
           <a:prstGeom prst="ellipse">
             <a:avLst/>
@@ -25059,14 +25689,14 @@
       </p:sp>
       <p:sp>
         <p:nvSpPr>
-          <p:cNvPr id="7" name="Text 5"/>
+          <p:cNvPr id="10" name="Text 8"/>
           <p:cNvSpPr txBox="1"/>
           <p:nvPr/>
         </p:nvSpPr>
         <p:spPr>
           <a:xfrm>
-            <a:off x="457200" y="1737360"/>
-            <a:ext cx="411480" cy="411480"/>
+            <a:off x="4846320" y="1280160"/>
+            <a:ext cx="384048" cy="384048"/>
           </a:xfrm>
           <a:prstGeom prst="rect">
             <a:avLst/>
@@ -25087,7 +25717,7 @@
                   <a:srgbClr val="FFFFFF"/>
                 </a:solidFill>
               </a:rPr>
-              <a:t>2</a:t>
+              <a:t>!</a:t>
             </a:r>
             <a:endParaRPr lang="en-US" sz="1300" dirty="0"/>
           </a:p>
@@ -25095,14 +25725,14 @@
       </p:sp>
       <p:sp>
         <p:nvSpPr>
-          <p:cNvPr id="8" name="Text 6"/>
+          <p:cNvPr id="11" name="Text 9"/>
           <p:cNvSpPr txBox="1"/>
           <p:nvPr/>
         </p:nvSpPr>
         <p:spPr>
           <a:xfrm>
-            <a:off x="1051560" y="1691640"/>
-            <a:ext cx="7589520" cy="502920"/>
+            <a:off x="5394960" y="1280160"/>
+            <a:ext cx="3108960" cy="384048"/>
           </a:xfrm>
           <a:prstGeom prst="rect">
             <a:avLst/>
@@ -25118,27 +25748,90 @@
               <a:buNone/>
             </a:pPr>
             <a:r>
-              <a:rPr lang="en-US" sz="1500" dirty="0">
+              <a:rPr lang="en-US" sz="1600" b="1" dirty="0">
                 <a:solidFill>
                   <a:schemeClr val="tx1"/>
                 </a:solidFill>
               </a:rPr>
-              <a:t>Meeting with CLT’s owners to review terms</a:t>
-            </a:r>
-            <a:endParaRPr lang="en-US" sz="1500" dirty="0"/>
-          </a:p>
-        </p:txBody>
-      </p:sp>
-      <p:sp>
-        <p:nvSpPr>
-          <p:cNvPr id="9" name="Shape 7"/>
+              <a:t>DTF in short runs</a:t>
+            </a:r>
+            <a:endParaRPr lang="en-US" sz="1600" dirty="0"/>
+          </a:p>
+        </p:txBody>
+      </p:sp>
+      <p:sp>
+        <p:nvSpPr>
+          <p:cNvPr id="12" name="Text 10"/>
+          <p:cNvSpPr txBox="1"/>
+          <p:nvPr/>
+        </p:nvSpPr>
+        <p:spPr>
+          <a:xfrm>
+            <a:off x="4846320" y="1828800"/>
+            <a:ext cx="3657600" cy="548640"/>
+          </a:xfrm>
+          <a:prstGeom prst="rect">
+            <a:avLst/>
+          </a:prstGeom>
+          <a:noFill/>
+          <a:ln/>
+        </p:spPr>
+        <p:txBody>
+          <a:bodyPr wrap="square" lIns="0" tIns="0" rIns="0" bIns="0" rtlCol="0" anchor="t"/>
+          <a:lstStyle/>
+          <a:p>
+            <a:pPr indent="0" marL="0">
+              <a:buNone/>
+            </a:pPr>
+            <a:r>
+              <a:rPr lang="en-US" sz="1300" dirty="0">
+                <a:solidFill>
+                  <a:schemeClr val="tx2"/>
+                </a:solidFill>
+              </a:rPr>
+              <a:t>Focus on volume and effects</a:t>
+            </a:r>
+            <a:endParaRPr lang="en-US" sz="1300" dirty="0"/>
+          </a:p>
+        </p:txBody>
+      </p:sp>
+      <p:sp>
+        <p:nvSpPr>
+          <p:cNvPr id="13" name="Shape 11"/>
           <p:cNvSpPr/>
           <p:nvPr/>
         </p:nvSpPr>
         <p:spPr>
           <a:xfrm>
-            <a:off x="457200" y="2377440"/>
-            <a:ext cx="411480" cy="411480"/>
+            <a:off x="457200" y="2697480"/>
+            <a:ext cx="4023360" cy="1417320"/>
+          </a:xfrm>
+          <a:prstGeom prst="roundRect">
+            <a:avLst>
+              <a:gd name="adj" fmla="val 5161"/>
+            </a:avLst>
+          </a:prstGeom>
+          <a:solidFill>
+            <a:srgbClr val="EEF2F7"/>
+          </a:solidFill>
+          <a:ln w="12700">
+            <a:solidFill>
+              <a:srgbClr val="EEF2F7"/>
+            </a:solidFill>
+            <a:prstDash val="solid"/>
+          </a:ln>
+        </p:spPr>
+      </p:sp>
+      <p:sp>
+        <p:nvSpPr>
+          <p:cNvPr id="14" name="Shape 12"/>
+          <p:cNvSpPr/>
+          <p:nvPr/>
+        </p:nvSpPr>
+        <p:spPr>
+          <a:xfrm>
+            <a:off x="640080" y="2880360"/>
+            <a:ext cx="384048" cy="384048"/>
           </a:xfrm>
           <a:prstGeom prst="ellipse">
             <a:avLst/>
@@ -25156,14 +25849,14 @@
       </p:sp>
       <p:sp>
         <p:nvSpPr>
-          <p:cNvPr id="10" name="Text 8"/>
+          <p:cNvPr id="15" name="Text 13"/>
           <p:cNvSpPr txBox="1"/>
           <p:nvPr/>
         </p:nvSpPr>
         <p:spPr>
           <a:xfrm>
-            <a:off x="457200" y="2377440"/>
-            <a:ext cx="411480" cy="411480"/>
+            <a:off x="640080" y="2880360"/>
+            <a:ext cx="384048" cy="384048"/>
           </a:xfrm>
           <a:prstGeom prst="rect">
             <a:avLst/>
@@ -25184,7 +25877,7 @@
                   <a:srgbClr val="1B1F3B"/>
                 </a:solidFill>
               </a:rPr>
-              <a:t>3</a:t>
+              <a:t>!</a:t>
             </a:r>
             <a:endParaRPr lang="en-US" sz="1300" dirty="0"/>
           </a:p>
@@ -25192,14 +25885,14 @@
       </p:sp>
       <p:sp>
         <p:nvSpPr>
-          <p:cNvPr id="11" name="Text 9"/>
+          <p:cNvPr id="16" name="Text 14"/>
           <p:cNvSpPr txBox="1"/>
           <p:nvPr/>
         </p:nvSpPr>
         <p:spPr>
           <a:xfrm>
-            <a:off x="1051560" y="2331720"/>
-            <a:ext cx="7589520" cy="502920"/>
+            <a:off x="1188720" y="2880360"/>
+            <a:ext cx="3108960" cy="384048"/>
           </a:xfrm>
           <a:prstGeom prst="rect">
             <a:avLst/>
@@ -25215,27 +25908,90 @@
               <a:buNone/>
             </a:pPr>
             <a:r>
-              <a:rPr lang="en-US" sz="1500" dirty="0">
+              <a:rPr lang="en-US" sz="1600" b="1" dirty="0">
                 <a:solidFill>
                   <a:schemeClr val="tx1"/>
                 </a:solidFill>
               </a:rPr>
-              <a:t>Confirm duties with a customs broker</a:t>
-            </a:r>
-            <a:endParaRPr lang="en-US" sz="1500" dirty="0"/>
-          </a:p>
-        </p:txBody>
-      </p:sp>
-      <p:sp>
-        <p:nvSpPr>
-          <p:cNvPr id="12" name="Shape 10"/>
+              <a:t>Tariffs</a:t>
+            </a:r>
+            <a:endParaRPr lang="en-US" sz="1600" dirty="0"/>
+          </a:p>
+        </p:txBody>
+      </p:sp>
+      <p:sp>
+        <p:nvSpPr>
+          <p:cNvPr id="17" name="Text 15"/>
+          <p:cNvSpPr txBox="1"/>
+          <p:nvPr/>
+        </p:nvSpPr>
+        <p:spPr>
+          <a:xfrm>
+            <a:off x="640080" y="3429000"/>
+            <a:ext cx="3657600" cy="548640"/>
+          </a:xfrm>
+          <a:prstGeom prst="rect">
+            <a:avLst/>
+          </a:prstGeom>
+          <a:noFill/>
+          <a:ln/>
+        </p:spPr>
+        <p:txBody>
+          <a:bodyPr wrap="square" lIns="0" tIns="0" rIns="0" bIns="0" rtlCol="0" anchor="t"/>
+          <a:lstStyle/>
+          <a:p>
+            <a:pPr indent="0" marL="0">
+              <a:buNone/>
+            </a:pPr>
+            <a:r>
+              <a:rPr lang="en-US" sz="1300" dirty="0">
+                <a:solidFill>
+                  <a:schemeClr val="tx2"/>
+                </a:solidFill>
+              </a:rPr>
+              <a:t>Confirmed lines; PROSEC; CEB</a:t>
+            </a:r>
+            <a:endParaRPr lang="en-US" sz="1300" dirty="0"/>
+          </a:p>
+        </p:txBody>
+      </p:sp>
+      <p:sp>
+        <p:nvSpPr>
+          <p:cNvPr id="18" name="Shape 16"/>
           <p:cNvSpPr/>
           <p:nvPr/>
         </p:nvSpPr>
         <p:spPr>
           <a:xfrm>
-            <a:off x="457200" y="3017520"/>
-            <a:ext cx="411480" cy="411480"/>
+            <a:off x="4663440" y="2697480"/>
+            <a:ext cx="4023360" cy="1417320"/>
+          </a:xfrm>
+          <a:prstGeom prst="roundRect">
+            <a:avLst>
+              <a:gd name="adj" fmla="val 5161"/>
+            </a:avLst>
+          </a:prstGeom>
+          <a:solidFill>
+            <a:srgbClr val="EEF2F7"/>
+          </a:solidFill>
+          <a:ln w="12700">
+            <a:solidFill>
+              <a:srgbClr val="EEF2F7"/>
+            </a:solidFill>
+            <a:prstDash val="solid"/>
+          </a:ln>
+        </p:spPr>
+      </p:sp>
+      <p:sp>
+        <p:nvSpPr>
+          <p:cNvPr id="19" name="Shape 17"/>
+          <p:cNvSpPr/>
+          <p:nvPr/>
+        </p:nvSpPr>
+        <p:spPr>
+          <a:xfrm>
+            <a:off x="4846320" y="2880360"/>
+            <a:ext cx="384048" cy="384048"/>
           </a:xfrm>
           <a:prstGeom prst="ellipse">
             <a:avLst/>
@@ -25253,14 +26009,14 @@
       </p:sp>
       <p:sp>
         <p:nvSpPr>
-          <p:cNvPr id="13" name="Text 11"/>
+          <p:cNvPr id="20" name="Text 18"/>
           <p:cNvSpPr txBox="1"/>
           <p:nvPr/>
         </p:nvSpPr>
         <p:spPr>
           <a:xfrm>
-            <a:off x="457200" y="3017520"/>
-            <a:ext cx="411480" cy="411480"/>
+            <a:off x="4846320" y="2880360"/>
+            <a:ext cx="384048" cy="384048"/>
           </a:xfrm>
           <a:prstGeom prst="rect">
             <a:avLst/>
@@ -25281,7 +26037,7 @@
                   <a:srgbClr val="FFFFFF"/>
                 </a:solidFill>
               </a:rPr>
-              <a:t>4</a:t>
+              <a:t>!</a:t>
             </a:r>
             <a:endParaRPr lang="en-US" sz="1300" dirty="0"/>
           </a:p>
@@ -25289,14 +26045,14 @@
       </p:sp>
       <p:sp>
         <p:nvSpPr>
-          <p:cNvPr id="14" name="Text 12"/>
+          <p:cNvPr id="21" name="Text 19"/>
           <p:cNvSpPr txBox="1"/>
           <p:nvPr/>
         </p:nvSpPr>
         <p:spPr>
           <a:xfrm>
-            <a:off x="1051560" y="2971800"/>
-            <a:ext cx="7589520" cy="502920"/>
+            <a:off x="5394960" y="2880360"/>
+            <a:ext cx="3108960" cy="384048"/>
           </a:xfrm>
           <a:prstGeom prst="rect">
             <a:avLst/>
@@ -25312,52 +26068,27 @@
               <a:buNone/>
             </a:pPr>
             <a:r>
-              <a:rPr lang="en-US" sz="1500" dirty="0">
+              <a:rPr lang="en-US" sz="1600" b="1" dirty="0">
                 <a:solidFill>
                   <a:schemeClr val="tx1"/>
                 </a:solidFill>
               </a:rPr>
-              <a:t>Validate consumption with 10–15 shops</a:t>
-            </a:r>
-            <a:endParaRPr lang="en-US" sz="1500" dirty="0"/>
-          </a:p>
-        </p:txBody>
-      </p:sp>
-      <p:sp>
-        <p:nvSpPr>
-          <p:cNvPr id="15" name="Shape 13"/>
-          <p:cNvSpPr/>
-          <p:nvPr/>
-        </p:nvSpPr>
-        <p:spPr>
-          <a:xfrm>
-            <a:off x="457200" y="3657600"/>
-            <a:ext cx="411480" cy="411480"/>
-          </a:xfrm>
-          <a:prstGeom prst="ellipse">
-            <a:avLst/>
-          </a:prstGeom>
-          <a:solidFill>
-            <a:srgbClr val="0089C2"/>
-          </a:solidFill>
-          <a:ln w="12700">
-            <a:solidFill>
-              <a:srgbClr val="0089C2"/>
-            </a:solidFill>
-            <a:prstDash val="solid"/>
-          </a:ln>
-        </p:spPr>
-      </p:sp>
-      <p:sp>
-        <p:nvSpPr>
-          <p:cNvPr id="16" name="Text 14"/>
+              <a:t>Textile learning curve</a:t>
+            </a:r>
+            <a:endParaRPr lang="en-US" sz="1600" dirty="0"/>
+          </a:p>
+        </p:txBody>
+      </p:sp>
+      <p:sp>
+        <p:nvSpPr>
+          <p:cNvPr id="22" name="Text 20"/>
           <p:cNvSpPr txBox="1"/>
           <p:nvPr/>
         </p:nvSpPr>
         <p:spPr>
           <a:xfrm>
-            <a:off x="457200" y="3657600"/>
-            <a:ext cx="411480" cy="411480"/>
+            <a:off x="4846320" y="3429000"/>
+            <a:ext cx="3657600" cy="548640"/>
           </a:xfrm>
           <a:prstGeom prst="rect">
             <a:avLst/>
@@ -25366,57 +26097,21 @@
           <a:ln/>
         </p:spPr>
         <p:txBody>
-          <a:bodyPr wrap="square" lIns="0" tIns="0" rIns="0" bIns="0" rtlCol="0" anchor="ctr"/>
-          <a:lstStyle/>
-          <a:p>
-            <a:pPr algn="ctr" indent="0" marL="0">
-              <a:buNone/>
-            </a:pPr>
-            <a:r>
-              <a:rPr lang="en-US" sz="1300" b="1" dirty="0">
-                <a:solidFill>
-                  <a:srgbClr val="FFFFFF"/>
-                </a:solidFill>
-              </a:rPr>
-              <a:t>5</a:t>
-            </a:r>
-            <a:endParaRPr lang="en-US" sz="1300" dirty="0"/>
-          </a:p>
-        </p:txBody>
-      </p:sp>
-      <p:sp>
-        <p:nvSpPr>
-          <p:cNvPr id="17" name="Text 15"/>
-          <p:cNvSpPr txBox="1"/>
-          <p:nvPr/>
-        </p:nvSpPr>
-        <p:spPr>
-          <a:xfrm>
-            <a:off x="1051560" y="3611880"/>
-            <a:ext cx="7589520" cy="502920"/>
-          </a:xfrm>
-          <a:prstGeom prst="rect">
-            <a:avLst/>
-          </a:prstGeom>
-          <a:noFill/>
-          <a:ln/>
-        </p:spPr>
-        <p:txBody>
-          <a:bodyPr wrap="square" lIns="0" tIns="0" rIns="0" bIns="0" rtlCol="0" anchor="ctr"/>
+          <a:bodyPr wrap="square" lIns="0" tIns="0" rIns="0" bIns="0" rtlCol="0" anchor="t"/>
           <a:lstStyle/>
           <a:p>
             <a:pPr indent="0" marL="0">
               <a:buNone/>
             </a:pPr>
             <a:r>
-              <a:rPr lang="en-US" sz="1500" dirty="0">
-                <a:solidFill>
-                  <a:schemeClr val="tx1"/>
-                </a:solidFill>
-              </a:rPr>
-              <a:t>Letter of intent and 6-month launch plan</a:t>
-            </a:r>
-            <a:endParaRPr lang="en-US" sz="1500" dirty="0"/>
+              <a:rPr lang="en-US" sz="1300" dirty="0">
+                <a:solidFill>
+                  <a:schemeClr val="tx2"/>
+                </a:solidFill>
+              </a:rPr>
+              <a:t>CLT certification and industry hires</a:t>
+            </a:r>
+            <a:endParaRPr lang="en-US" sz="1300" dirty="0"/>
           </a:p>
         </p:txBody>
       </p:sp>
@@ -25479,6 +26174,602 @@
 <file path=ppt/slides/slide33.xml><?xml version="1.0" encoding="utf-8"?>
 <p:sld xmlns:a="http://schemas.openxmlformats.org/drawingml/2006/main" xmlns:r="http://schemas.openxmlformats.org/officeDocument/2006/relationships" xmlns:p="http://schemas.openxmlformats.org/presentationml/2006/main">
   <p:cSld name="Slide 33">
+    <p:spTree>
+      <p:nvGrpSpPr>
+        <p:cNvPr id="1" name=""/>
+        <p:cNvGrpSpPr/>
+        <p:nvPr/>
+      </p:nvGrpSpPr>
+      <p:grpSpPr>
+        <a:xfrm>
+          <a:off x="0" y="0"/>
+          <a:ext cx="0" cy="0"/>
+          <a:chOff x="0" y="0"/>
+          <a:chExt cx="0" cy="0"/>
+        </a:xfrm>
+      </p:grpSpPr>
+      <p:sp>
+        <p:nvSpPr>
+          <p:cNvPr id="2" name="Text 0"/>
+          <p:cNvSpPr/>
+          <p:nvPr>
+            <p:ph idx="100" type="title" hasCustomPrompt="1"/>
+          </p:nvPr>
+        </p:nvSpPr>
+        <p:spPr>
+          <a:xfrm>
+            <a:off x="457200" y="274320"/>
+            <a:ext cx="8229600" cy="640080"/>
+          </a:xfrm>
+          <a:prstGeom prst="rect">
+            <a:avLst/>
+          </a:prstGeom>
+          <a:noFill/>
+          <a:ln/>
+        </p:spPr>
+        <p:txBody>
+          <a:bodyPr wrap="square" rtlCol="0" anchor="ctr"/>
+          <a:lstStyle/>
+          <a:p>
+            <a:pPr indent="0" marL="0">
+              <a:buNone/>
+            </a:pPr>
+            <a:r>
+              <a:rPr lang="en-US" sz="2600" b="1" dirty="0">
+                <a:solidFill>
+                  <a:schemeClr val="tx1"/>
+                </a:solidFill>
+              </a:rPr>
+              <a:t>Next steps</a:t>
+            </a:r>
+            <a:endParaRPr lang="en-US" sz="2600" dirty="0"/>
+          </a:p>
+        </p:txBody>
+      </p:sp>
+      <p:sp>
+        <p:nvSpPr>
+          <p:cNvPr id="3" name="Shape 1"/>
+          <p:cNvSpPr/>
+          <p:nvPr/>
+        </p:nvSpPr>
+        <p:spPr>
+          <a:xfrm>
+            <a:off x="457200" y="1097280"/>
+            <a:ext cx="411480" cy="411480"/>
+          </a:xfrm>
+          <a:prstGeom prst="ellipse">
+            <a:avLst/>
+          </a:prstGeom>
+          <a:solidFill>
+            <a:srgbClr val="0089C2"/>
+          </a:solidFill>
+          <a:ln w="12700">
+            <a:solidFill>
+              <a:srgbClr val="0089C2"/>
+            </a:solidFill>
+            <a:prstDash val="solid"/>
+          </a:ln>
+        </p:spPr>
+      </p:sp>
+      <p:sp>
+        <p:nvSpPr>
+          <p:cNvPr id="4" name="Text 2"/>
+          <p:cNvSpPr txBox="1"/>
+          <p:nvPr/>
+        </p:nvSpPr>
+        <p:spPr>
+          <a:xfrm>
+            <a:off x="457200" y="1097280"/>
+            <a:ext cx="411480" cy="411480"/>
+          </a:xfrm>
+          <a:prstGeom prst="rect">
+            <a:avLst/>
+          </a:prstGeom>
+          <a:noFill/>
+          <a:ln/>
+        </p:spPr>
+        <p:txBody>
+          <a:bodyPr wrap="square" lIns="0" tIns="0" rIns="0" bIns="0" rtlCol="0" anchor="ctr"/>
+          <a:lstStyle/>
+          <a:p>
+            <a:pPr algn="ctr" indent="0" marL="0">
+              <a:buNone/>
+            </a:pPr>
+            <a:r>
+              <a:rPr lang="en-US" sz="1300" b="1" dirty="0">
+                <a:solidFill>
+                  <a:srgbClr val="FFFFFF"/>
+                </a:solidFill>
+              </a:rPr>
+              <a:t>1</a:t>
+            </a:r>
+            <a:endParaRPr lang="en-US" sz="1300" dirty="0"/>
+          </a:p>
+        </p:txBody>
+      </p:sp>
+      <p:sp>
+        <p:nvSpPr>
+          <p:cNvPr id="5" name="Text 3"/>
+          <p:cNvSpPr txBox="1"/>
+          <p:nvPr/>
+        </p:nvSpPr>
+        <p:spPr>
+          <a:xfrm>
+            <a:off x="1051560" y="1051560"/>
+            <a:ext cx="7589520" cy="502920"/>
+          </a:xfrm>
+          <a:prstGeom prst="rect">
+            <a:avLst/>
+          </a:prstGeom>
+          <a:noFill/>
+          <a:ln/>
+        </p:spPr>
+        <p:txBody>
+          <a:bodyPr wrap="square" lIns="0" tIns="0" rIns="0" bIns="0" rtlCol="0" anchor="ctr"/>
+          <a:lstStyle/>
+          <a:p>
+            <a:pPr indent="0" marL="0">
+              <a:buNone/>
+            </a:pPr>
+            <a:r>
+              <a:rPr lang="en-US" sz="1500" dirty="0">
+                <a:solidFill>
+                  <a:schemeClr val="tx1"/>
+                </a:solidFill>
+              </a:rPr>
+              <a:t>CLT formal quotation (CLT-016B, CLT-012R, SM60-85, consumables)</a:t>
+            </a:r>
+            <a:endParaRPr lang="en-US" sz="1500" dirty="0"/>
+          </a:p>
+        </p:txBody>
+      </p:sp>
+      <p:sp>
+        <p:nvSpPr>
+          <p:cNvPr id="6" name="Shape 4"/>
+          <p:cNvSpPr/>
+          <p:nvPr/>
+        </p:nvSpPr>
+        <p:spPr>
+          <a:xfrm>
+            <a:off x="457200" y="1737360"/>
+            <a:ext cx="411480" cy="411480"/>
+          </a:xfrm>
+          <a:prstGeom prst="ellipse">
+            <a:avLst/>
+          </a:prstGeom>
+          <a:solidFill>
+            <a:srgbClr val="C2185B"/>
+          </a:solidFill>
+          <a:ln w="12700">
+            <a:solidFill>
+              <a:srgbClr val="C2185B"/>
+            </a:solidFill>
+            <a:prstDash val="solid"/>
+          </a:ln>
+        </p:spPr>
+      </p:sp>
+      <p:sp>
+        <p:nvSpPr>
+          <p:cNvPr id="7" name="Text 5"/>
+          <p:cNvSpPr txBox="1"/>
+          <p:nvPr/>
+        </p:nvSpPr>
+        <p:spPr>
+          <a:xfrm>
+            <a:off x="457200" y="1737360"/>
+            <a:ext cx="411480" cy="411480"/>
+          </a:xfrm>
+          <a:prstGeom prst="rect">
+            <a:avLst/>
+          </a:prstGeom>
+          <a:noFill/>
+          <a:ln/>
+        </p:spPr>
+        <p:txBody>
+          <a:bodyPr wrap="square" lIns="0" tIns="0" rIns="0" bIns="0" rtlCol="0" anchor="ctr"/>
+          <a:lstStyle/>
+          <a:p>
+            <a:pPr algn="ctr" indent="0" marL="0">
+              <a:buNone/>
+            </a:pPr>
+            <a:r>
+              <a:rPr lang="en-US" sz="1300" b="1" dirty="0">
+                <a:solidFill>
+                  <a:srgbClr val="FFFFFF"/>
+                </a:solidFill>
+              </a:rPr>
+              <a:t>2</a:t>
+            </a:r>
+            <a:endParaRPr lang="en-US" sz="1300" dirty="0"/>
+          </a:p>
+        </p:txBody>
+      </p:sp>
+      <p:sp>
+        <p:nvSpPr>
+          <p:cNvPr id="8" name="Text 6"/>
+          <p:cNvSpPr txBox="1"/>
+          <p:nvPr/>
+        </p:nvSpPr>
+        <p:spPr>
+          <a:xfrm>
+            <a:off x="1051560" y="1691640"/>
+            <a:ext cx="7589520" cy="502920"/>
+          </a:xfrm>
+          <a:prstGeom prst="rect">
+            <a:avLst/>
+          </a:prstGeom>
+          <a:noFill/>
+          <a:ln/>
+        </p:spPr>
+        <p:txBody>
+          <a:bodyPr wrap="square" lIns="0" tIns="0" rIns="0" bIns="0" rtlCol="0" anchor="ctr"/>
+          <a:lstStyle/>
+          <a:p>
+            <a:pPr indent="0" marL="0">
+              <a:buNone/>
+            </a:pPr>
+            <a:r>
+              <a:rPr lang="en-US" sz="1500" dirty="0">
+                <a:solidFill>
+                  <a:schemeClr val="tx1"/>
+                </a:solidFill>
+              </a:rPr>
+              <a:t>Meeting with CLT’s owners to review terms</a:t>
+            </a:r>
+            <a:endParaRPr lang="en-US" sz="1500" dirty="0"/>
+          </a:p>
+        </p:txBody>
+      </p:sp>
+      <p:sp>
+        <p:nvSpPr>
+          <p:cNvPr id="9" name="Shape 7"/>
+          <p:cNvSpPr/>
+          <p:nvPr/>
+        </p:nvSpPr>
+        <p:spPr>
+          <a:xfrm>
+            <a:off x="457200" y="2377440"/>
+            <a:ext cx="411480" cy="411480"/>
+          </a:xfrm>
+          <a:prstGeom prst="ellipse">
+            <a:avLst/>
+          </a:prstGeom>
+          <a:solidFill>
+            <a:srgbClr val="F2B705"/>
+          </a:solidFill>
+          <a:ln w="12700">
+            <a:solidFill>
+              <a:srgbClr val="F2B705"/>
+            </a:solidFill>
+            <a:prstDash val="solid"/>
+          </a:ln>
+        </p:spPr>
+      </p:sp>
+      <p:sp>
+        <p:nvSpPr>
+          <p:cNvPr id="10" name="Text 8"/>
+          <p:cNvSpPr txBox="1"/>
+          <p:nvPr/>
+        </p:nvSpPr>
+        <p:spPr>
+          <a:xfrm>
+            <a:off x="457200" y="2377440"/>
+            <a:ext cx="411480" cy="411480"/>
+          </a:xfrm>
+          <a:prstGeom prst="rect">
+            <a:avLst/>
+          </a:prstGeom>
+          <a:noFill/>
+          <a:ln/>
+        </p:spPr>
+        <p:txBody>
+          <a:bodyPr wrap="square" lIns="0" tIns="0" rIns="0" bIns="0" rtlCol="0" anchor="ctr"/>
+          <a:lstStyle/>
+          <a:p>
+            <a:pPr algn="ctr" indent="0" marL="0">
+              <a:buNone/>
+            </a:pPr>
+            <a:r>
+              <a:rPr lang="en-US" sz="1300" b="1" dirty="0">
+                <a:solidFill>
+                  <a:srgbClr val="1B1F3B"/>
+                </a:solidFill>
+              </a:rPr>
+              <a:t>3</a:t>
+            </a:r>
+            <a:endParaRPr lang="en-US" sz="1300" dirty="0"/>
+          </a:p>
+        </p:txBody>
+      </p:sp>
+      <p:sp>
+        <p:nvSpPr>
+          <p:cNvPr id="11" name="Text 9"/>
+          <p:cNvSpPr txBox="1"/>
+          <p:nvPr/>
+        </p:nvSpPr>
+        <p:spPr>
+          <a:xfrm>
+            <a:off x="1051560" y="2331720"/>
+            <a:ext cx="7589520" cy="502920"/>
+          </a:xfrm>
+          <a:prstGeom prst="rect">
+            <a:avLst/>
+          </a:prstGeom>
+          <a:noFill/>
+          <a:ln/>
+        </p:spPr>
+        <p:txBody>
+          <a:bodyPr wrap="square" lIns="0" tIns="0" rIns="0" bIns="0" rtlCol="0" anchor="ctr"/>
+          <a:lstStyle/>
+          <a:p>
+            <a:pPr indent="0" marL="0">
+              <a:buNone/>
+            </a:pPr>
+            <a:r>
+              <a:rPr lang="en-US" sz="1500" dirty="0">
+                <a:solidFill>
+                  <a:schemeClr val="tx1"/>
+                </a:solidFill>
+              </a:rPr>
+              <a:t>Confirm duties with a customs broker</a:t>
+            </a:r>
+            <a:endParaRPr lang="en-US" sz="1500" dirty="0"/>
+          </a:p>
+        </p:txBody>
+      </p:sp>
+      <p:sp>
+        <p:nvSpPr>
+          <p:cNvPr id="12" name="Shape 10"/>
+          <p:cNvSpPr/>
+          <p:nvPr/>
+        </p:nvSpPr>
+        <p:spPr>
+          <a:xfrm>
+            <a:off x="457200" y="3017520"/>
+            <a:ext cx="411480" cy="411480"/>
+          </a:xfrm>
+          <a:prstGeom prst="ellipse">
+            <a:avLst/>
+          </a:prstGeom>
+          <a:solidFill>
+            <a:srgbClr val="1B1F3B"/>
+          </a:solidFill>
+          <a:ln w="12700">
+            <a:solidFill>
+              <a:srgbClr val="1B1F3B"/>
+            </a:solidFill>
+            <a:prstDash val="solid"/>
+          </a:ln>
+        </p:spPr>
+      </p:sp>
+      <p:sp>
+        <p:nvSpPr>
+          <p:cNvPr id="13" name="Text 11"/>
+          <p:cNvSpPr txBox="1"/>
+          <p:nvPr/>
+        </p:nvSpPr>
+        <p:spPr>
+          <a:xfrm>
+            <a:off x="457200" y="3017520"/>
+            <a:ext cx="411480" cy="411480"/>
+          </a:xfrm>
+          <a:prstGeom prst="rect">
+            <a:avLst/>
+          </a:prstGeom>
+          <a:noFill/>
+          <a:ln/>
+        </p:spPr>
+        <p:txBody>
+          <a:bodyPr wrap="square" lIns="0" tIns="0" rIns="0" bIns="0" rtlCol="0" anchor="ctr"/>
+          <a:lstStyle/>
+          <a:p>
+            <a:pPr algn="ctr" indent="0" marL="0">
+              <a:buNone/>
+            </a:pPr>
+            <a:r>
+              <a:rPr lang="en-US" sz="1300" b="1" dirty="0">
+                <a:solidFill>
+                  <a:srgbClr val="FFFFFF"/>
+                </a:solidFill>
+              </a:rPr>
+              <a:t>4</a:t>
+            </a:r>
+            <a:endParaRPr lang="en-US" sz="1300" dirty="0"/>
+          </a:p>
+        </p:txBody>
+      </p:sp>
+      <p:sp>
+        <p:nvSpPr>
+          <p:cNvPr id="14" name="Text 12"/>
+          <p:cNvSpPr txBox="1"/>
+          <p:nvPr/>
+        </p:nvSpPr>
+        <p:spPr>
+          <a:xfrm>
+            <a:off x="1051560" y="2971800"/>
+            <a:ext cx="7589520" cy="502920"/>
+          </a:xfrm>
+          <a:prstGeom prst="rect">
+            <a:avLst/>
+          </a:prstGeom>
+          <a:noFill/>
+          <a:ln/>
+        </p:spPr>
+        <p:txBody>
+          <a:bodyPr wrap="square" lIns="0" tIns="0" rIns="0" bIns="0" rtlCol="0" anchor="ctr"/>
+          <a:lstStyle/>
+          <a:p>
+            <a:pPr indent="0" marL="0">
+              <a:buNone/>
+            </a:pPr>
+            <a:r>
+              <a:rPr lang="en-US" sz="1500" dirty="0">
+                <a:solidFill>
+                  <a:schemeClr val="tx1"/>
+                </a:solidFill>
+              </a:rPr>
+              <a:t>Validate consumption with 10–15 shops</a:t>
+            </a:r>
+            <a:endParaRPr lang="en-US" sz="1500" dirty="0"/>
+          </a:p>
+        </p:txBody>
+      </p:sp>
+      <p:sp>
+        <p:nvSpPr>
+          <p:cNvPr id="15" name="Shape 13"/>
+          <p:cNvSpPr/>
+          <p:nvPr/>
+        </p:nvSpPr>
+        <p:spPr>
+          <a:xfrm>
+            <a:off x="457200" y="3657600"/>
+            <a:ext cx="411480" cy="411480"/>
+          </a:xfrm>
+          <a:prstGeom prst="ellipse">
+            <a:avLst/>
+          </a:prstGeom>
+          <a:solidFill>
+            <a:srgbClr val="0089C2"/>
+          </a:solidFill>
+          <a:ln w="12700">
+            <a:solidFill>
+              <a:srgbClr val="0089C2"/>
+            </a:solidFill>
+            <a:prstDash val="solid"/>
+          </a:ln>
+        </p:spPr>
+      </p:sp>
+      <p:sp>
+        <p:nvSpPr>
+          <p:cNvPr id="16" name="Text 14"/>
+          <p:cNvSpPr txBox="1"/>
+          <p:nvPr/>
+        </p:nvSpPr>
+        <p:spPr>
+          <a:xfrm>
+            <a:off x="457200" y="3657600"/>
+            <a:ext cx="411480" cy="411480"/>
+          </a:xfrm>
+          <a:prstGeom prst="rect">
+            <a:avLst/>
+          </a:prstGeom>
+          <a:noFill/>
+          <a:ln/>
+        </p:spPr>
+        <p:txBody>
+          <a:bodyPr wrap="square" lIns="0" tIns="0" rIns="0" bIns="0" rtlCol="0" anchor="ctr"/>
+          <a:lstStyle/>
+          <a:p>
+            <a:pPr algn="ctr" indent="0" marL="0">
+              <a:buNone/>
+            </a:pPr>
+            <a:r>
+              <a:rPr lang="en-US" sz="1300" b="1" dirty="0">
+                <a:solidFill>
+                  <a:srgbClr val="FFFFFF"/>
+                </a:solidFill>
+              </a:rPr>
+              <a:t>5</a:t>
+            </a:r>
+            <a:endParaRPr lang="en-US" sz="1300" dirty="0"/>
+          </a:p>
+        </p:txBody>
+      </p:sp>
+      <p:sp>
+        <p:nvSpPr>
+          <p:cNvPr id="17" name="Text 15"/>
+          <p:cNvSpPr txBox="1"/>
+          <p:nvPr/>
+        </p:nvSpPr>
+        <p:spPr>
+          <a:xfrm>
+            <a:off x="1051560" y="3611880"/>
+            <a:ext cx="7589520" cy="502920"/>
+          </a:xfrm>
+          <a:prstGeom prst="rect">
+            <a:avLst/>
+          </a:prstGeom>
+          <a:noFill/>
+          <a:ln/>
+        </p:spPr>
+        <p:txBody>
+          <a:bodyPr wrap="square" lIns="0" tIns="0" rIns="0" bIns="0" rtlCol="0" anchor="ctr"/>
+          <a:lstStyle/>
+          <a:p>
+            <a:pPr indent="0" marL="0">
+              <a:buNone/>
+            </a:pPr>
+            <a:r>
+              <a:rPr lang="en-US" sz="1500" dirty="0">
+                <a:solidFill>
+                  <a:schemeClr val="tx1"/>
+                </a:solidFill>
+              </a:rPr>
+              <a:t>Letter of intent and 6-month launch plan</a:t>
+            </a:r>
+            <a:endParaRPr lang="en-US" sz="1500" dirty="0"/>
+          </a:p>
+        </p:txBody>
+      </p:sp>
+      <p:sp>
+        <p:nvSpPr>
+          <p:cNvPr id="25" name="Slide Number Placeholder 0"/>
+          <p:cNvSpPr>
+            <a:spLocks noGrp="1"/>
+          </p:cNvSpPr>
+          <p:nvPr>
+            <p:ph type="sldNum" sz="quarter" idx="4294967295"/>
+          </p:nvPr>
+        </p:nvSpPr>
+        <p:spPr>
+          <a:xfrm>
+            <a:off x="8229600" y="4800600"/>
+            <a:ext cx="457200" cy="228600"/>
+          </a:xfrm>
+          <a:prstGeom prst="rect">
+            <a:avLst/>
+          </a:prstGeom>
+          <a:extLst>
+            <a:ext uri="{C572A759-6A51-4108-AA02-DFA0A04FC94B}">
+              <ma14:wrappingTextBoxFlag xmlns:ma14="http://schemas.microsoft.com/office/mac/drawingml/2011/main" val="0"/>
+            </a:ext>
+          </a:extLst>
+        </p:spPr>
+        <p:txBody>
+          <a:bodyPr/>
+          <a:lstStyle>
+            <a:lvl1pPr>
+              <a:defRPr sz="900">
+                <a:solidFill>
+                  <a:srgbClr val="7A8299"/>
+                </a:solidFill>
+              </a:defRPr>
+            </a:lvl1pPr>
+          </a:lstStyle>
+          <a:p>
+            <a:pPr algn="r"/>
+            <a:fld id="{F7021451-1387-4CA6-816F-3879F97B5CBC}" type="slidenum">
+              <a:rPr b="0" lang="en-US"/>
+              <a:t>33</a:t>
+            </a:fld>
+            <a:endParaRPr lang="en-US"/>
+          </a:p>
+        </p:txBody>
+      </p:sp>
+    </p:spTree>
+  </p:cSld>
+  <p:clrMapOvr>
+    <a:masterClrMapping/>
+  </p:clrMapOvr>
+  <p:transition spd="med">
+    <p:fade/>
+  </p:transition>
+</p:sld>
+</file>
+
+<file path=ppt/slides/slide34.xml><?xml version="1.0" encoding="utf-8"?>
+<p:sld xmlns:a="http://schemas.openxmlformats.org/drawingml/2006/main" xmlns:r="http://schemas.openxmlformats.org/officeDocument/2006/relationships" xmlns:p="http://schemas.openxmlformats.org/presentationml/2006/main">
+  <p:cSld name="Slide 34">
     <p:spTree>
       <p:nvGrpSpPr>
         <p:cNvPr id="1" name=""/>

--- a/propuesta-clt/CLT_Proposal_Presentation_EN.pptx
+++ b/propuesta-clt/CLT_Proposal_Presentation_EN.pptx
@@ -140,13 +140,13 @@
   <p:extLst>
     <p:ext uri="{521415D9-36F7-43E2-AB2F-B90AF26B5E84}">
       <p14:sectionLst xmlns:p14="http://schemas.microsoft.com/office/powerpoint/2010/main">
-        <p14:section name="Opening" id="{42826b6a-84fc-bf56-e0ce-38b57c5184c0}">
+        <p14:section name="Opening" id="{391e0414-7884-2464-1d61-c060abd3fb3b}">
           <p14:sldIdLst>
             <p14:sldId id="256"/>
             <p14:sldId id="257"/>
           </p14:sldIdLst>
         </p14:section>
-        <p14:section name="The manufacturer" id="{fbc6f1a4-b551-2614-458b-c3722c3752ad}">
+        <p14:section name="The manufacturer" id="{dfdfd700-4457-a25f-b1e9-bf136265bee0}">
           <p14:sldIdLst>
             <p14:sldId id="258"/>
             <p14:sldId id="259"/>
@@ -157,7 +157,7 @@
             <p14:sldId id="264"/>
           </p14:sldIdLst>
         </p14:section>
-        <p14:section name="The Mexican market" id="{068d48d4-4d83-733c-ebe3-b5e73474db3d}">
+        <p14:section name="The Mexican market" id="{1111fb1f-1606-df73-1d10-c7cf88aac23e}">
           <p14:sldIdLst>
             <p14:sldId id="265"/>
             <p14:sldId id="266"/>
@@ -172,7 +172,7 @@
             <p14:sldId id="275"/>
           </p14:sldIdLst>
         </p14:section>
-        <p14:section name="Why TID · VSP · CEB" id="{cf684f60-a510-88db-f1d7-1f4852658d7a}">
+        <p14:section name="Why TID · VSP · CEB" id="{f7d2411e-01c6-1199-ff1d-3eab397b479d}">
           <p14:sldIdLst>
             <p14:sldId id="276"/>
             <p14:sldId id="277"/>
@@ -180,7 +180,7 @@
             <p14:sldId id="279"/>
           </p14:sldIdLst>
         </p14:section>
-        <p14:section name="Plan and investment" id="{eacd4fdf-e02a-e23e-6351-dedbf2a27f22}">
+        <p14:section name="Plan and investment" id="{7c4128b7-8f79-73e0-521f-4895f313d3b0}">
           <p14:sldIdLst>
             <p14:sldId id="280"/>
             <p14:sldId id="281"/>
@@ -189,7 +189,7 @@
             <p14:sldId id="284"/>
           </p14:sldIdLst>
         </p14:section>
-        <p14:section name="The proposal" id="{e373942f-88bd-e4b0-dbf0-48f001c99a5b}">
+        <p14:section name="The proposal" id="{9ccfddd4-df3d-2f1c-70f2-0e1f82c5cc0c}">
           <p14:sldIdLst>
             <p14:sldId id="285"/>
             <p14:sldId id="286"/>
@@ -30287,7 +30287,7 @@
                   <a:schemeClr val="accent2"/>
                 </a:solidFill>
               </a:rPr>
-              <a:t>Photos: VSP Printing</a:t>
+              <a:t>Photos: VSP</a:t>
             </a:r>
             <a:endParaRPr lang="en-US" sz="3000" dirty="0"/>
           </a:p>
@@ -30323,7 +30323,7 @@
                   <a:schemeClr val="tx2"/>
                 </a:solidFill>
               </a:rPr>
-              <a:t>VSP meeting with CLT</a:t>
+              <a:t>VSP Printing meeting with CLT</a:t>
             </a:r>
             <a:endParaRPr lang="en-US" sz="1200" dirty="0"/>
           </a:p>

--- a/propuesta-clt/CLT_Proposal_Presentation_EN.pptx
+++ b/propuesta-clt/CLT_Proposal_Presentation_EN.pptx
@@ -140,13 +140,13 @@
   <p:extLst>
     <p:ext uri="{521415D9-36F7-43E2-AB2F-B90AF26B5E84}">
       <p14:sectionLst xmlns:p14="http://schemas.microsoft.com/office/powerpoint/2010/main">
-        <p14:section name="Opening" id="{391e0414-7884-2464-1d61-c060abd3fb3b}">
+        <p14:section name="Opening" id="{f05e7b2e-54fe-6035-e554-38905801d463}">
           <p14:sldIdLst>
             <p14:sldId id="256"/>
             <p14:sldId id="257"/>
           </p14:sldIdLst>
         </p14:section>
-        <p14:section name="The manufacturer" id="{dfdfd700-4457-a25f-b1e9-bf136265bee0}">
+        <p14:section name="The manufacturer" id="{08c627fc-ca44-3cc9-7ac0-41d7cb8766b5}">
           <p14:sldIdLst>
             <p14:sldId id="258"/>
             <p14:sldId id="259"/>
@@ -157,7 +157,7 @@
             <p14:sldId id="264"/>
           </p14:sldIdLst>
         </p14:section>
-        <p14:section name="The Mexican market" id="{1111fb1f-1606-df73-1d10-c7cf88aac23e}">
+        <p14:section name="The Mexican market" id="{876ee5f1-5f6c-6c29-f614-f18d132ad4ac}">
           <p14:sldIdLst>
             <p14:sldId id="265"/>
             <p14:sldId id="266"/>
@@ -172,7 +172,7 @@
             <p14:sldId id="275"/>
           </p14:sldIdLst>
         </p14:section>
-        <p14:section name="Why TID · VSP · CEB" id="{f7d2411e-01c6-1199-ff1d-3eab397b479d}">
+        <p14:section name="Why TID · VSP · CEB" id="{bb0c1c95-ed97-a04c-5079-b4143804e0f1}">
           <p14:sldIdLst>
             <p14:sldId id="276"/>
             <p14:sldId id="277"/>
@@ -180,7 +180,7 @@
             <p14:sldId id="279"/>
           </p14:sldIdLst>
         </p14:section>
-        <p14:section name="Plan and investment" id="{7c4128b7-8f79-73e0-521f-4895f313d3b0}">
+        <p14:section name="Plan and investment" id="{cd62be23-e42c-3a5c-7a9c-dbc27d440138}">
           <p14:sldIdLst>
             <p14:sldId id="280"/>
             <p14:sldId id="281"/>
@@ -189,7 +189,7 @@
             <p14:sldId id="284"/>
           </p14:sldIdLst>
         </p14:section>
-        <p14:section name="The proposal" id="{9ccfddd4-df3d-2f1c-70f2-0e1f82c5cc0c}">
+        <p14:section name="The proposal" id="{513b45e8-832f-5e32-46df-82f7e05d15bd}">
           <p14:sldIdLst>
             <p14:sldId id="285"/>
             <p14:sldId id="286"/>
@@ -11330,7 +11330,7 @@
                             <a:srgbClr val="1B1F3B"/>
                           </a:solidFill>
                         </a:rPr>
-                        <a:t>RMC de México</a:t>
+                        <a:t>Industrias Manufactureras MYR</a:t>
                       </a:r>
                       <a:endParaRPr lang="en-US" sz="900" dirty="0"/>
                     </a:p>
@@ -11391,7 +11391,7 @@
                             <a:srgbClr val="1B1F3B"/>
                           </a:solidFill>
                         </a:rPr>
-                        <a:t>Linares, N.L.</a:t>
+                        <a:t>Irapuato, Gto.</a:t>
                       </a:r>
                       <a:endParaRPr lang="en-US" sz="900" dirty="0"/>
                     </a:p>
@@ -11452,7 +11452,7 @@
                             <a:srgbClr val="1B1F3B"/>
                           </a:solidFill>
                         </a:rPr>
-                        <a:t>Under Armour, Nordstrom</a:t>
+                        <a:t>adidas, Puma</a:t>
                       </a:r>
                       <a:endParaRPr lang="en-US" sz="900" dirty="0"/>
                     </a:p>

--- a/propuesta-clt/CLT_Proposal_Presentation_EN.pptx
+++ b/propuesta-clt/CLT_Proposal_Presentation_EN.pptx
@@ -140,13 +140,13 @@
   <p:extLst>
     <p:ext uri="{521415D9-36F7-43E2-AB2F-B90AF26B5E84}">
       <p14:sectionLst xmlns:p14="http://schemas.microsoft.com/office/powerpoint/2010/main">
-        <p14:section name="Opening" id="{f05e7b2e-54fe-6035-e554-38905801d463}">
+        <p14:section name="Opening" id="{020a5c85-22e1-f8af-ed46-1776daf6ddf5}">
           <p14:sldIdLst>
             <p14:sldId id="256"/>
             <p14:sldId id="257"/>
           </p14:sldIdLst>
         </p14:section>
-        <p14:section name="The manufacturer" id="{08c627fc-ca44-3cc9-7ac0-41d7cb8766b5}">
+        <p14:section name="The manufacturer" id="{f652d89e-567e-0dca-d2b1-fa8ab9694833}">
           <p14:sldIdLst>
             <p14:sldId id="258"/>
             <p14:sldId id="259"/>
@@ -157,7 +157,7 @@
             <p14:sldId id="264"/>
           </p14:sldIdLst>
         </p14:section>
-        <p14:section name="The Mexican market" id="{876ee5f1-5f6c-6c29-f614-f18d132ad4ac}">
+        <p14:section name="The Mexican market" id="{05ba5c35-ee71-aaa7-0900-2a2e31cbc30e}">
           <p14:sldIdLst>
             <p14:sldId id="265"/>
             <p14:sldId id="266"/>
@@ -172,7 +172,7 @@
             <p14:sldId id="275"/>
           </p14:sldIdLst>
         </p14:section>
-        <p14:section name="Why TID · VSP · CEB" id="{bb0c1c95-ed97-a04c-5079-b4143804e0f1}">
+        <p14:section name="Why TID · VSP · CEB" id="{fef6d0f5-9c4e-08bf-1d3e-0e80d3e229ef}">
           <p14:sldIdLst>
             <p14:sldId id="276"/>
             <p14:sldId id="277"/>
@@ -180,7 +180,7 @@
             <p14:sldId id="279"/>
           </p14:sldIdLst>
         </p14:section>
-        <p14:section name="Plan and investment" id="{cd62be23-e42c-3a5c-7a9c-dbc27d440138}">
+        <p14:section name="Plan and investment" id="{757a47c5-bb22-b6b4-26d1-c12cb029dff3}">
           <p14:sldIdLst>
             <p14:sldId id="280"/>
             <p14:sldId id="281"/>
@@ -189,7 +189,7 @@
             <p14:sldId id="284"/>
           </p14:sldIdLst>
         </p14:section>
-        <p14:section name="The proposal" id="{513b45e8-832f-5e32-46df-82f7e05d15bd}">
+        <p14:section name="The proposal" id="{929093f4-50c0-f7b8-51e0-2941e3605515}">
           <p14:sldIdLst>
             <p14:sldId id="285"/>
             <p14:sldId id="286"/>
@@ -4547,42 +4547,6 @@
               <a:buNone/>
             </a:pPr>
             <a:endParaRPr lang="en-US" sz="2600" dirty="0"/>
-          </a:p>
-        </p:txBody>
-      </p:sp>
-      <p:sp>
-        <p:nvSpPr>
-          <p:cNvPr id="3" name="Text 0"/>
-          <p:cNvSpPr/>
-          <p:nvPr/>
-        </p:nvSpPr>
-        <p:spPr>
-          <a:xfrm>
-            <a:off x="457200" y="4800600"/>
-            <a:ext cx="6858000" cy="228600"/>
-          </a:xfrm>
-          <a:prstGeom prst="rect">
-            <a:avLst/>
-          </a:prstGeom>
-          <a:noFill/>
-          <a:ln/>
-        </p:spPr>
-        <p:txBody>
-          <a:bodyPr wrap="square" rtlCol="0" anchor="ctr"/>
-          <a:lstStyle/>
-          <a:p>
-            <a:pPr indent="0" marL="0">
-              <a:buNone/>
-            </a:pPr>
-            <a:r>
-              <a:rPr lang="en-US" sz="900" dirty="0">
-                <a:solidFill>
-                  <a:srgbClr val="7A8299"/>
-                </a:solidFill>
-              </a:rPr>
-              <a:t>TID · VSP · CEB proposal to CLT — Confidential</a:t>
-            </a:r>
-            <a:endParaRPr lang="en-US" sz="900" dirty="0"/>
           </a:p>
         </p:txBody>
       </p:sp>
